--- a/informe/Presentacion_Fase4_Sebastian_Antunez.pptx
+++ b/informe/Presentacion_Fase4_Sebastian_Antunez.pptx
@@ -475,6 +475,1175 @@
     </a:lvl9pPr>
   </p:notesStyle>
 </p:notesMaster>
+</file>
+
+<file path=ppt/notesSlides/notesSlide1.xml><?xml version="1.0" encoding="utf-8"?>
+<p:notes xmlns:a="http://schemas.openxmlformats.org/drawingml/2006/main" xmlns:p="http://schemas.openxmlformats.org/presentationml/2006/main" xmlns:r="http://schemas.openxmlformats.org/officeDocument/2006/relationships">
+  <p:cSld>
+    <p:spTree>
+      <p:nvGrpSpPr>
+        <p:cNvPr id="1" name=""/>
+        <p:cNvGrpSpPr/>
+        <p:nvPr/>
+      </p:nvGrpSpPr>
+      <p:grpSpPr>
+        <a:xfrm>
+          <a:off x="0" y="0"/>
+          <a:ext cx="0" cy="0"/>
+          <a:chOff x="0" y="0"/>
+          <a:chExt cx="0" cy="0"/>
+        </a:xfrm>
+      </p:grpSpPr>
+      <p:sp>
+        <p:nvSpPr>
+          <p:cNvPr id="2" name="Slide Image Placeholder 1"/>
+          <p:cNvSpPr>
+            <a:spLocks noGrp="1"/>
+          </p:cNvSpPr>
+          <p:nvPr>
+            <p:ph type="sldImg" idx="2"/>
+          </p:nvPr>
+        </p:nvSpPr>
+        <p:spPr/>
+      </p:sp>
+      <p:sp>
+        <p:nvSpPr>
+          <p:cNvPr id="3" name="Notes Placeholder 2"/>
+          <p:cNvSpPr>
+            <a:spLocks noGrp="1"/>
+          </p:cNvSpPr>
+          <p:nvPr>
+            <p:ph type="body" idx="3" sz="quarter"/>
+          </p:nvPr>
+        </p:nvSpPr>
+        <p:spPr/>
+        <p:txBody>
+          <a:bodyPr/>
+          <a:lstStyle/>
+          <a:p>
+            <a:r>
+              <a:t>[0:00 - 0:20 · 20 s]</a:t>
+            </a:r>
+          </a:p>
+          <a:p/>
+          <a:p>
+            <a:r>
+              <a:t>Buenos días. Mi nombre es Sebastian Antunez y voy a presentar el proyecto final del</a:t>
+            </a:r>
+          </a:p>
+          <a:p>
+            <a:r>
+              <a:t>curso Programación para la Ciencia de Datos: un análisis sobre la sobreduración en la</a:t>
+            </a:r>
+          </a:p>
+          <a:p>
+            <a:r>
+              <a:t>titulación de la educación superior chilena, construido sobre 1.246.760 procesos de</a:t>
+            </a:r>
+          </a:p>
+          <a:p>
+            <a:r>
+              <a:t>titulación reales entre 2020 y 2025.</a:t>
+            </a:r>
+          </a:p>
+          <a:p/>
+          <a:p>
+            <a:r>
+              <a:t>RECORDAR: hablar más lento de lo que parece natural; en grabación siempre suena más rápido.</a:t>
+            </a:r>
+          </a:p>
+        </p:txBody>
+      </p:sp>
+      <p:sp>
+        <p:nvSpPr>
+          <p:cNvPr id="4" name="Slide Number Placeholder 3"/>
+          <p:cNvSpPr>
+            <a:spLocks noGrp="1"/>
+          </p:cNvSpPr>
+          <p:nvPr>
+            <p:ph type="sldNum" idx="5" sz="quarter"/>
+          </p:nvPr>
+        </p:nvSpPr>
+        <p:spPr/>
+      </p:sp>
+    </p:spTree>
+  </p:cSld>
+  <p:clrMapOvr>
+    <a:masterClrMapping/>
+  </p:clrMapOvr>
+</p:notes>
+</file>
+
+<file path=ppt/notesSlides/notesSlide10.xml><?xml version="1.0" encoding="utf-8"?>
+<p:notes xmlns:a="http://schemas.openxmlformats.org/drawingml/2006/main" xmlns:p="http://schemas.openxmlformats.org/presentationml/2006/main" xmlns:r="http://schemas.openxmlformats.org/officeDocument/2006/relationships">
+  <p:cSld>
+    <p:spTree>
+      <p:nvGrpSpPr>
+        <p:cNvPr id="1" name=""/>
+        <p:cNvGrpSpPr/>
+        <p:nvPr/>
+      </p:nvGrpSpPr>
+      <p:grpSpPr>
+        <a:xfrm>
+          <a:off x="0" y="0"/>
+          <a:ext cx="0" cy="0"/>
+          <a:chOff x="0" y="0"/>
+          <a:chExt cx="0" cy="0"/>
+        </a:xfrm>
+      </p:grpSpPr>
+      <p:sp>
+        <p:nvSpPr>
+          <p:cNvPr id="2" name="Slide Image Placeholder 1"/>
+          <p:cNvSpPr>
+            <a:spLocks noGrp="1"/>
+          </p:cNvSpPr>
+          <p:nvPr>
+            <p:ph type="sldImg" idx="2"/>
+          </p:nvPr>
+        </p:nvSpPr>
+        <p:spPr/>
+      </p:sp>
+      <p:sp>
+        <p:nvSpPr>
+          <p:cNvPr id="3" name="Notes Placeholder 2"/>
+          <p:cNvSpPr>
+            <a:spLocks noGrp="1"/>
+          </p:cNvSpPr>
+          <p:nvPr>
+            <p:ph type="body" idx="3" sz="quarter"/>
+          </p:nvPr>
+        </p:nvSpPr>
+        <p:spPr/>
+        <p:txBody>
+          <a:bodyPr/>
+          <a:lstStyle/>
+          <a:p>
+            <a:r>
+              <a:t>[6:55 - 7:10 · 15 s]</a:t>
+            </a:r>
+          </a:p>
+          <a:p/>
+          <a:p>
+            <a:r>
+              <a:t>Lo que queda para seguir: incorporar la base de matrícula para ver la deserción, que hoy</a:t>
+            </a:r>
+          </a:p>
+          <a:p>
+            <a:r>
+              <a:t>es invisible; usar modelos de supervivencia, que son los adecuados para datos</a:t>
+            </a:r>
+          </a:p>
+          <a:p>
+            <a:r>
+              <a:t>censurados; y ampliar las variables hacia la trayectoria individual.</a:t>
+            </a:r>
+          </a:p>
+          <a:p/>
+          <a:p>
+            <a:r>
+              <a:t>El repositorio completo está disponible en GitHub. Muchas gracias.</a:t>
+            </a:r>
+          </a:p>
+        </p:txBody>
+      </p:sp>
+      <p:sp>
+        <p:nvSpPr>
+          <p:cNvPr id="4" name="Slide Number Placeholder 3"/>
+          <p:cNvSpPr>
+            <a:spLocks noGrp="1"/>
+          </p:cNvSpPr>
+          <p:nvPr>
+            <p:ph type="sldNum" idx="5" sz="quarter"/>
+          </p:nvPr>
+        </p:nvSpPr>
+        <p:spPr/>
+      </p:sp>
+    </p:spTree>
+  </p:cSld>
+  <p:clrMapOvr>
+    <a:masterClrMapping/>
+  </p:clrMapOvr>
+</p:notes>
+</file>
+
+<file path=ppt/notesSlides/notesSlide2.xml><?xml version="1.0" encoding="utf-8"?>
+<p:notes xmlns:a="http://schemas.openxmlformats.org/drawingml/2006/main" xmlns:p="http://schemas.openxmlformats.org/presentationml/2006/main" xmlns:r="http://schemas.openxmlformats.org/officeDocument/2006/relationships">
+  <p:cSld>
+    <p:spTree>
+      <p:nvGrpSpPr>
+        <p:cNvPr id="1" name=""/>
+        <p:cNvGrpSpPr/>
+        <p:nvPr/>
+      </p:nvGrpSpPr>
+      <p:grpSpPr>
+        <a:xfrm>
+          <a:off x="0" y="0"/>
+          <a:ext cx="0" cy="0"/>
+          <a:chOff x="0" y="0"/>
+          <a:chExt cx="0" cy="0"/>
+        </a:xfrm>
+      </p:grpSpPr>
+      <p:sp>
+        <p:nvSpPr>
+          <p:cNvPr id="2" name="Slide Image Placeholder 1"/>
+          <p:cNvSpPr>
+            <a:spLocks noGrp="1"/>
+          </p:cNvSpPr>
+          <p:nvPr>
+            <p:ph type="sldImg" idx="2"/>
+          </p:nvPr>
+        </p:nvSpPr>
+        <p:spPr/>
+      </p:sp>
+      <p:sp>
+        <p:nvSpPr>
+          <p:cNvPr id="3" name="Notes Placeholder 2"/>
+          <p:cNvSpPr>
+            <a:spLocks noGrp="1"/>
+          </p:cNvSpPr>
+          <p:nvPr>
+            <p:ph type="body" idx="3" sz="quarter"/>
+          </p:nvPr>
+        </p:nvSpPr>
+        <p:spPr/>
+        <p:txBody>
+          <a:bodyPr/>
+          <a:lstStyle/>
+          <a:p>
+            <a:r>
+              <a:t>[0:20 - 1:10 · 50 s]</a:t>
+            </a:r>
+          </a:p>
+          <a:p/>
+          <a:p>
+            <a:r>
+              <a:t>Cada carrera en Chile declara una duración teórica. Sobre esa cifra se calculan la</a:t>
+            </a:r>
+          </a:p>
+          <a:p>
+            <a:r>
+              <a:t>duración de las becas y los créditos estatales.</a:t>
+            </a:r>
+          </a:p>
+          <a:p/>
+          <a:p>
+            <a:r>
+              <a:t>Lo que el sistema no publica es cuánto se tarda en realidad. Y aquí está el punto de</a:t>
+            </a:r>
+          </a:p>
+          <a:p>
+            <a:r>
+              <a:t>partida: al revisar el esquema oficial del SIES descubrí que las columnas que parecían</a:t>
+            </a:r>
+          </a:p>
+          <a:p>
+            <a:r>
+              <a:t>tener la respuesta NO registran lo que el estudiante tardó, sino lo que el plan declara.</a:t>
+            </a:r>
+          </a:p>
+          <a:p>
+            <a:r>
+              <a:t>Son un atributo de la carrera, no de la persona.</a:t>
+            </a:r>
+          </a:p>
+          <a:p/>
+          <a:p>
+            <a:r>
+              <a:t>Así que la pregunta fue: se puede reconstruir la duración real desde los registros</a:t>
+            </a:r>
+          </a:p>
+          <a:p>
+            <a:r>
+              <a:t>administrativos, y caracterizar el rezago con esa variable derivada.</a:t>
+            </a:r>
+          </a:p>
+          <a:p/>
+          <a:p>
+            <a:r>
+              <a:t>PAUSA de medio segundo antes de avanzar: es la bisagra del relato.</a:t>
+            </a:r>
+          </a:p>
+        </p:txBody>
+      </p:sp>
+      <p:sp>
+        <p:nvSpPr>
+          <p:cNvPr id="4" name="Slide Number Placeholder 3"/>
+          <p:cNvSpPr>
+            <a:spLocks noGrp="1"/>
+          </p:cNvSpPr>
+          <p:nvPr>
+            <p:ph type="sldNum" idx="5" sz="quarter"/>
+          </p:nvPr>
+        </p:nvSpPr>
+        <p:spPr/>
+      </p:sp>
+    </p:spTree>
+  </p:cSld>
+  <p:clrMapOvr>
+    <a:masterClrMapping/>
+  </p:clrMapOvr>
+</p:notes>
+</file>
+
+<file path=ppt/notesSlides/notesSlide3.xml><?xml version="1.0" encoding="utf-8"?>
+<p:notes xmlns:a="http://schemas.openxmlformats.org/drawingml/2006/main" xmlns:p="http://schemas.openxmlformats.org/presentationml/2006/main" xmlns:r="http://schemas.openxmlformats.org/officeDocument/2006/relationships">
+  <p:cSld>
+    <p:spTree>
+      <p:nvGrpSpPr>
+        <p:cNvPr id="1" name=""/>
+        <p:cNvGrpSpPr/>
+        <p:nvPr/>
+      </p:nvGrpSpPr>
+      <p:grpSpPr>
+        <a:xfrm>
+          <a:off x="0" y="0"/>
+          <a:ext cx="0" cy="0"/>
+          <a:chOff x="0" y="0"/>
+          <a:chExt cx="0" cy="0"/>
+        </a:xfrm>
+      </p:grpSpPr>
+      <p:sp>
+        <p:nvSpPr>
+          <p:cNvPr id="2" name="Slide Image Placeholder 1"/>
+          <p:cNvSpPr>
+            <a:spLocks noGrp="1"/>
+          </p:cNvSpPr>
+          <p:nvPr>
+            <p:ph type="sldImg" idx="2"/>
+          </p:nvPr>
+        </p:nvSpPr>
+        <p:spPr/>
+      </p:sp>
+      <p:sp>
+        <p:nvSpPr>
+          <p:cNvPr id="3" name="Notes Placeholder 2"/>
+          <p:cNvSpPr>
+            <a:spLocks noGrp="1"/>
+          </p:cNvSpPr>
+          <p:nvPr>
+            <p:ph type="body" idx="3" sz="quarter"/>
+          </p:nvPr>
+        </p:nvSpPr>
+        <p:spPr/>
+        <p:txBody>
+          <a:bodyPr/>
+          <a:lstStyle/>
+          <a:p>
+            <a:r>
+              <a:t>[1:10 - 2:10 · 60 s]</a:t>
+            </a:r>
+          </a:p>
+          <a:p/>
+          <a:p>
+            <a:r>
+              <a:t>El proyecto se desarrolló en cuatro fases. La primera definió el problema y levantó el</a:t>
+            </a:r>
+          </a:p>
+          <a:p>
+            <a:r>
+              <a:t>entorno reproducible. La segunda construyó el pipeline que convierte 955 megabytes de</a:t>
+            </a:r>
+          </a:p>
+          <a:p>
+            <a:r>
+              <a:t>archivos crudos en un conjunto analítico validado. La tercera implementó el núcleo</a:t>
+            </a:r>
+          </a:p>
+          <a:p>
+            <a:r>
+              <a:t>algorítmico desde primeros principios, con medición formal de complejidad y un modelo de</a:t>
+            </a:r>
+          </a:p>
+          <a:p>
+            <a:r>
+              <a:t>dominio orientado a objetos. Y la cuarta, que es la que presento, ejecuta todo eso de</a:t>
+            </a:r>
+          </a:p>
+          <a:p>
+            <a:r>
+              <a:t>extremo a extremo.</a:t>
+            </a:r>
+          </a:p>
+          <a:p/>
+          <a:p>
+            <a:r>
+              <a:t>La transformación central está abajo: la duración real se deriva del año y semestre de</a:t>
+            </a:r>
+          </a:p>
+          <a:p>
+            <a:r>
+              <a:t>ingreso y de titulación. El "más uno" no es arbitrario: quien ingresa y se titula en el</a:t>
+            </a:r>
+          </a:p>
+          <a:p>
+            <a:r>
+              <a:t>mismo semestre cursó un semestre, no cero. Esa coherencia aritmética se verifica como</a:t>
+            </a:r>
+          </a:p>
+          <a:p>
+            <a:r>
+              <a:t>regla de validación sobre el dataset completo.</a:t>
+            </a:r>
+          </a:p>
+          <a:p/>
+          <a:p>
+            <a:r>
+              <a:t>SI EL VIDEO VA CORTO, agregar aquí: el pipeline retiene el 72,9 por ciento de las filas</a:t>
+            </a:r>
+          </a:p>
+          <a:p>
+            <a:r>
+              <a:t>originales y cada exclusión está cuantificada en una bitácora auditable.</a:t>
+            </a:r>
+          </a:p>
+        </p:txBody>
+      </p:sp>
+      <p:sp>
+        <p:nvSpPr>
+          <p:cNvPr id="4" name="Slide Number Placeholder 3"/>
+          <p:cNvSpPr>
+            <a:spLocks noGrp="1"/>
+          </p:cNvSpPr>
+          <p:nvPr>
+            <p:ph type="sldNum" idx="5" sz="quarter"/>
+          </p:nvPr>
+        </p:nvSpPr>
+        <p:spPr/>
+      </p:sp>
+    </p:spTree>
+  </p:cSld>
+  <p:clrMapOvr>
+    <a:masterClrMapping/>
+  </p:clrMapOvr>
+</p:notes>
+</file>
+
+<file path=ppt/notesSlides/notesSlide4.xml><?xml version="1.0" encoding="utf-8"?>
+<p:notes xmlns:a="http://schemas.openxmlformats.org/drawingml/2006/main" xmlns:p="http://schemas.openxmlformats.org/presentationml/2006/main" xmlns:r="http://schemas.openxmlformats.org/officeDocument/2006/relationships">
+  <p:cSld>
+    <p:spTree>
+      <p:nvGrpSpPr>
+        <p:cNvPr id="1" name=""/>
+        <p:cNvGrpSpPr/>
+        <p:nvPr/>
+      </p:nvGrpSpPr>
+      <p:grpSpPr>
+        <a:xfrm>
+          <a:off x="0" y="0"/>
+          <a:ext cx="0" cy="0"/>
+          <a:chOff x="0" y="0"/>
+          <a:chExt cx="0" cy="0"/>
+        </a:xfrm>
+      </p:grpSpPr>
+      <p:sp>
+        <p:nvSpPr>
+          <p:cNvPr id="2" name="Slide Image Placeholder 1"/>
+          <p:cNvSpPr>
+            <a:spLocks noGrp="1"/>
+          </p:cNvSpPr>
+          <p:nvPr>
+            <p:ph type="sldImg" idx="2"/>
+          </p:nvPr>
+        </p:nvSpPr>
+        <p:spPr/>
+      </p:sp>
+      <p:sp>
+        <p:nvSpPr>
+          <p:cNvPr id="3" name="Notes Placeholder 2"/>
+          <p:cNvSpPr>
+            <a:spLocks noGrp="1"/>
+          </p:cNvSpPr>
+          <p:nvPr>
+            <p:ph type="body" idx="3" sz="quarter"/>
+          </p:nvPr>
+        </p:nvSpPr>
+        <p:spPr/>
+        <p:txBody>
+          <a:bodyPr/>
+          <a:lstStyle/>
+          <a:p>
+            <a:r>
+              <a:t>[2:10 - 3:05 · 55 s]</a:t>
+            </a:r>
+          </a:p>
+          <a:p/>
+          <a:p>
+            <a:r>
+              <a:t>Este es el resultado central. Solo el 19 por ciento de los titulados egresa dentro del</a:t>
+            </a:r>
+          </a:p>
+          <a:p>
+            <a:r>
+              <a:t>plazo que su propio plan declara. Dicho al revés: cuatro de cada cinco se titulan fuera</a:t>
+            </a:r>
+          </a:p>
+          <a:p>
+            <a:r>
+              <a:t>de plazo.</a:t>
+            </a:r>
+          </a:p>
+          <a:p/>
+          <a:p>
+            <a:r>
+              <a:t>El exceso promedio es de 2 coma 76 semestres, un 43 por ciento más de tiempo del</a:t>
+            </a:r>
+          </a:p>
+          <a:p>
+            <a:r>
+              <a:t>previsto. Y el rezago severo, más de cuatro semestres de exceso, alcanza al 20 coma 4</a:t>
+            </a:r>
+          </a:p>
+          <a:p>
+            <a:r>
+              <a:t>por ciento: prácticamente la misma proporción que logra titularse a tiempo.</a:t>
+            </a:r>
+          </a:p>
+          <a:p/>
+          <a:p>
+            <a:r>
+              <a:t>Agregado, el sistema acumula 3 coma 55 millones de semestres-estudiante por sobre lo</a:t>
+            </a:r>
+          </a:p>
+          <a:p>
+            <a:r>
+              <a:t>planificado en el período.</a:t>
+            </a:r>
+          </a:p>
+          <a:p/>
+          <a:p>
+            <a:r>
+              <a:t>El gráfico de la izquierda muestra por qué reporto media y mediana: la distribución es</a:t>
+            </a:r>
+          </a:p>
+          <a:p>
+            <a:r>
+              <a:t>asimétrica, con una cola larga que arrastra el promedio.</a:t>
+            </a:r>
+          </a:p>
+        </p:txBody>
+      </p:sp>
+      <p:sp>
+        <p:nvSpPr>
+          <p:cNvPr id="4" name="Slide Number Placeholder 3"/>
+          <p:cNvSpPr>
+            <a:spLocks noGrp="1"/>
+          </p:cNvSpPr>
+          <p:nvPr>
+            <p:ph type="sldNum" idx="5" sz="quarter"/>
+          </p:nvPr>
+        </p:nvSpPr>
+        <p:spPr/>
+      </p:sp>
+    </p:spTree>
+  </p:cSld>
+  <p:clrMapOvr>
+    <a:masterClrMapping/>
+  </p:clrMapOvr>
+</p:notes>
+</file>
+
+<file path=ppt/notesSlides/notesSlide5.xml><?xml version="1.0" encoding="utf-8"?>
+<p:notes xmlns:a="http://schemas.openxmlformats.org/drawingml/2006/main" xmlns:p="http://schemas.openxmlformats.org/presentationml/2006/main" xmlns:r="http://schemas.openxmlformats.org/officeDocument/2006/relationships">
+  <p:cSld>
+    <p:spTree>
+      <p:nvGrpSpPr>
+        <p:cNvPr id="1" name=""/>
+        <p:cNvGrpSpPr/>
+        <p:nvPr/>
+      </p:nvGrpSpPr>
+      <p:grpSpPr>
+        <a:xfrm>
+          <a:off x="0" y="0"/>
+          <a:ext cx="0" cy="0"/>
+          <a:chOff x="0" y="0"/>
+          <a:chExt cx="0" cy="0"/>
+        </a:xfrm>
+      </p:grpSpPr>
+      <p:sp>
+        <p:nvSpPr>
+          <p:cNvPr id="2" name="Slide Image Placeholder 1"/>
+          <p:cNvSpPr>
+            <a:spLocks noGrp="1"/>
+          </p:cNvSpPr>
+          <p:nvPr>
+            <p:ph type="sldImg" idx="2"/>
+          </p:nvPr>
+        </p:nvSpPr>
+        <p:spPr/>
+      </p:sp>
+      <p:sp>
+        <p:nvSpPr>
+          <p:cNvPr id="3" name="Notes Placeholder 2"/>
+          <p:cNvSpPr>
+            <a:spLocks noGrp="1"/>
+          </p:cNvSpPr>
+          <p:nvPr>
+            <p:ph type="body" idx="3" sz="quarter"/>
+          </p:nvPr>
+        </p:nvSpPr>
+        <p:spPr/>
+        <p:txBody>
+          <a:bodyPr/>
+          <a:lstStyle/>
+          <a:p>
+            <a:r>
+              <a:t>[3:05 - 4:05 · 60 s]</a:t>
+            </a:r>
+          </a:p>
+          <a:p/>
+          <a:p>
+            <a:r>
+              <a:t>El rezago tampoco se reparte de forma pareja.</a:t>
+            </a:r>
+          </a:p>
+          <a:p/>
+          <a:p>
+            <a:r>
+              <a:t>Por área de conocimiento, Derecho triplica a Educación: 5,77 semestres frente a 1,93.</a:t>
+            </a:r>
+          </a:p>
+          <a:p>
+            <a:r>
+              <a:t>Casi cuatro semestres, dos años, separan a la carrera más rezagada de la menos rezagada.</a:t>
+            </a:r>
+          </a:p>
+          <a:p/>
+          <a:p>
+            <a:r>
+              <a:t>Por tipo de institución, las universidades acumulan más rezago que los institutos</a:t>
+            </a:r>
+          </a:p>
+          <a:p>
+            <a:r>
+              <a:t>profesionales y su tasa de titulación oportuna es menos de la mitad. Eso sugiere que la</a:t>
+            </a:r>
+          </a:p>
+          <a:p>
+            <a:r>
+              <a:t>duración declarada es menos realista en carreras universitarias largas.</a:t>
+            </a:r>
+          </a:p>
+          <a:p/>
+          <a:p>
+            <a:r>
+              <a:t>Y por género, las mujeres se titulan 0 coma 93 semestres antes. Lo importante del panel</a:t>
+            </a:r>
+          </a:p>
+          <a:p>
+            <a:r>
+              <a:t>derecho es que la brecha se sostiene en las diez áreas sin excepción: no es que estudien</a:t>
+            </a:r>
+          </a:p>
+          <a:p>
+            <a:r>
+              <a:t>carreras más cortas, es que dentro de cada área se titulan antes.</a:t>
+            </a:r>
+          </a:p>
+        </p:txBody>
+      </p:sp>
+      <p:sp>
+        <p:nvSpPr>
+          <p:cNvPr id="4" name="Slide Number Placeholder 3"/>
+          <p:cNvSpPr>
+            <a:spLocks noGrp="1"/>
+          </p:cNvSpPr>
+          <p:nvPr>
+            <p:ph type="sldNum" idx="5" sz="quarter"/>
+          </p:nvPr>
+        </p:nvSpPr>
+        <p:spPr/>
+      </p:sp>
+    </p:spTree>
+  </p:cSld>
+  <p:clrMapOvr>
+    <a:masterClrMapping/>
+  </p:clrMapOvr>
+</p:notes>
+</file>
+
+<file path=ppt/notesSlides/notesSlide6.xml><?xml version="1.0" encoding="utf-8"?>
+<p:notes xmlns:a="http://schemas.openxmlformats.org/drawingml/2006/main" xmlns:p="http://schemas.openxmlformats.org/presentationml/2006/main" xmlns:r="http://schemas.openxmlformats.org/officeDocument/2006/relationships">
+  <p:cSld>
+    <p:spTree>
+      <p:nvGrpSpPr>
+        <p:cNvPr id="1" name=""/>
+        <p:cNvGrpSpPr/>
+        <p:nvPr/>
+      </p:nvGrpSpPr>
+      <p:grpSpPr>
+        <a:xfrm>
+          <a:off x="0" y="0"/>
+          <a:ext cx="0" cy="0"/>
+          <a:chOff x="0" y="0"/>
+          <a:chExt cx="0" cy="0"/>
+        </a:xfrm>
+      </p:grpSpPr>
+      <p:sp>
+        <p:nvSpPr>
+          <p:cNvPr id="2" name="Slide Image Placeholder 1"/>
+          <p:cNvSpPr>
+            <a:spLocks noGrp="1"/>
+          </p:cNvSpPr>
+          <p:nvPr>
+            <p:ph type="sldImg" idx="2"/>
+          </p:nvPr>
+        </p:nvSpPr>
+        <p:spPr/>
+      </p:sp>
+      <p:sp>
+        <p:nvSpPr>
+          <p:cNvPr id="3" name="Notes Placeholder 2"/>
+          <p:cNvSpPr>
+            <a:spLocks noGrp="1"/>
+          </p:cNvSpPr>
+          <p:nvPr>
+            <p:ph type="body" idx="3" sz="quarter"/>
+          </p:nvPr>
+        </p:nvSpPr>
+        <p:spPr/>
+        <p:txBody>
+          <a:bodyPr/>
+          <a:lstStyle/>
+          <a:p>
+            <a:r>
+              <a:t>[4:05 - 4:55 · 50 s]</a:t>
+            </a:r>
+          </a:p>
+          <a:p/>
+          <a:p>
+            <a:r>
+              <a:t>Este hallazgo no estaba en ninguna de las fases anteriores; apareció al mirar la serie</a:t>
+            </a:r>
+          </a:p>
+          <a:p>
+            <a:r>
+              <a:t>semestral en vez del promedio agregado.</a:t>
+            </a:r>
+          </a:p>
+          <a:p/>
+          <a:p>
+            <a:r>
+              <a:t>En 2020 se titularon unas 87 mil personas menos que en un año normal, y la sobreduración</a:t>
+            </a:r>
+          </a:p>
+          <a:p>
+            <a:r>
+              <a:t>media tocó su mínimo. En 2021 el volumen se recuperó y la sobreduración alcanzó su</a:t>
+            </a:r>
+          </a:p>
+          <a:p>
+            <a:r>
+              <a:t>máximo.</a:t>
+            </a:r>
+          </a:p>
+          <a:p/>
+          <a:p>
+            <a:r>
+              <a:t>La tentación es decir que 2020 fue un buen año. Pero no: las titulaciones se</a:t>
+            </a:r>
+          </a:p>
+          <a:p>
+            <a:r>
+              <a:t>POSTERGARON. Quienes debían egresar en 2020 lo hicieron en 2021, con uno o dos semestres</a:t>
+            </a:r>
+          </a:p>
+          <a:p>
+            <a:r>
+              <a:t>adicionales encima. El mínimo y el máximo son el mismo fenómeno visto en dos momentos, y</a:t>
+            </a:r>
+          </a:p>
+          <a:p>
+            <a:r>
+              <a:t>el mecanismo es de desplazamiento administrativo, no de deterioro académico.</a:t>
+            </a:r>
+          </a:p>
+        </p:txBody>
+      </p:sp>
+      <p:sp>
+        <p:nvSpPr>
+          <p:cNvPr id="4" name="Slide Number Placeholder 3"/>
+          <p:cNvSpPr>
+            <a:spLocks noGrp="1"/>
+          </p:cNvSpPr>
+          <p:nvPr>
+            <p:ph type="sldNum" idx="5" sz="quarter"/>
+          </p:nvPr>
+        </p:nvSpPr>
+        <p:spPr/>
+      </p:sp>
+    </p:spTree>
+  </p:cSld>
+  <p:clrMapOvr>
+    <a:masterClrMapping/>
+  </p:clrMapOvr>
+</p:notes>
+</file>
+
+<file path=ppt/notesSlides/notesSlide7.xml><?xml version="1.0" encoding="utf-8"?>
+<p:notes xmlns:a="http://schemas.openxmlformats.org/drawingml/2006/main" xmlns:p="http://schemas.openxmlformats.org/presentationml/2006/main" xmlns:r="http://schemas.openxmlformats.org/officeDocument/2006/relationships">
+  <p:cSld>
+    <p:spTree>
+      <p:nvGrpSpPr>
+        <p:cNvPr id="1" name=""/>
+        <p:cNvGrpSpPr/>
+        <p:nvPr/>
+      </p:nvGrpSpPr>
+      <p:grpSpPr>
+        <a:xfrm>
+          <a:off x="0" y="0"/>
+          <a:ext cx="0" cy="0"/>
+          <a:chOff x="0" y="0"/>
+          <a:chExt cx="0" cy="0"/>
+        </a:xfrm>
+      </p:grpSpPr>
+      <p:sp>
+        <p:nvSpPr>
+          <p:cNvPr id="2" name="Slide Image Placeholder 1"/>
+          <p:cNvSpPr>
+            <a:spLocks noGrp="1"/>
+          </p:cNvSpPr>
+          <p:nvPr>
+            <p:ph type="sldImg" idx="2"/>
+          </p:nvPr>
+        </p:nvSpPr>
+        <p:spPr/>
+      </p:sp>
+      <p:sp>
+        <p:nvSpPr>
+          <p:cNvPr id="3" name="Notes Placeholder 2"/>
+          <p:cNvSpPr>
+            <a:spLocks noGrp="1"/>
+          </p:cNvSpPr>
+          <p:nvPr>
+            <p:ph type="body" idx="3" sz="quarter"/>
+          </p:nvPr>
+        </p:nvSpPr>
+        <p:spPr/>
+        <p:txBody>
+          <a:bodyPr/>
+          <a:lstStyle/>
+          <a:p>
+            <a:r>
+              <a:t>[4:55 - 5:35 · 40 s]</a:t>
+            </a:r>
+          </a:p>
+          <a:p/>
+          <a:p>
+            <a:r>
+              <a:t>Y aquí una limitación que condiciona todo lo anterior, y que creo que es uno de los</a:t>
+            </a:r>
+          </a:p>
+          <a:p>
+            <a:r>
+              <a:t>resultados más valiosos del proyecto.</a:t>
+            </a:r>
+          </a:p>
+          <a:p/>
+          <a:p>
+            <a:r>
+              <a:t>Una base de titulados solo contiene a quien terminó. De las cohortes recientes solo se</a:t>
+            </a:r>
+          </a:p>
+          <a:p>
+            <a:r>
+              <a:t>han titulado los excepcionalmente rápidos, porque son los únicos que alcanzaron a</a:t>
+            </a:r>
+          </a:p>
+          <a:p>
+            <a:r>
+              <a:t>hacerlo. De las cohortes antiguas, en cambio, los que aparecen son los extremadamente</a:t>
+            </a:r>
+          </a:p>
+          <a:p>
+            <a:r>
+              <a:t>rezagados.</a:t>
+            </a:r>
+          </a:p>
+          <a:p/>
+          <a:p>
+            <a:r>
+              <a:t>Ninguna cohorte está completa, y lo están en direcciones opuestas. Por eso el descenso</a:t>
+            </a:r>
+          </a:p>
+          <a:p>
+            <a:r>
+              <a:t>de la serie desde 2024 no puede leerse como una mejora del sistema. Es una limitación de</a:t>
+            </a:r>
+          </a:p>
+          <a:p>
+            <a:r>
+              <a:t>la fuente, no del procesamiento, y declararla es parte del resultado.</a:t>
+            </a:r>
+          </a:p>
+        </p:txBody>
+      </p:sp>
+      <p:sp>
+        <p:nvSpPr>
+          <p:cNvPr id="4" name="Slide Number Placeholder 3"/>
+          <p:cNvSpPr>
+            <a:spLocks noGrp="1"/>
+          </p:cNvSpPr>
+          <p:nvPr>
+            <p:ph type="sldNum" idx="5" sz="quarter"/>
+          </p:nvPr>
+        </p:nvSpPr>
+        <p:spPr/>
+      </p:sp>
+    </p:spTree>
+  </p:cSld>
+  <p:clrMapOvr>
+    <a:masterClrMapping/>
+  </p:clrMapOvr>
+</p:notes>
+</file>
+
+<file path=ppt/notesSlides/notesSlide8.xml><?xml version="1.0" encoding="utf-8"?>
+<p:notes xmlns:a="http://schemas.openxmlformats.org/drawingml/2006/main" xmlns:p="http://schemas.openxmlformats.org/presentationml/2006/main" xmlns:r="http://schemas.openxmlformats.org/officeDocument/2006/relationships">
+  <p:cSld>
+    <p:spTree>
+      <p:nvGrpSpPr>
+        <p:cNvPr id="1" name=""/>
+        <p:cNvGrpSpPr/>
+        <p:nvPr/>
+      </p:nvGrpSpPr>
+      <p:grpSpPr>
+        <a:xfrm>
+          <a:off x="0" y="0"/>
+          <a:ext cx="0" cy="0"/>
+          <a:chOff x="0" y="0"/>
+          <a:chExt cx="0" cy="0"/>
+        </a:xfrm>
+      </p:grpSpPr>
+      <p:sp>
+        <p:nvSpPr>
+          <p:cNvPr id="2" name="Slide Image Placeholder 1"/>
+          <p:cNvSpPr>
+            <a:spLocks noGrp="1"/>
+          </p:cNvSpPr>
+          <p:nvPr>
+            <p:ph type="sldImg" idx="2"/>
+          </p:nvPr>
+        </p:nvSpPr>
+        <p:spPr/>
+      </p:sp>
+      <p:sp>
+        <p:nvSpPr>
+          <p:cNvPr id="3" name="Notes Placeholder 2"/>
+          <p:cNvSpPr>
+            <a:spLocks noGrp="1"/>
+          </p:cNvSpPr>
+          <p:nvPr>
+            <p:ph type="body" idx="3" sz="quarter"/>
+          </p:nvPr>
+        </p:nvSpPr>
+        <p:spPr/>
+        <p:txBody>
+          <a:bodyPr/>
+          <a:lstStyle/>
+          <a:p>
+            <a:r>
+              <a:t>[5:35 - 6:15 · 40 s]</a:t>
+            </a:r>
+          </a:p>
+          <a:p/>
+          <a:p>
+            <a:r>
+              <a:t>Sobre el trabajo técnico: el proyecto tiene 73 pruebas automatizadas que cubren casos</a:t>
+            </a:r>
+          </a:p>
+          <a:p>
+            <a:r>
+              <a:t>normales, límite y excepciones, y 9 reglas de coherencia del dominio, todas aprobadas.</a:t>
+            </a:r>
+          </a:p>
+          <a:p/>
+          <a:p>
+            <a:r>
+              <a:t>Los algoritmos se implementaron desde cero y se verificaron contra pandas, sorted y</a:t>
+            </a:r>
+          </a:p>
+          <a:p>
+            <a:r>
+              <a:t>NumPy ANTES de medir su tiempo: medir un algoritmo incorrecto no tiene sentido.</a:t>
+            </a:r>
+          </a:p>
+          <a:p/>
+          <a:p>
+            <a:r>
+              <a:t>Las curvas log-log confirmaron las cotas teóricas, pero también mostraron dónde la</a:t>
+            </a:r>
+          </a:p>
+          <a:p>
+            <a:r>
+              <a:t>teoría no basta: quickselect es orden n en comparaciones y sin embargo escala como n</a:t>
+            </a:r>
+          </a:p>
+          <a:p>
+            <a:r>
+              <a:t>elevado a 1,22, porque cada nivel de recursión asigna tres listas nuevas. La cota</a:t>
+            </a:r>
+          </a:p>
+          <a:p>
+            <a:r>
+              <a:t>describe el crecimiento, no la constante. Ese contraste fue uno de los aprendizajes</a:t>
+            </a:r>
+          </a:p>
+          <a:p>
+            <a:r>
+              <a:t>centrales del curso.</a:t>
+            </a:r>
+          </a:p>
+          <a:p/>
+          <a:p>
+            <a:r>
+              <a:t>SI EL VIDEO VA LARGO, recortar esta lámina a las dos primeras cifras y omitir el detalle</a:t>
+            </a:r>
+          </a:p>
+          <a:p>
+            <a:r>
+              <a:t>de quickselect: ahorra unos 20 segundos.</a:t>
+            </a:r>
+          </a:p>
+        </p:txBody>
+      </p:sp>
+      <p:sp>
+        <p:nvSpPr>
+          <p:cNvPr id="4" name="Slide Number Placeholder 3"/>
+          <p:cNvSpPr>
+            <a:spLocks noGrp="1"/>
+          </p:cNvSpPr>
+          <p:nvPr>
+            <p:ph type="sldNum" idx="5" sz="quarter"/>
+          </p:nvPr>
+        </p:nvSpPr>
+        <p:spPr/>
+      </p:sp>
+    </p:spTree>
+  </p:cSld>
+  <p:clrMapOvr>
+    <a:masterClrMapping/>
+  </p:clrMapOvr>
+</p:notes>
+</file>
+
+<file path=ppt/notesSlides/notesSlide9.xml><?xml version="1.0" encoding="utf-8"?>
+<p:notes xmlns:a="http://schemas.openxmlformats.org/drawingml/2006/main" xmlns:p="http://schemas.openxmlformats.org/presentationml/2006/main" xmlns:r="http://schemas.openxmlformats.org/officeDocument/2006/relationships">
+  <p:cSld>
+    <p:spTree>
+      <p:nvGrpSpPr>
+        <p:cNvPr id="1" name=""/>
+        <p:cNvGrpSpPr/>
+        <p:nvPr/>
+      </p:nvGrpSpPr>
+      <p:grpSpPr>
+        <a:xfrm>
+          <a:off x="0" y="0"/>
+          <a:ext cx="0" cy="0"/>
+          <a:chOff x="0" y="0"/>
+          <a:chExt cx="0" cy="0"/>
+        </a:xfrm>
+      </p:grpSpPr>
+      <p:sp>
+        <p:nvSpPr>
+          <p:cNvPr id="2" name="Slide Image Placeholder 1"/>
+          <p:cNvSpPr>
+            <a:spLocks noGrp="1"/>
+          </p:cNvSpPr>
+          <p:nvPr>
+            <p:ph type="sldImg" idx="2"/>
+          </p:nvPr>
+        </p:nvSpPr>
+        <p:spPr/>
+      </p:sp>
+      <p:sp>
+        <p:nvSpPr>
+          <p:cNvPr id="3" name="Notes Placeholder 2"/>
+          <p:cNvSpPr>
+            <a:spLocks noGrp="1"/>
+          </p:cNvSpPr>
+          <p:nvPr>
+            <p:ph type="body" idx="3" sz="quarter"/>
+          </p:nvPr>
+        </p:nvSpPr>
+        <p:spPr/>
+        <p:txBody>
+          <a:bodyPr/>
+          <a:lstStyle/>
+          <a:p>
+            <a:r>
+              <a:t>[6:15 - 6:55 · 40 s]</a:t>
+            </a:r>
+          </a:p>
+          <a:p/>
+          <a:p>
+            <a:r>
+              <a:t>En síntesis, cuatro conclusiones.</a:t>
+            </a:r>
+          </a:p>
+          <a:p/>
+          <a:p>
+            <a:r>
+              <a:t>El rezago es masivo y estructural, no aleatorio.</a:t>
+            </a:r>
+          </a:p>
+          <a:p/>
+          <a:p>
+            <a:r>
+              <a:t>La pandemia desplazó titulaciones en lugar de empeorarlas.</a:t>
+            </a:r>
+          </a:p>
+          <a:p/>
+          <a:p>
+            <a:r>
+              <a:t>Los registros administrativos no explican el caso individual: el R cuadrado es de 0 coma</a:t>
+            </a:r>
+          </a:p>
+          <a:p>
+            <a:r>
+              <a:t>085 y la clasificación no supera a predecir siempre la clase mayoritaria. Eso no es un</a:t>
+            </a:r>
+          </a:p>
+          <a:p>
+            <a:r>
+              <a:t>fracaso del modelo, es un resultado: el rezago depende de trayectorias personales que</a:t>
+            </a:r>
+          </a:p>
+          <a:p>
+            <a:r>
+              <a:t>esta fuente no registra.</a:t>
+            </a:r>
+          </a:p>
+          <a:p/>
+          <a:p>
+            <a:r>
+              <a:t>Y todo el proyecto es reproducible: cuatro comandos lo instalan y ejecutan, con 36</a:t>
+            </a:r>
+          </a:p>
+          <a:p>
+            <a:r>
+              <a:t>commits verificables y cada cifra rastreable hasta el archivo que la generó.</a:t>
+            </a:r>
+          </a:p>
+        </p:txBody>
+      </p:sp>
+      <p:sp>
+        <p:nvSpPr>
+          <p:cNvPr id="4" name="Slide Number Placeholder 3"/>
+          <p:cNvSpPr>
+            <a:spLocks noGrp="1"/>
+          </p:cNvSpPr>
+          <p:nvPr>
+            <p:ph type="sldNum" idx="5" sz="quarter"/>
+          </p:nvPr>
+        </p:nvSpPr>
+        <p:spPr/>
+      </p:sp>
+    </p:spTree>
+  </p:cSld>
+  <p:clrMapOvr>
+    <a:masterClrMapping/>
+  </p:clrMapOvr>
+</p:notes>
 </file>
 
 <file path=ppt/slideLayouts/slideLayout1.xml><?xml version="1.0" encoding="utf-8"?>

--- a/informe/Presentacion_Fase4_Sebastian_Antunez.pptx
+++ b/informe/Presentacion_Fase4_Sebastian_Antunez.pptx
@@ -5473,7 +5473,7 @@
                 <a:ea typeface="Cambria" panose="02040503050406030204" pitchFamily="18" charset="0"/>
                 <a:cs typeface="Calibri Light" panose="020F0302020204030204" pitchFamily="34" charset="0"/>
               </a:rPr>
-              <a:t>EL RESULTADO PRINCIPAL</a:t>
+              <a:t>CUATRO DE CADA CINCO EGRESAN FUERA DE PLAZO</a:t>
             </a:r>
           </a:p>
         </p:txBody>
@@ -5880,7 +5880,7 @@
       </p:sp>
       <p:pic>
         <p:nvPicPr>
-          <p:cNvPr id="23" name="Picture 22" descr="f4_distribucion_sobreduracion.png"/>
+          <p:cNvPr id="23" name="Picture 22" descr="f4_fig1_magnitud.png"/>
           <p:cNvPicPr>
             <a:picLocks noChangeAspect="1"/>
           </p:cNvPicPr>
@@ -5894,8 +5894,8 @@
         </p:blipFill>
         <p:spPr>
           <a:xfrm>
-            <a:off x="2819524" y="3154680"/>
-            <a:ext cx="6552952" cy="2697480"/>
+            <a:off x="3710860" y="3154680"/>
+            <a:ext cx="4770280" cy="2697480"/>
           </a:xfrm>
           <a:prstGeom prst="rect">
             <a:avLst/>
@@ -6242,14 +6242,14 @@
                 <a:ea typeface="Cambria" panose="02040503050406030204" pitchFamily="18" charset="0"/>
                 <a:cs typeface="Calibri Light" panose="020F0302020204030204" pitchFamily="34" charset="0"/>
               </a:rPr>
-              <a:t>EL REZAGO NO ES HOMOGÉNEO</a:t>
+              <a:t>DERECHO TRIPLICA A EDUCACIÓN</a:t>
             </a:r>
           </a:p>
         </p:txBody>
       </p:sp>
       <p:pic>
         <p:nvPicPr>
-          <p:cNvPr id="15" name="Picture 14" descr="f4_factores_sobreduracion.png"/>
+          <p:cNvPr id="15" name="Picture 14" descr="f4_fig2_factores.png"/>
           <p:cNvPicPr>
             <a:picLocks noChangeAspect="1"/>
           </p:cNvPicPr>
@@ -6263,8 +6263,8 @@
         </p:blipFill>
         <p:spPr>
           <a:xfrm>
-            <a:off x="2134259" y="1645920"/>
-            <a:ext cx="7923481" cy="2880360"/>
+            <a:off x="3648968" y="1645920"/>
+            <a:ext cx="4894063" cy="2880360"/>
           </a:xfrm>
           <a:prstGeom prst="rect">
             <a:avLst/>
@@ -6307,7 +6307,7 @@
                   <a:srgbClr val="3B3B3B"/>
                 </a:solidFill>
               </a:rPr>
-              <a:t>Derecho triplica a Educación:</a:t>
+              <a:t>Casi cuatro semestres separan los</a:t>
             </a:r>
           </a:p>
           <a:p>
@@ -6325,7 +6325,7 @@
                   <a:srgbClr val="3B3B3B"/>
                 </a:solidFill>
               </a:rPr>
-              <a:t>5,77 frente a 1,93 semestres</a:t>
+              <a:t>extremos del ranking de áreas</a:t>
             </a:r>
           </a:p>
         </p:txBody>
@@ -6788,14 +6788,14 @@
                 <a:ea typeface="Cambria" panose="02040503050406030204" pitchFamily="18" charset="0"/>
                 <a:cs typeface="Calibri Light" panose="020F0302020204030204" pitchFamily="34" charset="0"/>
               </a:rPr>
-              <a:t>LA PANDEMIA DESPLAZÓ TITULACIONES</a:t>
+              <a:t>LA PANDEMIA DESPLAZÓ TITULACIONES, NO LAS EMPEORÓ</a:t>
             </a:r>
           </a:p>
         </p:txBody>
       </p:sp>
       <p:pic>
         <p:nvPicPr>
-          <p:cNvPr id="15" name="Picture 14" descr="f4_serie_temporal.png"/>
+          <p:cNvPr id="15" name="Picture 14" descr="f4_fig3_evolucion.png"/>
           <p:cNvPicPr>
             <a:picLocks noChangeAspect="1"/>
           </p:cNvPicPr>
@@ -6809,8 +6809,8 @@
         </p:blipFill>
         <p:spPr>
           <a:xfrm>
-            <a:off x="2854238" y="1600200"/>
-            <a:ext cx="6483524" cy="3063240"/>
+            <a:off x="3199283" y="1600200"/>
+            <a:ext cx="5793434" cy="3063240"/>
           </a:xfrm>
           <a:prstGeom prst="rect">
             <a:avLst/>
@@ -7216,14 +7216,14 @@
                 <a:ea typeface="Cambria" panose="02040503050406030204" pitchFamily="18" charset="0"/>
                 <a:cs typeface="Calibri Light" panose="020F0302020204030204" pitchFamily="34" charset="0"/>
               </a:rPr>
-              <a:t>UNA LIMITACIÓN QUE CONDICIONA TODO</a:t>
+              <a:t>NINGUNA COHORTE ESTÁ COMPLETA</a:t>
             </a:r>
           </a:p>
         </p:txBody>
       </p:sp>
       <p:pic>
         <p:nvPicPr>
-          <p:cNvPr id="15" name="Picture 14" descr="f4_truncamiento_cohortes.png"/>
+          <p:cNvPr id="15" name="Picture 14" descr="f4_fig4_truncamiento.png"/>
           <p:cNvPicPr>
             <a:picLocks noChangeAspect="1"/>
           </p:cNvPicPr>
@@ -7237,8 +7237,8 @@
         </p:blipFill>
         <p:spPr>
           <a:xfrm>
-            <a:off x="2400910" y="1600200"/>
-            <a:ext cx="7390180" cy="2880360"/>
+            <a:off x="3401347" y="1600200"/>
+            <a:ext cx="5389305" cy="2880360"/>
           </a:xfrm>
           <a:prstGeom prst="rect">
             <a:avLst/>

--- a/informe/Presentacion_Fase4_Sebastian_Antunez.pptx
+++ b/informe/Presentacion_Fase4_Sebastian_Antunez.pptx
@@ -1616,7 +1616,7 @@
           <a:p/>
           <a:p>
             <a:r>
-              <a:t>Y todo el proyecto es reproducible: cuatro comandos lo instalan y ejecutan, con 36</a:t>
+              <a:t>Y todo el proyecto es reproducible: cuatro comandos lo instalan y ejecutan, con 45</a:t>
             </a:r>
           </a:p>
           <a:p>
@@ -9254,7 +9254,7 @@
                   <a:srgbClr val="3B3B3B"/>
                 </a:solidFill>
               </a:rPr>
-              <a:t>Cuatro comandos, 73 pruebas, 36 commits con historial verificable y cada cifra rastreable a su archivo.</a:t>
+              <a:t>Cuatro comandos, 73 pruebas, 45 commits con historial verificable y cada cifra rastreable a su archivo.</a:t>
             </a:r>
           </a:p>
         </p:txBody>

--- a/informe/Presentacion_Fase4_Sebastian_Antunez.pptx
+++ b/informe/Presentacion_Fase4_Sebastian_Antunez.pptx
@@ -5,19 +5,19 @@
     <p:sldMasterId id="2147483684" r:id="rId1"/>
   </p:sldMasterIdLst>
   <p:notesMasterIdLst>
-    <p:notesMasterId r:id="rId9"/>
+    <p:notesMasterId r:id="rId12"/>
   </p:notesMasterIdLst>
   <p:sldIdLst>
     <p:sldId id="2076137175" r:id="rId2"/>
-    <p:sldId id="2076137361" r:id="rId15"/>
-    <p:sldId id="2076137362" r:id="rId16"/>
-    <p:sldId id="2076137363" r:id="rId17"/>
-    <p:sldId id="2076137364" r:id="rId18"/>
-    <p:sldId id="2076137365" r:id="rId19"/>
-    <p:sldId id="2076137366" r:id="rId20"/>
-    <p:sldId id="2076137367" r:id="rId21"/>
-    <p:sldId id="2076137368" r:id="rId22"/>
-    <p:sldId id="2076137352" r:id="rId8"/>
+    <p:sldId id="2076137361" r:id="rId3"/>
+    <p:sldId id="2076137362" r:id="rId4"/>
+    <p:sldId id="2076137363" r:id="rId5"/>
+    <p:sldId id="2076137364" r:id="rId6"/>
+    <p:sldId id="2076137365" r:id="rId7"/>
+    <p:sldId id="2076137366" r:id="rId8"/>
+    <p:sldId id="2076137367" r:id="rId9"/>
+    <p:sldId id="2076137368" r:id="rId10"/>
+    <p:sldId id="2076137352" r:id="rId11"/>
   </p:sldIdLst>
   <p:sldSz cx="12192000" cy="6858000"/>
   <p:notesSz cx="6858000" cy="9144000"/>
@@ -211,7 +211,7 @@
           </a:lstStyle>
           <a:p>
             <a:fld id="{B02B2D6A-D10B-4950-84AB-B76A76B41051}" type="datetimeFigureOut">
-              <a:t>06-07-26</a:t>
+              <a:t>01-10-2026</a:t>
             </a:fld>
             <a:endParaRPr lang="es-ES"/>
           </a:p>
@@ -368,7 +368,7 @@
           </a:lstStyle>
           <a:p>
             <a:fld id="{D32D85B4-8D15-40BA-BE63-8F85761BC2A6}" type="slidenum">
-              <a:t>‹Nº›</a:t>
+              <a:t>‹#›</a:t>
             </a:fld>
             <a:endParaRPr lang="es-ES"/>
           </a:p>
@@ -478,7 +478,7 @@
 </file>
 
 <file path=ppt/notesSlides/notesSlide1.xml><?xml version="1.0" encoding="utf-8"?>
-<p:notes xmlns:a="http://schemas.openxmlformats.org/drawingml/2006/main" xmlns:p="http://schemas.openxmlformats.org/presentationml/2006/main" xmlns:r="http://schemas.openxmlformats.org/officeDocument/2006/relationships">
+<p:notes xmlns:a="http://schemas.openxmlformats.org/drawingml/2006/main" xmlns:r="http://schemas.openxmlformats.org/officeDocument/2006/relationships" xmlns:p="http://schemas.openxmlformats.org/presentationml/2006/main">
   <p:cSld>
     <p:spTree>
       <p:nvGrpSpPr>
@@ -498,7 +498,7 @@
         <p:nvSpPr>
           <p:cNvPr id="2" name="Slide Image Placeholder 1"/>
           <p:cNvSpPr>
-            <a:spLocks noGrp="1"/>
+            <a:spLocks noGrp="1" noRot="1" noChangeAspect="1"/>
           </p:cNvSpPr>
           <p:nvPr>
             <p:ph type="sldImg" idx="2"/>
@@ -513,7 +513,7 @@
             <a:spLocks noGrp="1"/>
           </p:cNvSpPr>
           <p:nvPr>
-            <p:ph type="body" idx="3" sz="quarter"/>
+            <p:ph type="body" sz="quarter" idx="3"/>
           </p:nvPr>
         </p:nvSpPr>
         <p:spPr/>
@@ -521,36 +521,7 @@
           <a:bodyPr/>
           <a:lstStyle/>
           <a:p>
-            <a:r>
-              <a:t>[0:00 - 0:20 · 20 s]</a:t>
-            </a:r>
-          </a:p>
-          <a:p/>
-          <a:p>
-            <a:r>
-              <a:t>Buenos días. Mi nombre es Sebastian Antunez y voy a presentar el proyecto final del</a:t>
-            </a:r>
-          </a:p>
-          <a:p>
-            <a:r>
-              <a:t>curso Programación para la Ciencia de Datos: un análisis sobre la sobreduración en la</a:t>
-            </a:r>
-          </a:p>
-          <a:p>
-            <a:r>
-              <a:t>titulación de la educación superior chilena, construido sobre 1.246.760 procesos de</a:t>
-            </a:r>
-          </a:p>
-          <a:p>
-            <a:r>
-              <a:t>titulación reales entre 2020 y 2025.</a:t>
-            </a:r>
-          </a:p>
-          <a:p/>
-          <a:p>
-            <a:r>
-              <a:t>RECORDAR: hablar más lento de lo que parece natural; en grabación siempre suena más rápido.</a:t>
-            </a:r>
+            <a:endParaRPr dirty="0"/>
           </a:p>
         </p:txBody>
       </p:sp>
@@ -561,7 +532,7 @@
             <a:spLocks noGrp="1"/>
           </p:cNvSpPr>
           <p:nvPr>
-            <p:ph type="sldNum" idx="5" sz="quarter"/>
+            <p:ph type="sldNum" sz="quarter" idx="5"/>
           </p:nvPr>
         </p:nvSpPr>
         <p:spPr/>
@@ -575,7 +546,7 @@
 </file>
 
 <file path=ppt/notesSlides/notesSlide10.xml><?xml version="1.0" encoding="utf-8"?>
-<p:notes xmlns:a="http://schemas.openxmlformats.org/drawingml/2006/main" xmlns:p="http://schemas.openxmlformats.org/presentationml/2006/main" xmlns:r="http://schemas.openxmlformats.org/officeDocument/2006/relationships">
+<p:notes xmlns:a="http://schemas.openxmlformats.org/drawingml/2006/main" xmlns:r="http://schemas.openxmlformats.org/officeDocument/2006/relationships" xmlns:p="http://schemas.openxmlformats.org/presentationml/2006/main">
   <p:cSld>
     <p:spTree>
       <p:nvGrpSpPr>
@@ -595,7 +566,7 @@
         <p:nvSpPr>
           <p:cNvPr id="2" name="Slide Image Placeholder 1"/>
           <p:cNvSpPr>
-            <a:spLocks noGrp="1"/>
+            <a:spLocks noGrp="1" noRot="1" noChangeAspect="1"/>
           </p:cNvSpPr>
           <p:nvPr>
             <p:ph type="sldImg" idx="2"/>
@@ -610,7 +581,7 @@
             <a:spLocks noGrp="1"/>
           </p:cNvSpPr>
           <p:nvPr>
-            <p:ph type="body" idx="3" sz="quarter"/>
+            <p:ph type="body" sz="quarter" idx="3"/>
           </p:nvPr>
         </p:nvSpPr>
         <p:spPr/>
@@ -618,31 +589,7 @@
           <a:bodyPr/>
           <a:lstStyle/>
           <a:p>
-            <a:r>
-              <a:t>[6:55 - 7:10 · 15 s]</a:t>
-            </a:r>
-          </a:p>
-          <a:p/>
-          <a:p>
-            <a:r>
-              <a:t>Lo que queda para seguir: incorporar la base de matrícula para ver la deserción, que hoy</a:t>
-            </a:r>
-          </a:p>
-          <a:p>
-            <a:r>
-              <a:t>es invisible; usar modelos de supervivencia, que son los adecuados para datos</a:t>
-            </a:r>
-          </a:p>
-          <a:p>
-            <a:r>
-              <a:t>censurados; y ampliar las variables hacia la trayectoria individual.</a:t>
-            </a:r>
-          </a:p>
-          <a:p/>
-          <a:p>
-            <a:r>
-              <a:t>El repositorio completo está disponible en GitHub. Muchas gracias.</a:t>
-            </a:r>
+            <a:endParaRPr dirty="0"/>
           </a:p>
         </p:txBody>
       </p:sp>
@@ -653,7 +600,7 @@
             <a:spLocks noGrp="1"/>
           </p:cNvSpPr>
           <p:nvPr>
-            <p:ph type="sldNum" idx="5" sz="quarter"/>
+            <p:ph type="sldNum" sz="quarter" idx="5"/>
           </p:nvPr>
         </p:nvSpPr>
         <p:spPr/>
@@ -667,7 +614,7 @@
 </file>
 
 <file path=ppt/notesSlides/notesSlide2.xml><?xml version="1.0" encoding="utf-8"?>
-<p:notes xmlns:a="http://schemas.openxmlformats.org/drawingml/2006/main" xmlns:p="http://schemas.openxmlformats.org/presentationml/2006/main" xmlns:r="http://schemas.openxmlformats.org/officeDocument/2006/relationships">
+<p:notes xmlns:a="http://schemas.openxmlformats.org/drawingml/2006/main" xmlns:r="http://schemas.openxmlformats.org/officeDocument/2006/relationships" xmlns:p="http://schemas.openxmlformats.org/presentationml/2006/main">
   <p:cSld>
     <p:spTree>
       <p:nvGrpSpPr>
@@ -687,7 +634,7 @@
         <p:nvSpPr>
           <p:cNvPr id="2" name="Slide Image Placeholder 1"/>
           <p:cNvSpPr>
-            <a:spLocks noGrp="1"/>
+            <a:spLocks noGrp="1" noRot="1" noChangeAspect="1"/>
           </p:cNvSpPr>
           <p:nvPr>
             <p:ph type="sldImg" idx="2"/>
@@ -702,7 +649,7 @@
             <a:spLocks noGrp="1"/>
           </p:cNvSpPr>
           <p:nvPr>
-            <p:ph type="body" idx="3" sz="quarter"/>
+            <p:ph type="body" sz="quarter" idx="3"/>
           </p:nvPr>
         </p:nvSpPr>
         <p:spPr/>
@@ -710,58 +657,7 @@
           <a:bodyPr/>
           <a:lstStyle/>
           <a:p>
-            <a:r>
-              <a:t>[0:20 - 1:10 · 50 s]</a:t>
-            </a:r>
-          </a:p>
-          <a:p/>
-          <a:p>
-            <a:r>
-              <a:t>Cada carrera en Chile declara una duración teórica. Sobre esa cifra se calculan la</a:t>
-            </a:r>
-          </a:p>
-          <a:p>
-            <a:r>
-              <a:t>duración de las becas y los créditos estatales.</a:t>
-            </a:r>
-          </a:p>
-          <a:p/>
-          <a:p>
-            <a:r>
-              <a:t>Lo que el sistema no publica es cuánto se tarda en realidad. Y aquí está el punto de</a:t>
-            </a:r>
-          </a:p>
-          <a:p>
-            <a:r>
-              <a:t>partida: al revisar el esquema oficial del SIES descubrí que las columnas que parecían</a:t>
-            </a:r>
-          </a:p>
-          <a:p>
-            <a:r>
-              <a:t>tener la respuesta NO registran lo que el estudiante tardó, sino lo que el plan declara.</a:t>
-            </a:r>
-          </a:p>
-          <a:p>
-            <a:r>
-              <a:t>Son un atributo de la carrera, no de la persona.</a:t>
-            </a:r>
-          </a:p>
-          <a:p/>
-          <a:p>
-            <a:r>
-              <a:t>Así que la pregunta fue: se puede reconstruir la duración real desde los registros</a:t>
-            </a:r>
-          </a:p>
-          <a:p>
-            <a:r>
-              <a:t>administrativos, y caracterizar el rezago con esa variable derivada.</a:t>
-            </a:r>
-          </a:p>
-          <a:p/>
-          <a:p>
-            <a:r>
-              <a:t>PAUSA de medio segundo antes de avanzar: es la bisagra del relato.</a:t>
-            </a:r>
+            <a:endParaRPr dirty="0"/>
           </a:p>
         </p:txBody>
       </p:sp>
@@ -772,7 +668,7 @@
             <a:spLocks noGrp="1"/>
           </p:cNvSpPr>
           <p:nvPr>
-            <p:ph type="sldNum" idx="5" sz="quarter"/>
+            <p:ph type="sldNum" sz="quarter" idx="5"/>
           </p:nvPr>
         </p:nvSpPr>
         <p:spPr/>
@@ -786,7 +682,7 @@
 </file>
 
 <file path=ppt/notesSlides/notesSlide3.xml><?xml version="1.0" encoding="utf-8"?>
-<p:notes xmlns:a="http://schemas.openxmlformats.org/drawingml/2006/main" xmlns:p="http://schemas.openxmlformats.org/presentationml/2006/main" xmlns:r="http://schemas.openxmlformats.org/officeDocument/2006/relationships">
+<p:notes xmlns:a="http://schemas.openxmlformats.org/drawingml/2006/main" xmlns:r="http://schemas.openxmlformats.org/officeDocument/2006/relationships" xmlns:p="http://schemas.openxmlformats.org/presentationml/2006/main">
   <p:cSld>
     <p:spTree>
       <p:nvGrpSpPr>
@@ -806,7 +702,7 @@
         <p:nvSpPr>
           <p:cNvPr id="2" name="Slide Image Placeholder 1"/>
           <p:cNvSpPr>
-            <a:spLocks noGrp="1"/>
+            <a:spLocks noGrp="1" noRot="1" noChangeAspect="1"/>
           </p:cNvSpPr>
           <p:nvPr>
             <p:ph type="sldImg" idx="2"/>
@@ -821,7 +717,7 @@
             <a:spLocks noGrp="1"/>
           </p:cNvSpPr>
           <p:nvPr>
-            <p:ph type="body" idx="3" sz="quarter"/>
+            <p:ph type="body" sz="quarter" idx="3"/>
           </p:nvPr>
         </p:nvSpPr>
         <p:spPr/>
@@ -829,72 +725,7 @@
           <a:bodyPr/>
           <a:lstStyle/>
           <a:p>
-            <a:r>
-              <a:t>[1:10 - 2:10 · 60 s]</a:t>
-            </a:r>
-          </a:p>
-          <a:p/>
-          <a:p>
-            <a:r>
-              <a:t>El proyecto se desarrolló en cuatro fases. La primera definió el problema y levantó el</a:t>
-            </a:r>
-          </a:p>
-          <a:p>
-            <a:r>
-              <a:t>entorno reproducible. La segunda construyó el pipeline que convierte 955 megabytes de</a:t>
-            </a:r>
-          </a:p>
-          <a:p>
-            <a:r>
-              <a:t>archivos crudos en un conjunto analítico validado. La tercera implementó el núcleo</a:t>
-            </a:r>
-          </a:p>
-          <a:p>
-            <a:r>
-              <a:t>algorítmico desde primeros principios, con medición formal de complejidad y un modelo de</a:t>
-            </a:r>
-          </a:p>
-          <a:p>
-            <a:r>
-              <a:t>dominio orientado a objetos. Y la cuarta, que es la que presento, ejecuta todo eso de</a:t>
-            </a:r>
-          </a:p>
-          <a:p>
-            <a:r>
-              <a:t>extremo a extremo.</a:t>
-            </a:r>
-          </a:p>
-          <a:p/>
-          <a:p>
-            <a:r>
-              <a:t>La transformación central está abajo: la duración real se deriva del año y semestre de</a:t>
-            </a:r>
-          </a:p>
-          <a:p>
-            <a:r>
-              <a:t>ingreso y de titulación. El "más uno" no es arbitrario: quien ingresa y se titula en el</a:t>
-            </a:r>
-          </a:p>
-          <a:p>
-            <a:r>
-              <a:t>mismo semestre cursó un semestre, no cero. Esa coherencia aritmética se verifica como</a:t>
-            </a:r>
-          </a:p>
-          <a:p>
-            <a:r>
-              <a:t>regla de validación sobre el dataset completo.</a:t>
-            </a:r>
-          </a:p>
-          <a:p/>
-          <a:p>
-            <a:r>
-              <a:t>SI EL VIDEO VA CORTO, agregar aquí: el pipeline retiene el 72,9 por ciento de las filas</a:t>
-            </a:r>
-          </a:p>
-          <a:p>
-            <a:r>
-              <a:t>originales y cada exclusión está cuantificada en una bitácora auditable.</a:t>
-            </a:r>
+            <a:endParaRPr dirty="0"/>
           </a:p>
         </p:txBody>
       </p:sp>
@@ -905,7 +736,7 @@
             <a:spLocks noGrp="1"/>
           </p:cNvSpPr>
           <p:nvPr>
-            <p:ph type="sldNum" idx="5" sz="quarter"/>
+            <p:ph type="sldNum" sz="quarter" idx="5"/>
           </p:nvPr>
         </p:nvSpPr>
         <p:spPr/>
@@ -919,7 +750,7 @@
 </file>
 
 <file path=ppt/notesSlides/notesSlide4.xml><?xml version="1.0" encoding="utf-8"?>
-<p:notes xmlns:a="http://schemas.openxmlformats.org/drawingml/2006/main" xmlns:p="http://schemas.openxmlformats.org/presentationml/2006/main" xmlns:r="http://schemas.openxmlformats.org/officeDocument/2006/relationships">
+<p:notes xmlns:a="http://schemas.openxmlformats.org/drawingml/2006/main" xmlns:r="http://schemas.openxmlformats.org/officeDocument/2006/relationships" xmlns:p="http://schemas.openxmlformats.org/presentationml/2006/main">
   <p:cSld>
     <p:spTree>
       <p:nvGrpSpPr>
@@ -939,7 +770,7 @@
         <p:nvSpPr>
           <p:cNvPr id="2" name="Slide Image Placeholder 1"/>
           <p:cNvSpPr>
-            <a:spLocks noGrp="1"/>
+            <a:spLocks noGrp="1" noRot="1" noChangeAspect="1"/>
           </p:cNvSpPr>
           <p:nvPr>
             <p:ph type="sldImg" idx="2"/>
@@ -954,7 +785,7 @@
             <a:spLocks noGrp="1"/>
           </p:cNvSpPr>
           <p:nvPr>
-            <p:ph type="body" idx="3" sz="quarter"/>
+            <p:ph type="body" sz="quarter" idx="3"/>
           </p:nvPr>
         </p:nvSpPr>
         <p:spPr/>
@@ -962,63 +793,7 @@
           <a:bodyPr/>
           <a:lstStyle/>
           <a:p>
-            <a:r>
-              <a:t>[2:10 - 3:05 · 55 s]</a:t>
-            </a:r>
-          </a:p>
-          <a:p/>
-          <a:p>
-            <a:r>
-              <a:t>Este es el resultado central. Solo el 19 por ciento de los titulados egresa dentro del</a:t>
-            </a:r>
-          </a:p>
-          <a:p>
-            <a:r>
-              <a:t>plazo que su propio plan declara. Dicho al revés: cuatro de cada cinco se titulan fuera</a:t>
-            </a:r>
-          </a:p>
-          <a:p>
-            <a:r>
-              <a:t>de plazo.</a:t>
-            </a:r>
-          </a:p>
-          <a:p/>
-          <a:p>
-            <a:r>
-              <a:t>El exceso promedio es de 2 coma 76 semestres, un 43 por ciento más de tiempo del</a:t>
-            </a:r>
-          </a:p>
-          <a:p>
-            <a:r>
-              <a:t>previsto. Y el rezago severo, más de cuatro semestres de exceso, alcanza al 20 coma 4</a:t>
-            </a:r>
-          </a:p>
-          <a:p>
-            <a:r>
-              <a:t>por ciento: prácticamente la misma proporción que logra titularse a tiempo.</a:t>
-            </a:r>
-          </a:p>
-          <a:p/>
-          <a:p>
-            <a:r>
-              <a:t>Agregado, el sistema acumula 3 coma 55 millones de semestres-estudiante por sobre lo</a:t>
-            </a:r>
-          </a:p>
-          <a:p>
-            <a:r>
-              <a:t>planificado en el período.</a:t>
-            </a:r>
-          </a:p>
-          <a:p/>
-          <a:p>
-            <a:r>
-              <a:t>El gráfico de la izquierda muestra por qué reporto media y mediana: la distribución es</a:t>
-            </a:r>
-          </a:p>
-          <a:p>
-            <a:r>
-              <a:t>asimétrica, con una cola larga que arrastra el promedio.</a:t>
-            </a:r>
+            <a:endParaRPr dirty="0"/>
           </a:p>
         </p:txBody>
       </p:sp>
@@ -1029,7 +804,7 @@
             <a:spLocks noGrp="1"/>
           </p:cNvSpPr>
           <p:nvPr>
-            <p:ph type="sldNum" idx="5" sz="quarter"/>
+            <p:ph type="sldNum" sz="quarter" idx="5"/>
           </p:nvPr>
         </p:nvSpPr>
         <p:spPr/>
@@ -1043,7 +818,7 @@
 </file>
 
 <file path=ppt/notesSlides/notesSlide5.xml><?xml version="1.0" encoding="utf-8"?>
-<p:notes xmlns:a="http://schemas.openxmlformats.org/drawingml/2006/main" xmlns:p="http://schemas.openxmlformats.org/presentationml/2006/main" xmlns:r="http://schemas.openxmlformats.org/officeDocument/2006/relationships">
+<p:notes xmlns:a="http://schemas.openxmlformats.org/drawingml/2006/main" xmlns:r="http://schemas.openxmlformats.org/officeDocument/2006/relationships" xmlns:p="http://schemas.openxmlformats.org/presentationml/2006/main">
   <p:cSld>
     <p:spTree>
       <p:nvGrpSpPr>
@@ -1063,7 +838,7 @@
         <p:nvSpPr>
           <p:cNvPr id="2" name="Slide Image Placeholder 1"/>
           <p:cNvSpPr>
-            <a:spLocks noGrp="1"/>
+            <a:spLocks noGrp="1" noRot="1" noChangeAspect="1"/>
           </p:cNvSpPr>
           <p:nvPr>
             <p:ph type="sldImg" idx="2"/>
@@ -1078,7 +853,7 @@
             <a:spLocks noGrp="1"/>
           </p:cNvSpPr>
           <p:nvPr>
-            <p:ph type="body" idx="3" sz="quarter"/>
+            <p:ph type="body" sz="quarter" idx="3"/>
           </p:nvPr>
         </p:nvSpPr>
         <p:spPr/>
@@ -1086,58 +861,7 @@
           <a:bodyPr/>
           <a:lstStyle/>
           <a:p>
-            <a:r>
-              <a:t>[3:05 - 4:05 · 60 s]</a:t>
-            </a:r>
-          </a:p>
-          <a:p/>
-          <a:p>
-            <a:r>
-              <a:t>El rezago tampoco se reparte de forma pareja.</a:t>
-            </a:r>
-          </a:p>
-          <a:p/>
-          <a:p>
-            <a:r>
-              <a:t>Por área de conocimiento, Derecho triplica a Educación: 5,77 semestres frente a 1,93.</a:t>
-            </a:r>
-          </a:p>
-          <a:p>
-            <a:r>
-              <a:t>Casi cuatro semestres, dos años, separan a la carrera más rezagada de la menos rezagada.</a:t>
-            </a:r>
-          </a:p>
-          <a:p/>
-          <a:p>
-            <a:r>
-              <a:t>Por tipo de institución, las universidades acumulan más rezago que los institutos</a:t>
-            </a:r>
-          </a:p>
-          <a:p>
-            <a:r>
-              <a:t>profesionales y su tasa de titulación oportuna es menos de la mitad. Eso sugiere que la</a:t>
-            </a:r>
-          </a:p>
-          <a:p>
-            <a:r>
-              <a:t>duración declarada es menos realista en carreras universitarias largas.</a:t>
-            </a:r>
-          </a:p>
-          <a:p/>
-          <a:p>
-            <a:r>
-              <a:t>Y por género, las mujeres se titulan 0 coma 93 semestres antes. Lo importante del panel</a:t>
-            </a:r>
-          </a:p>
-          <a:p>
-            <a:r>
-              <a:t>derecho es que la brecha se sostiene en las diez áreas sin excepción: no es que estudien</a:t>
-            </a:r>
-          </a:p>
-          <a:p>
-            <a:r>
-              <a:t>carreras más cortas, es que dentro de cada área se titulan antes.</a:t>
-            </a:r>
+            <a:endParaRPr dirty="0"/>
           </a:p>
         </p:txBody>
       </p:sp>
@@ -1148,7 +872,7 @@
             <a:spLocks noGrp="1"/>
           </p:cNvSpPr>
           <p:nvPr>
-            <p:ph type="sldNum" idx="5" sz="quarter"/>
+            <p:ph type="sldNum" sz="quarter" idx="5"/>
           </p:nvPr>
         </p:nvSpPr>
         <p:spPr/>
@@ -1162,7 +886,7 @@
 </file>
 
 <file path=ppt/notesSlides/notesSlide6.xml><?xml version="1.0" encoding="utf-8"?>
-<p:notes xmlns:a="http://schemas.openxmlformats.org/drawingml/2006/main" xmlns:p="http://schemas.openxmlformats.org/presentationml/2006/main" xmlns:r="http://schemas.openxmlformats.org/officeDocument/2006/relationships">
+<p:notes xmlns:a="http://schemas.openxmlformats.org/drawingml/2006/main" xmlns:r="http://schemas.openxmlformats.org/officeDocument/2006/relationships" xmlns:p="http://schemas.openxmlformats.org/presentationml/2006/main">
   <p:cSld>
     <p:spTree>
       <p:nvGrpSpPr>
@@ -1182,7 +906,7 @@
         <p:nvSpPr>
           <p:cNvPr id="2" name="Slide Image Placeholder 1"/>
           <p:cNvSpPr>
-            <a:spLocks noGrp="1"/>
+            <a:spLocks noGrp="1" noRot="1" noChangeAspect="1"/>
           </p:cNvSpPr>
           <p:nvPr>
             <p:ph type="sldImg" idx="2"/>
@@ -1197,7 +921,7 @@
             <a:spLocks noGrp="1"/>
           </p:cNvSpPr>
           <p:nvPr>
-            <p:ph type="body" idx="3" sz="quarter"/>
+            <p:ph type="body" sz="quarter" idx="3"/>
           </p:nvPr>
         </p:nvSpPr>
         <p:spPr/>
@@ -1205,57 +929,7 @@
           <a:bodyPr/>
           <a:lstStyle/>
           <a:p>
-            <a:r>
-              <a:t>[4:05 - 4:55 · 50 s]</a:t>
-            </a:r>
-          </a:p>
-          <a:p/>
-          <a:p>
-            <a:r>
-              <a:t>Este hallazgo no estaba en ninguna de las fases anteriores; apareció al mirar la serie</a:t>
-            </a:r>
-          </a:p>
-          <a:p>
-            <a:r>
-              <a:t>semestral en vez del promedio agregado.</a:t>
-            </a:r>
-          </a:p>
-          <a:p/>
-          <a:p>
-            <a:r>
-              <a:t>En 2020 se titularon unas 87 mil personas menos que en un año normal, y la sobreduración</a:t>
-            </a:r>
-          </a:p>
-          <a:p>
-            <a:r>
-              <a:t>media tocó su mínimo. En 2021 el volumen se recuperó y la sobreduración alcanzó su</a:t>
-            </a:r>
-          </a:p>
-          <a:p>
-            <a:r>
-              <a:t>máximo.</a:t>
-            </a:r>
-          </a:p>
-          <a:p/>
-          <a:p>
-            <a:r>
-              <a:t>La tentación es decir que 2020 fue un buen año. Pero no: las titulaciones se</a:t>
-            </a:r>
-          </a:p>
-          <a:p>
-            <a:r>
-              <a:t>POSTERGARON. Quienes debían egresar en 2020 lo hicieron en 2021, con uno o dos semestres</a:t>
-            </a:r>
-          </a:p>
-          <a:p>
-            <a:r>
-              <a:t>adicionales encima. El mínimo y el máximo son el mismo fenómeno visto en dos momentos, y</a:t>
-            </a:r>
-          </a:p>
-          <a:p>
-            <a:r>
-              <a:t>el mecanismo es de desplazamiento administrativo, no de deterioro académico.</a:t>
-            </a:r>
+            <a:endParaRPr dirty="0"/>
           </a:p>
         </p:txBody>
       </p:sp>
@@ -1266,7 +940,7 @@
             <a:spLocks noGrp="1"/>
           </p:cNvSpPr>
           <p:nvPr>
-            <p:ph type="sldNum" idx="5" sz="quarter"/>
+            <p:ph type="sldNum" sz="quarter" idx="5"/>
           </p:nvPr>
         </p:nvSpPr>
         <p:spPr/>
@@ -1280,7 +954,7 @@
 </file>
 
 <file path=ppt/notesSlides/notesSlide7.xml><?xml version="1.0" encoding="utf-8"?>
-<p:notes xmlns:a="http://schemas.openxmlformats.org/drawingml/2006/main" xmlns:p="http://schemas.openxmlformats.org/presentationml/2006/main" xmlns:r="http://schemas.openxmlformats.org/officeDocument/2006/relationships">
+<p:notes xmlns:a="http://schemas.openxmlformats.org/drawingml/2006/main" xmlns:r="http://schemas.openxmlformats.org/officeDocument/2006/relationships" xmlns:p="http://schemas.openxmlformats.org/presentationml/2006/main">
   <p:cSld>
     <p:spTree>
       <p:nvGrpSpPr>
@@ -1300,7 +974,7 @@
         <p:nvSpPr>
           <p:cNvPr id="2" name="Slide Image Placeholder 1"/>
           <p:cNvSpPr>
-            <a:spLocks noGrp="1"/>
+            <a:spLocks noGrp="1" noRot="1" noChangeAspect="1"/>
           </p:cNvSpPr>
           <p:nvPr>
             <p:ph type="sldImg" idx="2"/>
@@ -1315,7 +989,7 @@
             <a:spLocks noGrp="1"/>
           </p:cNvSpPr>
           <p:nvPr>
-            <p:ph type="body" idx="3" sz="quarter"/>
+            <p:ph type="body" sz="quarter" idx="3"/>
           </p:nvPr>
         </p:nvSpPr>
         <p:spPr/>
@@ -1323,57 +997,7 @@
           <a:bodyPr/>
           <a:lstStyle/>
           <a:p>
-            <a:r>
-              <a:t>[4:55 - 5:35 · 40 s]</a:t>
-            </a:r>
-          </a:p>
-          <a:p/>
-          <a:p>
-            <a:r>
-              <a:t>Y aquí una limitación que condiciona todo lo anterior, y que creo que es uno de los</a:t>
-            </a:r>
-          </a:p>
-          <a:p>
-            <a:r>
-              <a:t>resultados más valiosos del proyecto.</a:t>
-            </a:r>
-          </a:p>
-          <a:p/>
-          <a:p>
-            <a:r>
-              <a:t>Una base de titulados solo contiene a quien terminó. De las cohortes recientes solo se</a:t>
-            </a:r>
-          </a:p>
-          <a:p>
-            <a:r>
-              <a:t>han titulado los excepcionalmente rápidos, porque son los únicos que alcanzaron a</a:t>
-            </a:r>
-          </a:p>
-          <a:p>
-            <a:r>
-              <a:t>hacerlo. De las cohortes antiguas, en cambio, los que aparecen son los extremadamente</a:t>
-            </a:r>
-          </a:p>
-          <a:p>
-            <a:r>
-              <a:t>rezagados.</a:t>
-            </a:r>
-          </a:p>
-          <a:p/>
-          <a:p>
-            <a:r>
-              <a:t>Ninguna cohorte está completa, y lo están en direcciones opuestas. Por eso el descenso</a:t>
-            </a:r>
-          </a:p>
-          <a:p>
-            <a:r>
-              <a:t>de la serie desde 2024 no puede leerse como una mejora del sistema. Es una limitación de</a:t>
-            </a:r>
-          </a:p>
-          <a:p>
-            <a:r>
-              <a:t>la fuente, no del procesamiento, y declararla es parte del resultado.</a:t>
-            </a:r>
+            <a:endParaRPr dirty="0"/>
           </a:p>
         </p:txBody>
       </p:sp>
@@ -1384,7 +1008,7 @@
             <a:spLocks noGrp="1"/>
           </p:cNvSpPr>
           <p:nvPr>
-            <p:ph type="sldNum" idx="5" sz="quarter"/>
+            <p:ph type="sldNum" sz="quarter" idx="5"/>
           </p:nvPr>
         </p:nvSpPr>
         <p:spPr/>
@@ -1398,7 +1022,7 @@
 </file>
 
 <file path=ppt/notesSlides/notesSlide8.xml><?xml version="1.0" encoding="utf-8"?>
-<p:notes xmlns:a="http://schemas.openxmlformats.org/drawingml/2006/main" xmlns:p="http://schemas.openxmlformats.org/presentationml/2006/main" xmlns:r="http://schemas.openxmlformats.org/officeDocument/2006/relationships">
+<p:notes xmlns:a="http://schemas.openxmlformats.org/drawingml/2006/main" xmlns:r="http://schemas.openxmlformats.org/officeDocument/2006/relationships" xmlns:p="http://schemas.openxmlformats.org/presentationml/2006/main">
   <p:cSld>
     <p:spTree>
       <p:nvGrpSpPr>
@@ -1418,7 +1042,7 @@
         <p:nvSpPr>
           <p:cNvPr id="2" name="Slide Image Placeholder 1"/>
           <p:cNvSpPr>
-            <a:spLocks noGrp="1"/>
+            <a:spLocks noGrp="1" noRot="1" noChangeAspect="1"/>
           </p:cNvSpPr>
           <p:nvPr>
             <p:ph type="sldImg" idx="2"/>
@@ -1433,7 +1057,7 @@
             <a:spLocks noGrp="1"/>
           </p:cNvSpPr>
           <p:nvPr>
-            <p:ph type="body" idx="3" sz="quarter"/>
+            <p:ph type="body" sz="quarter" idx="3"/>
           </p:nvPr>
         </p:nvSpPr>
         <p:spPr/>
@@ -1441,68 +1065,7 @@
           <a:bodyPr/>
           <a:lstStyle/>
           <a:p>
-            <a:r>
-              <a:t>[5:35 - 6:15 · 40 s]</a:t>
-            </a:r>
-          </a:p>
-          <a:p/>
-          <a:p>
-            <a:r>
-              <a:t>Sobre el trabajo técnico: el proyecto tiene 73 pruebas automatizadas que cubren casos</a:t>
-            </a:r>
-          </a:p>
-          <a:p>
-            <a:r>
-              <a:t>normales, límite y excepciones, y 9 reglas de coherencia del dominio, todas aprobadas.</a:t>
-            </a:r>
-          </a:p>
-          <a:p/>
-          <a:p>
-            <a:r>
-              <a:t>Los algoritmos se implementaron desde cero y se verificaron contra pandas, sorted y</a:t>
-            </a:r>
-          </a:p>
-          <a:p>
-            <a:r>
-              <a:t>NumPy ANTES de medir su tiempo: medir un algoritmo incorrecto no tiene sentido.</a:t>
-            </a:r>
-          </a:p>
-          <a:p/>
-          <a:p>
-            <a:r>
-              <a:t>Las curvas log-log confirmaron las cotas teóricas, pero también mostraron dónde la</a:t>
-            </a:r>
-          </a:p>
-          <a:p>
-            <a:r>
-              <a:t>teoría no basta: quickselect es orden n en comparaciones y sin embargo escala como n</a:t>
-            </a:r>
-          </a:p>
-          <a:p>
-            <a:r>
-              <a:t>elevado a 1,22, porque cada nivel de recursión asigna tres listas nuevas. La cota</a:t>
-            </a:r>
-          </a:p>
-          <a:p>
-            <a:r>
-              <a:t>describe el crecimiento, no la constante. Ese contraste fue uno de los aprendizajes</a:t>
-            </a:r>
-          </a:p>
-          <a:p>
-            <a:r>
-              <a:t>centrales del curso.</a:t>
-            </a:r>
-          </a:p>
-          <a:p/>
-          <a:p>
-            <a:r>
-              <a:t>SI EL VIDEO VA LARGO, recortar esta lámina a las dos primeras cifras y omitir el detalle</a:t>
-            </a:r>
-          </a:p>
-          <a:p>
-            <a:r>
-              <a:t>de quickselect: ahorra unos 20 segundos.</a:t>
-            </a:r>
+            <a:endParaRPr dirty="0"/>
           </a:p>
         </p:txBody>
       </p:sp>
@@ -1513,7 +1076,7 @@
             <a:spLocks noGrp="1"/>
           </p:cNvSpPr>
           <p:nvPr>
-            <p:ph type="sldNum" idx="5" sz="quarter"/>
+            <p:ph type="sldNum" sz="quarter" idx="5"/>
           </p:nvPr>
         </p:nvSpPr>
         <p:spPr/>
@@ -1527,7 +1090,7 @@
 </file>
 
 <file path=ppt/notesSlides/notesSlide9.xml><?xml version="1.0" encoding="utf-8"?>
-<p:notes xmlns:a="http://schemas.openxmlformats.org/drawingml/2006/main" xmlns:p="http://schemas.openxmlformats.org/presentationml/2006/main" xmlns:r="http://schemas.openxmlformats.org/officeDocument/2006/relationships">
+<p:notes xmlns:a="http://schemas.openxmlformats.org/drawingml/2006/main" xmlns:r="http://schemas.openxmlformats.org/officeDocument/2006/relationships" xmlns:p="http://schemas.openxmlformats.org/presentationml/2006/main">
   <p:cSld>
     <p:spTree>
       <p:nvGrpSpPr>
@@ -1547,7 +1110,7 @@
         <p:nvSpPr>
           <p:cNvPr id="2" name="Slide Image Placeholder 1"/>
           <p:cNvSpPr>
-            <a:spLocks noGrp="1"/>
+            <a:spLocks noGrp="1" noRot="1" noChangeAspect="1"/>
           </p:cNvSpPr>
           <p:nvPr>
             <p:ph type="sldImg" idx="2"/>
@@ -1562,7 +1125,7 @@
             <a:spLocks noGrp="1"/>
           </p:cNvSpPr>
           <p:nvPr>
-            <p:ph type="body" idx="3" sz="quarter"/>
+            <p:ph type="body" sz="quarter" idx="3"/>
           </p:nvPr>
         </p:nvSpPr>
         <p:spPr/>
@@ -1570,59 +1133,7 @@
           <a:bodyPr/>
           <a:lstStyle/>
           <a:p>
-            <a:r>
-              <a:t>[6:15 - 6:55 · 40 s]</a:t>
-            </a:r>
-          </a:p>
-          <a:p/>
-          <a:p>
-            <a:r>
-              <a:t>En síntesis, cuatro conclusiones.</a:t>
-            </a:r>
-          </a:p>
-          <a:p/>
-          <a:p>
-            <a:r>
-              <a:t>El rezago es masivo y estructural, no aleatorio.</a:t>
-            </a:r>
-          </a:p>
-          <a:p/>
-          <a:p>
-            <a:r>
-              <a:t>La pandemia desplazó titulaciones en lugar de empeorarlas.</a:t>
-            </a:r>
-          </a:p>
-          <a:p/>
-          <a:p>
-            <a:r>
-              <a:t>Los registros administrativos no explican el caso individual: el R cuadrado es de 0 coma</a:t>
-            </a:r>
-          </a:p>
-          <a:p>
-            <a:r>
-              <a:t>085 y la clasificación no supera a predecir siempre la clase mayoritaria. Eso no es un</a:t>
-            </a:r>
-          </a:p>
-          <a:p>
-            <a:r>
-              <a:t>fracaso del modelo, es un resultado: el rezago depende de trayectorias personales que</a:t>
-            </a:r>
-          </a:p>
-          <a:p>
-            <a:r>
-              <a:t>esta fuente no registra.</a:t>
-            </a:r>
-          </a:p>
-          <a:p/>
-          <a:p>
-            <a:r>
-              <a:t>Y todo el proyecto es reproducible: cuatro comandos lo instalan y ejecutan, con 45</a:t>
-            </a:r>
-          </a:p>
-          <a:p>
-            <a:r>
-              <a:t>commits verificables y cada cifra rastreable hasta el archivo que la generó.</a:t>
-            </a:r>
+            <a:endParaRPr dirty="0"/>
           </a:p>
         </p:txBody>
       </p:sp>
@@ -1633,7 +1144,7 @@
             <a:spLocks noGrp="1"/>
           </p:cNvSpPr>
           <p:nvPr>
-            <p:ph type="sldNum" idx="5" sz="quarter"/>
+            <p:ph type="sldNum" sz="quarter" idx="5"/>
           </p:nvPr>
         </p:nvSpPr>
         <p:spPr/>
@@ -1777,7 +1288,7 @@
           <a:p>
             <a:fld id="{7DC156A5-B668-40B6-B68E-AFC99CB3A359}" type="datetimeFigureOut">
               <a:rPr lang="es-CL" smtClean="0"/>
-              <a:t>06-07-26</a:t>
+              <a:t>01-10-2026</a:t>
             </a:fld>
             <a:endParaRPr lang="es-CL"/>
           </a:p>
@@ -1819,7 +1330,7 @@
           <a:p>
             <a:fld id="{524E32BF-339A-4FD7-AF2D-884DBB49ECE9}" type="slidenum">
               <a:rPr lang="es-CL" smtClean="0"/>
-              <a:t>‹Nº›</a:t>
+              <a:t>‹#›</a:t>
             </a:fld>
             <a:endParaRPr lang="es-CL"/>
           </a:p>
@@ -1947,7 +1458,7 @@
           <a:p>
             <a:fld id="{7DC156A5-B668-40B6-B68E-AFC99CB3A359}" type="datetimeFigureOut">
               <a:rPr lang="es-CL" smtClean="0"/>
-              <a:t>06-07-26</a:t>
+              <a:t>01-10-2026</a:t>
             </a:fld>
             <a:endParaRPr lang="es-CL"/>
           </a:p>
@@ -1989,7 +1500,7 @@
           <a:p>
             <a:fld id="{524E32BF-339A-4FD7-AF2D-884DBB49ECE9}" type="slidenum">
               <a:rPr lang="es-CL" smtClean="0"/>
-              <a:t>‹Nº›</a:t>
+              <a:t>‹#›</a:t>
             </a:fld>
             <a:endParaRPr lang="es-CL"/>
           </a:p>
@@ -2127,7 +1638,7 @@
           <a:p>
             <a:fld id="{7DC156A5-B668-40B6-B68E-AFC99CB3A359}" type="datetimeFigureOut">
               <a:rPr lang="es-CL" smtClean="0"/>
-              <a:t>06-07-26</a:t>
+              <a:t>01-10-2026</a:t>
             </a:fld>
             <a:endParaRPr lang="es-CL"/>
           </a:p>
@@ -2169,7 +1680,7 @@
           <a:p>
             <a:fld id="{524E32BF-339A-4FD7-AF2D-884DBB49ECE9}" type="slidenum">
               <a:rPr lang="es-CL" smtClean="0"/>
-              <a:t>‹Nº›</a:t>
+              <a:t>‹#›</a:t>
             </a:fld>
             <a:endParaRPr lang="es-CL"/>
           </a:p>
@@ -2297,7 +1808,7 @@
           <a:p>
             <a:fld id="{7DC156A5-B668-40B6-B68E-AFC99CB3A359}" type="datetimeFigureOut">
               <a:rPr lang="es-CL" smtClean="0"/>
-              <a:t>06-07-26</a:t>
+              <a:t>01-10-2026</a:t>
             </a:fld>
             <a:endParaRPr lang="es-CL"/>
           </a:p>
@@ -2339,7 +1850,7 @@
           <a:p>
             <a:fld id="{524E32BF-339A-4FD7-AF2D-884DBB49ECE9}" type="slidenum">
               <a:rPr lang="es-CL" smtClean="0"/>
-              <a:t>‹Nº›</a:t>
+              <a:t>‹#›</a:t>
             </a:fld>
             <a:endParaRPr lang="es-CL"/>
           </a:p>
@@ -2543,7 +2054,7 @@
           <a:p>
             <a:fld id="{7DC156A5-B668-40B6-B68E-AFC99CB3A359}" type="datetimeFigureOut">
               <a:rPr lang="es-CL" smtClean="0"/>
-              <a:t>06-07-26</a:t>
+              <a:t>01-10-2026</a:t>
             </a:fld>
             <a:endParaRPr lang="es-CL"/>
           </a:p>
@@ -2585,7 +2096,7 @@
           <a:p>
             <a:fld id="{524E32BF-339A-4FD7-AF2D-884DBB49ECE9}" type="slidenum">
               <a:rPr lang="es-CL" smtClean="0"/>
-              <a:t>‹Nº›</a:t>
+              <a:t>‹#›</a:t>
             </a:fld>
             <a:endParaRPr lang="es-CL"/>
           </a:p>
@@ -2775,7 +2286,7 @@
           <a:p>
             <a:fld id="{7DC156A5-B668-40B6-B68E-AFC99CB3A359}" type="datetimeFigureOut">
               <a:rPr lang="es-CL" smtClean="0"/>
-              <a:t>06-07-26</a:t>
+              <a:t>01-10-2026</a:t>
             </a:fld>
             <a:endParaRPr lang="es-CL"/>
           </a:p>
@@ -2817,7 +2328,7 @@
           <a:p>
             <a:fld id="{524E32BF-339A-4FD7-AF2D-884DBB49ECE9}" type="slidenum">
               <a:rPr lang="es-CL" smtClean="0"/>
-              <a:t>‹Nº›</a:t>
+              <a:t>‹#›</a:t>
             </a:fld>
             <a:endParaRPr lang="es-CL"/>
           </a:p>
@@ -3142,7 +2653,7 @@
           <a:p>
             <a:fld id="{7DC156A5-B668-40B6-B68E-AFC99CB3A359}" type="datetimeFigureOut">
               <a:rPr lang="es-CL" smtClean="0"/>
-              <a:t>06-07-26</a:t>
+              <a:t>01-10-2026</a:t>
             </a:fld>
             <a:endParaRPr lang="es-CL"/>
           </a:p>
@@ -3184,7 +2695,7 @@
           <a:p>
             <a:fld id="{524E32BF-339A-4FD7-AF2D-884DBB49ECE9}" type="slidenum">
               <a:rPr lang="es-CL" smtClean="0"/>
-              <a:t>‹Nº›</a:t>
+              <a:t>‹#›</a:t>
             </a:fld>
             <a:endParaRPr lang="es-CL"/>
           </a:p>
@@ -3260,7 +2771,7 @@
           <a:p>
             <a:fld id="{7DC156A5-B668-40B6-B68E-AFC99CB3A359}" type="datetimeFigureOut">
               <a:rPr lang="es-CL" smtClean="0"/>
-              <a:t>06-07-26</a:t>
+              <a:t>01-10-2026</a:t>
             </a:fld>
             <a:endParaRPr lang="es-CL"/>
           </a:p>
@@ -3302,7 +2813,7 @@
           <a:p>
             <a:fld id="{524E32BF-339A-4FD7-AF2D-884DBB49ECE9}" type="slidenum">
               <a:rPr lang="es-CL" smtClean="0"/>
-              <a:t>‹Nº›</a:t>
+              <a:t>‹#›</a:t>
             </a:fld>
             <a:endParaRPr lang="es-CL"/>
           </a:p>
@@ -3355,7 +2866,7 @@
           <a:p>
             <a:fld id="{7DC156A5-B668-40B6-B68E-AFC99CB3A359}" type="datetimeFigureOut">
               <a:rPr lang="es-CL" smtClean="0"/>
-              <a:t>06-07-26</a:t>
+              <a:t>01-10-2026</a:t>
             </a:fld>
             <a:endParaRPr lang="es-CL"/>
           </a:p>
@@ -3397,7 +2908,7 @@
           <a:p>
             <a:fld id="{524E32BF-339A-4FD7-AF2D-884DBB49ECE9}" type="slidenum">
               <a:rPr lang="es-CL" smtClean="0"/>
-              <a:t>‹Nº›</a:t>
+              <a:t>‹#›</a:t>
             </a:fld>
             <a:endParaRPr lang="es-CL"/>
           </a:p>
@@ -3632,7 +3143,7 @@
           <a:p>
             <a:fld id="{7DC156A5-B668-40B6-B68E-AFC99CB3A359}" type="datetimeFigureOut">
               <a:rPr lang="es-CL" smtClean="0"/>
-              <a:t>06-07-26</a:t>
+              <a:t>01-10-2026</a:t>
             </a:fld>
             <a:endParaRPr lang="es-CL"/>
           </a:p>
@@ -3674,7 +3185,7 @@
           <a:p>
             <a:fld id="{524E32BF-339A-4FD7-AF2D-884DBB49ECE9}" type="slidenum">
               <a:rPr lang="es-CL" smtClean="0"/>
-              <a:t>‹Nº›</a:t>
+              <a:t>‹#›</a:t>
             </a:fld>
             <a:endParaRPr lang="es-CL"/>
           </a:p>
@@ -3889,7 +3400,7 @@
           <a:p>
             <a:fld id="{7DC156A5-B668-40B6-B68E-AFC99CB3A359}" type="datetimeFigureOut">
               <a:rPr lang="es-CL" smtClean="0"/>
-              <a:t>06-07-26</a:t>
+              <a:t>01-10-2026</a:t>
             </a:fld>
             <a:endParaRPr lang="es-CL"/>
           </a:p>
@@ -3931,7 +3442,7 @@
           <a:p>
             <a:fld id="{524E32BF-339A-4FD7-AF2D-884DBB49ECE9}" type="slidenum">
               <a:rPr lang="es-CL" smtClean="0"/>
-              <a:t>‹Nº›</a:t>
+              <a:t>‹#›</a:t>
             </a:fld>
             <a:endParaRPr lang="es-CL"/>
           </a:p>
@@ -4102,7 +3613,7 @@
           <a:p>
             <a:fld id="{7DC156A5-B668-40B6-B68E-AFC99CB3A359}" type="datetimeFigureOut">
               <a:rPr lang="es-CL" smtClean="0"/>
-              <a:t>06-07-26</a:t>
+              <a:t>01-10-2026</a:t>
             </a:fld>
             <a:endParaRPr lang="es-CL"/>
           </a:p>
@@ -4180,7 +3691,7 @@
           <a:p>
             <a:fld id="{524E32BF-339A-4FD7-AF2D-884DBB49ECE9}" type="slidenum">
               <a:rPr lang="es-CL" smtClean="0"/>
-              <a:t>‹Nº›</a:t>
+              <a:t>‹#›</a:t>
             </a:fld>
             <a:endParaRPr lang="es-CL"/>
           </a:p>
@@ -4496,7 +4007,7 @@
     <p:bg>
       <p:bgPr>
         <a:blipFill dpi="0" rotWithShape="1">
-          <a:blip r:embed="rId2">
+          <a:blip r:embed="rId3">
             <a:lum/>
           </a:blip>
           <a:srcRect/>
@@ -4545,7 +4056,7 @@
           </a:prstGeom>
         </p:spPr>
         <p:txBody>
-          <a:bodyPr vert="horz" lIns="91440" tIns="45720" rIns="91440" bIns="45720" rtlCol="0" anchor="b" wrap="square">
+          <a:bodyPr vert="horz" wrap="square" lIns="91440" tIns="45720" rIns="91440" bIns="45720" rtlCol="0" anchor="b">
             <a:normAutofit fontScale="92500" lnSpcReduction="10000"/>
           </a:bodyPr>
           <a:lstStyle>
@@ -5090,7 +4601,7 @@
           <p:nvPr/>
         </p:nvPicPr>
         <p:blipFill>
-          <a:blip r:embed="rId3">
+          <a:blip r:embed="rId4">
             <a:extLst>
               <a:ext uri="{28A0092B-C50C-407E-A947-70E740481C1C}">
                 <a14:useLocalDpi xmlns:a14="http://schemas.microsoft.com/office/drawing/2010/main" val="0"/>
@@ -5127,7 +4638,7 @@
           <a:noFill/>
         </p:spPr>
         <p:txBody>
-          <a:bodyPr wrap="square" lIns="0" rIns="0" tIns="0" bIns="0">
+          <a:bodyPr wrap="square" lIns="0" tIns="0" rIns="0" bIns="0">
             <a:spAutoFit/>
           </a:bodyPr>
           <a:lstStyle/>
@@ -5183,7 +4694,140 @@
 </file>
 
 <file path=ppt/slides/slide10.xml><?xml version="1.0" encoding="utf-8"?>
-<p:sld xmlns:a="http://schemas.openxmlformats.org/drawingml/2006/main" xmlns:p="http://schemas.openxmlformats.org/presentationml/2006/main" xmlns:r="http://schemas.openxmlformats.org/officeDocument/2006/relationships">
+<p:sld xmlns:a="http://schemas.openxmlformats.org/drawingml/2006/main" xmlns:r="http://schemas.openxmlformats.org/officeDocument/2006/relationships" xmlns:p="http://schemas.openxmlformats.org/presentationml/2006/main">
+  <p:cSld>
+    <p:bg>
+      <p:bgPr>
+        <a:blipFill dpi="0" rotWithShape="1">
+          <a:blip r:embed="rId3">
+            <a:lum/>
+          </a:blip>
+          <a:srcRect/>
+          <a:stretch>
+            <a:fillRect/>
+          </a:stretch>
+        </a:blipFill>
+        <a:effectLst/>
+      </p:bgPr>
+    </p:bg>
+    <p:spTree>
+      <p:nvGrpSpPr>
+        <p:cNvPr id="1" name=""/>
+        <p:cNvGrpSpPr/>
+        <p:nvPr/>
+      </p:nvGrpSpPr>
+      <p:grpSpPr>
+        <a:xfrm>
+          <a:off x="0" y="0"/>
+          <a:ext cx="0" cy="0"/>
+          <a:chOff x="0" y="0"/>
+          <a:chExt cx="0" cy="0"/>
+        </a:xfrm>
+      </p:grpSpPr>
+      <p:pic>
+        <p:nvPicPr>
+          <p:cNvPr id="17" name="Imagen 16">
+            <a:extLst>
+              <a:ext uri="{FF2B5EF4-FFF2-40B4-BE49-F238E27FC236}">
+                <a16:creationId xmlns:a16="http://schemas.microsoft.com/office/drawing/2014/main" id="{D903B572-7AB0-4369-C487-D62538C3B61C}"/>
+              </a:ext>
+            </a:extLst>
+          </p:cNvPr>
+          <p:cNvPicPr>
+            <a:picLocks noChangeAspect="1"/>
+          </p:cNvPicPr>
+          <p:nvPr/>
+        </p:nvPicPr>
+        <p:blipFill>
+          <a:blip r:embed="rId4"/>
+          <a:stretch>
+            <a:fillRect/>
+          </a:stretch>
+        </p:blipFill>
+        <p:spPr>
+          <a:xfrm>
+            <a:off x="5232400" y="2606876"/>
+            <a:ext cx="1727200" cy="1460500"/>
+          </a:xfrm>
+          <a:prstGeom prst="rect">
+            <a:avLst/>
+          </a:prstGeom>
+        </p:spPr>
+      </p:pic>
+      <p:sp>
+        <p:nvSpPr>
+          <p:cNvPr id="18" name="TextBox 17"/>
+          <p:cNvSpPr txBox="1"/>
+          <p:nvPr/>
+        </p:nvSpPr>
+        <p:spPr>
+          <a:xfrm>
+            <a:off x="2743200" y="4892040"/>
+            <a:ext cx="6702552" cy="1005840"/>
+          </a:xfrm>
+          <a:prstGeom prst="rect">
+            <a:avLst/>
+          </a:prstGeom>
+          <a:noFill/>
+        </p:spPr>
+        <p:txBody>
+          <a:bodyPr wrap="square" lIns="0" tIns="0" rIns="0" bIns="0">
+            <a:spAutoFit/>
+          </a:bodyPr>
+          <a:lstStyle/>
+          <a:p>
+            <a:pPr algn="ctr">
+              <a:lnSpc>
+                <a:spcPct val="150000"/>
+              </a:lnSpc>
+              <a:spcAft>
+                <a:spcPts val="0"/>
+              </a:spcAft>
+            </a:pPr>
+            <a:r>
+              <a:rPr sz="1200" b="0">
+                <a:solidFill>
+                  <a:srgbClr val="FFFFFF"/>
+                </a:solidFill>
+              </a:rPr>
+              <a:t>Incorporar la matrícula para ver la deserción  ·  Modelos de supervivencia para datos censurados</a:t>
+            </a:r>
+          </a:p>
+          <a:p>
+            <a:pPr algn="ctr">
+              <a:lnSpc>
+                <a:spcPct val="150000"/>
+              </a:lnSpc>
+              <a:spcAft>
+                <a:spcPts val="0"/>
+              </a:spcAft>
+            </a:pPr>
+            <a:r>
+              <a:rPr sz="1200" b="0">
+                <a:solidFill>
+                  <a:srgbClr val="FFFFFF"/>
+                </a:solidFill>
+              </a:rPr>
+              <a:t>github.com/santunez75/proyecto-titulados</a:t>
+            </a:r>
+          </a:p>
+        </p:txBody>
+      </p:sp>
+    </p:spTree>
+    <p:extLst>
+      <p:ext uri="{BB962C8B-B14F-4D97-AF65-F5344CB8AC3E}">
+        <p14:creationId xmlns:p14="http://schemas.microsoft.com/office/powerpoint/2010/main" val="2207412846"/>
+      </p:ext>
+    </p:extLst>
+  </p:cSld>
+  <p:clrMapOvr>
+    <a:overrideClrMapping bg1="dk1" tx1="lt1" bg2="dk2" tx2="lt2" accent1="accent1" accent2="accent2" accent3="accent3" accent4="accent4" accent5="accent5" accent6="accent6" hlink="hlink" folHlink="folHlink"/>
+  </p:clrMapOvr>
+</p:sld>
+</file>
+
+<file path=ppt/slides/slide2.xml><?xml version="1.0" encoding="utf-8"?>
+<p:sld xmlns:a="http://schemas.openxmlformats.org/drawingml/2006/main" xmlns:r="http://schemas.openxmlformats.org/officeDocument/2006/relationships" xmlns:p="http://schemas.openxmlformats.org/presentationml/2006/main">
   <p:cSld>
     <p:spTree>
       <p:nvGrpSpPr>
@@ -5191,7 +4835,14 @@
         <p:cNvGrpSpPr/>
         <p:nvPr/>
       </p:nvGrpSpPr>
-      <p:grpSpPr/>
+      <p:grpSpPr>
+        <a:xfrm>
+          <a:off x="0" y="0"/>
+          <a:ext cx="0" cy="0"/>
+          <a:chOff x="0" y="0"/>
+          <a:chExt cx="0" cy="0"/>
+        </a:xfrm>
+      </p:grpSpPr>
       <p:grpSp>
         <p:nvGrpSpPr>
           <p:cNvPr id="7" name="Grupo 6">
@@ -5375,7 +5026,7 @@
               <p:nvPr/>
             </p:nvPicPr>
             <p:blipFill>
-              <a:blip r:embed="rId2"/>
+              <a:blip r:embed="rId3"/>
               <a:stretch>
                 <a:fillRect/>
               </a:stretch>
@@ -5473,7 +5124,7 @@
                 <a:ea typeface="Cambria" panose="02040503050406030204" pitchFamily="18" charset="0"/>
                 <a:cs typeface="Calibri Light" panose="020F0302020204030204" pitchFamily="34" charset="0"/>
               </a:rPr>
-              <a:t>CUATRO DE CADA CINCO EGRESAN FUERA DE PLAZO</a:t>
+              <a:t>EL PROBLEMA</a:t>
             </a:r>
           </a:p>
         </p:txBody>
@@ -5486,8 +5137,8 @@
         </p:nvSpPr>
         <p:spPr>
           <a:xfrm>
-            <a:off x="868680" y="1691640"/>
-            <a:ext cx="2395728" cy="640080"/>
+            <a:off x="868680" y="1828800"/>
+            <a:ext cx="5577840" cy="3108960"/>
           </a:xfrm>
           <a:prstGeom prst="rect">
             <a:avLst/>
@@ -5495,40 +5146,205 @@
           <a:noFill/>
         </p:spPr>
         <p:txBody>
-          <a:bodyPr wrap="square" lIns="0" rIns="0" tIns="0" bIns="0">
+          <a:bodyPr wrap="square" lIns="0" tIns="0" rIns="0" bIns="0">
             <a:spAutoFit/>
           </a:bodyPr>
           <a:lstStyle/>
           <a:p>
-            <a:pPr algn="ctr">
-              <a:lnSpc>
-                <a:spcPct val="125000"/>
+            <a:pPr algn="l">
+              <a:lnSpc>
+                <a:spcPct val="135000"/>
               </a:lnSpc>
               <a:spcAft>
-                <a:spcPts val="0"/>
+                <a:spcPts val="600"/>
               </a:spcAft>
             </a:pPr>
             <a:r>
-              <a:rPr sz="3600" b="1">
-                <a:solidFill>
-                  <a:srgbClr val="1E7A46"/>
+              <a:rPr sz="1500" b="0">
+                <a:solidFill>
+                  <a:srgbClr val="3B3B3B"/>
                 </a:solidFill>
               </a:rPr>
-              <a:t>19,0 %</a:t>
-            </a:r>
-          </a:p>
-        </p:txBody>
-      </p:sp>
-      <p:sp>
-        <p:nvSpPr>
-          <p:cNvPr id="16" name="TextBox 15"/>
+              <a:t>Cada carrera en Chile declara una duración teórica.</a:t>
+            </a:r>
+          </a:p>
+          <a:p>
+            <a:pPr algn="l">
+              <a:lnSpc>
+                <a:spcPct val="135000"/>
+              </a:lnSpc>
+              <a:spcAft>
+                <a:spcPts val="600"/>
+              </a:spcAft>
+            </a:pPr>
+            <a:r>
+              <a:rPr sz="1500" b="0">
+                <a:solidFill>
+                  <a:srgbClr val="3B3B3B"/>
+                </a:solidFill>
+              </a:rPr>
+              <a:t>Esa cifra define expectativas de gasto y determina la</a:t>
+            </a:r>
+          </a:p>
+          <a:p>
+            <a:pPr algn="l">
+              <a:lnSpc>
+                <a:spcPct val="135000"/>
+              </a:lnSpc>
+              <a:spcAft>
+                <a:spcPts val="600"/>
+              </a:spcAft>
+            </a:pPr>
+            <a:r>
+              <a:rPr sz="1500" b="0">
+                <a:solidFill>
+                  <a:srgbClr val="3B3B3B"/>
+                </a:solidFill>
+              </a:rPr>
+              <a:t>duración de becas y créditos estatales.</a:t>
+            </a:r>
+          </a:p>
+          <a:p>
+            <a:pPr algn="l">
+              <a:lnSpc>
+                <a:spcPct val="135000"/>
+              </a:lnSpc>
+              <a:spcAft>
+                <a:spcPts val="600"/>
+              </a:spcAft>
+            </a:pPr>
+            <a:endParaRPr sz="1500" b="0">
+              <a:solidFill>
+                <a:srgbClr val="3B3B3B"/>
+              </a:solidFill>
+            </a:endParaRPr>
+          </a:p>
+          <a:p>
+            <a:pPr algn="l">
+              <a:lnSpc>
+                <a:spcPct val="135000"/>
+              </a:lnSpc>
+              <a:spcAft>
+                <a:spcPts val="600"/>
+              </a:spcAft>
+            </a:pPr>
+            <a:r>
+              <a:rPr sz="1500" b="0">
+                <a:solidFill>
+                  <a:srgbClr val="3B3B3B"/>
+                </a:solidFill>
+              </a:rPr>
+              <a:t>Nadie publica cuánto se tarda en realidad.</a:t>
+            </a:r>
+          </a:p>
+          <a:p>
+            <a:pPr algn="l">
+              <a:lnSpc>
+                <a:spcPct val="135000"/>
+              </a:lnSpc>
+              <a:spcAft>
+                <a:spcPts val="600"/>
+              </a:spcAft>
+            </a:pPr>
+            <a:endParaRPr sz="1500" b="0">
+              <a:solidFill>
+                <a:srgbClr val="3B3B3B"/>
+              </a:solidFill>
+            </a:endParaRPr>
+          </a:p>
+          <a:p>
+            <a:pPr algn="l">
+              <a:lnSpc>
+                <a:spcPct val="135000"/>
+              </a:lnSpc>
+              <a:spcAft>
+                <a:spcPts val="600"/>
+              </a:spcAft>
+            </a:pPr>
+            <a:r>
+              <a:rPr sz="1500" b="0">
+                <a:solidFill>
+                  <a:srgbClr val="3B3B3B"/>
+                </a:solidFill>
+              </a:rPr>
+              <a:t>La diferencia —la sobreduración— no existe como</a:t>
+            </a:r>
+          </a:p>
+          <a:p>
+            <a:pPr algn="l">
+              <a:lnSpc>
+                <a:spcPct val="135000"/>
+              </a:lnSpc>
+              <a:spcAft>
+                <a:spcPts val="600"/>
+              </a:spcAft>
+            </a:pPr>
+            <a:r>
+              <a:rPr sz="1500" b="0">
+                <a:solidFill>
+                  <a:srgbClr val="3B3B3B"/>
+                </a:solidFill>
+              </a:rPr>
+              <a:t>variable en ningún registro oficial.</a:t>
+            </a:r>
+          </a:p>
+        </p:txBody>
+      </p:sp>
+      <p:sp>
+        <p:nvSpPr>
+          <p:cNvPr id="16" name="Rectangle 15"/>
+          <p:cNvSpPr/>
+          <p:nvPr/>
+        </p:nvSpPr>
+        <p:spPr>
+          <a:xfrm>
+            <a:off x="6720840" y="2057400"/>
+            <a:ext cx="4343400" cy="1600200"/>
+          </a:xfrm>
+          <a:prstGeom prst="rect">
+            <a:avLst/>
+          </a:prstGeom>
+          <a:solidFill>
+            <a:srgbClr val="20236D"/>
+          </a:solidFill>
+          <a:ln>
+            <a:noFill/>
+          </a:ln>
+          <a:effectLst/>
+        </p:spPr>
+        <p:style>
+          <a:lnRef idx="1">
+            <a:schemeClr val="accent1"/>
+          </a:lnRef>
+          <a:fillRef idx="3">
+            <a:schemeClr val="accent1"/>
+          </a:fillRef>
+          <a:effectRef idx="2">
+            <a:schemeClr val="accent1"/>
+          </a:effectRef>
+          <a:fontRef idx="minor">
+            <a:schemeClr val="lt1"/>
+          </a:fontRef>
+        </p:style>
+        <p:txBody>
+          <a:bodyPr rtlCol="0" anchor="ctr"/>
+          <a:lstStyle/>
+          <a:p>
+            <a:pPr algn="ctr"/>
+            <a:endParaRPr/>
+          </a:p>
+        </p:txBody>
+      </p:sp>
+      <p:sp>
+        <p:nvSpPr>
+          <p:cNvPr id="17" name="TextBox 16"/>
           <p:cNvSpPr txBox="1"/>
           <p:nvPr/>
         </p:nvSpPr>
         <p:spPr>
           <a:xfrm>
-            <a:off x="868680" y="2350008"/>
-            <a:ext cx="2395728" cy="502920"/>
+            <a:off x="6995160" y="2286000"/>
+            <a:ext cx="3794760" cy="1188720"/>
           </a:xfrm>
           <a:prstGeom prst="rect">
             <a:avLst/>
@@ -5536,58 +5352,76 @@
           <a:noFill/>
         </p:spPr>
         <p:txBody>
-          <a:bodyPr wrap="square" lIns="0" rIns="0" tIns="0" bIns="0">
+          <a:bodyPr wrap="square" lIns="0" tIns="0" rIns="0" bIns="0">
             <a:spAutoFit/>
           </a:bodyPr>
           <a:lstStyle/>
           <a:p>
-            <a:pPr algn="ctr">
-              <a:lnSpc>
-                <a:spcPct val="115000"/>
+            <a:pPr algn="l">
+              <a:lnSpc>
+                <a:spcPct val="130000"/>
               </a:lnSpc>
               <a:spcAft>
                 <a:spcPts val="0"/>
               </a:spcAft>
             </a:pPr>
             <a:r>
-              <a:rPr sz="1150" b="0">
-                <a:solidFill>
-                  <a:srgbClr val="3B3B3B"/>
+              <a:rPr sz="1450" b="1">
+                <a:solidFill>
+                  <a:srgbClr val="FFFFFF"/>
                 </a:solidFill>
               </a:rPr>
-              <a:t>se titula dentro</a:t>
-            </a:r>
-          </a:p>
-          <a:p>
-            <a:pPr algn="ctr">
-              <a:lnSpc>
-                <a:spcPct val="115000"/>
+              <a:t>¿Se puede reconstruir la duración real</a:t>
+            </a:r>
+          </a:p>
+          <a:p>
+            <a:pPr algn="l">
+              <a:lnSpc>
+                <a:spcPct val="130000"/>
               </a:lnSpc>
               <a:spcAft>
                 <a:spcPts val="0"/>
               </a:spcAft>
             </a:pPr>
             <a:r>
-              <a:rPr sz="1150" b="0">
-                <a:solidFill>
-                  <a:srgbClr val="3B3B3B"/>
+              <a:rPr sz="1450" b="1">
+                <a:solidFill>
+                  <a:srgbClr val="FFFFFF"/>
                 </a:solidFill>
               </a:rPr>
-              <a:t>del plazo teórico</a:t>
-            </a:r>
-          </a:p>
-        </p:txBody>
-      </p:sp>
-      <p:sp>
-        <p:nvSpPr>
-          <p:cNvPr id="17" name="TextBox 16"/>
+              <a:t>desde los registros administrativos</a:t>
+            </a:r>
+          </a:p>
+          <a:p>
+            <a:pPr algn="l">
+              <a:lnSpc>
+                <a:spcPct val="130000"/>
+              </a:lnSpc>
+              <a:spcAft>
+                <a:spcPts val="0"/>
+              </a:spcAft>
+            </a:pPr>
+            <a:r>
+              <a:rPr sz="1450" b="1">
+                <a:solidFill>
+                  <a:srgbClr val="FFFFFF"/>
+                </a:solidFill>
+              </a:rPr>
+              <a:t>y caracterizar el rezago con ella?</a:t>
+            </a:r>
+          </a:p>
+        </p:txBody>
+      </p:sp>
+      <p:sp>
+        <p:nvSpPr>
+          <p:cNvPr id="18" name="TextBox 17"/>
           <p:cNvSpPr txBox="1"/>
           <p:nvPr/>
         </p:nvSpPr>
         <p:spPr>
           <a:xfrm>
-            <a:off x="3547872" y="1691640"/>
-            <a:ext cx="2395728" cy="640080"/>
+            <a:off x="6720840" y="1783080"/>
+            <a:ext cx="4343400" cy="274320"/>
           </a:xfrm>
           <a:prstGeom prst="rect">
             <a:avLst/>
@@ -5595,12 +5429,12 @@
           <a:noFill/>
         </p:spPr>
         <p:txBody>
-          <a:bodyPr wrap="square" lIns="0" rIns="0" tIns="0" bIns="0">
+          <a:bodyPr wrap="square" lIns="0" tIns="0" rIns="0" bIns="0">
             <a:spAutoFit/>
           </a:bodyPr>
           <a:lstStyle/>
           <a:p>
-            <a:pPr algn="ctr">
+            <a:pPr algn="l">
               <a:lnSpc>
                 <a:spcPct val="125000"/>
               </a:lnSpc>
@@ -5609,26 +5443,26 @@
               </a:spcAft>
             </a:pPr>
             <a:r>
-              <a:rPr sz="3600" b="1">
+              <a:rPr sz="1100" b="1">
                 <a:solidFill>
                   <a:srgbClr val="20236D"/>
                 </a:solidFill>
               </a:rPr>
-              <a:t>2,76</a:t>
-            </a:r>
-          </a:p>
-        </p:txBody>
-      </p:sp>
-      <p:sp>
-        <p:nvSpPr>
-          <p:cNvPr id="18" name="TextBox 17"/>
+              <a:t>LA PREGUNTA TÉCNICA</a:t>
+            </a:r>
+          </a:p>
+        </p:txBody>
+      </p:sp>
+      <p:sp>
+        <p:nvSpPr>
+          <p:cNvPr id="19" name="TextBox 18"/>
           <p:cNvSpPr txBox="1"/>
           <p:nvPr/>
         </p:nvSpPr>
         <p:spPr>
           <a:xfrm>
-            <a:off x="3547872" y="2350008"/>
-            <a:ext cx="2395728" cy="502920"/>
+            <a:off x="6720840" y="3977639"/>
+            <a:ext cx="4343400" cy="914400"/>
           </a:xfrm>
           <a:prstGeom prst="rect">
             <a:avLst/>
@@ -5636,309 +5470,44 @@
           <a:noFill/>
         </p:spPr>
         <p:txBody>
-          <a:bodyPr wrap="square" lIns="0" rIns="0" tIns="0" bIns="0">
+          <a:bodyPr wrap="square" lIns="0" tIns="0" rIns="0" bIns="0">
             <a:spAutoFit/>
           </a:bodyPr>
           <a:lstStyle/>
           <a:p>
-            <a:pPr algn="ctr">
-              <a:lnSpc>
-                <a:spcPct val="115000"/>
+            <a:pPr algn="l">
+              <a:lnSpc>
+                <a:spcPct val="130000"/>
               </a:lnSpc>
               <a:spcAft>
                 <a:spcPts val="0"/>
               </a:spcAft>
             </a:pPr>
             <a:r>
-              <a:rPr sz="1150" b="0">
-                <a:solidFill>
-                  <a:srgbClr val="3B3B3B"/>
+              <a:rPr sz="1200" b="0">
+                <a:solidFill>
+                  <a:srgbClr val="808080"/>
                 </a:solidFill>
               </a:rPr>
-              <a:t>semestres de exceso</a:t>
-            </a:r>
-          </a:p>
-          <a:p>
-            <a:pPr algn="ctr">
-              <a:lnSpc>
-                <a:spcPct val="115000"/>
+              <a:t>Fuente: SIES, Titulados de Educación Superior</a:t>
+            </a:r>
+          </a:p>
+          <a:p>
+            <a:pPr algn="l">
+              <a:lnSpc>
+                <a:spcPct val="130000"/>
               </a:lnSpc>
               <a:spcAft>
                 <a:spcPts val="0"/>
               </a:spcAft>
             </a:pPr>
             <a:r>
-              <a:rPr sz="1150" b="0">
-                <a:solidFill>
-                  <a:srgbClr val="3B3B3B"/>
+              <a:rPr sz="1200" b="0">
+                <a:solidFill>
+                  <a:srgbClr val="808080"/>
                 </a:solidFill>
               </a:rPr>
-              <a:t>en promedio</a:t>
-            </a:r>
-          </a:p>
-        </p:txBody>
-      </p:sp>
-      <p:sp>
-        <p:nvSpPr>
-          <p:cNvPr id="19" name="TextBox 18"/>
-          <p:cNvSpPr txBox="1"/>
-          <p:nvPr/>
-        </p:nvSpPr>
-        <p:spPr>
-          <a:xfrm>
-            <a:off x="6227064" y="1691640"/>
-            <a:ext cx="2395728" cy="640080"/>
-          </a:xfrm>
-          <a:prstGeom prst="rect">
-            <a:avLst/>
-          </a:prstGeom>
-          <a:noFill/>
-        </p:spPr>
-        <p:txBody>
-          <a:bodyPr wrap="square" lIns="0" rIns="0" tIns="0" bIns="0">
-            <a:spAutoFit/>
-          </a:bodyPr>
-          <a:lstStyle/>
-          <a:p>
-            <a:pPr algn="ctr">
-              <a:lnSpc>
-                <a:spcPct val="125000"/>
-              </a:lnSpc>
-              <a:spcAft>
-                <a:spcPts val="0"/>
-              </a:spcAft>
-            </a:pPr>
-            <a:r>
-              <a:rPr sz="3600" b="1">
-                <a:solidFill>
-                  <a:srgbClr val="B02A1E"/>
-                </a:solidFill>
-              </a:rPr>
-              <a:t>20,4 %</a:t>
-            </a:r>
-          </a:p>
-        </p:txBody>
-      </p:sp>
-      <p:sp>
-        <p:nvSpPr>
-          <p:cNvPr id="20" name="TextBox 19"/>
-          <p:cNvSpPr txBox="1"/>
-          <p:nvPr/>
-        </p:nvSpPr>
-        <p:spPr>
-          <a:xfrm>
-            <a:off x="6227064" y="2350008"/>
-            <a:ext cx="2395728" cy="502920"/>
-          </a:xfrm>
-          <a:prstGeom prst="rect">
-            <a:avLst/>
-          </a:prstGeom>
-          <a:noFill/>
-        </p:spPr>
-        <p:txBody>
-          <a:bodyPr wrap="square" lIns="0" rIns="0" tIns="0" bIns="0">
-            <a:spAutoFit/>
-          </a:bodyPr>
-          <a:lstStyle/>
-          <a:p>
-            <a:pPr algn="ctr">
-              <a:lnSpc>
-                <a:spcPct val="115000"/>
-              </a:lnSpc>
-              <a:spcAft>
-                <a:spcPts val="0"/>
-              </a:spcAft>
-            </a:pPr>
-            <a:r>
-              <a:rPr sz="1150" b="0">
-                <a:solidFill>
-                  <a:srgbClr val="3B3B3B"/>
-                </a:solidFill>
-              </a:rPr>
-              <a:t>acumula rezago severo</a:t>
-            </a:r>
-          </a:p>
-          <a:p>
-            <a:pPr algn="ctr">
-              <a:lnSpc>
-                <a:spcPct val="115000"/>
-              </a:lnSpc>
-              <a:spcAft>
-                <a:spcPts val="0"/>
-              </a:spcAft>
-            </a:pPr>
-            <a:r>
-              <a:rPr sz="1150" b="0">
-                <a:solidFill>
-                  <a:srgbClr val="3B3B3B"/>
-                </a:solidFill>
-              </a:rPr>
-              <a:t>(más de 4 semestres)</a:t>
-            </a:r>
-          </a:p>
-        </p:txBody>
-      </p:sp>
-      <p:sp>
-        <p:nvSpPr>
-          <p:cNvPr id="21" name="TextBox 20"/>
-          <p:cNvSpPr txBox="1"/>
-          <p:nvPr/>
-        </p:nvSpPr>
-        <p:spPr>
-          <a:xfrm>
-            <a:off x="8906256" y="1691640"/>
-            <a:ext cx="2395728" cy="640080"/>
-          </a:xfrm>
-          <a:prstGeom prst="rect">
-            <a:avLst/>
-          </a:prstGeom>
-          <a:noFill/>
-        </p:spPr>
-        <p:txBody>
-          <a:bodyPr wrap="square" lIns="0" rIns="0" tIns="0" bIns="0">
-            <a:spAutoFit/>
-          </a:bodyPr>
-          <a:lstStyle/>
-          <a:p>
-            <a:pPr algn="ctr">
-              <a:lnSpc>
-                <a:spcPct val="125000"/>
-              </a:lnSpc>
-              <a:spcAft>
-                <a:spcPts val="0"/>
-              </a:spcAft>
-            </a:pPr>
-            <a:r>
-              <a:rPr sz="3600" b="1">
-                <a:solidFill>
-                  <a:srgbClr val="20236D"/>
-                </a:solidFill>
-              </a:rPr>
-              <a:t>3,55 M</a:t>
-            </a:r>
-          </a:p>
-        </p:txBody>
-      </p:sp>
-      <p:sp>
-        <p:nvSpPr>
-          <p:cNvPr id="22" name="TextBox 21"/>
-          <p:cNvSpPr txBox="1"/>
-          <p:nvPr/>
-        </p:nvSpPr>
-        <p:spPr>
-          <a:xfrm>
-            <a:off x="8906256" y="2350008"/>
-            <a:ext cx="2395728" cy="502920"/>
-          </a:xfrm>
-          <a:prstGeom prst="rect">
-            <a:avLst/>
-          </a:prstGeom>
-          <a:noFill/>
-        </p:spPr>
-        <p:txBody>
-          <a:bodyPr wrap="square" lIns="0" rIns="0" tIns="0" bIns="0">
-            <a:spAutoFit/>
-          </a:bodyPr>
-          <a:lstStyle/>
-          <a:p>
-            <a:pPr algn="ctr">
-              <a:lnSpc>
-                <a:spcPct val="115000"/>
-              </a:lnSpc>
-              <a:spcAft>
-                <a:spcPts val="0"/>
-              </a:spcAft>
-            </a:pPr>
-            <a:r>
-              <a:rPr sz="1150" b="0">
-                <a:solidFill>
-                  <a:srgbClr val="3B3B3B"/>
-                </a:solidFill>
-              </a:rPr>
-              <a:t>semestres-estudiante</a:t>
-            </a:r>
-          </a:p>
-          <a:p>
-            <a:pPr algn="ctr">
-              <a:lnSpc>
-                <a:spcPct val="115000"/>
-              </a:lnSpc>
-              <a:spcAft>
-                <a:spcPts val="0"/>
-              </a:spcAft>
-            </a:pPr>
-            <a:r>
-              <a:rPr sz="1150" b="0">
-                <a:solidFill>
-                  <a:srgbClr val="3B3B3B"/>
-                </a:solidFill>
-              </a:rPr>
-              <a:t>en exceso, 2020-2025</a:t>
-            </a:r>
-          </a:p>
-        </p:txBody>
-      </p:sp>
-      <p:pic>
-        <p:nvPicPr>
-          <p:cNvPr id="23" name="Picture 22" descr="f4_fig1_magnitud.png"/>
-          <p:cNvPicPr>
-            <a:picLocks noChangeAspect="1"/>
-          </p:cNvPicPr>
-          <p:nvPr/>
-        </p:nvPicPr>
-        <p:blipFill>
-          <a:blip r:embed="rId3"/>
-          <a:stretch>
-            <a:fillRect/>
-          </a:stretch>
-        </p:blipFill>
-        <p:spPr>
-          <a:xfrm>
-            <a:off x="3710860" y="3154680"/>
-            <a:ext cx="4770280" cy="2697480"/>
-          </a:xfrm>
-          <a:prstGeom prst="rect">
-            <a:avLst/>
-          </a:prstGeom>
-        </p:spPr>
-      </p:pic>
-      <p:sp>
-        <p:nvSpPr>
-          <p:cNvPr id="24" name="TextBox 23"/>
-          <p:cNvSpPr txBox="1"/>
-          <p:nvPr/>
-        </p:nvSpPr>
-        <p:spPr>
-          <a:xfrm>
-            <a:off x="868680" y="6053328"/>
-            <a:ext cx="10424160" cy="274320"/>
-          </a:xfrm>
-          <a:prstGeom prst="rect">
-            <a:avLst/>
-          </a:prstGeom>
-          <a:noFill/>
-        </p:spPr>
-        <p:txBody>
-          <a:bodyPr wrap="square" lIns="0" rIns="0" tIns="0" bIns="0">
-            <a:spAutoFit/>
-          </a:bodyPr>
-          <a:lstStyle/>
-          <a:p>
-            <a:pPr algn="l">
-              <a:lnSpc>
-                <a:spcPct val="125000"/>
-              </a:lnSpc>
-              <a:spcAft>
-                <a:spcPts val="0"/>
-              </a:spcAft>
-            </a:pPr>
-            <a:r>
-              <a:rPr sz="950" b="0">
-                <a:solidFill>
-                  <a:srgbClr val="808080"/>
-                </a:solidFill>
-              </a:rPr>
-              <a:t>Fuente: elaboración propia a partir de SIES, Titulados de Educación Superior 2020-2025 (n = 1.246.760).</a:t>
+              <a:t>6 archivos · 955 MB · 1.710.167 filas · 40 columnas</a:t>
             </a:r>
           </a:p>
         </p:txBody>
@@ -5951,8 +5520,8 @@
 </p:sld>
 </file>
 
-<file path=ppt/slides/slide11.xml><?xml version="1.0" encoding="utf-8"?>
-<p:sld xmlns:a="http://schemas.openxmlformats.org/drawingml/2006/main" xmlns:p="http://schemas.openxmlformats.org/presentationml/2006/main" xmlns:r="http://schemas.openxmlformats.org/officeDocument/2006/relationships">
+<file path=ppt/slides/slide3.xml><?xml version="1.0" encoding="utf-8"?>
+<p:sld xmlns:a="http://schemas.openxmlformats.org/drawingml/2006/main" xmlns:r="http://schemas.openxmlformats.org/officeDocument/2006/relationships" xmlns:p="http://schemas.openxmlformats.org/presentationml/2006/main">
   <p:cSld>
     <p:spTree>
       <p:nvGrpSpPr>
@@ -5960,7 +5529,14 @@
         <p:cNvGrpSpPr/>
         <p:nvPr/>
       </p:nvGrpSpPr>
-      <p:grpSpPr/>
+      <p:grpSpPr>
+        <a:xfrm>
+          <a:off x="0" y="0"/>
+          <a:ext cx="0" cy="0"/>
+          <a:chOff x="0" y="0"/>
+          <a:chExt cx="0" cy="0"/>
+        </a:xfrm>
+      </p:grpSpPr>
       <p:grpSp>
         <p:nvGrpSpPr>
           <p:cNvPr id="7" name="Grupo 6">
@@ -6144,7 +5720,7 @@
               <p:nvPr/>
             </p:nvPicPr>
             <p:blipFill>
-              <a:blip r:embed="rId2"/>
+              <a:blip r:embed="rId3"/>
               <a:stretch>
                 <a:fillRect/>
               </a:stretch>
@@ -6242,45 +5818,21 @@
                 <a:ea typeface="Cambria" panose="02040503050406030204" pitchFamily="18" charset="0"/>
                 <a:cs typeface="Calibri Light" panose="020F0302020204030204" pitchFamily="34" charset="0"/>
               </a:rPr>
-              <a:t>DERECHO TRIPLICA A EDUCACIÓN</a:t>
-            </a:r>
-          </a:p>
-        </p:txBody>
-      </p:sp>
-      <p:pic>
-        <p:nvPicPr>
-          <p:cNvPr id="15" name="Picture 14" descr="f4_fig2_factores.png"/>
-          <p:cNvPicPr>
-            <a:picLocks noChangeAspect="1"/>
-          </p:cNvPicPr>
-          <p:nvPr/>
-        </p:nvPicPr>
-        <p:blipFill>
-          <a:blip r:embed="rId3"/>
-          <a:stretch>
-            <a:fillRect/>
-          </a:stretch>
-        </p:blipFill>
-        <p:spPr>
-          <a:xfrm>
-            <a:off x="3648968" y="1645920"/>
-            <a:ext cx="4894063" cy="2880360"/>
-          </a:xfrm>
-          <a:prstGeom prst="rect">
-            <a:avLst/>
-          </a:prstGeom>
-        </p:spPr>
-      </p:pic>
-      <p:sp>
-        <p:nvSpPr>
-          <p:cNvPr id="16" name="TextBox 15"/>
+              <a:t>CÓMO SE CONSTRUYÓ</a:t>
+            </a:r>
+          </a:p>
+        </p:txBody>
+      </p:sp>
+      <p:sp>
+        <p:nvSpPr>
+          <p:cNvPr id="15" name="TextBox 14"/>
           <p:cNvSpPr txBox="1"/>
           <p:nvPr/>
         </p:nvSpPr>
         <p:spPr>
           <a:xfrm>
-            <a:off x="868680" y="4892040"/>
-            <a:ext cx="3319272" cy="822960"/>
+            <a:off x="868680" y="1783080"/>
+            <a:ext cx="2395728" cy="411480"/>
           </a:xfrm>
           <a:prstGeom prst="rect">
             <a:avLst/>
@@ -6288,45 +5840,72 @@
           <a:noFill/>
         </p:spPr>
         <p:txBody>
-          <a:bodyPr wrap="square" lIns="0" rIns="0" tIns="0" bIns="0">
+          <a:bodyPr wrap="square" lIns="0" tIns="0" rIns="0" bIns="0">
             <a:spAutoFit/>
           </a:bodyPr>
           <a:lstStyle/>
           <a:p>
             <a:pPr algn="l">
               <a:lnSpc>
-                <a:spcPct val="130000"/>
+                <a:spcPct val="125000"/>
               </a:lnSpc>
               <a:spcAft>
                 <a:spcPts val="0"/>
               </a:spcAft>
             </a:pPr>
             <a:r>
-              <a:rPr sz="1250" b="0">
-                <a:solidFill>
-                  <a:srgbClr val="3B3B3B"/>
+              <a:rPr sz="2200" b="1">
+                <a:solidFill>
+                  <a:srgbClr val="20236D"/>
                 </a:solidFill>
               </a:rPr>
-              <a:t>Casi cuatro semestres separan los</a:t>
-            </a:r>
-          </a:p>
-          <a:p>
-            <a:pPr algn="l">
-              <a:lnSpc>
-                <a:spcPct val="130000"/>
-              </a:lnSpc>
-              <a:spcAft>
-                <a:spcPts val="0"/>
-              </a:spcAft>
-            </a:pPr>
-            <a:r>
-              <a:rPr sz="1250" b="0">
-                <a:solidFill>
-                  <a:srgbClr val="3B3B3B"/>
-                </a:solidFill>
-              </a:rPr>
-              <a:t>extremos del ranking de áreas</a:t>
-            </a:r>
+              <a:t>F1</a:t>
+            </a:r>
+          </a:p>
+        </p:txBody>
+      </p:sp>
+      <p:sp>
+        <p:nvSpPr>
+          <p:cNvPr id="16" name="Rectangle 15"/>
+          <p:cNvSpPr/>
+          <p:nvPr/>
+        </p:nvSpPr>
+        <p:spPr>
+          <a:xfrm>
+            <a:off x="868680" y="2267712"/>
+            <a:ext cx="2395728" cy="25400"/>
+          </a:xfrm>
+          <a:prstGeom prst="rect">
+            <a:avLst/>
+          </a:prstGeom>
+          <a:solidFill>
+            <a:srgbClr val="20236D"/>
+          </a:solidFill>
+          <a:ln>
+            <a:noFill/>
+          </a:ln>
+          <a:effectLst/>
+        </p:spPr>
+        <p:style>
+          <a:lnRef idx="1">
+            <a:schemeClr val="accent1"/>
+          </a:lnRef>
+          <a:fillRef idx="3">
+            <a:schemeClr val="accent1"/>
+          </a:fillRef>
+          <a:effectRef idx="2">
+            <a:schemeClr val="accent1"/>
+          </a:effectRef>
+          <a:fontRef idx="minor">
+            <a:schemeClr val="lt1"/>
+          </a:fontRef>
+        </p:style>
+        <p:txBody>
+          <a:bodyPr rtlCol="0" anchor="ctr"/>
+          <a:lstStyle/>
+          <a:p>
+            <a:pPr algn="ctr"/>
+            <a:endParaRPr/>
           </a:p>
         </p:txBody>
       </p:sp>
@@ -6338,8 +5917,8 @@
         </p:nvSpPr>
         <p:spPr>
           <a:xfrm>
-            <a:off x="4425696" y="4892040"/>
-            <a:ext cx="3319272" cy="822960"/>
+            <a:off x="868680" y="2395728"/>
+            <a:ext cx="2395728" cy="320040"/>
           </a:xfrm>
           <a:prstGeom prst="rect">
             <a:avLst/>
@@ -6347,44 +5926,26 @@
           <a:noFill/>
         </p:spPr>
         <p:txBody>
-          <a:bodyPr wrap="square" lIns="0" rIns="0" tIns="0" bIns="0">
+          <a:bodyPr wrap="square" lIns="0" tIns="0" rIns="0" bIns="0">
             <a:spAutoFit/>
           </a:bodyPr>
           <a:lstStyle/>
           <a:p>
             <a:pPr algn="l">
               <a:lnSpc>
-                <a:spcPct val="130000"/>
+                <a:spcPct val="125000"/>
               </a:lnSpc>
               <a:spcAft>
                 <a:spcPts val="0"/>
               </a:spcAft>
             </a:pPr>
             <a:r>
-              <a:rPr sz="1250" b="0">
+              <a:rPr sz="1350" b="1">
                 <a:solidFill>
                   <a:srgbClr val="3B3B3B"/>
                 </a:solidFill>
               </a:rPr>
-              <a:t>Las universidades superan a los IP</a:t>
-            </a:r>
-          </a:p>
-          <a:p>
-            <a:pPr algn="l">
-              <a:lnSpc>
-                <a:spcPct val="130000"/>
-              </a:lnSpc>
-              <a:spcAft>
-                <a:spcPts val="0"/>
-              </a:spcAft>
-            </a:pPr>
-            <a:r>
-              <a:rPr sz="1250" b="0">
-                <a:solidFill>
-                  <a:srgbClr val="3B3B3B"/>
-                </a:solidFill>
-              </a:rPr>
-              <a:t>en más de un semestre completo</a:t>
+              <a:t>Definición y entorno</a:t>
             </a:r>
           </a:p>
         </p:txBody>
@@ -6397,8 +5958,8 @@
         </p:nvSpPr>
         <p:spPr>
           <a:xfrm>
-            <a:off x="7982712" y="4892040"/>
-            <a:ext cx="3319272" cy="822960"/>
+            <a:off x="868680" y="2788920"/>
+            <a:ext cx="2395728" cy="1005840"/>
           </a:xfrm>
           <a:prstGeom prst="rect">
             <a:avLst/>
@@ -6406,44 +5967,44 @@
           <a:noFill/>
         </p:spPr>
         <p:txBody>
-          <a:bodyPr wrap="square" lIns="0" rIns="0" tIns="0" bIns="0">
+          <a:bodyPr wrap="square" lIns="0" tIns="0" rIns="0" bIns="0">
             <a:spAutoFit/>
           </a:bodyPr>
           <a:lstStyle/>
           <a:p>
             <a:pPr algn="l">
               <a:lnSpc>
-                <a:spcPct val="130000"/>
+                <a:spcPct val="125000"/>
               </a:lnSpc>
               <a:spcAft>
                 <a:spcPts val="0"/>
               </a:spcAft>
             </a:pPr>
             <a:r>
-              <a:rPr sz="1250" b="0">
+              <a:rPr sz="1150" b="0">
                 <a:solidFill>
                   <a:srgbClr val="3B3B3B"/>
                 </a:solidFill>
               </a:rPr>
-              <a:t>Las mujeres se titulan 0,93 semestres</a:t>
+              <a:t>Pregunta técnica, entorno virtual,</a:t>
             </a:r>
           </a:p>
           <a:p>
             <a:pPr algn="l">
               <a:lnSpc>
-                <a:spcPct val="130000"/>
+                <a:spcPct val="125000"/>
               </a:lnSpc>
               <a:spcAft>
                 <a:spcPts val="0"/>
               </a:spcAft>
             </a:pPr>
             <a:r>
-              <a:rPr sz="1250" b="0">
+              <a:rPr sz="1150" b="0">
                 <a:solidFill>
                   <a:srgbClr val="3B3B3B"/>
                 </a:solidFill>
               </a:rPr>
-              <a:t>antes, en las diez áreas sin excepción</a:t>
+              <a:t>dependencias fijadas, código modular</a:t>
             </a:r>
           </a:p>
         </p:txBody>
@@ -6456,8 +6017,8 @@
         </p:nvSpPr>
         <p:spPr>
           <a:xfrm>
-            <a:off x="868680" y="6053328"/>
-            <a:ext cx="10424160" cy="274320"/>
+            <a:off x="3547872" y="1783080"/>
+            <a:ext cx="2395728" cy="411480"/>
           </a:xfrm>
           <a:prstGeom prst="rect">
             <a:avLst/>
@@ -6465,7 +6026,7 @@
           <a:noFill/>
         </p:spPr>
         <p:txBody>
-          <a:bodyPr wrap="square" lIns="0" rIns="0" tIns="0" bIns="0">
+          <a:bodyPr wrap="square" lIns="0" tIns="0" rIns="0" bIns="0">
             <a:spAutoFit/>
           </a:bodyPr>
           <a:lstStyle/>
@@ -6479,12 +6040,678 @@
               </a:spcAft>
             </a:pPr>
             <a:r>
-              <a:rPr sz="950" b="0">
-                <a:solidFill>
-                  <a:srgbClr val="808080"/>
+              <a:rPr sz="2200" b="1">
+                <a:solidFill>
+                  <a:srgbClr val="20236D"/>
                 </a:solidFill>
               </a:rPr>
-              <a:t>Fuente: elaboración propia a partir de SIES, Titulados de Educación Superior 2020-2025.</a:t>
+              <a:t>F2</a:t>
+            </a:r>
+          </a:p>
+        </p:txBody>
+      </p:sp>
+      <p:sp>
+        <p:nvSpPr>
+          <p:cNvPr id="20" name="Rectangle 19"/>
+          <p:cNvSpPr/>
+          <p:nvPr/>
+        </p:nvSpPr>
+        <p:spPr>
+          <a:xfrm>
+            <a:off x="3547872" y="2267712"/>
+            <a:ext cx="2395728" cy="25400"/>
+          </a:xfrm>
+          <a:prstGeom prst="rect">
+            <a:avLst/>
+          </a:prstGeom>
+          <a:solidFill>
+            <a:srgbClr val="20236D"/>
+          </a:solidFill>
+          <a:ln>
+            <a:noFill/>
+          </a:ln>
+          <a:effectLst/>
+        </p:spPr>
+        <p:style>
+          <a:lnRef idx="1">
+            <a:schemeClr val="accent1"/>
+          </a:lnRef>
+          <a:fillRef idx="3">
+            <a:schemeClr val="accent1"/>
+          </a:fillRef>
+          <a:effectRef idx="2">
+            <a:schemeClr val="accent1"/>
+          </a:effectRef>
+          <a:fontRef idx="minor">
+            <a:schemeClr val="lt1"/>
+          </a:fontRef>
+        </p:style>
+        <p:txBody>
+          <a:bodyPr rtlCol="0" anchor="ctr"/>
+          <a:lstStyle/>
+          <a:p>
+            <a:pPr algn="ctr"/>
+            <a:endParaRPr/>
+          </a:p>
+        </p:txBody>
+      </p:sp>
+      <p:sp>
+        <p:nvSpPr>
+          <p:cNvPr id="21" name="TextBox 20"/>
+          <p:cNvSpPr txBox="1"/>
+          <p:nvPr/>
+        </p:nvSpPr>
+        <p:spPr>
+          <a:xfrm>
+            <a:off x="3547872" y="2395728"/>
+            <a:ext cx="2395728" cy="320040"/>
+          </a:xfrm>
+          <a:prstGeom prst="rect">
+            <a:avLst/>
+          </a:prstGeom>
+          <a:noFill/>
+        </p:spPr>
+        <p:txBody>
+          <a:bodyPr wrap="square" lIns="0" tIns="0" rIns="0" bIns="0">
+            <a:spAutoFit/>
+          </a:bodyPr>
+          <a:lstStyle/>
+          <a:p>
+            <a:pPr algn="l">
+              <a:lnSpc>
+                <a:spcPct val="125000"/>
+              </a:lnSpc>
+              <a:spcAft>
+                <a:spcPts val="0"/>
+              </a:spcAft>
+            </a:pPr>
+            <a:r>
+              <a:rPr sz="1350" b="1">
+                <a:solidFill>
+                  <a:srgbClr val="3B3B3B"/>
+                </a:solidFill>
+              </a:rPr>
+              <a:t>Pipeline de datos</a:t>
+            </a:r>
+          </a:p>
+        </p:txBody>
+      </p:sp>
+      <p:sp>
+        <p:nvSpPr>
+          <p:cNvPr id="22" name="TextBox 21"/>
+          <p:cNvSpPr txBox="1"/>
+          <p:nvPr/>
+        </p:nvSpPr>
+        <p:spPr>
+          <a:xfrm>
+            <a:off x="3547872" y="2788920"/>
+            <a:ext cx="2395728" cy="1005840"/>
+          </a:xfrm>
+          <a:prstGeom prst="rect">
+            <a:avLst/>
+          </a:prstGeom>
+          <a:noFill/>
+        </p:spPr>
+        <p:txBody>
+          <a:bodyPr wrap="square" lIns="0" tIns="0" rIns="0" bIns="0">
+            <a:spAutoFit/>
+          </a:bodyPr>
+          <a:lstStyle/>
+          <a:p>
+            <a:pPr algn="l">
+              <a:lnSpc>
+                <a:spcPct val="125000"/>
+              </a:lnSpc>
+              <a:spcAft>
+                <a:spcPts val="0"/>
+              </a:spcAft>
+            </a:pPr>
+            <a:r>
+              <a:rPr sz="1150" b="0">
+                <a:solidFill>
+                  <a:srgbClr val="3B3B3B"/>
+                </a:solidFill>
+              </a:rPr>
+              <a:t>Ingesta, centinelas, duplicados,</a:t>
+            </a:r>
+          </a:p>
+          <a:p>
+            <a:pPr algn="l">
+              <a:lnSpc>
+                <a:spcPct val="125000"/>
+              </a:lnSpc>
+              <a:spcAft>
+                <a:spcPts val="0"/>
+              </a:spcAft>
+            </a:pPr>
+            <a:r>
+              <a:rPr sz="1150" b="0">
+                <a:solidFill>
+                  <a:srgbClr val="3B3B3B"/>
+                </a:solidFill>
+              </a:rPr>
+              <a:t>reconstrucción de la duración real</a:t>
+            </a:r>
+          </a:p>
+        </p:txBody>
+      </p:sp>
+      <p:sp>
+        <p:nvSpPr>
+          <p:cNvPr id="23" name="TextBox 22"/>
+          <p:cNvSpPr txBox="1"/>
+          <p:nvPr/>
+        </p:nvSpPr>
+        <p:spPr>
+          <a:xfrm>
+            <a:off x="6227064" y="1783080"/>
+            <a:ext cx="2395728" cy="411480"/>
+          </a:xfrm>
+          <a:prstGeom prst="rect">
+            <a:avLst/>
+          </a:prstGeom>
+          <a:noFill/>
+        </p:spPr>
+        <p:txBody>
+          <a:bodyPr wrap="square" lIns="0" tIns="0" rIns="0" bIns="0">
+            <a:spAutoFit/>
+          </a:bodyPr>
+          <a:lstStyle/>
+          <a:p>
+            <a:pPr algn="l">
+              <a:lnSpc>
+                <a:spcPct val="125000"/>
+              </a:lnSpc>
+              <a:spcAft>
+                <a:spcPts val="0"/>
+              </a:spcAft>
+            </a:pPr>
+            <a:r>
+              <a:rPr sz="2200" b="1">
+                <a:solidFill>
+                  <a:srgbClr val="20236D"/>
+                </a:solidFill>
+              </a:rPr>
+              <a:t>F3</a:t>
+            </a:r>
+          </a:p>
+        </p:txBody>
+      </p:sp>
+      <p:sp>
+        <p:nvSpPr>
+          <p:cNvPr id="24" name="Rectangle 23"/>
+          <p:cNvSpPr/>
+          <p:nvPr/>
+        </p:nvSpPr>
+        <p:spPr>
+          <a:xfrm>
+            <a:off x="6227064" y="2267712"/>
+            <a:ext cx="2395728" cy="25400"/>
+          </a:xfrm>
+          <a:prstGeom prst="rect">
+            <a:avLst/>
+          </a:prstGeom>
+          <a:solidFill>
+            <a:srgbClr val="20236D"/>
+          </a:solidFill>
+          <a:ln>
+            <a:noFill/>
+          </a:ln>
+          <a:effectLst/>
+        </p:spPr>
+        <p:style>
+          <a:lnRef idx="1">
+            <a:schemeClr val="accent1"/>
+          </a:lnRef>
+          <a:fillRef idx="3">
+            <a:schemeClr val="accent1"/>
+          </a:fillRef>
+          <a:effectRef idx="2">
+            <a:schemeClr val="accent1"/>
+          </a:effectRef>
+          <a:fontRef idx="minor">
+            <a:schemeClr val="lt1"/>
+          </a:fontRef>
+        </p:style>
+        <p:txBody>
+          <a:bodyPr rtlCol="0" anchor="ctr"/>
+          <a:lstStyle/>
+          <a:p>
+            <a:pPr algn="ctr"/>
+            <a:endParaRPr/>
+          </a:p>
+        </p:txBody>
+      </p:sp>
+      <p:sp>
+        <p:nvSpPr>
+          <p:cNvPr id="25" name="TextBox 24"/>
+          <p:cNvSpPr txBox="1"/>
+          <p:nvPr/>
+        </p:nvSpPr>
+        <p:spPr>
+          <a:xfrm>
+            <a:off x="6227064" y="2395728"/>
+            <a:ext cx="2395728" cy="320040"/>
+          </a:xfrm>
+          <a:prstGeom prst="rect">
+            <a:avLst/>
+          </a:prstGeom>
+          <a:noFill/>
+        </p:spPr>
+        <p:txBody>
+          <a:bodyPr wrap="square" lIns="0" tIns="0" rIns="0" bIns="0">
+            <a:spAutoFit/>
+          </a:bodyPr>
+          <a:lstStyle/>
+          <a:p>
+            <a:pPr algn="l">
+              <a:lnSpc>
+                <a:spcPct val="125000"/>
+              </a:lnSpc>
+              <a:spcAft>
+                <a:spcPts val="0"/>
+              </a:spcAft>
+            </a:pPr>
+            <a:r>
+              <a:rPr sz="1350" b="1">
+                <a:solidFill>
+                  <a:srgbClr val="3B3B3B"/>
+                </a:solidFill>
+              </a:rPr>
+              <a:t>Núcleo algorítmico</a:t>
+            </a:r>
+          </a:p>
+        </p:txBody>
+      </p:sp>
+      <p:sp>
+        <p:nvSpPr>
+          <p:cNvPr id="26" name="TextBox 25"/>
+          <p:cNvSpPr txBox="1"/>
+          <p:nvPr/>
+        </p:nvSpPr>
+        <p:spPr>
+          <a:xfrm>
+            <a:off x="6227064" y="2788920"/>
+            <a:ext cx="2395728" cy="1005840"/>
+          </a:xfrm>
+          <a:prstGeom prst="rect">
+            <a:avLst/>
+          </a:prstGeom>
+          <a:noFill/>
+        </p:spPr>
+        <p:txBody>
+          <a:bodyPr wrap="square" lIns="0" tIns="0" rIns="0" bIns="0">
+            <a:spAutoFit/>
+          </a:bodyPr>
+          <a:lstStyle/>
+          <a:p>
+            <a:pPr algn="l">
+              <a:lnSpc>
+                <a:spcPct val="125000"/>
+              </a:lnSpc>
+              <a:spcAft>
+                <a:spcPts val="0"/>
+              </a:spcAft>
+            </a:pPr>
+            <a:r>
+              <a:rPr sz="1150" b="0">
+                <a:solidFill>
+                  <a:srgbClr val="3B3B3B"/>
+                </a:solidFill>
+              </a:rPr>
+              <a:t>Algoritmos propios, complejidad</a:t>
+            </a:r>
+          </a:p>
+          <a:p>
+            <a:pPr algn="l">
+              <a:lnSpc>
+                <a:spcPct val="125000"/>
+              </a:lnSpc>
+              <a:spcAft>
+                <a:spcPts val="0"/>
+              </a:spcAft>
+            </a:pPr>
+            <a:r>
+              <a:rPr sz="1150" b="0">
+                <a:solidFill>
+                  <a:srgbClr val="3B3B3B"/>
+                </a:solidFill>
+              </a:rPr>
+              <a:t>medida, POO y modelos por gradiente</a:t>
+            </a:r>
+          </a:p>
+        </p:txBody>
+      </p:sp>
+      <p:sp>
+        <p:nvSpPr>
+          <p:cNvPr id="27" name="TextBox 26"/>
+          <p:cNvSpPr txBox="1"/>
+          <p:nvPr/>
+        </p:nvSpPr>
+        <p:spPr>
+          <a:xfrm>
+            <a:off x="8906256" y="1783080"/>
+            <a:ext cx="2395728" cy="411480"/>
+          </a:xfrm>
+          <a:prstGeom prst="rect">
+            <a:avLst/>
+          </a:prstGeom>
+          <a:noFill/>
+        </p:spPr>
+        <p:txBody>
+          <a:bodyPr wrap="square" lIns="0" tIns="0" rIns="0" bIns="0">
+            <a:spAutoFit/>
+          </a:bodyPr>
+          <a:lstStyle/>
+          <a:p>
+            <a:pPr algn="l">
+              <a:lnSpc>
+                <a:spcPct val="125000"/>
+              </a:lnSpc>
+              <a:spcAft>
+                <a:spcPts val="0"/>
+              </a:spcAft>
+            </a:pPr>
+            <a:r>
+              <a:rPr sz="2200" b="1">
+                <a:solidFill>
+                  <a:srgbClr val="20236D"/>
+                </a:solidFill>
+              </a:rPr>
+              <a:t>F4</a:t>
+            </a:r>
+          </a:p>
+        </p:txBody>
+      </p:sp>
+      <p:sp>
+        <p:nvSpPr>
+          <p:cNvPr id="28" name="Rectangle 27"/>
+          <p:cNvSpPr/>
+          <p:nvPr/>
+        </p:nvSpPr>
+        <p:spPr>
+          <a:xfrm>
+            <a:off x="8906256" y="2267712"/>
+            <a:ext cx="2395728" cy="25400"/>
+          </a:xfrm>
+          <a:prstGeom prst="rect">
+            <a:avLst/>
+          </a:prstGeom>
+          <a:solidFill>
+            <a:srgbClr val="20236D"/>
+          </a:solidFill>
+          <a:ln>
+            <a:noFill/>
+          </a:ln>
+          <a:effectLst/>
+        </p:spPr>
+        <p:style>
+          <a:lnRef idx="1">
+            <a:schemeClr val="accent1"/>
+          </a:lnRef>
+          <a:fillRef idx="3">
+            <a:schemeClr val="accent1"/>
+          </a:fillRef>
+          <a:effectRef idx="2">
+            <a:schemeClr val="accent1"/>
+          </a:effectRef>
+          <a:fontRef idx="minor">
+            <a:schemeClr val="lt1"/>
+          </a:fontRef>
+        </p:style>
+        <p:txBody>
+          <a:bodyPr rtlCol="0" anchor="ctr"/>
+          <a:lstStyle/>
+          <a:p>
+            <a:pPr algn="ctr"/>
+            <a:endParaRPr/>
+          </a:p>
+        </p:txBody>
+      </p:sp>
+      <p:sp>
+        <p:nvSpPr>
+          <p:cNvPr id="29" name="TextBox 28"/>
+          <p:cNvSpPr txBox="1"/>
+          <p:nvPr/>
+        </p:nvSpPr>
+        <p:spPr>
+          <a:xfrm>
+            <a:off x="8906256" y="2395728"/>
+            <a:ext cx="2395728" cy="320040"/>
+          </a:xfrm>
+          <a:prstGeom prst="rect">
+            <a:avLst/>
+          </a:prstGeom>
+          <a:noFill/>
+        </p:spPr>
+        <p:txBody>
+          <a:bodyPr wrap="square" lIns="0" tIns="0" rIns="0" bIns="0">
+            <a:spAutoFit/>
+          </a:bodyPr>
+          <a:lstStyle/>
+          <a:p>
+            <a:pPr algn="l">
+              <a:lnSpc>
+                <a:spcPct val="125000"/>
+              </a:lnSpc>
+              <a:spcAft>
+                <a:spcPts val="0"/>
+              </a:spcAft>
+            </a:pPr>
+            <a:r>
+              <a:rPr sz="1350" b="1">
+                <a:solidFill>
+                  <a:srgbClr val="3B3B3B"/>
+                </a:solidFill>
+              </a:rPr>
+              <a:t>Análisis y difusión</a:t>
+            </a:r>
+          </a:p>
+        </p:txBody>
+      </p:sp>
+      <p:sp>
+        <p:nvSpPr>
+          <p:cNvPr id="30" name="TextBox 29"/>
+          <p:cNvSpPr txBox="1"/>
+          <p:nvPr/>
+        </p:nvSpPr>
+        <p:spPr>
+          <a:xfrm>
+            <a:off x="8906256" y="2788920"/>
+            <a:ext cx="2395728" cy="1005840"/>
+          </a:xfrm>
+          <a:prstGeom prst="rect">
+            <a:avLst/>
+          </a:prstGeom>
+          <a:noFill/>
+        </p:spPr>
+        <p:txBody>
+          <a:bodyPr wrap="square" lIns="0" tIns="0" rIns="0" bIns="0">
+            <a:spAutoFit/>
+          </a:bodyPr>
+          <a:lstStyle/>
+          <a:p>
+            <a:pPr algn="l">
+              <a:lnSpc>
+                <a:spcPct val="125000"/>
+              </a:lnSpc>
+              <a:spcAft>
+                <a:spcPts val="0"/>
+              </a:spcAft>
+            </a:pPr>
+            <a:r>
+              <a:rPr sz="1150" b="0">
+                <a:solidFill>
+                  <a:srgbClr val="3B3B3B"/>
+                </a:solidFill>
+              </a:rPr>
+              <a:t>Resultados, visualizaciones,</a:t>
+            </a:r>
+          </a:p>
+          <a:p>
+            <a:pPr algn="l">
+              <a:lnSpc>
+                <a:spcPct val="125000"/>
+              </a:lnSpc>
+              <a:spcAft>
+                <a:spcPts val="0"/>
+              </a:spcAft>
+            </a:pPr>
+            <a:r>
+              <a:rPr sz="1150" b="0">
+                <a:solidFill>
+                  <a:srgbClr val="3B3B3B"/>
+                </a:solidFill>
+              </a:rPr>
+              <a:t>discusión y comunicación</a:t>
+            </a:r>
+          </a:p>
+        </p:txBody>
+      </p:sp>
+      <p:sp>
+        <p:nvSpPr>
+          <p:cNvPr id="31" name="TextBox 30"/>
+          <p:cNvSpPr txBox="1"/>
+          <p:nvPr/>
+        </p:nvSpPr>
+        <p:spPr>
+          <a:xfrm>
+            <a:off x="868680" y="4069080"/>
+            <a:ext cx="10424160" cy="320040"/>
+          </a:xfrm>
+          <a:prstGeom prst="rect">
+            <a:avLst/>
+          </a:prstGeom>
+          <a:noFill/>
+        </p:spPr>
+        <p:txBody>
+          <a:bodyPr wrap="square" lIns="0" tIns="0" rIns="0" bIns="0">
+            <a:spAutoFit/>
+          </a:bodyPr>
+          <a:lstStyle/>
+          <a:p>
+            <a:pPr algn="l">
+              <a:lnSpc>
+                <a:spcPct val="125000"/>
+              </a:lnSpc>
+              <a:spcAft>
+                <a:spcPts val="0"/>
+              </a:spcAft>
+            </a:pPr>
+            <a:r>
+              <a:rPr sz="1400" b="1">
+                <a:solidFill>
+                  <a:srgbClr val="20236D"/>
+                </a:solidFill>
+              </a:rPr>
+              <a:t>La transformación central: la duración real no existe en la fuente, se deriva.</a:t>
+            </a:r>
+          </a:p>
+        </p:txBody>
+      </p:sp>
+      <p:sp>
+        <p:nvSpPr>
+          <p:cNvPr id="32" name="Rectangle 31"/>
+          <p:cNvSpPr/>
+          <p:nvPr/>
+        </p:nvSpPr>
+        <p:spPr>
+          <a:xfrm>
+            <a:off x="868680" y="4462272"/>
+            <a:ext cx="10424160" cy="1051560"/>
+          </a:xfrm>
+          <a:prstGeom prst="rect">
+            <a:avLst/>
+          </a:prstGeom>
+          <a:solidFill>
+            <a:srgbClr val="F2F3F7"/>
+          </a:solidFill>
+          <a:ln>
+            <a:solidFill>
+              <a:srgbClr val="D0D2E0"/>
+            </a:solidFill>
+          </a:ln>
+          <a:effectLst/>
+        </p:spPr>
+        <p:style>
+          <a:lnRef idx="1">
+            <a:schemeClr val="accent1"/>
+          </a:lnRef>
+          <a:fillRef idx="3">
+            <a:schemeClr val="accent1"/>
+          </a:fillRef>
+          <a:effectRef idx="2">
+            <a:schemeClr val="accent1"/>
+          </a:effectRef>
+          <a:fontRef idx="minor">
+            <a:schemeClr val="lt1"/>
+          </a:fontRef>
+        </p:style>
+        <p:txBody>
+          <a:bodyPr rtlCol="0" anchor="ctr"/>
+          <a:lstStyle/>
+          <a:p>
+            <a:pPr algn="ctr"/>
+            <a:endParaRPr/>
+          </a:p>
+        </p:txBody>
+      </p:sp>
+      <p:sp>
+        <p:nvSpPr>
+          <p:cNvPr id="33" name="TextBox 32"/>
+          <p:cNvSpPr txBox="1"/>
+          <p:nvPr/>
+        </p:nvSpPr>
+        <p:spPr>
+          <a:xfrm>
+            <a:off x="1097280" y="4645152"/>
+            <a:ext cx="10058400" cy="777240"/>
+          </a:xfrm>
+          <a:prstGeom prst="rect">
+            <a:avLst/>
+          </a:prstGeom>
+          <a:noFill/>
+        </p:spPr>
+        <p:txBody>
+          <a:bodyPr wrap="square" lIns="0" tIns="0" rIns="0" bIns="0">
+            <a:spAutoFit/>
+          </a:bodyPr>
+          <a:lstStyle/>
+          <a:p>
+            <a:pPr algn="l">
+              <a:lnSpc>
+                <a:spcPct val="145000"/>
+              </a:lnSpc>
+              <a:spcAft>
+                <a:spcPts val="0"/>
+              </a:spcAft>
+            </a:pPr>
+            <a:r>
+              <a:rPr sz="1150" b="0">
+                <a:solidFill>
+                  <a:srgbClr val="3B3B3B"/>
+                </a:solidFill>
+                <a:latin typeface="Consolas"/>
+              </a:rPr>
+              <a:t>duracion_real_sem = (anio_titulo - anio_ing_carr_ori) * 2 + (semestre_titulo - sem_ing_carr_ori) + 1</a:t>
+            </a:r>
+          </a:p>
+          <a:p>
+            <a:pPr algn="l">
+              <a:lnSpc>
+                <a:spcPct val="145000"/>
+              </a:lnSpc>
+              <a:spcAft>
+                <a:spcPts val="0"/>
+              </a:spcAft>
+            </a:pPr>
+            <a:r>
+              <a:rPr sz="1150" b="0">
+                <a:solidFill>
+                  <a:srgbClr val="3B3B3B"/>
+                </a:solidFill>
+                <a:latin typeface="Consolas"/>
+              </a:rPr>
+              <a:t>sobreduracion_sem = duracion_real_sem - dur_total_carr</a:t>
             </a:r>
           </a:p>
         </p:txBody>
@@ -6497,8 +6724,8 @@
 </p:sld>
 </file>
 
-<file path=ppt/slides/slide12.xml><?xml version="1.0" encoding="utf-8"?>
-<p:sld xmlns:a="http://schemas.openxmlformats.org/drawingml/2006/main" xmlns:p="http://schemas.openxmlformats.org/presentationml/2006/main" xmlns:r="http://schemas.openxmlformats.org/officeDocument/2006/relationships">
+<file path=ppt/slides/slide4.xml><?xml version="1.0" encoding="utf-8"?>
+<p:sld xmlns:a="http://schemas.openxmlformats.org/drawingml/2006/main" xmlns:r="http://schemas.openxmlformats.org/officeDocument/2006/relationships" xmlns:p="http://schemas.openxmlformats.org/presentationml/2006/main">
   <p:cSld>
     <p:spTree>
       <p:nvGrpSpPr>
@@ -6506,7 +6733,14 @@
         <p:cNvGrpSpPr/>
         <p:nvPr/>
       </p:nvGrpSpPr>
-      <p:grpSpPr/>
+      <p:grpSpPr>
+        <a:xfrm>
+          <a:off x="0" y="0"/>
+          <a:ext cx="0" cy="0"/>
+          <a:chOff x="0" y="0"/>
+          <a:chExt cx="0" cy="0"/>
+        </a:xfrm>
+      </p:grpSpPr>
       <p:grpSp>
         <p:nvGrpSpPr>
           <p:cNvPr id="7" name="Grupo 6">
@@ -6690,7 +6924,7 @@
               <p:nvPr/>
             </p:nvPicPr>
             <p:blipFill>
-              <a:blip r:embed="rId2"/>
+              <a:blip r:embed="rId3"/>
               <a:stretch>
                 <a:fillRect/>
               </a:stretch>
@@ -6788,29 +7022,429 @@
                 <a:ea typeface="Cambria" panose="02040503050406030204" pitchFamily="18" charset="0"/>
                 <a:cs typeface="Calibri Light" panose="020F0302020204030204" pitchFamily="34" charset="0"/>
               </a:rPr>
-              <a:t>LA PANDEMIA DESPLAZÓ TITULACIONES, NO LAS EMPEORÓ</a:t>
+              <a:t>CUATRO DE CADA CINCO EGRESAN FUERA DE PLAZO</a:t>
+            </a:r>
+          </a:p>
+        </p:txBody>
+      </p:sp>
+      <p:sp>
+        <p:nvSpPr>
+          <p:cNvPr id="15" name="TextBox 14"/>
+          <p:cNvSpPr txBox="1"/>
+          <p:nvPr/>
+        </p:nvSpPr>
+        <p:spPr>
+          <a:xfrm>
+            <a:off x="868680" y="1691640"/>
+            <a:ext cx="2395728" cy="640080"/>
+          </a:xfrm>
+          <a:prstGeom prst="rect">
+            <a:avLst/>
+          </a:prstGeom>
+          <a:noFill/>
+        </p:spPr>
+        <p:txBody>
+          <a:bodyPr wrap="square" lIns="0" tIns="0" rIns="0" bIns="0">
+            <a:spAutoFit/>
+          </a:bodyPr>
+          <a:lstStyle/>
+          <a:p>
+            <a:pPr algn="ctr">
+              <a:lnSpc>
+                <a:spcPct val="125000"/>
+              </a:lnSpc>
+              <a:spcAft>
+                <a:spcPts val="0"/>
+              </a:spcAft>
+            </a:pPr>
+            <a:r>
+              <a:rPr sz="3600" b="1">
+                <a:solidFill>
+                  <a:srgbClr val="1E7A46"/>
+                </a:solidFill>
+              </a:rPr>
+              <a:t>19,0 %</a:t>
+            </a:r>
+          </a:p>
+        </p:txBody>
+      </p:sp>
+      <p:sp>
+        <p:nvSpPr>
+          <p:cNvPr id="16" name="TextBox 15"/>
+          <p:cNvSpPr txBox="1"/>
+          <p:nvPr/>
+        </p:nvSpPr>
+        <p:spPr>
+          <a:xfrm>
+            <a:off x="868680" y="2350008"/>
+            <a:ext cx="2395728" cy="502920"/>
+          </a:xfrm>
+          <a:prstGeom prst="rect">
+            <a:avLst/>
+          </a:prstGeom>
+          <a:noFill/>
+        </p:spPr>
+        <p:txBody>
+          <a:bodyPr wrap="square" lIns="0" tIns="0" rIns="0" bIns="0">
+            <a:spAutoFit/>
+          </a:bodyPr>
+          <a:lstStyle/>
+          <a:p>
+            <a:pPr algn="ctr">
+              <a:lnSpc>
+                <a:spcPct val="115000"/>
+              </a:lnSpc>
+              <a:spcAft>
+                <a:spcPts val="0"/>
+              </a:spcAft>
+            </a:pPr>
+            <a:r>
+              <a:rPr sz="1150" b="0">
+                <a:solidFill>
+                  <a:srgbClr val="3B3B3B"/>
+                </a:solidFill>
+              </a:rPr>
+              <a:t>se titula dentro</a:t>
+            </a:r>
+          </a:p>
+          <a:p>
+            <a:pPr algn="ctr">
+              <a:lnSpc>
+                <a:spcPct val="115000"/>
+              </a:lnSpc>
+              <a:spcAft>
+                <a:spcPts val="0"/>
+              </a:spcAft>
+            </a:pPr>
+            <a:r>
+              <a:rPr sz="1150" b="0">
+                <a:solidFill>
+                  <a:srgbClr val="3B3B3B"/>
+                </a:solidFill>
+              </a:rPr>
+              <a:t>del plazo teórico</a:t>
+            </a:r>
+          </a:p>
+        </p:txBody>
+      </p:sp>
+      <p:sp>
+        <p:nvSpPr>
+          <p:cNvPr id="17" name="TextBox 16"/>
+          <p:cNvSpPr txBox="1"/>
+          <p:nvPr/>
+        </p:nvSpPr>
+        <p:spPr>
+          <a:xfrm>
+            <a:off x="3547872" y="1691640"/>
+            <a:ext cx="2395728" cy="640080"/>
+          </a:xfrm>
+          <a:prstGeom prst="rect">
+            <a:avLst/>
+          </a:prstGeom>
+          <a:noFill/>
+        </p:spPr>
+        <p:txBody>
+          <a:bodyPr wrap="square" lIns="0" tIns="0" rIns="0" bIns="0">
+            <a:spAutoFit/>
+          </a:bodyPr>
+          <a:lstStyle/>
+          <a:p>
+            <a:pPr algn="ctr">
+              <a:lnSpc>
+                <a:spcPct val="125000"/>
+              </a:lnSpc>
+              <a:spcAft>
+                <a:spcPts val="0"/>
+              </a:spcAft>
+            </a:pPr>
+            <a:r>
+              <a:rPr sz="3600" b="1">
+                <a:solidFill>
+                  <a:srgbClr val="20236D"/>
+                </a:solidFill>
+              </a:rPr>
+              <a:t>2,76</a:t>
+            </a:r>
+          </a:p>
+        </p:txBody>
+      </p:sp>
+      <p:sp>
+        <p:nvSpPr>
+          <p:cNvPr id="18" name="TextBox 17"/>
+          <p:cNvSpPr txBox="1"/>
+          <p:nvPr/>
+        </p:nvSpPr>
+        <p:spPr>
+          <a:xfrm>
+            <a:off x="3547872" y="2350008"/>
+            <a:ext cx="2395728" cy="502920"/>
+          </a:xfrm>
+          <a:prstGeom prst="rect">
+            <a:avLst/>
+          </a:prstGeom>
+          <a:noFill/>
+        </p:spPr>
+        <p:txBody>
+          <a:bodyPr wrap="square" lIns="0" tIns="0" rIns="0" bIns="0">
+            <a:spAutoFit/>
+          </a:bodyPr>
+          <a:lstStyle/>
+          <a:p>
+            <a:pPr algn="ctr">
+              <a:lnSpc>
+                <a:spcPct val="115000"/>
+              </a:lnSpc>
+              <a:spcAft>
+                <a:spcPts val="0"/>
+              </a:spcAft>
+            </a:pPr>
+            <a:r>
+              <a:rPr sz="1150" b="0">
+                <a:solidFill>
+                  <a:srgbClr val="3B3B3B"/>
+                </a:solidFill>
+              </a:rPr>
+              <a:t>semestres de exceso</a:t>
+            </a:r>
+          </a:p>
+          <a:p>
+            <a:pPr algn="ctr">
+              <a:lnSpc>
+                <a:spcPct val="115000"/>
+              </a:lnSpc>
+              <a:spcAft>
+                <a:spcPts val="0"/>
+              </a:spcAft>
+            </a:pPr>
+            <a:r>
+              <a:rPr sz="1150" b="0">
+                <a:solidFill>
+                  <a:srgbClr val="3B3B3B"/>
+                </a:solidFill>
+              </a:rPr>
+              <a:t>en promedio</a:t>
+            </a:r>
+          </a:p>
+        </p:txBody>
+      </p:sp>
+      <p:sp>
+        <p:nvSpPr>
+          <p:cNvPr id="19" name="TextBox 18"/>
+          <p:cNvSpPr txBox="1"/>
+          <p:nvPr/>
+        </p:nvSpPr>
+        <p:spPr>
+          <a:xfrm>
+            <a:off x="6227064" y="1691640"/>
+            <a:ext cx="2395728" cy="640080"/>
+          </a:xfrm>
+          <a:prstGeom prst="rect">
+            <a:avLst/>
+          </a:prstGeom>
+          <a:noFill/>
+        </p:spPr>
+        <p:txBody>
+          <a:bodyPr wrap="square" lIns="0" tIns="0" rIns="0" bIns="0">
+            <a:spAutoFit/>
+          </a:bodyPr>
+          <a:lstStyle/>
+          <a:p>
+            <a:pPr algn="ctr">
+              <a:lnSpc>
+                <a:spcPct val="125000"/>
+              </a:lnSpc>
+              <a:spcAft>
+                <a:spcPts val="0"/>
+              </a:spcAft>
+            </a:pPr>
+            <a:r>
+              <a:rPr sz="3600" b="1">
+                <a:solidFill>
+                  <a:srgbClr val="B02A1E"/>
+                </a:solidFill>
+              </a:rPr>
+              <a:t>20,4 %</a:t>
+            </a:r>
+          </a:p>
+        </p:txBody>
+      </p:sp>
+      <p:sp>
+        <p:nvSpPr>
+          <p:cNvPr id="20" name="TextBox 19"/>
+          <p:cNvSpPr txBox="1"/>
+          <p:nvPr/>
+        </p:nvSpPr>
+        <p:spPr>
+          <a:xfrm>
+            <a:off x="6227064" y="2350008"/>
+            <a:ext cx="2395728" cy="502920"/>
+          </a:xfrm>
+          <a:prstGeom prst="rect">
+            <a:avLst/>
+          </a:prstGeom>
+          <a:noFill/>
+        </p:spPr>
+        <p:txBody>
+          <a:bodyPr wrap="square" lIns="0" tIns="0" rIns="0" bIns="0">
+            <a:spAutoFit/>
+          </a:bodyPr>
+          <a:lstStyle/>
+          <a:p>
+            <a:pPr algn="ctr">
+              <a:lnSpc>
+                <a:spcPct val="115000"/>
+              </a:lnSpc>
+              <a:spcAft>
+                <a:spcPts val="0"/>
+              </a:spcAft>
+            </a:pPr>
+            <a:r>
+              <a:rPr sz="1150" b="0">
+                <a:solidFill>
+                  <a:srgbClr val="3B3B3B"/>
+                </a:solidFill>
+              </a:rPr>
+              <a:t>acumula rezago severo</a:t>
+            </a:r>
+          </a:p>
+          <a:p>
+            <a:pPr algn="ctr">
+              <a:lnSpc>
+                <a:spcPct val="115000"/>
+              </a:lnSpc>
+              <a:spcAft>
+                <a:spcPts val="0"/>
+              </a:spcAft>
+            </a:pPr>
+            <a:r>
+              <a:rPr sz="1150" b="0">
+                <a:solidFill>
+                  <a:srgbClr val="3B3B3B"/>
+                </a:solidFill>
+              </a:rPr>
+              <a:t>(más de 4 semestres)</a:t>
+            </a:r>
+          </a:p>
+        </p:txBody>
+      </p:sp>
+      <p:sp>
+        <p:nvSpPr>
+          <p:cNvPr id="21" name="TextBox 20"/>
+          <p:cNvSpPr txBox="1"/>
+          <p:nvPr/>
+        </p:nvSpPr>
+        <p:spPr>
+          <a:xfrm>
+            <a:off x="8906256" y="1691640"/>
+            <a:ext cx="2395728" cy="640080"/>
+          </a:xfrm>
+          <a:prstGeom prst="rect">
+            <a:avLst/>
+          </a:prstGeom>
+          <a:noFill/>
+        </p:spPr>
+        <p:txBody>
+          <a:bodyPr wrap="square" lIns="0" tIns="0" rIns="0" bIns="0">
+            <a:spAutoFit/>
+          </a:bodyPr>
+          <a:lstStyle/>
+          <a:p>
+            <a:pPr algn="ctr">
+              <a:lnSpc>
+                <a:spcPct val="125000"/>
+              </a:lnSpc>
+              <a:spcAft>
+                <a:spcPts val="0"/>
+              </a:spcAft>
+            </a:pPr>
+            <a:r>
+              <a:rPr sz="3600" b="1">
+                <a:solidFill>
+                  <a:srgbClr val="20236D"/>
+                </a:solidFill>
+              </a:rPr>
+              <a:t>3,55 M</a:t>
+            </a:r>
+          </a:p>
+        </p:txBody>
+      </p:sp>
+      <p:sp>
+        <p:nvSpPr>
+          <p:cNvPr id="22" name="TextBox 21"/>
+          <p:cNvSpPr txBox="1"/>
+          <p:nvPr/>
+        </p:nvSpPr>
+        <p:spPr>
+          <a:xfrm>
+            <a:off x="8906256" y="2350008"/>
+            <a:ext cx="2395728" cy="502920"/>
+          </a:xfrm>
+          <a:prstGeom prst="rect">
+            <a:avLst/>
+          </a:prstGeom>
+          <a:noFill/>
+        </p:spPr>
+        <p:txBody>
+          <a:bodyPr wrap="square" lIns="0" tIns="0" rIns="0" bIns="0">
+            <a:spAutoFit/>
+          </a:bodyPr>
+          <a:lstStyle/>
+          <a:p>
+            <a:pPr algn="ctr">
+              <a:lnSpc>
+                <a:spcPct val="115000"/>
+              </a:lnSpc>
+              <a:spcAft>
+                <a:spcPts val="0"/>
+              </a:spcAft>
+            </a:pPr>
+            <a:r>
+              <a:rPr sz="1150" b="0">
+                <a:solidFill>
+                  <a:srgbClr val="3B3B3B"/>
+                </a:solidFill>
+              </a:rPr>
+              <a:t>semestres-estudiante</a:t>
+            </a:r>
+          </a:p>
+          <a:p>
+            <a:pPr algn="ctr">
+              <a:lnSpc>
+                <a:spcPct val="115000"/>
+              </a:lnSpc>
+              <a:spcAft>
+                <a:spcPts val="0"/>
+              </a:spcAft>
+            </a:pPr>
+            <a:r>
+              <a:rPr sz="1150" b="0">
+                <a:solidFill>
+                  <a:srgbClr val="3B3B3B"/>
+                </a:solidFill>
+              </a:rPr>
+              <a:t>en exceso, 2020-2025</a:t>
             </a:r>
           </a:p>
         </p:txBody>
       </p:sp>
       <p:pic>
         <p:nvPicPr>
-          <p:cNvPr id="15" name="Picture 14" descr="f4_fig3_evolucion.png"/>
+          <p:cNvPr id="23" name="Picture 22" descr="f4_fig1_magnitud.png"/>
           <p:cNvPicPr>
             <a:picLocks noChangeAspect="1"/>
           </p:cNvPicPr>
           <p:nvPr/>
         </p:nvPicPr>
         <p:blipFill>
-          <a:blip r:embed="rId3"/>
+          <a:blip r:embed="rId4"/>
           <a:stretch>
             <a:fillRect/>
           </a:stretch>
         </p:blipFill>
         <p:spPr>
           <a:xfrm>
-            <a:off x="3199283" y="1600200"/>
-            <a:ext cx="5793434" cy="3063240"/>
+            <a:off x="3710860" y="3154680"/>
+            <a:ext cx="4770280" cy="2697480"/>
           </a:xfrm>
           <a:prstGeom prst="rect">
             <a:avLst/>
@@ -6819,14 +7453,14 @@
       </p:pic>
       <p:sp>
         <p:nvSpPr>
-          <p:cNvPr id="16" name="TextBox 15"/>
+          <p:cNvPr id="24" name="TextBox 23"/>
           <p:cNvSpPr txBox="1"/>
           <p:nvPr/>
         </p:nvSpPr>
         <p:spPr>
           <a:xfrm>
-            <a:off x="868680" y="4846320"/>
-            <a:ext cx="10424160" cy="1005840"/>
+            <a:off x="868680" y="6053328"/>
+            <a:ext cx="10424160" cy="274320"/>
           </a:xfrm>
           <a:prstGeom prst="rect">
             <a:avLst/>
@@ -6834,66 +7468,7 @@
           <a:noFill/>
         </p:spPr>
         <p:txBody>
-          <a:bodyPr wrap="square" lIns="0" rIns="0" tIns="0" bIns="0">
-            <a:spAutoFit/>
-          </a:bodyPr>
-          <a:lstStyle/>
-          <a:p>
-            <a:pPr algn="l">
-              <a:lnSpc>
-                <a:spcPct val="130000"/>
-              </a:lnSpc>
-              <a:spcAft>
-                <a:spcPts val="400"/>
-              </a:spcAft>
-            </a:pPr>
-            <a:r>
-              <a:rPr sz="1250" b="0">
-                <a:solidFill>
-                  <a:srgbClr val="3B3B3B"/>
-                </a:solidFill>
-              </a:rPr>
-              <a:t>En 2020 se titularon 87.000 personas menos que en un año normal y la sobreduración tocó su mínimo. En 2021 el volumen se recuperó y la sobreduración alcanzó su máximo.</a:t>
-            </a:r>
-          </a:p>
-          <a:p>
-            <a:pPr algn="l">
-              <a:lnSpc>
-                <a:spcPct val="130000"/>
-              </a:lnSpc>
-              <a:spcAft>
-                <a:spcPts val="400"/>
-              </a:spcAft>
-            </a:pPr>
-            <a:r>
-              <a:rPr sz="1250" b="0">
-                <a:solidFill>
-                  <a:srgbClr val="3B3B3B"/>
-                </a:solidFill>
-              </a:rPr>
-              <a:t>Son el mismo fenómeno: las titulaciones se postergaron. El mecanismo es de desplazamiento, no de deterioro académico.</a:t>
-            </a:r>
-          </a:p>
-        </p:txBody>
-      </p:sp>
-      <p:sp>
-        <p:nvSpPr>
-          <p:cNvPr id="17" name="TextBox 16"/>
-          <p:cNvSpPr txBox="1"/>
-          <p:nvPr/>
-        </p:nvSpPr>
-        <p:spPr>
-          <a:xfrm>
-            <a:off x="868680" y="6053328"/>
-            <a:ext cx="10424160" cy="274320"/>
-          </a:xfrm>
-          <a:prstGeom prst="rect">
-            <a:avLst/>
-          </a:prstGeom>
-          <a:noFill/>
-        </p:spPr>
-        <p:txBody>
-          <a:bodyPr wrap="square" lIns="0" rIns="0" tIns="0" bIns="0">
+          <a:bodyPr wrap="square" lIns="0" tIns="0" rIns="0" bIns="0">
             <a:spAutoFit/>
           </a:bodyPr>
           <a:lstStyle/>
@@ -6912,7 +7487,7 @@
                   <a:srgbClr val="808080"/>
                 </a:solidFill>
               </a:rPr>
-              <a:t>Fuente: elaboración propia a partir de SIES, Titulados de Educación Superior 2020-2025.</a:t>
+              <a:t>Fuente: elaboración propia a partir de SIES, Titulados de Educación Superior 2020-2025 (n = 1.246.760).</a:t>
             </a:r>
           </a:p>
         </p:txBody>
@@ -6925,8 +7500,8 @@
 </p:sld>
 </file>
 
-<file path=ppt/slides/slide13.xml><?xml version="1.0" encoding="utf-8"?>
-<p:sld xmlns:a="http://schemas.openxmlformats.org/drawingml/2006/main" xmlns:p="http://schemas.openxmlformats.org/presentationml/2006/main" xmlns:r="http://schemas.openxmlformats.org/officeDocument/2006/relationships">
+<file path=ppt/slides/slide5.xml><?xml version="1.0" encoding="utf-8"?>
+<p:sld xmlns:a="http://schemas.openxmlformats.org/drawingml/2006/main" xmlns:r="http://schemas.openxmlformats.org/officeDocument/2006/relationships" xmlns:p="http://schemas.openxmlformats.org/presentationml/2006/main">
   <p:cSld>
     <p:spTree>
       <p:nvGrpSpPr>
@@ -6934,7 +7509,14 @@
         <p:cNvGrpSpPr/>
         <p:nvPr/>
       </p:nvGrpSpPr>
-      <p:grpSpPr/>
+      <p:grpSpPr>
+        <a:xfrm>
+          <a:off x="0" y="0"/>
+          <a:ext cx="0" cy="0"/>
+          <a:chOff x="0" y="0"/>
+          <a:chExt cx="0" cy="0"/>
+        </a:xfrm>
+      </p:grpSpPr>
       <p:grpSp>
         <p:nvGrpSpPr>
           <p:cNvPr id="7" name="Grupo 6">
@@ -7118,7 +7700,7 @@
               <p:nvPr/>
             </p:nvPicPr>
             <p:blipFill>
-              <a:blip r:embed="rId2"/>
+              <a:blip r:embed="rId3"/>
               <a:stretch>
                 <a:fillRect/>
               </a:stretch>
@@ -7216,29 +7798,29 @@
                 <a:ea typeface="Cambria" panose="02040503050406030204" pitchFamily="18" charset="0"/>
                 <a:cs typeface="Calibri Light" panose="020F0302020204030204" pitchFamily="34" charset="0"/>
               </a:rPr>
-              <a:t>NINGUNA COHORTE ESTÁ COMPLETA</a:t>
+              <a:t>DERECHO TRIPLICA A EDUCACIÓN</a:t>
             </a:r>
           </a:p>
         </p:txBody>
       </p:sp>
       <p:pic>
         <p:nvPicPr>
-          <p:cNvPr id="15" name="Picture 14" descr="f4_fig4_truncamiento.png"/>
+          <p:cNvPr id="15" name="Picture 14" descr="f4_fig2_factores.png"/>
           <p:cNvPicPr>
             <a:picLocks noChangeAspect="1"/>
           </p:cNvPicPr>
           <p:nvPr/>
         </p:nvPicPr>
         <p:blipFill>
-          <a:blip r:embed="rId3"/>
+          <a:blip r:embed="rId4"/>
           <a:stretch>
             <a:fillRect/>
           </a:stretch>
         </p:blipFill>
         <p:spPr>
           <a:xfrm>
-            <a:off x="3401347" y="1600200"/>
-            <a:ext cx="5389305" cy="2880360"/>
+            <a:off x="3648968" y="1645920"/>
+            <a:ext cx="4894063" cy="2880360"/>
           </a:xfrm>
           <a:prstGeom prst="rect">
             <a:avLst/>
@@ -7253,8 +7835,8 @@
         </p:nvSpPr>
         <p:spPr>
           <a:xfrm>
-            <a:off x="868680" y="4709160"/>
-            <a:ext cx="10424160" cy="1188720"/>
+            <a:off x="868680" y="4892040"/>
+            <a:ext cx="3319272" cy="822960"/>
           </a:xfrm>
           <a:prstGeom prst="rect">
             <a:avLst/>
@@ -7262,7 +7844,7 @@
           <a:noFill/>
         </p:spPr>
         <p:txBody>
-          <a:bodyPr wrap="square" lIns="0" rIns="0" tIns="0" bIns="0">
+          <a:bodyPr wrap="square" lIns="0" tIns="0" rIns="0" bIns="0">
             <a:spAutoFit/>
           </a:bodyPr>
           <a:lstStyle/>
@@ -7272,7 +7854,7 @@
                 <a:spcPct val="130000"/>
               </a:lnSpc>
               <a:spcAft>
-                <a:spcPts val="400"/>
+                <a:spcPts val="0"/>
               </a:spcAft>
             </a:pPr>
             <a:r>
@@ -7281,7 +7863,7 @@
                   <a:srgbClr val="3B3B3B"/>
                 </a:solidFill>
               </a:rPr>
-              <a:t>De las cohortes recientes solo se han titulado los más rápidos; de las antiguas, solo los más rezagados.</a:t>
+              <a:t>Casi cuatro semestres separan los</a:t>
             </a:r>
           </a:p>
           <a:p>
@@ -7290,7 +7872,7 @@
                 <a:spcPct val="130000"/>
               </a:lnSpc>
               <a:spcAft>
-                <a:spcPts val="400"/>
+                <a:spcPts val="0"/>
               </a:spcAft>
             </a:pPr>
             <a:r>
@@ -7299,25 +7881,7 @@
                   <a:srgbClr val="3B3B3B"/>
                 </a:solidFill>
               </a:rPr>
-              <a:t>Ninguna cohorte está completa, y lo están en direcciones opuestas: el descenso de la serie no es una mejora del sistema.</a:t>
-            </a:r>
-          </a:p>
-          <a:p>
-            <a:pPr algn="l">
-              <a:lnSpc>
-                <a:spcPct val="130000"/>
-              </a:lnSpc>
-              <a:spcAft>
-                <a:spcPts val="400"/>
-              </a:spcAft>
-            </a:pPr>
-            <a:r>
-              <a:rPr sz="1250" b="0">
-                <a:solidFill>
-                  <a:srgbClr val="3B3B3B"/>
-                </a:solidFill>
-              </a:rPr>
-              <a:t>Es una limitación del diseño de la fuente, no del procesamiento — y declararla es parte del resultado.</a:t>
+              <a:t>extremos del ranking de áreas</a:t>
             </a:r>
           </a:p>
         </p:txBody>
@@ -7330,8 +7894,8 @@
         </p:nvSpPr>
         <p:spPr>
           <a:xfrm>
-            <a:off x="868680" y="6053328"/>
-            <a:ext cx="10424160" cy="274320"/>
+            <a:off x="4425696" y="4892040"/>
+            <a:ext cx="3319272" cy="822960"/>
           </a:xfrm>
           <a:prstGeom prst="rect">
             <a:avLst/>
@@ -7339,7 +7903,125 @@
           <a:noFill/>
         </p:spPr>
         <p:txBody>
-          <a:bodyPr wrap="square" lIns="0" rIns="0" tIns="0" bIns="0">
+          <a:bodyPr wrap="square" lIns="0" tIns="0" rIns="0" bIns="0">
+            <a:spAutoFit/>
+          </a:bodyPr>
+          <a:lstStyle/>
+          <a:p>
+            <a:pPr algn="l">
+              <a:lnSpc>
+                <a:spcPct val="130000"/>
+              </a:lnSpc>
+              <a:spcAft>
+                <a:spcPts val="0"/>
+              </a:spcAft>
+            </a:pPr>
+            <a:r>
+              <a:rPr sz="1250" b="0">
+                <a:solidFill>
+                  <a:srgbClr val="3B3B3B"/>
+                </a:solidFill>
+              </a:rPr>
+              <a:t>Las universidades superan a los IP</a:t>
+            </a:r>
+          </a:p>
+          <a:p>
+            <a:pPr algn="l">
+              <a:lnSpc>
+                <a:spcPct val="130000"/>
+              </a:lnSpc>
+              <a:spcAft>
+                <a:spcPts val="0"/>
+              </a:spcAft>
+            </a:pPr>
+            <a:r>
+              <a:rPr sz="1250" b="0">
+                <a:solidFill>
+                  <a:srgbClr val="3B3B3B"/>
+                </a:solidFill>
+              </a:rPr>
+              <a:t>en más de un semestre completo</a:t>
+            </a:r>
+          </a:p>
+        </p:txBody>
+      </p:sp>
+      <p:sp>
+        <p:nvSpPr>
+          <p:cNvPr id="18" name="TextBox 17"/>
+          <p:cNvSpPr txBox="1"/>
+          <p:nvPr/>
+        </p:nvSpPr>
+        <p:spPr>
+          <a:xfrm>
+            <a:off x="7982712" y="4892040"/>
+            <a:ext cx="3319272" cy="822960"/>
+          </a:xfrm>
+          <a:prstGeom prst="rect">
+            <a:avLst/>
+          </a:prstGeom>
+          <a:noFill/>
+        </p:spPr>
+        <p:txBody>
+          <a:bodyPr wrap="square" lIns="0" tIns="0" rIns="0" bIns="0">
+            <a:spAutoFit/>
+          </a:bodyPr>
+          <a:lstStyle/>
+          <a:p>
+            <a:pPr algn="l">
+              <a:lnSpc>
+                <a:spcPct val="130000"/>
+              </a:lnSpc>
+              <a:spcAft>
+                <a:spcPts val="0"/>
+              </a:spcAft>
+            </a:pPr>
+            <a:r>
+              <a:rPr sz="1250" b="0">
+                <a:solidFill>
+                  <a:srgbClr val="3B3B3B"/>
+                </a:solidFill>
+              </a:rPr>
+              <a:t>Las mujeres se titulan 0,93 semestres</a:t>
+            </a:r>
+          </a:p>
+          <a:p>
+            <a:pPr algn="l">
+              <a:lnSpc>
+                <a:spcPct val="130000"/>
+              </a:lnSpc>
+              <a:spcAft>
+                <a:spcPts val="0"/>
+              </a:spcAft>
+            </a:pPr>
+            <a:r>
+              <a:rPr sz="1250" b="0">
+                <a:solidFill>
+                  <a:srgbClr val="3B3B3B"/>
+                </a:solidFill>
+              </a:rPr>
+              <a:t>antes, en las diez áreas sin excepción</a:t>
+            </a:r>
+          </a:p>
+        </p:txBody>
+      </p:sp>
+      <p:sp>
+        <p:nvSpPr>
+          <p:cNvPr id="19" name="TextBox 18"/>
+          <p:cNvSpPr txBox="1"/>
+          <p:nvPr/>
+        </p:nvSpPr>
+        <p:spPr>
+          <a:xfrm>
+            <a:off x="868680" y="6053328"/>
+            <a:ext cx="10424160" cy="274320"/>
+          </a:xfrm>
+          <a:prstGeom prst="rect">
+            <a:avLst/>
+          </a:prstGeom>
+          <a:noFill/>
+        </p:spPr>
+        <p:txBody>
+          <a:bodyPr wrap="square" lIns="0" tIns="0" rIns="0" bIns="0">
             <a:spAutoFit/>
           </a:bodyPr>
           <a:lstStyle/>
@@ -7371,8 +8053,8 @@
 </p:sld>
 </file>
 
-<file path=ppt/slides/slide14.xml><?xml version="1.0" encoding="utf-8"?>
-<p:sld xmlns:a="http://schemas.openxmlformats.org/drawingml/2006/main" xmlns:p="http://schemas.openxmlformats.org/presentationml/2006/main" xmlns:r="http://schemas.openxmlformats.org/officeDocument/2006/relationships">
+<file path=ppt/slides/slide6.xml><?xml version="1.0" encoding="utf-8"?>
+<p:sld xmlns:a="http://schemas.openxmlformats.org/drawingml/2006/main" xmlns:r="http://schemas.openxmlformats.org/officeDocument/2006/relationships" xmlns:p="http://schemas.openxmlformats.org/presentationml/2006/main">
   <p:cSld>
     <p:spTree>
       <p:nvGrpSpPr>
@@ -7380,7 +8062,14 @@
         <p:cNvGrpSpPr/>
         <p:nvPr/>
       </p:nvGrpSpPr>
-      <p:grpSpPr/>
+      <p:grpSpPr>
+        <a:xfrm>
+          <a:off x="0" y="0"/>
+          <a:ext cx="0" cy="0"/>
+          <a:chOff x="0" y="0"/>
+          <a:chExt cx="0" cy="0"/>
+        </a:xfrm>
+      </p:grpSpPr>
       <p:grpSp>
         <p:nvGrpSpPr>
           <p:cNvPr id="7" name="Grupo 6">
@@ -7564,7 +8253,7 @@
               <p:nvPr/>
             </p:nvPicPr>
             <p:blipFill>
-              <a:blip r:embed="rId2"/>
+              <a:blip r:embed="rId3"/>
               <a:stretch>
                 <a:fillRect/>
               </a:stretch>
@@ -7662,21 +8351,45 @@
                 <a:ea typeface="Cambria" panose="02040503050406030204" pitchFamily="18" charset="0"/>
                 <a:cs typeface="Calibri Light" panose="020F0302020204030204" pitchFamily="34" charset="0"/>
               </a:rPr>
-              <a:t>EL RIGOR DETRÁS DE LAS CIFRAS</a:t>
-            </a:r>
-          </a:p>
-        </p:txBody>
-      </p:sp>
-      <p:sp>
-        <p:nvSpPr>
-          <p:cNvPr id="15" name="TextBox 14"/>
+              <a:t>LA PANDEMIA DESPLAZÓ TITULACIONES, NO LAS EMPEORÓ</a:t>
+            </a:r>
+          </a:p>
+        </p:txBody>
+      </p:sp>
+      <p:pic>
+        <p:nvPicPr>
+          <p:cNvPr id="15" name="Picture 14" descr="f4_fig3_evolucion.png"/>
+          <p:cNvPicPr>
+            <a:picLocks noChangeAspect="1"/>
+          </p:cNvPicPr>
+          <p:nvPr/>
+        </p:nvPicPr>
+        <p:blipFill>
+          <a:blip r:embed="rId4"/>
+          <a:stretch>
+            <a:fillRect/>
+          </a:stretch>
+        </p:blipFill>
+        <p:spPr>
+          <a:xfrm>
+            <a:off x="3199283" y="1600200"/>
+            <a:ext cx="5793434" cy="3063240"/>
+          </a:xfrm>
+          <a:prstGeom prst="rect">
+            <a:avLst/>
+          </a:prstGeom>
+        </p:spPr>
+      </p:pic>
+      <p:sp>
+        <p:nvSpPr>
+          <p:cNvPr id="16" name="TextBox 15"/>
           <p:cNvSpPr txBox="1"/>
           <p:nvPr/>
         </p:nvSpPr>
         <p:spPr>
           <a:xfrm>
-            <a:off x="868680" y="1737360"/>
-            <a:ext cx="2395728" cy="640080"/>
+            <a:off x="868680" y="4846320"/>
+            <a:ext cx="10424160" cy="1005840"/>
           </a:xfrm>
           <a:prstGeom prst="rect">
             <a:avLst/>
@@ -7684,40 +8397,58 @@
           <a:noFill/>
         </p:spPr>
         <p:txBody>
-          <a:bodyPr wrap="square" lIns="0" rIns="0" tIns="0" bIns="0">
+          <a:bodyPr wrap="square" lIns="0" tIns="0" rIns="0" bIns="0">
             <a:spAutoFit/>
           </a:bodyPr>
           <a:lstStyle/>
           <a:p>
-            <a:pPr algn="ctr">
-              <a:lnSpc>
-                <a:spcPct val="125000"/>
+            <a:pPr algn="l">
+              <a:lnSpc>
+                <a:spcPct val="130000"/>
               </a:lnSpc>
               <a:spcAft>
-                <a:spcPts val="0"/>
+                <a:spcPts val="400"/>
               </a:spcAft>
             </a:pPr>
             <a:r>
-              <a:rPr sz="3600" b="1">
-                <a:solidFill>
-                  <a:srgbClr val="1E7A46"/>
+              <a:rPr sz="1250" b="0">
+                <a:solidFill>
+                  <a:srgbClr val="3B3B3B"/>
                 </a:solidFill>
               </a:rPr>
-              <a:t>73</a:t>
-            </a:r>
-          </a:p>
-        </p:txBody>
-      </p:sp>
-      <p:sp>
-        <p:nvSpPr>
-          <p:cNvPr id="16" name="TextBox 15"/>
+              <a:t>En 2020 se titularon 87.000 personas menos que en un año normal y la sobreduración tocó su mínimo. En 2021 el volumen se recuperó y la sobreduración alcanzó su máximo.</a:t>
+            </a:r>
+          </a:p>
+          <a:p>
+            <a:pPr algn="l">
+              <a:lnSpc>
+                <a:spcPct val="130000"/>
+              </a:lnSpc>
+              <a:spcAft>
+                <a:spcPts val="400"/>
+              </a:spcAft>
+            </a:pPr>
+            <a:r>
+              <a:rPr sz="1250" b="0">
+                <a:solidFill>
+                  <a:srgbClr val="3B3B3B"/>
+                </a:solidFill>
+              </a:rPr>
+              <a:t>Son el mismo fenómeno: las titulaciones se postergaron. El mecanismo es de desplazamiento, no de deterioro académico.</a:t>
+            </a:r>
+          </a:p>
+        </p:txBody>
+      </p:sp>
+      <p:sp>
+        <p:nvSpPr>
+          <p:cNvPr id="17" name="TextBox 16"/>
           <p:cNvSpPr txBox="1"/>
           <p:nvPr/>
         </p:nvSpPr>
         <p:spPr>
           <a:xfrm>
-            <a:off x="868680" y="2395728"/>
-            <a:ext cx="2395728" cy="502920"/>
+            <a:off x="868680" y="6053328"/>
+            <a:ext cx="10424160" cy="274320"/>
           </a:xfrm>
           <a:prstGeom prst="rect">
             <a:avLst/>
@@ -7725,696 +8456,26 @@
           <a:noFill/>
         </p:spPr>
         <p:txBody>
-          <a:bodyPr wrap="square" lIns="0" rIns="0" tIns="0" bIns="0">
+          <a:bodyPr wrap="square" lIns="0" tIns="0" rIns="0" bIns="0">
             <a:spAutoFit/>
           </a:bodyPr>
           <a:lstStyle/>
           <a:p>
-            <a:pPr algn="ctr">
-              <a:lnSpc>
-                <a:spcPct val="115000"/>
+            <a:pPr algn="l">
+              <a:lnSpc>
+                <a:spcPct val="125000"/>
               </a:lnSpc>
               <a:spcAft>
                 <a:spcPts val="0"/>
               </a:spcAft>
             </a:pPr>
             <a:r>
-              <a:rPr sz="1150" b="0">
-                <a:solidFill>
-                  <a:srgbClr val="3B3B3B"/>
+              <a:rPr sz="950" b="0">
+                <a:solidFill>
+                  <a:srgbClr val="808080"/>
                 </a:solidFill>
               </a:rPr>
-              <a:t>pruebas automatizadas</a:t>
-            </a:r>
-          </a:p>
-          <a:p>
-            <a:pPr algn="ctr">
-              <a:lnSpc>
-                <a:spcPct val="115000"/>
-              </a:lnSpc>
-              <a:spcAft>
-                <a:spcPts val="0"/>
-              </a:spcAft>
-            </a:pPr>
-            <a:r>
-              <a:rPr sz="1150" b="0">
-                <a:solidFill>
-                  <a:srgbClr val="3B3B3B"/>
-                </a:solidFill>
-              </a:rPr>
-              <a:t>de casos normales,</a:t>
-            </a:r>
-          </a:p>
-          <a:p>
-            <a:pPr algn="ctr">
-              <a:lnSpc>
-                <a:spcPct val="115000"/>
-              </a:lnSpc>
-              <a:spcAft>
-                <a:spcPts val="0"/>
-              </a:spcAft>
-            </a:pPr>
-            <a:r>
-              <a:rPr sz="1150" b="0">
-                <a:solidFill>
-                  <a:srgbClr val="3B3B3B"/>
-                </a:solidFill>
-              </a:rPr>
-              <a:t>límite y excepciones</a:t>
-            </a:r>
-          </a:p>
-        </p:txBody>
-      </p:sp>
-      <p:sp>
-        <p:nvSpPr>
-          <p:cNvPr id="17" name="TextBox 16"/>
-          <p:cNvSpPr txBox="1"/>
-          <p:nvPr/>
-        </p:nvSpPr>
-        <p:spPr>
-          <a:xfrm>
-            <a:off x="3547872" y="1737360"/>
-            <a:ext cx="2395728" cy="640080"/>
-          </a:xfrm>
-          <a:prstGeom prst="rect">
-            <a:avLst/>
-          </a:prstGeom>
-          <a:noFill/>
-        </p:spPr>
-        <p:txBody>
-          <a:bodyPr wrap="square" lIns="0" rIns="0" tIns="0" bIns="0">
-            <a:spAutoFit/>
-          </a:bodyPr>
-          <a:lstStyle/>
-          <a:p>
-            <a:pPr algn="ctr">
-              <a:lnSpc>
-                <a:spcPct val="125000"/>
-              </a:lnSpc>
-              <a:spcAft>
-                <a:spcPts val="0"/>
-              </a:spcAft>
-            </a:pPr>
-            <a:r>
-              <a:rPr sz="3600" b="1">
-                <a:solidFill>
-                  <a:srgbClr val="1E7A46"/>
-                </a:solidFill>
-              </a:rPr>
-              <a:t>9</a:t>
-            </a:r>
-          </a:p>
-        </p:txBody>
-      </p:sp>
-      <p:sp>
-        <p:nvSpPr>
-          <p:cNvPr id="18" name="TextBox 17"/>
-          <p:cNvSpPr txBox="1"/>
-          <p:nvPr/>
-        </p:nvSpPr>
-        <p:spPr>
-          <a:xfrm>
-            <a:off x="3547872" y="2395728"/>
-            <a:ext cx="2395728" cy="502920"/>
-          </a:xfrm>
-          <a:prstGeom prst="rect">
-            <a:avLst/>
-          </a:prstGeom>
-          <a:noFill/>
-        </p:spPr>
-        <p:txBody>
-          <a:bodyPr wrap="square" lIns="0" rIns="0" tIns="0" bIns="0">
-            <a:spAutoFit/>
-          </a:bodyPr>
-          <a:lstStyle/>
-          <a:p>
-            <a:pPr algn="ctr">
-              <a:lnSpc>
-                <a:spcPct val="115000"/>
-              </a:lnSpc>
-              <a:spcAft>
-                <a:spcPts val="0"/>
-              </a:spcAft>
-            </a:pPr>
-            <a:r>
-              <a:rPr sz="1150" b="0">
-                <a:solidFill>
-                  <a:srgbClr val="3B3B3B"/>
-                </a:solidFill>
-              </a:rPr>
-              <a:t>reglas de coherencia</a:t>
-            </a:r>
-          </a:p>
-          <a:p>
-            <a:pPr algn="ctr">
-              <a:lnSpc>
-                <a:spcPct val="115000"/>
-              </a:lnSpc>
-              <a:spcAft>
-                <a:spcPts val="0"/>
-              </a:spcAft>
-            </a:pPr>
-            <a:r>
-              <a:rPr sz="1150" b="0">
-                <a:solidFill>
-                  <a:srgbClr val="3B3B3B"/>
-                </a:solidFill>
-              </a:rPr>
-              <a:t>del dominio, todas</a:t>
-            </a:r>
-          </a:p>
-          <a:p>
-            <a:pPr algn="ctr">
-              <a:lnSpc>
-                <a:spcPct val="115000"/>
-              </a:lnSpc>
-              <a:spcAft>
-                <a:spcPts val="0"/>
-              </a:spcAft>
-            </a:pPr>
-            <a:r>
-              <a:rPr sz="1150" b="0">
-                <a:solidFill>
-                  <a:srgbClr val="3B3B3B"/>
-                </a:solidFill>
-              </a:rPr>
-              <a:t>aprobadas</a:t>
-            </a:r>
-          </a:p>
-        </p:txBody>
-      </p:sp>
-      <p:sp>
-        <p:nvSpPr>
-          <p:cNvPr id="19" name="TextBox 18"/>
-          <p:cNvSpPr txBox="1"/>
-          <p:nvPr/>
-        </p:nvSpPr>
-        <p:spPr>
-          <a:xfrm>
-            <a:off x="6227064" y="1737360"/>
-            <a:ext cx="2395728" cy="640080"/>
-          </a:xfrm>
-          <a:prstGeom prst="rect">
-            <a:avLst/>
-          </a:prstGeom>
-          <a:noFill/>
-        </p:spPr>
-        <p:txBody>
-          <a:bodyPr wrap="square" lIns="0" rIns="0" tIns="0" bIns="0">
-            <a:spAutoFit/>
-          </a:bodyPr>
-          <a:lstStyle/>
-          <a:p>
-            <a:pPr algn="ctr">
-              <a:lnSpc>
-                <a:spcPct val="125000"/>
-              </a:lnSpc>
-              <a:spcAft>
-                <a:spcPts val="0"/>
-              </a:spcAft>
-            </a:pPr>
-            <a:r>
-              <a:rPr sz="3600" b="1">
-                <a:solidFill>
-                  <a:srgbClr val="20236D"/>
-                </a:solidFill>
-              </a:rPr>
-              <a:t>6.516×</a:t>
-            </a:r>
-          </a:p>
-        </p:txBody>
-      </p:sp>
-      <p:sp>
-        <p:nvSpPr>
-          <p:cNvPr id="20" name="TextBox 19"/>
-          <p:cNvSpPr txBox="1"/>
-          <p:nvPr/>
-        </p:nvSpPr>
-        <p:spPr>
-          <a:xfrm>
-            <a:off x="6227064" y="2395728"/>
-            <a:ext cx="2395728" cy="502920"/>
-          </a:xfrm>
-          <a:prstGeom prst="rect">
-            <a:avLst/>
-          </a:prstGeom>
-          <a:noFill/>
-        </p:spPr>
-        <p:txBody>
-          <a:bodyPr wrap="square" lIns="0" rIns="0" tIns="0" bIns="0">
-            <a:spAutoFit/>
-          </a:bodyPr>
-          <a:lstStyle/>
-          <a:p>
-            <a:pPr algn="ctr">
-              <a:lnSpc>
-                <a:spcPct val="115000"/>
-              </a:lnSpc>
-              <a:spcAft>
-                <a:spcPts val="0"/>
-              </a:spcAft>
-            </a:pPr>
-            <a:r>
-              <a:rPr sz="1150" b="0">
-                <a:solidFill>
-                  <a:srgbClr val="3B3B3B"/>
-                </a:solidFill>
-              </a:rPr>
-              <a:t>más rápido el conteo</a:t>
-            </a:r>
-          </a:p>
-          <a:p>
-            <a:pPr algn="ctr">
-              <a:lnSpc>
-                <a:spcPct val="115000"/>
-              </a:lnSpc>
-              <a:spcAft>
-                <a:spcPts val="0"/>
-              </a:spcAft>
-            </a:pPr>
-            <a:r>
-              <a:rPr sz="1150" b="0">
-                <a:solidFill>
-                  <a:srgbClr val="3B3B3B"/>
-                </a:solidFill>
-              </a:rPr>
-              <a:t>por búsqueda binaria</a:t>
-            </a:r>
-          </a:p>
-          <a:p>
-            <a:pPr algn="ctr">
-              <a:lnSpc>
-                <a:spcPct val="115000"/>
-              </a:lnSpc>
-              <a:spcAft>
-                <a:spcPts val="0"/>
-              </a:spcAft>
-            </a:pPr>
-            <a:r>
-              <a:rPr sz="1150" b="0">
-                <a:solidFill>
-                  <a:srgbClr val="3B3B3B"/>
-                </a:solidFill>
-              </a:rPr>
-              <a:t>que el lineal</a:t>
-            </a:r>
-          </a:p>
-        </p:txBody>
-      </p:sp>
-      <p:sp>
-        <p:nvSpPr>
-          <p:cNvPr id="21" name="TextBox 20"/>
-          <p:cNvSpPr txBox="1"/>
-          <p:nvPr/>
-        </p:nvSpPr>
-        <p:spPr>
-          <a:xfrm>
-            <a:off x="8906256" y="1737360"/>
-            <a:ext cx="2395728" cy="640080"/>
-          </a:xfrm>
-          <a:prstGeom prst="rect">
-            <a:avLst/>
-          </a:prstGeom>
-          <a:noFill/>
-        </p:spPr>
-        <p:txBody>
-          <a:bodyPr wrap="square" lIns="0" rIns="0" tIns="0" bIns="0">
-            <a:spAutoFit/>
-          </a:bodyPr>
-          <a:lstStyle/>
-          <a:p>
-            <a:pPr algn="ctr">
-              <a:lnSpc>
-                <a:spcPct val="125000"/>
-              </a:lnSpc>
-              <a:spcAft>
-                <a:spcPts val="0"/>
-              </a:spcAft>
-            </a:pPr>
-            <a:r>
-              <a:rPr sz="3600" b="1">
-                <a:solidFill>
-                  <a:srgbClr val="20236D"/>
-                </a:solidFill>
-              </a:rPr>
-              <a:t>860×</a:t>
-            </a:r>
-          </a:p>
-        </p:txBody>
-      </p:sp>
-      <p:sp>
-        <p:nvSpPr>
-          <p:cNvPr id="22" name="TextBox 21"/>
-          <p:cNvSpPr txBox="1"/>
-          <p:nvPr/>
-        </p:nvSpPr>
-        <p:spPr>
-          <a:xfrm>
-            <a:off x="8906256" y="2395728"/>
-            <a:ext cx="2395728" cy="502920"/>
-          </a:xfrm>
-          <a:prstGeom prst="rect">
-            <a:avLst/>
-          </a:prstGeom>
-          <a:noFill/>
-        </p:spPr>
-        <p:txBody>
-          <a:bodyPr wrap="square" lIns="0" rIns="0" tIns="0" bIns="0">
-            <a:spAutoFit/>
-          </a:bodyPr>
-          <a:lstStyle/>
-          <a:p>
-            <a:pPr algn="ctr">
-              <a:lnSpc>
-                <a:spcPct val="115000"/>
-              </a:lnSpc>
-              <a:spcAft>
-                <a:spcPts val="0"/>
-              </a:spcAft>
-            </a:pPr>
-            <a:r>
-              <a:rPr sz="1150" b="0">
-                <a:solidFill>
-                  <a:srgbClr val="3B3B3B"/>
-                </a:solidFill>
-              </a:rPr>
-              <a:t>menos memoria la</a:t>
-            </a:r>
-          </a:p>
-          <a:p>
-            <a:pPr algn="ctr">
-              <a:lnSpc>
-                <a:spcPct val="115000"/>
-              </a:lnSpc>
-              <a:spcAft>
-                <a:spcPts val="0"/>
-              </a:spcAft>
-            </a:pPr>
-            <a:r>
-              <a:rPr sz="1150" b="0">
-                <a:solidFill>
-                  <a:srgbClr val="3B3B3B"/>
-                </a:solidFill>
-              </a:rPr>
-              <a:t>agregación de una</a:t>
-            </a:r>
-          </a:p>
-          <a:p>
-            <a:pPr algn="ctr">
-              <a:lnSpc>
-                <a:spcPct val="115000"/>
-              </a:lnSpc>
-              <a:spcAft>
-                <a:spcPts val="0"/>
-              </a:spcAft>
-            </a:pPr>
-            <a:r>
-              <a:rPr sz="1150" b="0">
-                <a:solidFill>
-                  <a:srgbClr val="3B3B3B"/>
-                </a:solidFill>
-              </a:rPr>
-              <a:t>sola pasada</a:t>
-            </a:r>
-          </a:p>
-        </p:txBody>
-      </p:sp>
-      <p:sp>
-        <p:nvSpPr>
-          <p:cNvPr id="23" name="TextBox 22"/>
-          <p:cNvSpPr txBox="1"/>
-          <p:nvPr/>
-        </p:nvSpPr>
-        <p:spPr>
-          <a:xfrm>
-            <a:off x="868680" y="3611880"/>
-            <a:ext cx="4983480" cy="2011680"/>
-          </a:xfrm>
-          <a:prstGeom prst="rect">
-            <a:avLst/>
-          </a:prstGeom>
-          <a:noFill/>
-        </p:spPr>
-        <p:txBody>
-          <a:bodyPr wrap="square" lIns="0" rIns="0" tIns="0" bIns="0">
-            <a:spAutoFit/>
-          </a:bodyPr>
-          <a:lstStyle/>
-          <a:p>
-            <a:pPr algn="l">
-              <a:lnSpc>
-                <a:spcPct val="135000"/>
-              </a:lnSpc>
-              <a:spcAft>
-                <a:spcPts val="0"/>
-              </a:spcAft>
-            </a:pPr>
-            <a:r>
-              <a:rPr sz="1300" b="0">
-                <a:solidFill>
-                  <a:srgbClr val="3B3B3B"/>
-                </a:solidFill>
-              </a:rPr>
-              <a:t>Los algoritmos se implementaron desde cero y se</a:t>
-            </a:r>
-          </a:p>
-          <a:p>
-            <a:pPr algn="l">
-              <a:lnSpc>
-                <a:spcPct val="135000"/>
-              </a:lnSpc>
-              <a:spcAft>
-                <a:spcPts val="0"/>
-              </a:spcAft>
-            </a:pPr>
-            <a:r>
-              <a:rPr sz="1300" b="0">
-                <a:solidFill>
-                  <a:srgbClr val="3B3B3B"/>
-                </a:solidFill>
-              </a:rPr>
-              <a:t>verificaron contra pandas, sorted y NumPy antes</a:t>
-            </a:r>
-          </a:p>
-          <a:p>
-            <a:pPr algn="l">
-              <a:lnSpc>
-                <a:spcPct val="135000"/>
-              </a:lnSpc>
-              <a:spcAft>
-                <a:spcPts val="0"/>
-              </a:spcAft>
-            </a:pPr>
-            <a:r>
-              <a:rPr sz="1300" b="0">
-                <a:solidFill>
-                  <a:srgbClr val="3B3B3B"/>
-                </a:solidFill>
-              </a:rPr>
-              <a:t>de medir su tiempo.</a:t>
-            </a:r>
-          </a:p>
-          <a:p>
-            <a:pPr algn="l">
-              <a:lnSpc>
-                <a:spcPct val="135000"/>
-              </a:lnSpc>
-              <a:spcAft>
-                <a:spcPts val="0"/>
-              </a:spcAft>
-            </a:pPr>
-            <a:r>
-              <a:rPr sz="1300" b="0">
-                <a:solidFill>
-                  <a:srgbClr val="3B3B3B"/>
-                </a:solidFill>
-              </a:rPr>
-              <a:t/>
-            </a:r>
-          </a:p>
-          <a:p>
-            <a:pPr algn="l">
-              <a:lnSpc>
-                <a:spcPct val="135000"/>
-              </a:lnSpc>
-              <a:spcAft>
-                <a:spcPts val="0"/>
-              </a:spcAft>
-            </a:pPr>
-            <a:r>
-              <a:rPr sz="1300" b="0">
-                <a:solidFill>
-                  <a:srgbClr val="3B3B3B"/>
-                </a:solidFill>
-              </a:rPr>
-              <a:t>Las curvas log-log confirmaron las cotas:</a:t>
-            </a:r>
-          </a:p>
-          <a:p>
-            <a:pPr algn="l">
-              <a:lnSpc>
-                <a:spcPct val="135000"/>
-              </a:lnSpc>
-              <a:spcAft>
-                <a:spcPts val="0"/>
-              </a:spcAft>
-            </a:pPr>
-            <a:r>
-              <a:rPr sz="1300" b="0">
-                <a:solidFill>
-                  <a:srgbClr val="3B3B3B"/>
-                </a:solidFill>
-              </a:rPr>
-              <a:t>1,00 lineal · 1,08 merge sort · 2,04 inserción</a:t>
-            </a:r>
-          </a:p>
-        </p:txBody>
-      </p:sp>
-      <p:sp>
-        <p:nvSpPr>
-          <p:cNvPr id="24" name="TextBox 23"/>
-          <p:cNvSpPr txBox="1"/>
-          <p:nvPr/>
-        </p:nvSpPr>
-        <p:spPr>
-          <a:xfrm>
-            <a:off x="6309360" y="3611880"/>
-            <a:ext cx="4983480" cy="2011680"/>
-          </a:xfrm>
-          <a:prstGeom prst="rect">
-            <a:avLst/>
-          </a:prstGeom>
-          <a:noFill/>
-        </p:spPr>
-        <p:txBody>
-          <a:bodyPr wrap="square" lIns="0" rIns="0" tIns="0" bIns="0">
-            <a:spAutoFit/>
-          </a:bodyPr>
-          <a:lstStyle/>
-          <a:p>
-            <a:pPr algn="l">
-              <a:lnSpc>
-                <a:spcPct val="135000"/>
-              </a:lnSpc>
-              <a:spcAft>
-                <a:spcPts val="0"/>
-              </a:spcAft>
-            </a:pPr>
-            <a:r>
-              <a:rPr sz="1300" b="0">
-                <a:solidFill>
-                  <a:srgbClr val="3B3B3B"/>
-                </a:solidFill>
-              </a:rPr>
-              <a:t>Y mostraron dónde la teoría no basta:</a:t>
-            </a:r>
-          </a:p>
-          <a:p>
-            <a:pPr algn="l">
-              <a:lnSpc>
-                <a:spcPct val="135000"/>
-              </a:lnSpc>
-              <a:spcAft>
-                <a:spcPts val="0"/>
-              </a:spcAft>
-            </a:pPr>
-            <a:r>
-              <a:rPr sz="1300" b="0">
-                <a:solidFill>
-                  <a:srgbClr val="3B3B3B"/>
-                </a:solidFill>
-              </a:rPr>
-              <a:t/>
-            </a:r>
-          </a:p>
-          <a:p>
-            <a:pPr algn="l">
-              <a:lnSpc>
-                <a:spcPct val="135000"/>
-              </a:lnSpc>
-              <a:spcAft>
-                <a:spcPts val="0"/>
-              </a:spcAft>
-            </a:pPr>
-            <a:r>
-              <a:rPr sz="1300" b="0">
-                <a:solidFill>
-                  <a:srgbClr val="3B3B3B"/>
-                </a:solidFill>
-              </a:rPr>
-              <a:t>quickselect es O(n) en comparaciones pero escala</a:t>
-            </a:r>
-          </a:p>
-          <a:p>
-            <a:pPr algn="l">
-              <a:lnSpc>
-                <a:spcPct val="135000"/>
-              </a:lnSpc>
-              <a:spcAft>
-                <a:spcPts val="0"/>
-              </a:spcAft>
-            </a:pPr>
-            <a:r>
-              <a:rPr sz="1300" b="0">
-                <a:solidFill>
-                  <a:srgbClr val="3B3B3B"/>
-                </a:solidFill>
-              </a:rPr>
-              <a:t>como n^1,22, porque cada nivel de recursión asigna</a:t>
-            </a:r>
-          </a:p>
-          <a:p>
-            <a:pPr algn="l">
-              <a:lnSpc>
-                <a:spcPct val="135000"/>
-              </a:lnSpc>
-              <a:spcAft>
-                <a:spcPts val="0"/>
-              </a:spcAft>
-            </a:pPr>
-            <a:r>
-              <a:rPr sz="1300" b="0">
-                <a:solidFill>
-                  <a:srgbClr val="3B3B3B"/>
-                </a:solidFill>
-              </a:rPr>
-              <a:t>tres listas nuevas.</a:t>
-            </a:r>
-          </a:p>
-          <a:p>
-            <a:pPr algn="l">
-              <a:lnSpc>
-                <a:spcPct val="135000"/>
-              </a:lnSpc>
-              <a:spcAft>
-                <a:spcPts val="0"/>
-              </a:spcAft>
-            </a:pPr>
-            <a:r>
-              <a:rPr sz="1300" b="0">
-                <a:solidFill>
-                  <a:srgbClr val="3B3B3B"/>
-                </a:solidFill>
-              </a:rPr>
-              <a:t/>
-            </a:r>
-          </a:p>
-          <a:p>
-            <a:pPr algn="l">
-              <a:lnSpc>
-                <a:spcPct val="135000"/>
-              </a:lnSpc>
-              <a:spcAft>
-                <a:spcPts val="0"/>
-              </a:spcAft>
-            </a:pPr>
-            <a:r>
-              <a:rPr sz="1300" b="0">
-                <a:solidFill>
-                  <a:srgbClr val="3B3B3B"/>
-                </a:solidFill>
-              </a:rPr>
-              <a:t>La cota describe el crecimiento, no la constante.</a:t>
+              <a:t>Fuente: elaboración propia a partir de SIES, Titulados de Educación Superior 2020-2025.</a:t>
             </a:r>
           </a:p>
         </p:txBody>
@@ -8427,8 +8488,8 @@
 </p:sld>
 </file>
 
-<file path=ppt/slides/slide15.xml><?xml version="1.0" encoding="utf-8"?>
-<p:sld xmlns:a="http://schemas.openxmlformats.org/drawingml/2006/main" xmlns:p="http://schemas.openxmlformats.org/presentationml/2006/main" xmlns:r="http://schemas.openxmlformats.org/officeDocument/2006/relationships">
+<file path=ppt/slides/slide7.xml><?xml version="1.0" encoding="utf-8"?>
+<p:sld xmlns:a="http://schemas.openxmlformats.org/drawingml/2006/main" xmlns:r="http://schemas.openxmlformats.org/officeDocument/2006/relationships" xmlns:p="http://schemas.openxmlformats.org/presentationml/2006/main">
   <p:cSld>
     <p:spTree>
       <p:nvGrpSpPr>
@@ -8436,7 +8497,14 @@
         <p:cNvGrpSpPr/>
         <p:nvPr/>
       </p:nvGrpSpPr>
-      <p:grpSpPr/>
+      <p:grpSpPr>
+        <a:xfrm>
+          <a:off x="0" y="0"/>
+          <a:ext cx="0" cy="0"/>
+          <a:chOff x="0" y="0"/>
+          <a:chExt cx="0" cy="0"/>
+        </a:xfrm>
+      </p:grpSpPr>
       <p:grpSp>
         <p:nvGrpSpPr>
           <p:cNvPr id="7" name="Grupo 6">
@@ -8620,7 +8688,7 @@
               <p:nvPr/>
             </p:nvPicPr>
             <p:blipFill>
-              <a:blip r:embed="rId2"/>
+              <a:blip r:embed="rId3"/>
               <a:stretch>
                 <a:fillRect/>
               </a:stretch>
@@ -8718,63 +8786,35 @@
                 <a:ea typeface="Cambria" panose="02040503050406030204" pitchFamily="18" charset="0"/>
                 <a:cs typeface="Calibri Light" panose="020F0302020204030204" pitchFamily="34" charset="0"/>
               </a:rPr>
-              <a:t>CONCLUSIONES</a:t>
-            </a:r>
-          </a:p>
-        </p:txBody>
-      </p:sp>
-      <p:sp>
-        <p:nvSpPr>
-          <p:cNvPr id="15" name="Oval 14"/>
-          <p:cNvSpPr/>
+              <a:t>NINGUNA COHORTE ESTÁ COMPLETA</a:t>
+            </a:r>
+          </a:p>
+        </p:txBody>
+      </p:sp>
+      <p:pic>
+        <p:nvPicPr>
+          <p:cNvPr id="15" name="Picture 14" descr="f4_fig4_truncamiento.png"/>
+          <p:cNvPicPr>
+            <a:picLocks noChangeAspect="1"/>
+          </p:cNvPicPr>
           <p:nvPr/>
-        </p:nvSpPr>
+        </p:nvPicPr>
+        <p:blipFill>
+          <a:blip r:embed="rId4"/>
+          <a:stretch>
+            <a:fillRect/>
+          </a:stretch>
+        </p:blipFill>
         <p:spPr>
           <a:xfrm>
-            <a:off x="868680" y="1783080"/>
-            <a:ext cx="457200" cy="457200"/>
-          </a:xfrm>
-          <a:prstGeom prst="ellipse">
+            <a:off x="3401347" y="1600200"/>
+            <a:ext cx="5389305" cy="2880360"/>
+          </a:xfrm>
+          <a:prstGeom prst="rect">
             <a:avLst/>
           </a:prstGeom>
-          <a:solidFill>
-            <a:srgbClr val="20236D"/>
-          </a:solidFill>
-          <a:ln>
-            <a:noFill/>
-          </a:ln>
-          <a:effectLst/>
         </p:spPr>
-        <p:style>
-          <a:lnRef idx="1">
-            <a:schemeClr val="accent1"/>
-          </a:lnRef>
-          <a:fillRef idx="3">
-            <a:schemeClr val="accent1"/>
-          </a:fillRef>
-          <a:effectRef idx="2">
-            <a:schemeClr val="accent1"/>
-          </a:effectRef>
-          <a:fontRef idx="minor">
-            <a:schemeClr val="lt1"/>
-          </a:fontRef>
-        </p:style>
-        <p:txBody>
-          <a:bodyPr rtlCol="0" anchor="ctr"/>
-          <a:lstStyle/>
-          <a:p>
-            <a:pPr algn="ctr"/>
-            <a:r>
-              <a:rPr sz="1600" b="1">
-                <a:solidFill>
-                  <a:srgbClr val="FFFFFF"/>
-                </a:solidFill>
-              </a:rPr>
-              <a:t>1</a:t>
-            </a:r>
-          </a:p>
-        </p:txBody>
-      </p:sp>
+      </p:pic>
       <p:sp>
         <p:nvSpPr>
           <p:cNvPr id="16" name="TextBox 15"/>
@@ -8783,8 +8823,8 @@
         </p:nvSpPr>
         <p:spPr>
           <a:xfrm>
-            <a:off x="1554480" y="1801368"/>
-            <a:ext cx="9692640" cy="320040"/>
+            <a:off x="868680" y="4709160"/>
+            <a:ext cx="10424160" cy="1188720"/>
           </a:xfrm>
           <a:prstGeom prst="rect">
             <a:avLst/>
@@ -8792,26 +8832,62 @@
           <a:noFill/>
         </p:spPr>
         <p:txBody>
-          <a:bodyPr wrap="square" lIns="0" rIns="0" tIns="0" bIns="0">
+          <a:bodyPr wrap="square" lIns="0" tIns="0" rIns="0" bIns="0">
             <a:spAutoFit/>
           </a:bodyPr>
           <a:lstStyle/>
           <a:p>
             <a:pPr algn="l">
               <a:lnSpc>
-                <a:spcPct val="125000"/>
+                <a:spcPct val="130000"/>
               </a:lnSpc>
               <a:spcAft>
-                <a:spcPts val="0"/>
+                <a:spcPts val="400"/>
               </a:spcAft>
             </a:pPr>
             <a:r>
-              <a:rPr sz="1500" b="1">
-                <a:solidFill>
-                  <a:srgbClr val="20236D"/>
+              <a:rPr sz="1250" b="0">
+                <a:solidFill>
+                  <a:srgbClr val="3B3B3B"/>
                 </a:solidFill>
               </a:rPr>
-              <a:t>El rezago es masivo y estructural.</a:t>
+              <a:t>De las cohortes recientes solo se han titulado los más rápidos; de las antiguas, solo los más rezagados.</a:t>
+            </a:r>
+          </a:p>
+          <a:p>
+            <a:pPr algn="l">
+              <a:lnSpc>
+                <a:spcPct val="130000"/>
+              </a:lnSpc>
+              <a:spcAft>
+                <a:spcPts val="400"/>
+              </a:spcAft>
+            </a:pPr>
+            <a:r>
+              <a:rPr sz="1250" b="0">
+                <a:solidFill>
+                  <a:srgbClr val="3B3B3B"/>
+                </a:solidFill>
+              </a:rPr>
+              <a:t>Ninguna cohorte está completa, y lo están en direcciones opuestas: el descenso de la serie no es una mejora del sistema.</a:t>
+            </a:r>
+          </a:p>
+          <a:p>
+            <a:pPr algn="l">
+              <a:lnSpc>
+                <a:spcPct val="130000"/>
+              </a:lnSpc>
+              <a:spcAft>
+                <a:spcPts val="400"/>
+              </a:spcAft>
+            </a:pPr>
+            <a:r>
+              <a:rPr sz="1250" b="0">
+                <a:solidFill>
+                  <a:srgbClr val="3B3B3B"/>
+                </a:solidFill>
+              </a:rPr>
+              <a:t>Es una limitación del diseño de la fuente, no del procesamiento — y declararla es parte del resultado.</a:t>
             </a:r>
           </a:p>
         </p:txBody>
@@ -8824,8 +8900,8 @@
         </p:nvSpPr>
         <p:spPr>
           <a:xfrm>
-            <a:off x="1554480" y="2167128"/>
-            <a:ext cx="9692640" cy="457200"/>
+            <a:off x="868680" y="6053328"/>
+            <a:ext cx="10424160" cy="274320"/>
           </a:xfrm>
           <a:prstGeom prst="rect">
             <a:avLst/>
@@ -8833,7 +8909,7 @@
           <a:noFill/>
         </p:spPr>
         <p:txBody>
-          <a:bodyPr wrap="square" lIns="0" rIns="0" tIns="0" bIns="0">
+          <a:bodyPr wrap="square" lIns="0" tIns="0" rIns="0" bIns="0">
             <a:spAutoFit/>
           </a:bodyPr>
           <a:lstStyle/>
@@ -8847,414 +8923,12 @@
               </a:spcAft>
             </a:pPr>
             <a:r>
-              <a:rPr sz="1250" b="0">
-                <a:solidFill>
-                  <a:srgbClr val="3B3B3B"/>
+              <a:rPr sz="950" b="0">
+                <a:solidFill>
+                  <a:srgbClr val="808080"/>
                 </a:solidFill>
               </a:rPr>
-              <a:t>80 % egresa fuera de plazo; Derecho triplica a Educación; las mujeres se titulan antes en las diez áreas.</a:t>
-            </a:r>
-          </a:p>
-        </p:txBody>
-      </p:sp>
-      <p:sp>
-        <p:nvSpPr>
-          <p:cNvPr id="18" name="Oval 17"/>
-          <p:cNvSpPr/>
-          <p:nvPr/>
-        </p:nvSpPr>
-        <p:spPr>
-          <a:xfrm>
-            <a:off x="868680" y="2807208"/>
-            <a:ext cx="457200" cy="457200"/>
-          </a:xfrm>
-          <a:prstGeom prst="ellipse">
-            <a:avLst/>
-          </a:prstGeom>
-          <a:solidFill>
-            <a:srgbClr val="20236D"/>
-          </a:solidFill>
-          <a:ln>
-            <a:noFill/>
-          </a:ln>
-          <a:effectLst/>
-        </p:spPr>
-        <p:style>
-          <a:lnRef idx="1">
-            <a:schemeClr val="accent1"/>
-          </a:lnRef>
-          <a:fillRef idx="3">
-            <a:schemeClr val="accent1"/>
-          </a:fillRef>
-          <a:effectRef idx="2">
-            <a:schemeClr val="accent1"/>
-          </a:effectRef>
-          <a:fontRef idx="minor">
-            <a:schemeClr val="lt1"/>
-          </a:fontRef>
-        </p:style>
-        <p:txBody>
-          <a:bodyPr rtlCol="0" anchor="ctr"/>
-          <a:lstStyle/>
-          <a:p>
-            <a:pPr algn="ctr"/>
-            <a:r>
-              <a:rPr sz="1600" b="1">
-                <a:solidFill>
-                  <a:srgbClr val="FFFFFF"/>
-                </a:solidFill>
-              </a:rPr>
-              <a:t>2</a:t>
-            </a:r>
-          </a:p>
-        </p:txBody>
-      </p:sp>
-      <p:sp>
-        <p:nvSpPr>
-          <p:cNvPr id="19" name="TextBox 18"/>
-          <p:cNvSpPr txBox="1"/>
-          <p:nvPr/>
-        </p:nvSpPr>
-        <p:spPr>
-          <a:xfrm>
-            <a:off x="1554480" y="2825496"/>
-            <a:ext cx="9692640" cy="320040"/>
-          </a:xfrm>
-          <a:prstGeom prst="rect">
-            <a:avLst/>
-          </a:prstGeom>
-          <a:noFill/>
-        </p:spPr>
-        <p:txBody>
-          <a:bodyPr wrap="square" lIns="0" rIns="0" tIns="0" bIns="0">
-            <a:spAutoFit/>
-          </a:bodyPr>
-          <a:lstStyle/>
-          <a:p>
-            <a:pPr algn="l">
-              <a:lnSpc>
-                <a:spcPct val="125000"/>
-              </a:lnSpc>
-              <a:spcAft>
-                <a:spcPts val="0"/>
-              </a:spcAft>
-            </a:pPr>
-            <a:r>
-              <a:rPr sz="1500" b="1">
-                <a:solidFill>
-                  <a:srgbClr val="20236D"/>
-                </a:solidFill>
-              </a:rPr>
-              <a:t>La pandemia desplazó, no deterioró.</a:t>
-            </a:r>
-          </a:p>
-        </p:txBody>
-      </p:sp>
-      <p:sp>
-        <p:nvSpPr>
-          <p:cNvPr id="20" name="TextBox 19"/>
-          <p:cNvSpPr txBox="1"/>
-          <p:nvPr/>
-        </p:nvSpPr>
-        <p:spPr>
-          <a:xfrm>
-            <a:off x="1554480" y="3191256"/>
-            <a:ext cx="9692640" cy="457200"/>
-          </a:xfrm>
-          <a:prstGeom prst="rect">
-            <a:avLst/>
-          </a:prstGeom>
-          <a:noFill/>
-        </p:spPr>
-        <p:txBody>
-          <a:bodyPr wrap="square" lIns="0" rIns="0" tIns="0" bIns="0">
-            <a:spAutoFit/>
-          </a:bodyPr>
-          <a:lstStyle/>
-          <a:p>
-            <a:pPr algn="l">
-              <a:lnSpc>
-                <a:spcPct val="125000"/>
-              </a:lnSpc>
-              <a:spcAft>
-                <a:spcPts val="0"/>
-              </a:spcAft>
-            </a:pPr>
-            <a:r>
-              <a:rPr sz="1250" b="0">
-                <a:solidFill>
-                  <a:srgbClr val="3B3B3B"/>
-                </a:solidFill>
-              </a:rPr>
-              <a:t>La caída de 2020 y el máximo de 2021 son el mismo fenómeno visto en dos momentos.</a:t>
-            </a:r>
-          </a:p>
-        </p:txBody>
-      </p:sp>
-      <p:sp>
-        <p:nvSpPr>
-          <p:cNvPr id="21" name="Oval 20"/>
-          <p:cNvSpPr/>
-          <p:nvPr/>
-        </p:nvSpPr>
-        <p:spPr>
-          <a:xfrm>
-            <a:off x="868680" y="3831336"/>
-            <a:ext cx="457200" cy="457200"/>
-          </a:xfrm>
-          <a:prstGeom prst="ellipse">
-            <a:avLst/>
-          </a:prstGeom>
-          <a:solidFill>
-            <a:srgbClr val="20236D"/>
-          </a:solidFill>
-          <a:ln>
-            <a:noFill/>
-          </a:ln>
-          <a:effectLst/>
-        </p:spPr>
-        <p:style>
-          <a:lnRef idx="1">
-            <a:schemeClr val="accent1"/>
-          </a:lnRef>
-          <a:fillRef idx="3">
-            <a:schemeClr val="accent1"/>
-          </a:fillRef>
-          <a:effectRef idx="2">
-            <a:schemeClr val="accent1"/>
-          </a:effectRef>
-          <a:fontRef idx="minor">
-            <a:schemeClr val="lt1"/>
-          </a:fontRef>
-        </p:style>
-        <p:txBody>
-          <a:bodyPr rtlCol="0" anchor="ctr"/>
-          <a:lstStyle/>
-          <a:p>
-            <a:pPr algn="ctr"/>
-            <a:r>
-              <a:rPr sz="1600" b="1">
-                <a:solidFill>
-                  <a:srgbClr val="FFFFFF"/>
-                </a:solidFill>
-              </a:rPr>
-              <a:t>3</a:t>
-            </a:r>
-          </a:p>
-        </p:txBody>
-      </p:sp>
-      <p:sp>
-        <p:nvSpPr>
-          <p:cNvPr id="22" name="TextBox 21"/>
-          <p:cNvSpPr txBox="1"/>
-          <p:nvPr/>
-        </p:nvSpPr>
-        <p:spPr>
-          <a:xfrm>
-            <a:off x="1554480" y="3849624"/>
-            <a:ext cx="9692640" cy="320040"/>
-          </a:xfrm>
-          <a:prstGeom prst="rect">
-            <a:avLst/>
-          </a:prstGeom>
-          <a:noFill/>
-        </p:spPr>
-        <p:txBody>
-          <a:bodyPr wrap="square" lIns="0" rIns="0" tIns="0" bIns="0">
-            <a:spAutoFit/>
-          </a:bodyPr>
-          <a:lstStyle/>
-          <a:p>
-            <a:pPr algn="l">
-              <a:lnSpc>
-                <a:spcPct val="125000"/>
-              </a:lnSpc>
-              <a:spcAft>
-                <a:spcPts val="0"/>
-              </a:spcAft>
-            </a:pPr>
-            <a:r>
-              <a:rPr sz="1500" b="1">
-                <a:solidFill>
-                  <a:srgbClr val="20236D"/>
-                </a:solidFill>
-              </a:rPr>
-              <a:t>Los registros no explican el caso individual.</a:t>
-            </a:r>
-          </a:p>
-        </p:txBody>
-      </p:sp>
-      <p:sp>
-        <p:nvSpPr>
-          <p:cNvPr id="23" name="TextBox 22"/>
-          <p:cNvSpPr txBox="1"/>
-          <p:nvPr/>
-        </p:nvSpPr>
-        <p:spPr>
-          <a:xfrm>
-            <a:off x="1554480" y="4215384"/>
-            <a:ext cx="9692640" cy="457200"/>
-          </a:xfrm>
-          <a:prstGeom prst="rect">
-            <a:avLst/>
-          </a:prstGeom>
-          <a:noFill/>
-        </p:spPr>
-        <p:txBody>
-          <a:bodyPr wrap="square" lIns="0" rIns="0" tIns="0" bIns="0">
-            <a:spAutoFit/>
-          </a:bodyPr>
-          <a:lstStyle/>
-          <a:p>
-            <a:pPr algn="l">
-              <a:lnSpc>
-                <a:spcPct val="125000"/>
-              </a:lnSpc>
-              <a:spcAft>
-                <a:spcPts val="0"/>
-              </a:spcAft>
-            </a:pPr>
-            <a:r>
-              <a:rPr sz="1250" b="0">
-                <a:solidFill>
-                  <a:srgbClr val="3B3B3B"/>
-                </a:solidFill>
-              </a:rPr>
-              <a:t>R² de 0,085: el rezago depende de trayectorias personales que la fuente no registra. Es un resultado, no un fracaso.</a:t>
-            </a:r>
-          </a:p>
-        </p:txBody>
-      </p:sp>
-      <p:sp>
-        <p:nvSpPr>
-          <p:cNvPr id="24" name="Oval 23"/>
-          <p:cNvSpPr/>
-          <p:nvPr/>
-        </p:nvSpPr>
-        <p:spPr>
-          <a:xfrm>
-            <a:off x="868680" y="4855464"/>
-            <a:ext cx="457200" cy="457200"/>
-          </a:xfrm>
-          <a:prstGeom prst="ellipse">
-            <a:avLst/>
-          </a:prstGeom>
-          <a:solidFill>
-            <a:srgbClr val="20236D"/>
-          </a:solidFill>
-          <a:ln>
-            <a:noFill/>
-          </a:ln>
-          <a:effectLst/>
-        </p:spPr>
-        <p:style>
-          <a:lnRef idx="1">
-            <a:schemeClr val="accent1"/>
-          </a:lnRef>
-          <a:fillRef idx="3">
-            <a:schemeClr val="accent1"/>
-          </a:fillRef>
-          <a:effectRef idx="2">
-            <a:schemeClr val="accent1"/>
-          </a:effectRef>
-          <a:fontRef idx="minor">
-            <a:schemeClr val="lt1"/>
-          </a:fontRef>
-        </p:style>
-        <p:txBody>
-          <a:bodyPr rtlCol="0" anchor="ctr"/>
-          <a:lstStyle/>
-          <a:p>
-            <a:pPr algn="ctr"/>
-            <a:r>
-              <a:rPr sz="1600" b="1">
-                <a:solidFill>
-                  <a:srgbClr val="FFFFFF"/>
-                </a:solidFill>
-              </a:rPr>
-              <a:t>4</a:t>
-            </a:r>
-          </a:p>
-        </p:txBody>
-      </p:sp>
-      <p:sp>
-        <p:nvSpPr>
-          <p:cNvPr id="25" name="TextBox 24"/>
-          <p:cNvSpPr txBox="1"/>
-          <p:nvPr/>
-        </p:nvSpPr>
-        <p:spPr>
-          <a:xfrm>
-            <a:off x="1554480" y="4873752"/>
-            <a:ext cx="9692640" cy="320040"/>
-          </a:xfrm>
-          <a:prstGeom prst="rect">
-            <a:avLst/>
-          </a:prstGeom>
-          <a:noFill/>
-        </p:spPr>
-        <p:txBody>
-          <a:bodyPr wrap="square" lIns="0" rIns="0" tIns="0" bIns="0">
-            <a:spAutoFit/>
-          </a:bodyPr>
-          <a:lstStyle/>
-          <a:p>
-            <a:pPr algn="l">
-              <a:lnSpc>
-                <a:spcPct val="125000"/>
-              </a:lnSpc>
-              <a:spcAft>
-                <a:spcPts val="0"/>
-              </a:spcAft>
-            </a:pPr>
-            <a:r>
-              <a:rPr sz="1500" b="1">
-                <a:solidFill>
-                  <a:srgbClr val="20236D"/>
-                </a:solidFill>
-              </a:rPr>
-              <a:t>Todo el proyecto es reproducible.</a:t>
-            </a:r>
-          </a:p>
-        </p:txBody>
-      </p:sp>
-      <p:sp>
-        <p:nvSpPr>
-          <p:cNvPr id="26" name="TextBox 25"/>
-          <p:cNvSpPr txBox="1"/>
-          <p:nvPr/>
-        </p:nvSpPr>
-        <p:spPr>
-          <a:xfrm>
-            <a:off x="1554480" y="5239512"/>
-            <a:ext cx="9692640" cy="457200"/>
-          </a:xfrm>
-          <a:prstGeom prst="rect">
-            <a:avLst/>
-          </a:prstGeom>
-          <a:noFill/>
-        </p:spPr>
-        <p:txBody>
-          <a:bodyPr wrap="square" lIns="0" rIns="0" tIns="0" bIns="0">
-            <a:spAutoFit/>
-          </a:bodyPr>
-          <a:lstStyle/>
-          <a:p>
-            <a:pPr algn="l">
-              <a:lnSpc>
-                <a:spcPct val="125000"/>
-              </a:lnSpc>
-              <a:spcAft>
-                <a:spcPts val="0"/>
-              </a:spcAft>
-            </a:pPr>
-            <a:r>
-              <a:rPr sz="1250" b="0">
-                <a:solidFill>
-                  <a:srgbClr val="3B3B3B"/>
-                </a:solidFill>
-              </a:rPr>
-              <a:t>Cuatro comandos, 73 pruebas, 45 commits con historial verificable y cada cifra rastreable a su archivo.</a:t>
+              <a:t>Fuente: elaboración propia a partir de SIES, Titulados de Educación Superior 2020-2025.</a:t>
             </a:r>
           </a:p>
         </p:txBody>
@@ -9267,23 +8941,9 @@
 </p:sld>
 </file>
 
-<file path=ppt/slides/slide7.xml><?xml version="1.0" encoding="utf-8"?>
+<file path=ppt/slides/slide8.xml><?xml version="1.0" encoding="utf-8"?>
 <p:sld xmlns:a="http://schemas.openxmlformats.org/drawingml/2006/main" xmlns:r="http://schemas.openxmlformats.org/officeDocument/2006/relationships" xmlns:p="http://schemas.openxmlformats.org/presentationml/2006/main">
   <p:cSld>
-    <p:bg>
-      <p:bgPr>
-        <a:blipFill dpi="0" rotWithShape="1">
-          <a:blip r:embed="rId2">
-            <a:lum/>
-          </a:blip>
-          <a:srcRect/>
-          <a:stretch>
-            <a:fillRect/>
-          </a:stretch>
-        </a:blipFill>
-        <a:effectLst/>
-      </p:bgPr>
-    </p:bg>
     <p:spTree>
       <p:nvGrpSpPr>
         <p:cNvPr id="1" name=""/>
@@ -9298,118 +8958,6 @@
           <a:chExt cx="0" cy="0"/>
         </a:xfrm>
       </p:grpSpPr>
-      <p:pic>
-        <p:nvPicPr>
-          <p:cNvPr id="17" name="Imagen 16">
-            <a:extLst>
-              <a:ext uri="{FF2B5EF4-FFF2-40B4-BE49-F238E27FC236}">
-                <a16:creationId xmlns:a16="http://schemas.microsoft.com/office/drawing/2014/main" id="{D903B572-7AB0-4369-C487-D62538C3B61C}"/>
-              </a:ext>
-            </a:extLst>
-          </p:cNvPr>
-          <p:cNvPicPr>
-            <a:picLocks noChangeAspect="1"/>
-          </p:cNvPicPr>
-          <p:nvPr/>
-        </p:nvPicPr>
-        <p:blipFill>
-          <a:blip r:embed="rId3"/>
-          <a:stretch>
-            <a:fillRect/>
-          </a:stretch>
-        </p:blipFill>
-        <p:spPr>
-          <a:xfrm>
-            <a:off x="5232400" y="2606876"/>
-            <a:ext cx="1727200" cy="1460500"/>
-          </a:xfrm>
-          <a:prstGeom prst="rect">
-            <a:avLst/>
-          </a:prstGeom>
-        </p:spPr>
-      </p:pic>
-      <p:sp>
-        <p:nvSpPr>
-          <p:cNvPr id="18" name="TextBox 17"/>
-          <p:cNvSpPr txBox="1"/>
-          <p:nvPr/>
-        </p:nvSpPr>
-        <p:spPr>
-          <a:xfrm>
-            <a:off x="2743200" y="4892040"/>
-            <a:ext cx="6702552" cy="1005840"/>
-          </a:xfrm>
-          <a:prstGeom prst="rect">
-            <a:avLst/>
-          </a:prstGeom>
-          <a:noFill/>
-        </p:spPr>
-        <p:txBody>
-          <a:bodyPr wrap="square" lIns="0" rIns="0" tIns="0" bIns="0">
-            <a:spAutoFit/>
-          </a:bodyPr>
-          <a:lstStyle/>
-          <a:p>
-            <a:pPr algn="ctr">
-              <a:lnSpc>
-                <a:spcPct val="150000"/>
-              </a:lnSpc>
-              <a:spcAft>
-                <a:spcPts val="0"/>
-              </a:spcAft>
-            </a:pPr>
-            <a:r>
-              <a:rPr sz="1200" b="0">
-                <a:solidFill>
-                  <a:srgbClr val="FFFFFF"/>
-                </a:solidFill>
-              </a:rPr>
-              <a:t>Incorporar la matrícula para ver la deserción  ·  Modelos de supervivencia para datos censurados</a:t>
-            </a:r>
-          </a:p>
-          <a:p>
-            <a:pPr algn="ctr">
-              <a:lnSpc>
-                <a:spcPct val="150000"/>
-              </a:lnSpc>
-              <a:spcAft>
-                <a:spcPts val="0"/>
-              </a:spcAft>
-            </a:pPr>
-            <a:r>
-              <a:rPr sz="1200" b="0">
-                <a:solidFill>
-                  <a:srgbClr val="FFFFFF"/>
-                </a:solidFill>
-              </a:rPr>
-              <a:t>github.com/santunez75/proyecto-titulados</a:t>
-            </a:r>
-          </a:p>
-        </p:txBody>
-      </p:sp>
-    </p:spTree>
-    <p:extLst>
-      <p:ext uri="{BB962C8B-B14F-4D97-AF65-F5344CB8AC3E}">
-        <p14:creationId xmlns:p14="http://schemas.microsoft.com/office/powerpoint/2010/main" val="2207412846"/>
-      </p:ext>
-    </p:extLst>
-  </p:cSld>
-  <p:clrMapOvr>
-    <a:overrideClrMapping bg1="dk1" tx1="lt1" bg2="dk2" tx2="lt2" accent1="accent1" accent2="accent2" accent3="accent3" accent4="accent4" accent5="accent5" accent6="accent6" hlink="hlink" folHlink="folHlink"/>
-  </p:clrMapOvr>
-</p:sld>
-</file>
-
-<file path=ppt/slides/slide8.xml><?xml version="1.0" encoding="utf-8"?>
-<p:sld xmlns:a="http://schemas.openxmlformats.org/drawingml/2006/main" xmlns:p="http://schemas.openxmlformats.org/presentationml/2006/main" xmlns:r="http://schemas.openxmlformats.org/officeDocument/2006/relationships">
-  <p:cSld>
-    <p:spTree>
-      <p:nvGrpSpPr>
-        <p:cNvPr id="1" name=""/>
-        <p:cNvGrpSpPr/>
-        <p:nvPr/>
-      </p:nvGrpSpPr>
-      <p:grpSpPr/>
       <p:grpSp>
         <p:nvGrpSpPr>
           <p:cNvPr id="7" name="Grupo 6">
@@ -9593,7 +9141,7 @@
               <p:nvPr/>
             </p:nvPicPr>
             <p:blipFill>
-              <a:blip r:embed="rId2"/>
+              <a:blip r:embed="rId3"/>
               <a:stretch>
                 <a:fillRect/>
               </a:stretch>
@@ -9691,7 +9239,7 @@
                 <a:ea typeface="Cambria" panose="02040503050406030204" pitchFamily="18" charset="0"/>
                 <a:cs typeface="Calibri Light" panose="020F0302020204030204" pitchFamily="34" charset="0"/>
               </a:rPr>
-              <a:t>EL PROBLEMA</a:t>
+              <a:t>EL RIGOR DETRÁS DE LAS CIFRAS</a:t>
             </a:r>
           </a:p>
         </p:txBody>
@@ -9704,8 +9252,8 @@
         </p:nvSpPr>
         <p:spPr>
           <a:xfrm>
-            <a:off x="868680" y="1828800"/>
-            <a:ext cx="5577840" cy="3108960"/>
+            <a:off x="868680" y="1737360"/>
+            <a:ext cx="2395728" cy="640080"/>
           </a:xfrm>
           <a:prstGeom prst="rect">
             <a:avLst/>
@@ -9713,210 +9261,40 @@
           <a:noFill/>
         </p:spPr>
         <p:txBody>
-          <a:bodyPr wrap="square" lIns="0" rIns="0" tIns="0" bIns="0">
+          <a:bodyPr wrap="square" lIns="0" tIns="0" rIns="0" bIns="0">
             <a:spAutoFit/>
           </a:bodyPr>
           <a:lstStyle/>
           <a:p>
-            <a:pPr algn="l">
-              <a:lnSpc>
-                <a:spcPct val="135000"/>
+            <a:pPr algn="ctr">
+              <a:lnSpc>
+                <a:spcPct val="125000"/>
               </a:lnSpc>
               <a:spcAft>
-                <a:spcPts val="600"/>
+                <a:spcPts val="0"/>
               </a:spcAft>
             </a:pPr>
             <a:r>
-              <a:rPr sz="1500" b="0">
-                <a:solidFill>
-                  <a:srgbClr val="3B3B3B"/>
+              <a:rPr sz="3600" b="1">
+                <a:solidFill>
+                  <a:srgbClr val="1E7A46"/>
                 </a:solidFill>
               </a:rPr>
-              <a:t>Cada carrera en Chile declara una duración teórica.</a:t>
-            </a:r>
-          </a:p>
-          <a:p>
-            <a:pPr algn="l">
-              <a:lnSpc>
-                <a:spcPct val="135000"/>
-              </a:lnSpc>
-              <a:spcAft>
-                <a:spcPts val="600"/>
-              </a:spcAft>
-            </a:pPr>
-            <a:r>
-              <a:rPr sz="1500" b="0">
-                <a:solidFill>
-                  <a:srgbClr val="3B3B3B"/>
-                </a:solidFill>
-              </a:rPr>
-              <a:t>Esa cifra define expectativas de gasto y determina la</a:t>
-            </a:r>
-          </a:p>
-          <a:p>
-            <a:pPr algn="l">
-              <a:lnSpc>
-                <a:spcPct val="135000"/>
-              </a:lnSpc>
-              <a:spcAft>
-                <a:spcPts val="600"/>
-              </a:spcAft>
-            </a:pPr>
-            <a:r>
-              <a:rPr sz="1500" b="0">
-                <a:solidFill>
-                  <a:srgbClr val="3B3B3B"/>
-                </a:solidFill>
-              </a:rPr>
-              <a:t>duración de becas y créditos estatales.</a:t>
-            </a:r>
-          </a:p>
-          <a:p>
-            <a:pPr algn="l">
-              <a:lnSpc>
-                <a:spcPct val="135000"/>
-              </a:lnSpc>
-              <a:spcAft>
-                <a:spcPts val="600"/>
-              </a:spcAft>
-            </a:pPr>
-            <a:r>
-              <a:rPr sz="1500" b="0">
-                <a:solidFill>
-                  <a:srgbClr val="3B3B3B"/>
-                </a:solidFill>
-              </a:rPr>
-              <a:t/>
-            </a:r>
-          </a:p>
-          <a:p>
-            <a:pPr algn="l">
-              <a:lnSpc>
-                <a:spcPct val="135000"/>
-              </a:lnSpc>
-              <a:spcAft>
-                <a:spcPts val="600"/>
-              </a:spcAft>
-            </a:pPr>
-            <a:r>
-              <a:rPr sz="1500" b="0">
-                <a:solidFill>
-                  <a:srgbClr val="3B3B3B"/>
-                </a:solidFill>
-              </a:rPr>
-              <a:t>Nadie publica cuánto se tarda en realidad.</a:t>
-            </a:r>
-          </a:p>
-          <a:p>
-            <a:pPr algn="l">
-              <a:lnSpc>
-                <a:spcPct val="135000"/>
-              </a:lnSpc>
-              <a:spcAft>
-                <a:spcPts val="600"/>
-              </a:spcAft>
-            </a:pPr>
-            <a:r>
-              <a:rPr sz="1500" b="0">
-                <a:solidFill>
-                  <a:srgbClr val="3B3B3B"/>
-                </a:solidFill>
-              </a:rPr>
-              <a:t/>
-            </a:r>
-          </a:p>
-          <a:p>
-            <a:pPr algn="l">
-              <a:lnSpc>
-                <a:spcPct val="135000"/>
-              </a:lnSpc>
-              <a:spcAft>
-                <a:spcPts val="600"/>
-              </a:spcAft>
-            </a:pPr>
-            <a:r>
-              <a:rPr sz="1500" b="0">
-                <a:solidFill>
-                  <a:srgbClr val="3B3B3B"/>
-                </a:solidFill>
-              </a:rPr>
-              <a:t>La diferencia —la sobreduración— no existe como</a:t>
-            </a:r>
-          </a:p>
-          <a:p>
-            <a:pPr algn="l">
-              <a:lnSpc>
-                <a:spcPct val="135000"/>
-              </a:lnSpc>
-              <a:spcAft>
-                <a:spcPts val="600"/>
-              </a:spcAft>
-            </a:pPr>
-            <a:r>
-              <a:rPr sz="1500" b="0">
-                <a:solidFill>
-                  <a:srgbClr val="3B3B3B"/>
-                </a:solidFill>
-              </a:rPr>
-              <a:t>variable en ningún registro oficial.</a:t>
-            </a:r>
-          </a:p>
-        </p:txBody>
-      </p:sp>
-      <p:sp>
-        <p:nvSpPr>
-          <p:cNvPr id="16" name="Rectangle 15"/>
-          <p:cNvSpPr/>
-          <p:nvPr/>
-        </p:nvSpPr>
-        <p:spPr>
-          <a:xfrm>
-            <a:off x="6720840" y="2057400"/>
-            <a:ext cx="4343400" cy="1600200"/>
-          </a:xfrm>
-          <a:prstGeom prst="rect">
-            <a:avLst/>
-          </a:prstGeom>
-          <a:solidFill>
-            <a:srgbClr val="20236D"/>
-          </a:solidFill>
-          <a:ln>
-            <a:noFill/>
-          </a:ln>
-          <a:effectLst/>
-        </p:spPr>
-        <p:style>
-          <a:lnRef idx="1">
-            <a:schemeClr val="accent1"/>
-          </a:lnRef>
-          <a:fillRef idx="3">
-            <a:schemeClr val="accent1"/>
-          </a:fillRef>
-          <a:effectRef idx="2">
-            <a:schemeClr val="accent1"/>
-          </a:effectRef>
-          <a:fontRef idx="minor">
-            <a:schemeClr val="lt1"/>
-          </a:fontRef>
-        </p:style>
-        <p:txBody>
-          <a:bodyPr rtlCol="0" anchor="ctr"/>
-          <a:lstStyle/>
-          <a:p>
-            <a:pPr algn="ctr"/>
-          </a:p>
-        </p:txBody>
-      </p:sp>
-      <p:sp>
-        <p:nvSpPr>
-          <p:cNvPr id="17" name="TextBox 16"/>
+              <a:t>73</a:t>
+            </a:r>
+          </a:p>
+        </p:txBody>
+      </p:sp>
+      <p:sp>
+        <p:nvSpPr>
+          <p:cNvPr id="16" name="TextBox 15"/>
           <p:cNvSpPr txBox="1"/>
           <p:nvPr/>
         </p:nvSpPr>
         <p:spPr>
           <a:xfrm>
-            <a:off x="6995160" y="2286000"/>
-            <a:ext cx="3794760" cy="1188720"/>
+            <a:off x="868680" y="2395728"/>
+            <a:ext cx="2395728" cy="502920"/>
           </a:xfrm>
           <a:prstGeom prst="rect">
             <a:avLst/>
@@ -9924,76 +9302,76 @@
           <a:noFill/>
         </p:spPr>
         <p:txBody>
-          <a:bodyPr wrap="square" lIns="0" rIns="0" tIns="0" bIns="0">
+          <a:bodyPr wrap="square" lIns="0" tIns="0" rIns="0" bIns="0">
             <a:spAutoFit/>
           </a:bodyPr>
           <a:lstStyle/>
           <a:p>
-            <a:pPr algn="l">
-              <a:lnSpc>
-                <a:spcPct val="130000"/>
+            <a:pPr algn="ctr">
+              <a:lnSpc>
+                <a:spcPct val="115000"/>
               </a:lnSpc>
               <a:spcAft>
                 <a:spcPts val="0"/>
               </a:spcAft>
             </a:pPr>
             <a:r>
-              <a:rPr sz="1450" b="1">
-                <a:solidFill>
-                  <a:srgbClr val="FFFFFF"/>
+              <a:rPr sz="1150" b="0">
+                <a:solidFill>
+                  <a:srgbClr val="3B3B3B"/>
                 </a:solidFill>
               </a:rPr>
-              <a:t>¿Se puede reconstruir la duración real</a:t>
-            </a:r>
-          </a:p>
-          <a:p>
-            <a:pPr algn="l">
-              <a:lnSpc>
-                <a:spcPct val="130000"/>
+              <a:t>pruebas automatizadas</a:t>
+            </a:r>
+          </a:p>
+          <a:p>
+            <a:pPr algn="ctr">
+              <a:lnSpc>
+                <a:spcPct val="115000"/>
               </a:lnSpc>
               <a:spcAft>
                 <a:spcPts val="0"/>
               </a:spcAft>
             </a:pPr>
             <a:r>
-              <a:rPr sz="1450" b="1">
-                <a:solidFill>
-                  <a:srgbClr val="FFFFFF"/>
+              <a:rPr sz="1150" b="0">
+                <a:solidFill>
+                  <a:srgbClr val="3B3B3B"/>
                 </a:solidFill>
               </a:rPr>
-              <a:t>desde los registros administrativos</a:t>
-            </a:r>
-          </a:p>
-          <a:p>
-            <a:pPr algn="l">
-              <a:lnSpc>
-                <a:spcPct val="130000"/>
+              <a:t>de casos normales,</a:t>
+            </a:r>
+          </a:p>
+          <a:p>
+            <a:pPr algn="ctr">
+              <a:lnSpc>
+                <a:spcPct val="115000"/>
               </a:lnSpc>
               <a:spcAft>
                 <a:spcPts val="0"/>
               </a:spcAft>
             </a:pPr>
             <a:r>
-              <a:rPr sz="1450" b="1">
-                <a:solidFill>
-                  <a:srgbClr val="FFFFFF"/>
+              <a:rPr sz="1150" b="0">
+                <a:solidFill>
+                  <a:srgbClr val="3B3B3B"/>
                 </a:solidFill>
               </a:rPr>
-              <a:t>y caracterizar el rezago con ella?</a:t>
-            </a:r>
-          </a:p>
-        </p:txBody>
-      </p:sp>
-      <p:sp>
-        <p:nvSpPr>
-          <p:cNvPr id="18" name="TextBox 17"/>
+              <a:t>límite y excepciones</a:t>
+            </a:r>
+          </a:p>
+        </p:txBody>
+      </p:sp>
+      <p:sp>
+        <p:nvSpPr>
+          <p:cNvPr id="17" name="TextBox 16"/>
           <p:cNvSpPr txBox="1"/>
           <p:nvPr/>
         </p:nvSpPr>
         <p:spPr>
           <a:xfrm>
-            <a:off x="6720840" y="1783080"/>
-            <a:ext cx="4343400" cy="274320"/>
+            <a:off x="3547872" y="1737360"/>
+            <a:ext cx="2395728" cy="640080"/>
           </a:xfrm>
           <a:prstGeom prst="rect">
             <a:avLst/>
@@ -10001,12 +9379,12 @@
           <a:noFill/>
         </p:spPr>
         <p:txBody>
-          <a:bodyPr wrap="square" lIns="0" rIns="0" tIns="0" bIns="0">
+          <a:bodyPr wrap="square" lIns="0" tIns="0" rIns="0" bIns="0">
             <a:spAutoFit/>
           </a:bodyPr>
           <a:lstStyle/>
           <a:p>
-            <a:pPr algn="l">
+            <a:pPr algn="ctr">
               <a:lnSpc>
                 <a:spcPct val="125000"/>
               </a:lnSpc>
@@ -10015,26 +9393,26 @@
               </a:spcAft>
             </a:pPr>
             <a:r>
-              <a:rPr sz="1100" b="1">
-                <a:solidFill>
-                  <a:srgbClr val="20236D"/>
+              <a:rPr sz="3600" b="1">
+                <a:solidFill>
+                  <a:srgbClr val="1E7A46"/>
                 </a:solidFill>
               </a:rPr>
-              <a:t>LA PREGUNTA TÉCNICA</a:t>
-            </a:r>
-          </a:p>
-        </p:txBody>
-      </p:sp>
-      <p:sp>
-        <p:nvSpPr>
-          <p:cNvPr id="19" name="TextBox 18"/>
+              <a:t>9</a:t>
+            </a:r>
+          </a:p>
+        </p:txBody>
+      </p:sp>
+      <p:sp>
+        <p:nvSpPr>
+          <p:cNvPr id="18" name="TextBox 17"/>
           <p:cNvSpPr txBox="1"/>
           <p:nvPr/>
         </p:nvSpPr>
         <p:spPr>
           <a:xfrm>
-            <a:off x="6720840" y="3977639"/>
-            <a:ext cx="4343400" cy="914400"/>
+            <a:off x="3547872" y="2395728"/>
+            <a:ext cx="2395728" cy="502920"/>
           </a:xfrm>
           <a:prstGeom prst="rect">
             <a:avLst/>
@@ -10042,44 +9420,569 @@
           <a:noFill/>
         </p:spPr>
         <p:txBody>
-          <a:bodyPr wrap="square" lIns="0" rIns="0" tIns="0" bIns="0">
+          <a:bodyPr wrap="square" lIns="0" tIns="0" rIns="0" bIns="0">
             <a:spAutoFit/>
           </a:bodyPr>
           <a:lstStyle/>
           <a:p>
-            <a:pPr algn="l">
-              <a:lnSpc>
-                <a:spcPct val="130000"/>
+            <a:pPr algn="ctr">
+              <a:lnSpc>
+                <a:spcPct val="115000"/>
               </a:lnSpc>
               <a:spcAft>
                 <a:spcPts val="0"/>
               </a:spcAft>
             </a:pPr>
             <a:r>
-              <a:rPr sz="1200" b="0">
-                <a:solidFill>
-                  <a:srgbClr val="808080"/>
+              <a:rPr sz="1150" b="0">
+                <a:solidFill>
+                  <a:srgbClr val="3B3B3B"/>
                 </a:solidFill>
               </a:rPr>
-              <a:t>Fuente: SIES, Titulados de Educación Superior</a:t>
-            </a:r>
-          </a:p>
-          <a:p>
-            <a:pPr algn="l">
-              <a:lnSpc>
-                <a:spcPct val="130000"/>
+              <a:t>reglas de coherencia</a:t>
+            </a:r>
+          </a:p>
+          <a:p>
+            <a:pPr algn="ctr">
+              <a:lnSpc>
+                <a:spcPct val="115000"/>
               </a:lnSpc>
               <a:spcAft>
                 <a:spcPts val="0"/>
               </a:spcAft>
             </a:pPr>
             <a:r>
-              <a:rPr sz="1200" b="0">
-                <a:solidFill>
-                  <a:srgbClr val="808080"/>
+              <a:rPr sz="1150" b="0">
+                <a:solidFill>
+                  <a:srgbClr val="3B3B3B"/>
                 </a:solidFill>
               </a:rPr>
-              <a:t>6 archivos · 955 MB · 1.710.167 filas · 40 columnas</a:t>
+              <a:t>del dominio, todas</a:t>
+            </a:r>
+          </a:p>
+          <a:p>
+            <a:pPr algn="ctr">
+              <a:lnSpc>
+                <a:spcPct val="115000"/>
+              </a:lnSpc>
+              <a:spcAft>
+                <a:spcPts val="0"/>
+              </a:spcAft>
+            </a:pPr>
+            <a:r>
+              <a:rPr sz="1150" b="0">
+                <a:solidFill>
+                  <a:srgbClr val="3B3B3B"/>
+                </a:solidFill>
+              </a:rPr>
+              <a:t>aprobadas</a:t>
+            </a:r>
+          </a:p>
+        </p:txBody>
+      </p:sp>
+      <p:sp>
+        <p:nvSpPr>
+          <p:cNvPr id="19" name="TextBox 18"/>
+          <p:cNvSpPr txBox="1"/>
+          <p:nvPr/>
+        </p:nvSpPr>
+        <p:spPr>
+          <a:xfrm>
+            <a:off x="6227064" y="1737360"/>
+            <a:ext cx="2395728" cy="640080"/>
+          </a:xfrm>
+          <a:prstGeom prst="rect">
+            <a:avLst/>
+          </a:prstGeom>
+          <a:noFill/>
+        </p:spPr>
+        <p:txBody>
+          <a:bodyPr wrap="square" lIns="0" tIns="0" rIns="0" bIns="0">
+            <a:spAutoFit/>
+          </a:bodyPr>
+          <a:lstStyle/>
+          <a:p>
+            <a:pPr algn="ctr">
+              <a:lnSpc>
+                <a:spcPct val="125000"/>
+              </a:lnSpc>
+              <a:spcAft>
+                <a:spcPts val="0"/>
+              </a:spcAft>
+            </a:pPr>
+            <a:r>
+              <a:rPr sz="3600" b="1">
+                <a:solidFill>
+                  <a:srgbClr val="20236D"/>
+                </a:solidFill>
+              </a:rPr>
+              <a:t>6.516×</a:t>
+            </a:r>
+          </a:p>
+        </p:txBody>
+      </p:sp>
+      <p:sp>
+        <p:nvSpPr>
+          <p:cNvPr id="20" name="TextBox 19"/>
+          <p:cNvSpPr txBox="1"/>
+          <p:nvPr/>
+        </p:nvSpPr>
+        <p:spPr>
+          <a:xfrm>
+            <a:off x="6227064" y="2395728"/>
+            <a:ext cx="2395728" cy="502920"/>
+          </a:xfrm>
+          <a:prstGeom prst="rect">
+            <a:avLst/>
+          </a:prstGeom>
+          <a:noFill/>
+        </p:spPr>
+        <p:txBody>
+          <a:bodyPr wrap="square" lIns="0" tIns="0" rIns="0" bIns="0">
+            <a:spAutoFit/>
+          </a:bodyPr>
+          <a:lstStyle/>
+          <a:p>
+            <a:pPr algn="ctr">
+              <a:lnSpc>
+                <a:spcPct val="115000"/>
+              </a:lnSpc>
+              <a:spcAft>
+                <a:spcPts val="0"/>
+              </a:spcAft>
+            </a:pPr>
+            <a:r>
+              <a:rPr sz="1150" b="0">
+                <a:solidFill>
+                  <a:srgbClr val="3B3B3B"/>
+                </a:solidFill>
+              </a:rPr>
+              <a:t>más rápido el conteo</a:t>
+            </a:r>
+          </a:p>
+          <a:p>
+            <a:pPr algn="ctr">
+              <a:lnSpc>
+                <a:spcPct val="115000"/>
+              </a:lnSpc>
+              <a:spcAft>
+                <a:spcPts val="0"/>
+              </a:spcAft>
+            </a:pPr>
+            <a:r>
+              <a:rPr sz="1150" b="0">
+                <a:solidFill>
+                  <a:srgbClr val="3B3B3B"/>
+                </a:solidFill>
+              </a:rPr>
+              <a:t>por búsqueda binaria</a:t>
+            </a:r>
+          </a:p>
+          <a:p>
+            <a:pPr algn="ctr">
+              <a:lnSpc>
+                <a:spcPct val="115000"/>
+              </a:lnSpc>
+              <a:spcAft>
+                <a:spcPts val="0"/>
+              </a:spcAft>
+            </a:pPr>
+            <a:r>
+              <a:rPr sz="1150" b="0">
+                <a:solidFill>
+                  <a:srgbClr val="3B3B3B"/>
+                </a:solidFill>
+              </a:rPr>
+              <a:t>que el lineal</a:t>
+            </a:r>
+          </a:p>
+        </p:txBody>
+      </p:sp>
+      <p:sp>
+        <p:nvSpPr>
+          <p:cNvPr id="21" name="TextBox 20"/>
+          <p:cNvSpPr txBox="1"/>
+          <p:nvPr/>
+        </p:nvSpPr>
+        <p:spPr>
+          <a:xfrm>
+            <a:off x="8906256" y="1737360"/>
+            <a:ext cx="2395728" cy="640080"/>
+          </a:xfrm>
+          <a:prstGeom prst="rect">
+            <a:avLst/>
+          </a:prstGeom>
+          <a:noFill/>
+        </p:spPr>
+        <p:txBody>
+          <a:bodyPr wrap="square" lIns="0" tIns="0" rIns="0" bIns="0">
+            <a:spAutoFit/>
+          </a:bodyPr>
+          <a:lstStyle/>
+          <a:p>
+            <a:pPr algn="ctr">
+              <a:lnSpc>
+                <a:spcPct val="125000"/>
+              </a:lnSpc>
+              <a:spcAft>
+                <a:spcPts val="0"/>
+              </a:spcAft>
+            </a:pPr>
+            <a:r>
+              <a:rPr sz="3600" b="1">
+                <a:solidFill>
+                  <a:srgbClr val="20236D"/>
+                </a:solidFill>
+              </a:rPr>
+              <a:t>860×</a:t>
+            </a:r>
+          </a:p>
+        </p:txBody>
+      </p:sp>
+      <p:sp>
+        <p:nvSpPr>
+          <p:cNvPr id="22" name="TextBox 21"/>
+          <p:cNvSpPr txBox="1"/>
+          <p:nvPr/>
+        </p:nvSpPr>
+        <p:spPr>
+          <a:xfrm>
+            <a:off x="8906256" y="2395728"/>
+            <a:ext cx="2395728" cy="502920"/>
+          </a:xfrm>
+          <a:prstGeom prst="rect">
+            <a:avLst/>
+          </a:prstGeom>
+          <a:noFill/>
+        </p:spPr>
+        <p:txBody>
+          <a:bodyPr wrap="square" lIns="0" tIns="0" rIns="0" bIns="0">
+            <a:spAutoFit/>
+          </a:bodyPr>
+          <a:lstStyle/>
+          <a:p>
+            <a:pPr algn="ctr">
+              <a:lnSpc>
+                <a:spcPct val="115000"/>
+              </a:lnSpc>
+              <a:spcAft>
+                <a:spcPts val="0"/>
+              </a:spcAft>
+            </a:pPr>
+            <a:r>
+              <a:rPr sz="1150" b="0">
+                <a:solidFill>
+                  <a:srgbClr val="3B3B3B"/>
+                </a:solidFill>
+              </a:rPr>
+              <a:t>menos memoria la</a:t>
+            </a:r>
+          </a:p>
+          <a:p>
+            <a:pPr algn="ctr">
+              <a:lnSpc>
+                <a:spcPct val="115000"/>
+              </a:lnSpc>
+              <a:spcAft>
+                <a:spcPts val="0"/>
+              </a:spcAft>
+            </a:pPr>
+            <a:r>
+              <a:rPr sz="1150" b="0">
+                <a:solidFill>
+                  <a:srgbClr val="3B3B3B"/>
+                </a:solidFill>
+              </a:rPr>
+              <a:t>agregación de una</a:t>
+            </a:r>
+          </a:p>
+          <a:p>
+            <a:pPr algn="ctr">
+              <a:lnSpc>
+                <a:spcPct val="115000"/>
+              </a:lnSpc>
+              <a:spcAft>
+                <a:spcPts val="0"/>
+              </a:spcAft>
+            </a:pPr>
+            <a:r>
+              <a:rPr sz="1150" b="0">
+                <a:solidFill>
+                  <a:srgbClr val="3B3B3B"/>
+                </a:solidFill>
+              </a:rPr>
+              <a:t>sola pasada</a:t>
+            </a:r>
+          </a:p>
+        </p:txBody>
+      </p:sp>
+      <p:sp>
+        <p:nvSpPr>
+          <p:cNvPr id="23" name="TextBox 22"/>
+          <p:cNvSpPr txBox="1"/>
+          <p:nvPr/>
+        </p:nvSpPr>
+        <p:spPr>
+          <a:xfrm>
+            <a:off x="868680" y="3611880"/>
+            <a:ext cx="4983480" cy="2011680"/>
+          </a:xfrm>
+          <a:prstGeom prst="rect">
+            <a:avLst/>
+          </a:prstGeom>
+          <a:noFill/>
+        </p:spPr>
+        <p:txBody>
+          <a:bodyPr wrap="square" lIns="0" tIns="0" rIns="0" bIns="0">
+            <a:spAutoFit/>
+          </a:bodyPr>
+          <a:lstStyle/>
+          <a:p>
+            <a:pPr algn="l">
+              <a:lnSpc>
+                <a:spcPct val="135000"/>
+              </a:lnSpc>
+              <a:spcAft>
+                <a:spcPts val="0"/>
+              </a:spcAft>
+            </a:pPr>
+            <a:r>
+              <a:rPr sz="1300" b="0">
+                <a:solidFill>
+                  <a:srgbClr val="3B3B3B"/>
+                </a:solidFill>
+              </a:rPr>
+              <a:t>Los algoritmos se implementaron desde cero y se</a:t>
+            </a:r>
+          </a:p>
+          <a:p>
+            <a:pPr algn="l">
+              <a:lnSpc>
+                <a:spcPct val="135000"/>
+              </a:lnSpc>
+              <a:spcAft>
+                <a:spcPts val="0"/>
+              </a:spcAft>
+            </a:pPr>
+            <a:r>
+              <a:rPr sz="1300" b="0">
+                <a:solidFill>
+                  <a:srgbClr val="3B3B3B"/>
+                </a:solidFill>
+              </a:rPr>
+              <a:t>verificaron contra pandas, sorted y NumPy antes</a:t>
+            </a:r>
+          </a:p>
+          <a:p>
+            <a:pPr algn="l">
+              <a:lnSpc>
+                <a:spcPct val="135000"/>
+              </a:lnSpc>
+              <a:spcAft>
+                <a:spcPts val="0"/>
+              </a:spcAft>
+            </a:pPr>
+            <a:r>
+              <a:rPr sz="1300" b="0">
+                <a:solidFill>
+                  <a:srgbClr val="3B3B3B"/>
+                </a:solidFill>
+              </a:rPr>
+              <a:t>de medir su tiempo.</a:t>
+            </a:r>
+          </a:p>
+          <a:p>
+            <a:pPr algn="l">
+              <a:lnSpc>
+                <a:spcPct val="135000"/>
+              </a:lnSpc>
+              <a:spcAft>
+                <a:spcPts val="0"/>
+              </a:spcAft>
+            </a:pPr>
+            <a:endParaRPr sz="1300" b="0">
+              <a:solidFill>
+                <a:srgbClr val="3B3B3B"/>
+              </a:solidFill>
+            </a:endParaRPr>
+          </a:p>
+          <a:p>
+            <a:pPr algn="l">
+              <a:lnSpc>
+                <a:spcPct val="135000"/>
+              </a:lnSpc>
+              <a:spcAft>
+                <a:spcPts val="0"/>
+              </a:spcAft>
+            </a:pPr>
+            <a:r>
+              <a:rPr sz="1300" b="0">
+                <a:solidFill>
+                  <a:srgbClr val="3B3B3B"/>
+                </a:solidFill>
+              </a:rPr>
+              <a:t>Las curvas log-log confirmaron las cotas:</a:t>
+            </a:r>
+          </a:p>
+          <a:p>
+            <a:pPr algn="l">
+              <a:lnSpc>
+                <a:spcPct val="135000"/>
+              </a:lnSpc>
+              <a:spcAft>
+                <a:spcPts val="0"/>
+              </a:spcAft>
+            </a:pPr>
+            <a:r>
+              <a:rPr sz="1300" b="0">
+                <a:solidFill>
+                  <a:srgbClr val="3B3B3B"/>
+                </a:solidFill>
+              </a:rPr>
+              <a:t>1,00 lineal · 1,08 merge sort · 2,04 inserción</a:t>
+            </a:r>
+          </a:p>
+        </p:txBody>
+      </p:sp>
+      <p:sp>
+        <p:nvSpPr>
+          <p:cNvPr id="24" name="TextBox 23"/>
+          <p:cNvSpPr txBox="1"/>
+          <p:nvPr/>
+        </p:nvSpPr>
+        <p:spPr>
+          <a:xfrm>
+            <a:off x="6309360" y="3611880"/>
+            <a:ext cx="4983480" cy="2011680"/>
+          </a:xfrm>
+          <a:prstGeom prst="rect">
+            <a:avLst/>
+          </a:prstGeom>
+          <a:noFill/>
+        </p:spPr>
+        <p:txBody>
+          <a:bodyPr wrap="square" lIns="0" tIns="0" rIns="0" bIns="0">
+            <a:spAutoFit/>
+          </a:bodyPr>
+          <a:lstStyle/>
+          <a:p>
+            <a:pPr algn="l">
+              <a:lnSpc>
+                <a:spcPct val="135000"/>
+              </a:lnSpc>
+              <a:spcAft>
+                <a:spcPts val="0"/>
+              </a:spcAft>
+            </a:pPr>
+            <a:r>
+              <a:rPr sz="1300" b="0">
+                <a:solidFill>
+                  <a:srgbClr val="3B3B3B"/>
+                </a:solidFill>
+              </a:rPr>
+              <a:t>Y mostraron dónde la teoría no basta:</a:t>
+            </a:r>
+          </a:p>
+          <a:p>
+            <a:pPr algn="l">
+              <a:lnSpc>
+                <a:spcPct val="135000"/>
+              </a:lnSpc>
+              <a:spcAft>
+                <a:spcPts val="0"/>
+              </a:spcAft>
+            </a:pPr>
+            <a:endParaRPr sz="1300" b="0">
+              <a:solidFill>
+                <a:srgbClr val="3B3B3B"/>
+              </a:solidFill>
+            </a:endParaRPr>
+          </a:p>
+          <a:p>
+            <a:pPr algn="l">
+              <a:lnSpc>
+                <a:spcPct val="135000"/>
+              </a:lnSpc>
+              <a:spcAft>
+                <a:spcPts val="0"/>
+              </a:spcAft>
+            </a:pPr>
+            <a:r>
+              <a:rPr sz="1300" b="0">
+                <a:solidFill>
+                  <a:srgbClr val="3B3B3B"/>
+                </a:solidFill>
+              </a:rPr>
+              <a:t>quickselect es O(n) en comparaciones pero escala</a:t>
+            </a:r>
+          </a:p>
+          <a:p>
+            <a:pPr algn="l">
+              <a:lnSpc>
+                <a:spcPct val="135000"/>
+              </a:lnSpc>
+              <a:spcAft>
+                <a:spcPts val="0"/>
+              </a:spcAft>
+            </a:pPr>
+            <a:r>
+              <a:rPr sz="1300" b="0">
+                <a:solidFill>
+                  <a:srgbClr val="3B3B3B"/>
+                </a:solidFill>
+              </a:rPr>
+              <a:t>como n^1,22, porque cada nivel de recursión asigna</a:t>
+            </a:r>
+          </a:p>
+          <a:p>
+            <a:pPr algn="l">
+              <a:lnSpc>
+                <a:spcPct val="135000"/>
+              </a:lnSpc>
+              <a:spcAft>
+                <a:spcPts val="0"/>
+              </a:spcAft>
+            </a:pPr>
+            <a:r>
+              <a:rPr sz="1300" b="0">
+                <a:solidFill>
+                  <a:srgbClr val="3B3B3B"/>
+                </a:solidFill>
+              </a:rPr>
+              <a:t>tres listas nuevas.</a:t>
+            </a:r>
+          </a:p>
+          <a:p>
+            <a:pPr algn="l">
+              <a:lnSpc>
+                <a:spcPct val="135000"/>
+              </a:lnSpc>
+              <a:spcAft>
+                <a:spcPts val="0"/>
+              </a:spcAft>
+            </a:pPr>
+            <a:endParaRPr sz="1300" b="0">
+              <a:solidFill>
+                <a:srgbClr val="3B3B3B"/>
+              </a:solidFill>
+            </a:endParaRPr>
+          </a:p>
+          <a:p>
+            <a:pPr algn="l">
+              <a:lnSpc>
+                <a:spcPct val="135000"/>
+              </a:lnSpc>
+              <a:spcAft>
+                <a:spcPts val="0"/>
+              </a:spcAft>
+            </a:pPr>
+            <a:r>
+              <a:rPr sz="1300" b="0">
+                <a:solidFill>
+                  <a:srgbClr val="3B3B3B"/>
+                </a:solidFill>
+              </a:rPr>
+              <a:t>La cota describe el crecimiento, no la constante.</a:t>
             </a:r>
           </a:p>
         </p:txBody>
@@ -10093,7 +9996,7 @@
 </file>
 
 <file path=ppt/slides/slide9.xml><?xml version="1.0" encoding="utf-8"?>
-<p:sld xmlns:a="http://schemas.openxmlformats.org/drawingml/2006/main" xmlns:p="http://schemas.openxmlformats.org/presentationml/2006/main" xmlns:r="http://schemas.openxmlformats.org/officeDocument/2006/relationships">
+<p:sld xmlns:a="http://schemas.openxmlformats.org/drawingml/2006/main" xmlns:r="http://schemas.openxmlformats.org/officeDocument/2006/relationships" xmlns:p="http://schemas.openxmlformats.org/presentationml/2006/main">
   <p:cSld>
     <p:spTree>
       <p:nvGrpSpPr>
@@ -10101,7 +10004,14 @@
         <p:cNvGrpSpPr/>
         <p:nvPr/>
       </p:nvGrpSpPr>
-      <p:grpSpPr/>
+      <p:grpSpPr>
+        <a:xfrm>
+          <a:off x="0" y="0"/>
+          <a:ext cx="0" cy="0"/>
+          <a:chOff x="0" y="0"/>
+          <a:chExt cx="0" cy="0"/>
+        </a:xfrm>
+      </p:grpSpPr>
       <p:grpSp>
         <p:nvGrpSpPr>
           <p:cNvPr id="7" name="Grupo 6">
@@ -10285,7 +10195,7 @@
               <p:nvPr/>
             </p:nvPicPr>
             <p:blipFill>
-              <a:blip r:embed="rId2"/>
+              <a:blip r:embed="rId3"/>
               <a:stretch>
                 <a:fillRect/>
               </a:stretch>
@@ -10383,64 +10293,23 @@
                 <a:ea typeface="Cambria" panose="02040503050406030204" pitchFamily="18" charset="0"/>
                 <a:cs typeface="Calibri Light" panose="020F0302020204030204" pitchFamily="34" charset="0"/>
               </a:rPr>
-              <a:t>CÓMO SE CONSTRUYÓ</a:t>
-            </a:r>
-          </a:p>
-        </p:txBody>
-      </p:sp>
-      <p:sp>
-        <p:nvSpPr>
-          <p:cNvPr id="15" name="TextBox 14"/>
-          <p:cNvSpPr txBox="1"/>
-          <p:nvPr/>
-        </p:nvSpPr>
-        <p:spPr>
-          <a:xfrm>
-            <a:off x="868680" y="1783080"/>
-            <a:ext cx="2395728" cy="411480"/>
-          </a:xfrm>
-          <a:prstGeom prst="rect">
-            <a:avLst/>
-          </a:prstGeom>
-          <a:noFill/>
-        </p:spPr>
-        <p:txBody>
-          <a:bodyPr wrap="square" lIns="0" rIns="0" tIns="0" bIns="0">
-            <a:spAutoFit/>
-          </a:bodyPr>
-          <a:lstStyle/>
-          <a:p>
-            <a:pPr algn="l">
-              <a:lnSpc>
-                <a:spcPct val="125000"/>
-              </a:lnSpc>
-              <a:spcAft>
-                <a:spcPts val="0"/>
-              </a:spcAft>
-            </a:pPr>
-            <a:r>
-              <a:rPr sz="2200" b="1">
-                <a:solidFill>
-                  <a:srgbClr val="20236D"/>
-                </a:solidFill>
-              </a:rPr>
-              <a:t>F1</a:t>
-            </a:r>
-          </a:p>
-        </p:txBody>
-      </p:sp>
-      <p:sp>
-        <p:nvSpPr>
-          <p:cNvPr id="16" name="Rectangle 15"/>
+              <a:t>CONCLUSIONES</a:t>
+            </a:r>
+          </a:p>
+        </p:txBody>
+      </p:sp>
+      <p:sp>
+        <p:nvSpPr>
+          <p:cNvPr id="15" name="Oval 14"/>
           <p:cNvSpPr/>
           <p:nvPr/>
         </p:nvSpPr>
         <p:spPr>
           <a:xfrm>
-            <a:off x="868680" y="2267712"/>
-            <a:ext cx="2395728" cy="25400"/>
-          </a:xfrm>
-          <a:prstGeom prst="rect">
+            <a:off x="868680" y="1783080"/>
+            <a:ext cx="457200" cy="457200"/>
+          </a:xfrm>
+          <a:prstGeom prst="ellipse">
             <a:avLst/>
           </a:prstGeom>
           <a:solidFill>
@@ -10470,19 +10339,27 @@
           <a:lstStyle/>
           <a:p>
             <a:pPr algn="ctr"/>
-          </a:p>
-        </p:txBody>
-      </p:sp>
-      <p:sp>
-        <p:nvSpPr>
-          <p:cNvPr id="17" name="TextBox 16"/>
+            <a:r>
+              <a:rPr sz="1600" b="1">
+                <a:solidFill>
+                  <a:srgbClr val="FFFFFF"/>
+                </a:solidFill>
+              </a:rPr>
+              <a:t>1</a:t>
+            </a:r>
+          </a:p>
+        </p:txBody>
+      </p:sp>
+      <p:sp>
+        <p:nvSpPr>
+          <p:cNvPr id="16" name="TextBox 15"/>
           <p:cNvSpPr txBox="1"/>
           <p:nvPr/>
         </p:nvSpPr>
         <p:spPr>
           <a:xfrm>
-            <a:off x="868680" y="2395728"/>
-            <a:ext cx="2395728" cy="320040"/>
+            <a:off x="1554480" y="1801368"/>
+            <a:ext cx="9692640" cy="320040"/>
           </a:xfrm>
           <a:prstGeom prst="rect">
             <a:avLst/>
@@ -10490,7 +10367,7 @@
           <a:noFill/>
         </p:spPr>
         <p:txBody>
-          <a:bodyPr wrap="square" lIns="0" rIns="0" tIns="0" bIns="0">
+          <a:bodyPr wrap="square" lIns="0" tIns="0" rIns="0" bIns="0">
             <a:spAutoFit/>
           </a:bodyPr>
           <a:lstStyle/>
@@ -10504,26 +10381,26 @@
               </a:spcAft>
             </a:pPr>
             <a:r>
-              <a:rPr sz="1350" b="1">
-                <a:solidFill>
-                  <a:srgbClr val="3B3B3B"/>
+              <a:rPr sz="1500" b="1">
+                <a:solidFill>
+                  <a:srgbClr val="20236D"/>
                 </a:solidFill>
               </a:rPr>
-              <a:t>Definición y entorno</a:t>
-            </a:r>
-          </a:p>
-        </p:txBody>
-      </p:sp>
-      <p:sp>
-        <p:nvSpPr>
-          <p:cNvPr id="18" name="TextBox 17"/>
+              <a:t>El rezago es masivo y estructural.</a:t>
+            </a:r>
+          </a:p>
+        </p:txBody>
+      </p:sp>
+      <p:sp>
+        <p:nvSpPr>
+          <p:cNvPr id="17" name="TextBox 16"/>
           <p:cNvSpPr txBox="1"/>
           <p:nvPr/>
         </p:nvSpPr>
         <p:spPr>
           <a:xfrm>
-            <a:off x="868680" y="2788920"/>
-            <a:ext cx="2395728" cy="1005840"/>
+            <a:off x="1554480" y="2167128"/>
+            <a:ext cx="9692640" cy="457200"/>
           </a:xfrm>
           <a:prstGeom prst="rect">
             <a:avLst/>
@@ -10531,7 +10408,7 @@
           <a:noFill/>
         </p:spPr>
         <p:txBody>
-          <a:bodyPr wrap="square" lIns="0" rIns="0" tIns="0" bIns="0">
+          <a:bodyPr wrap="square" lIns="0" tIns="0" rIns="0" bIns="0">
             <a:spAutoFit/>
           </a:bodyPr>
           <a:lstStyle/>
@@ -10545,87 +10422,28 @@
               </a:spcAft>
             </a:pPr>
             <a:r>
-              <a:rPr sz="1150" b="0">
+              <a:rPr sz="1250" b="0">
                 <a:solidFill>
                   <a:srgbClr val="3B3B3B"/>
                 </a:solidFill>
               </a:rPr>
-              <a:t>Pregunta técnica, entorno virtual,</a:t>
-            </a:r>
-          </a:p>
-          <a:p>
-            <a:pPr algn="l">
-              <a:lnSpc>
-                <a:spcPct val="125000"/>
-              </a:lnSpc>
-              <a:spcAft>
-                <a:spcPts val="0"/>
-              </a:spcAft>
-            </a:pPr>
-            <a:r>
-              <a:rPr sz="1150" b="0">
-                <a:solidFill>
-                  <a:srgbClr val="3B3B3B"/>
-                </a:solidFill>
-              </a:rPr>
-              <a:t>dependencias fijadas, código modular</a:t>
-            </a:r>
-          </a:p>
-        </p:txBody>
-      </p:sp>
-      <p:sp>
-        <p:nvSpPr>
-          <p:cNvPr id="19" name="TextBox 18"/>
-          <p:cNvSpPr txBox="1"/>
-          <p:nvPr/>
-        </p:nvSpPr>
-        <p:spPr>
-          <a:xfrm>
-            <a:off x="3547872" y="1783080"/>
-            <a:ext cx="2395728" cy="411480"/>
-          </a:xfrm>
-          <a:prstGeom prst="rect">
-            <a:avLst/>
-          </a:prstGeom>
-          <a:noFill/>
-        </p:spPr>
-        <p:txBody>
-          <a:bodyPr wrap="square" lIns="0" rIns="0" tIns="0" bIns="0">
-            <a:spAutoFit/>
-          </a:bodyPr>
-          <a:lstStyle/>
-          <a:p>
-            <a:pPr algn="l">
-              <a:lnSpc>
-                <a:spcPct val="125000"/>
-              </a:lnSpc>
-              <a:spcAft>
-                <a:spcPts val="0"/>
-              </a:spcAft>
-            </a:pPr>
-            <a:r>
-              <a:rPr sz="2200" b="1">
-                <a:solidFill>
-                  <a:srgbClr val="20236D"/>
-                </a:solidFill>
-              </a:rPr>
-              <a:t>F2</a:t>
-            </a:r>
-          </a:p>
-        </p:txBody>
-      </p:sp>
-      <p:sp>
-        <p:nvSpPr>
-          <p:cNvPr id="20" name="Rectangle 19"/>
+              <a:t>80 % egresa fuera de plazo; Derecho triplica a Educación; las mujeres se titulan antes en las diez áreas.</a:t>
+            </a:r>
+          </a:p>
+        </p:txBody>
+      </p:sp>
+      <p:sp>
+        <p:nvSpPr>
+          <p:cNvPr id="18" name="Oval 17"/>
           <p:cNvSpPr/>
           <p:nvPr/>
         </p:nvSpPr>
         <p:spPr>
           <a:xfrm>
-            <a:off x="3547872" y="2267712"/>
-            <a:ext cx="2395728" cy="25400"/>
-          </a:xfrm>
-          <a:prstGeom prst="rect">
+            <a:off x="868680" y="2807208"/>
+            <a:ext cx="457200" cy="457200"/>
+          </a:xfrm>
+          <a:prstGeom prst="ellipse">
             <a:avLst/>
           </a:prstGeom>
           <a:solidFill>
@@ -10655,19 +10473,27 @@
           <a:lstStyle/>
           <a:p>
             <a:pPr algn="ctr"/>
-          </a:p>
-        </p:txBody>
-      </p:sp>
-      <p:sp>
-        <p:nvSpPr>
-          <p:cNvPr id="21" name="TextBox 20"/>
+            <a:r>
+              <a:rPr sz="1600" b="1">
+                <a:solidFill>
+                  <a:srgbClr val="FFFFFF"/>
+                </a:solidFill>
+              </a:rPr>
+              <a:t>2</a:t>
+            </a:r>
+          </a:p>
+        </p:txBody>
+      </p:sp>
+      <p:sp>
+        <p:nvSpPr>
+          <p:cNvPr id="19" name="TextBox 18"/>
           <p:cNvSpPr txBox="1"/>
           <p:nvPr/>
         </p:nvSpPr>
         <p:spPr>
           <a:xfrm>
-            <a:off x="3547872" y="2395728"/>
-            <a:ext cx="2395728" cy="320040"/>
+            <a:off x="1554480" y="2825496"/>
+            <a:ext cx="9692640" cy="320040"/>
           </a:xfrm>
           <a:prstGeom prst="rect">
             <a:avLst/>
@@ -10675,7 +10501,7 @@
           <a:noFill/>
         </p:spPr>
         <p:txBody>
-          <a:bodyPr wrap="square" lIns="0" rIns="0" tIns="0" bIns="0">
+          <a:bodyPr wrap="square" lIns="0" tIns="0" rIns="0" bIns="0">
             <a:spAutoFit/>
           </a:bodyPr>
           <a:lstStyle/>
@@ -10689,26 +10515,26 @@
               </a:spcAft>
             </a:pPr>
             <a:r>
-              <a:rPr sz="1350" b="1">
-                <a:solidFill>
-                  <a:srgbClr val="3B3B3B"/>
+              <a:rPr sz="1500" b="1">
+                <a:solidFill>
+                  <a:srgbClr val="20236D"/>
                 </a:solidFill>
               </a:rPr>
-              <a:t>Pipeline de datos</a:t>
-            </a:r>
-          </a:p>
-        </p:txBody>
-      </p:sp>
-      <p:sp>
-        <p:nvSpPr>
-          <p:cNvPr id="22" name="TextBox 21"/>
+              <a:t>La pandemia desplazó, no deterioró.</a:t>
+            </a:r>
+          </a:p>
+        </p:txBody>
+      </p:sp>
+      <p:sp>
+        <p:nvSpPr>
+          <p:cNvPr id="20" name="TextBox 19"/>
           <p:cNvSpPr txBox="1"/>
           <p:nvPr/>
         </p:nvSpPr>
         <p:spPr>
           <a:xfrm>
-            <a:off x="3547872" y="2788920"/>
-            <a:ext cx="2395728" cy="1005840"/>
+            <a:off x="1554480" y="3191256"/>
+            <a:ext cx="9692640" cy="457200"/>
           </a:xfrm>
           <a:prstGeom prst="rect">
             <a:avLst/>
@@ -10716,7 +10542,7 @@
           <a:noFill/>
         </p:spPr>
         <p:txBody>
-          <a:bodyPr wrap="square" lIns="0" rIns="0" tIns="0" bIns="0">
+          <a:bodyPr wrap="square" lIns="0" tIns="0" rIns="0" bIns="0">
             <a:spAutoFit/>
           </a:bodyPr>
           <a:lstStyle/>
@@ -10730,87 +10556,28 @@
               </a:spcAft>
             </a:pPr>
             <a:r>
-              <a:rPr sz="1150" b="0">
+              <a:rPr sz="1250" b="0">
                 <a:solidFill>
                   <a:srgbClr val="3B3B3B"/>
                 </a:solidFill>
               </a:rPr>
-              <a:t>Ingesta, centinelas, duplicados,</a:t>
-            </a:r>
-          </a:p>
-          <a:p>
-            <a:pPr algn="l">
-              <a:lnSpc>
-                <a:spcPct val="125000"/>
-              </a:lnSpc>
-              <a:spcAft>
-                <a:spcPts val="0"/>
-              </a:spcAft>
-            </a:pPr>
-            <a:r>
-              <a:rPr sz="1150" b="0">
-                <a:solidFill>
-                  <a:srgbClr val="3B3B3B"/>
-                </a:solidFill>
-              </a:rPr>
-              <a:t>reconstrucción de la duración real</a:t>
-            </a:r>
-          </a:p>
-        </p:txBody>
-      </p:sp>
-      <p:sp>
-        <p:nvSpPr>
-          <p:cNvPr id="23" name="TextBox 22"/>
-          <p:cNvSpPr txBox="1"/>
-          <p:nvPr/>
-        </p:nvSpPr>
-        <p:spPr>
-          <a:xfrm>
-            <a:off x="6227064" y="1783080"/>
-            <a:ext cx="2395728" cy="411480"/>
-          </a:xfrm>
-          <a:prstGeom prst="rect">
-            <a:avLst/>
-          </a:prstGeom>
-          <a:noFill/>
-        </p:spPr>
-        <p:txBody>
-          <a:bodyPr wrap="square" lIns="0" rIns="0" tIns="0" bIns="0">
-            <a:spAutoFit/>
-          </a:bodyPr>
-          <a:lstStyle/>
-          <a:p>
-            <a:pPr algn="l">
-              <a:lnSpc>
-                <a:spcPct val="125000"/>
-              </a:lnSpc>
-              <a:spcAft>
-                <a:spcPts val="0"/>
-              </a:spcAft>
-            </a:pPr>
-            <a:r>
-              <a:rPr sz="2200" b="1">
-                <a:solidFill>
-                  <a:srgbClr val="20236D"/>
-                </a:solidFill>
-              </a:rPr>
-              <a:t>F3</a:t>
-            </a:r>
-          </a:p>
-        </p:txBody>
-      </p:sp>
-      <p:sp>
-        <p:nvSpPr>
-          <p:cNvPr id="24" name="Rectangle 23"/>
+              <a:t>La caída de 2020 y el máximo de 2021 son el mismo fenómeno visto en dos momentos.</a:t>
+            </a:r>
+          </a:p>
+        </p:txBody>
+      </p:sp>
+      <p:sp>
+        <p:nvSpPr>
+          <p:cNvPr id="21" name="Oval 20"/>
           <p:cNvSpPr/>
           <p:nvPr/>
         </p:nvSpPr>
         <p:spPr>
           <a:xfrm>
-            <a:off x="6227064" y="2267712"/>
-            <a:ext cx="2395728" cy="25400"/>
-          </a:xfrm>
-          <a:prstGeom prst="rect">
+            <a:off x="868680" y="3831336"/>
+            <a:ext cx="457200" cy="457200"/>
+          </a:xfrm>
+          <a:prstGeom prst="ellipse">
             <a:avLst/>
           </a:prstGeom>
           <a:solidFill>
@@ -10840,19 +10607,27 @@
           <a:lstStyle/>
           <a:p>
             <a:pPr algn="ctr"/>
-          </a:p>
-        </p:txBody>
-      </p:sp>
-      <p:sp>
-        <p:nvSpPr>
-          <p:cNvPr id="25" name="TextBox 24"/>
+            <a:r>
+              <a:rPr sz="1600" b="1">
+                <a:solidFill>
+                  <a:srgbClr val="FFFFFF"/>
+                </a:solidFill>
+              </a:rPr>
+              <a:t>3</a:t>
+            </a:r>
+          </a:p>
+        </p:txBody>
+      </p:sp>
+      <p:sp>
+        <p:nvSpPr>
+          <p:cNvPr id="22" name="TextBox 21"/>
           <p:cNvSpPr txBox="1"/>
           <p:nvPr/>
         </p:nvSpPr>
         <p:spPr>
           <a:xfrm>
-            <a:off x="6227064" y="2395728"/>
-            <a:ext cx="2395728" cy="320040"/>
+            <a:off x="1554480" y="3849624"/>
+            <a:ext cx="9692640" cy="320040"/>
           </a:xfrm>
           <a:prstGeom prst="rect">
             <a:avLst/>
@@ -10860,7 +10635,7 @@
           <a:noFill/>
         </p:spPr>
         <p:txBody>
-          <a:bodyPr wrap="square" lIns="0" rIns="0" tIns="0" bIns="0">
+          <a:bodyPr wrap="square" lIns="0" tIns="0" rIns="0" bIns="0">
             <a:spAutoFit/>
           </a:bodyPr>
           <a:lstStyle/>
@@ -10874,26 +10649,26 @@
               </a:spcAft>
             </a:pPr>
             <a:r>
-              <a:rPr sz="1350" b="1">
-                <a:solidFill>
-                  <a:srgbClr val="3B3B3B"/>
+              <a:rPr sz="1500" b="1">
+                <a:solidFill>
+                  <a:srgbClr val="20236D"/>
                 </a:solidFill>
               </a:rPr>
-              <a:t>Núcleo algorítmico</a:t>
-            </a:r>
-          </a:p>
-        </p:txBody>
-      </p:sp>
-      <p:sp>
-        <p:nvSpPr>
-          <p:cNvPr id="26" name="TextBox 25"/>
+              <a:t>Los registros no explican el caso individual.</a:t>
+            </a:r>
+          </a:p>
+        </p:txBody>
+      </p:sp>
+      <p:sp>
+        <p:nvSpPr>
+          <p:cNvPr id="23" name="TextBox 22"/>
           <p:cNvSpPr txBox="1"/>
           <p:nvPr/>
         </p:nvSpPr>
         <p:spPr>
           <a:xfrm>
-            <a:off x="6227064" y="2788920"/>
-            <a:ext cx="2395728" cy="1005840"/>
+            <a:off x="1554480" y="4215384"/>
+            <a:ext cx="9692640" cy="457200"/>
           </a:xfrm>
           <a:prstGeom prst="rect">
             <a:avLst/>
@@ -10901,7 +10676,7 @@
           <a:noFill/>
         </p:spPr>
         <p:txBody>
-          <a:bodyPr wrap="square" lIns="0" rIns="0" tIns="0" bIns="0">
+          <a:bodyPr wrap="square" lIns="0" tIns="0" rIns="0" bIns="0">
             <a:spAutoFit/>
           </a:bodyPr>
           <a:lstStyle/>
@@ -10915,87 +10690,28 @@
               </a:spcAft>
             </a:pPr>
             <a:r>
-              <a:rPr sz="1150" b="0">
+              <a:rPr sz="1250" b="0">
                 <a:solidFill>
                   <a:srgbClr val="3B3B3B"/>
                 </a:solidFill>
               </a:rPr>
-              <a:t>Algoritmos propios, complejidad</a:t>
-            </a:r>
-          </a:p>
-          <a:p>
-            <a:pPr algn="l">
-              <a:lnSpc>
-                <a:spcPct val="125000"/>
-              </a:lnSpc>
-              <a:spcAft>
-                <a:spcPts val="0"/>
-              </a:spcAft>
-            </a:pPr>
-            <a:r>
-              <a:rPr sz="1150" b="0">
-                <a:solidFill>
-                  <a:srgbClr val="3B3B3B"/>
-                </a:solidFill>
-              </a:rPr>
-              <a:t>medida, POO y modelos por gradiente</a:t>
-            </a:r>
-          </a:p>
-        </p:txBody>
-      </p:sp>
-      <p:sp>
-        <p:nvSpPr>
-          <p:cNvPr id="27" name="TextBox 26"/>
-          <p:cNvSpPr txBox="1"/>
-          <p:nvPr/>
-        </p:nvSpPr>
-        <p:spPr>
-          <a:xfrm>
-            <a:off x="8906256" y="1783080"/>
-            <a:ext cx="2395728" cy="411480"/>
-          </a:xfrm>
-          <a:prstGeom prst="rect">
-            <a:avLst/>
-          </a:prstGeom>
-          <a:noFill/>
-        </p:spPr>
-        <p:txBody>
-          <a:bodyPr wrap="square" lIns="0" rIns="0" tIns="0" bIns="0">
-            <a:spAutoFit/>
-          </a:bodyPr>
-          <a:lstStyle/>
-          <a:p>
-            <a:pPr algn="l">
-              <a:lnSpc>
-                <a:spcPct val="125000"/>
-              </a:lnSpc>
-              <a:spcAft>
-                <a:spcPts val="0"/>
-              </a:spcAft>
-            </a:pPr>
-            <a:r>
-              <a:rPr sz="2200" b="1">
-                <a:solidFill>
-                  <a:srgbClr val="20236D"/>
-                </a:solidFill>
-              </a:rPr>
-              <a:t>F4</a:t>
-            </a:r>
-          </a:p>
-        </p:txBody>
-      </p:sp>
-      <p:sp>
-        <p:nvSpPr>
-          <p:cNvPr id="28" name="Rectangle 27"/>
+              <a:t>R² de 0,085: el rezago depende de trayectorias personales que la fuente no registra. Es un resultado, no un fracaso.</a:t>
+            </a:r>
+          </a:p>
+        </p:txBody>
+      </p:sp>
+      <p:sp>
+        <p:nvSpPr>
+          <p:cNvPr id="24" name="Oval 23"/>
           <p:cNvSpPr/>
           <p:nvPr/>
         </p:nvSpPr>
         <p:spPr>
           <a:xfrm>
-            <a:off x="8906256" y="2267712"/>
-            <a:ext cx="2395728" cy="25400"/>
-          </a:xfrm>
-          <a:prstGeom prst="rect">
+            <a:off x="868680" y="4855464"/>
+            <a:ext cx="457200" cy="457200"/>
+          </a:xfrm>
+          <a:prstGeom prst="ellipse">
             <a:avLst/>
           </a:prstGeom>
           <a:solidFill>
@@ -11025,19 +10741,27 @@
           <a:lstStyle/>
           <a:p>
             <a:pPr algn="ctr"/>
-          </a:p>
-        </p:txBody>
-      </p:sp>
-      <p:sp>
-        <p:nvSpPr>
-          <p:cNvPr id="29" name="TextBox 28"/>
+            <a:r>
+              <a:rPr sz="1600" b="1">
+                <a:solidFill>
+                  <a:srgbClr val="FFFFFF"/>
+                </a:solidFill>
+              </a:rPr>
+              <a:t>4</a:t>
+            </a:r>
+          </a:p>
+        </p:txBody>
+      </p:sp>
+      <p:sp>
+        <p:nvSpPr>
+          <p:cNvPr id="25" name="TextBox 24"/>
           <p:cNvSpPr txBox="1"/>
           <p:nvPr/>
         </p:nvSpPr>
         <p:spPr>
           <a:xfrm>
-            <a:off x="8906256" y="2395728"/>
-            <a:ext cx="2395728" cy="320040"/>
+            <a:off x="1554480" y="4873752"/>
+            <a:ext cx="9692640" cy="320040"/>
           </a:xfrm>
           <a:prstGeom prst="rect">
             <a:avLst/>
@@ -11045,7 +10769,7 @@
           <a:noFill/>
         </p:spPr>
         <p:txBody>
-          <a:bodyPr wrap="square" lIns="0" rIns="0" tIns="0" bIns="0">
+          <a:bodyPr wrap="square" lIns="0" tIns="0" rIns="0" bIns="0">
             <a:spAutoFit/>
           </a:bodyPr>
           <a:lstStyle/>
@@ -11059,26 +10783,26 @@
               </a:spcAft>
             </a:pPr>
             <a:r>
-              <a:rPr sz="1350" b="1">
-                <a:solidFill>
-                  <a:srgbClr val="3B3B3B"/>
+              <a:rPr sz="1500" b="1">
+                <a:solidFill>
+                  <a:srgbClr val="20236D"/>
                 </a:solidFill>
               </a:rPr>
-              <a:t>Análisis y difusión</a:t>
-            </a:r>
-          </a:p>
-        </p:txBody>
-      </p:sp>
-      <p:sp>
-        <p:nvSpPr>
-          <p:cNvPr id="30" name="TextBox 29"/>
+              <a:t>Todo el proyecto es reproducible.</a:t>
+            </a:r>
+          </a:p>
+        </p:txBody>
+      </p:sp>
+      <p:sp>
+        <p:nvSpPr>
+          <p:cNvPr id="26" name="TextBox 25"/>
           <p:cNvSpPr txBox="1"/>
           <p:nvPr/>
         </p:nvSpPr>
         <p:spPr>
           <a:xfrm>
-            <a:off x="8906256" y="2788920"/>
-            <a:ext cx="2395728" cy="1005840"/>
+            <a:off x="1554480" y="5239512"/>
+            <a:ext cx="9692640" cy="457200"/>
           </a:xfrm>
           <a:prstGeom prst="rect">
             <a:avLst/>
@@ -11086,7 +10810,7 @@
           <a:noFill/>
         </p:spPr>
         <p:txBody>
-          <a:bodyPr wrap="square" lIns="0" rIns="0" tIns="0" bIns="0">
+          <a:bodyPr wrap="square" lIns="0" tIns="0" rIns="0" bIns="0">
             <a:spAutoFit/>
           </a:bodyPr>
           <a:lstStyle/>
@@ -11100,178 +10824,12 @@
               </a:spcAft>
             </a:pPr>
             <a:r>
-              <a:rPr sz="1150" b="0">
+              <a:rPr sz="1250" b="0">
                 <a:solidFill>
                   <a:srgbClr val="3B3B3B"/>
                 </a:solidFill>
               </a:rPr>
-              <a:t>Resultados, visualizaciones,</a:t>
-            </a:r>
-          </a:p>
-          <a:p>
-            <a:pPr algn="l">
-              <a:lnSpc>
-                <a:spcPct val="125000"/>
-              </a:lnSpc>
-              <a:spcAft>
-                <a:spcPts val="0"/>
-              </a:spcAft>
-            </a:pPr>
-            <a:r>
-              <a:rPr sz="1150" b="0">
-                <a:solidFill>
-                  <a:srgbClr val="3B3B3B"/>
-                </a:solidFill>
-              </a:rPr>
-              <a:t>discusión y comunicación</a:t>
-            </a:r>
-          </a:p>
-        </p:txBody>
-      </p:sp>
-      <p:sp>
-        <p:nvSpPr>
-          <p:cNvPr id="31" name="TextBox 30"/>
-          <p:cNvSpPr txBox="1"/>
-          <p:nvPr/>
-        </p:nvSpPr>
-        <p:spPr>
-          <a:xfrm>
-            <a:off x="868680" y="4069080"/>
-            <a:ext cx="10424160" cy="320040"/>
-          </a:xfrm>
-          <a:prstGeom prst="rect">
-            <a:avLst/>
-          </a:prstGeom>
-          <a:noFill/>
-        </p:spPr>
-        <p:txBody>
-          <a:bodyPr wrap="square" lIns="0" rIns="0" tIns="0" bIns="0">
-            <a:spAutoFit/>
-          </a:bodyPr>
-          <a:lstStyle/>
-          <a:p>
-            <a:pPr algn="l">
-              <a:lnSpc>
-                <a:spcPct val="125000"/>
-              </a:lnSpc>
-              <a:spcAft>
-                <a:spcPts val="0"/>
-              </a:spcAft>
-            </a:pPr>
-            <a:r>
-              <a:rPr sz="1400" b="1">
-                <a:solidFill>
-                  <a:srgbClr val="20236D"/>
-                </a:solidFill>
-              </a:rPr>
-              <a:t>La transformación central: la duración real no existe en la fuente, se deriva.</a:t>
-            </a:r>
-          </a:p>
-        </p:txBody>
-      </p:sp>
-      <p:sp>
-        <p:nvSpPr>
-          <p:cNvPr id="32" name="Rectangle 31"/>
-          <p:cNvSpPr/>
-          <p:nvPr/>
-        </p:nvSpPr>
-        <p:spPr>
-          <a:xfrm>
-            <a:off x="868680" y="4462272"/>
-            <a:ext cx="10424160" cy="1051560"/>
-          </a:xfrm>
-          <a:prstGeom prst="rect">
-            <a:avLst/>
-          </a:prstGeom>
-          <a:solidFill>
-            <a:srgbClr val="F2F3F7"/>
-          </a:solidFill>
-          <a:ln>
-            <a:solidFill>
-              <a:srgbClr val="D0D2E0"/>
-            </a:solidFill>
-          </a:ln>
-          <a:effectLst/>
-        </p:spPr>
-        <p:style>
-          <a:lnRef idx="1">
-            <a:schemeClr val="accent1"/>
-          </a:lnRef>
-          <a:fillRef idx="3">
-            <a:schemeClr val="accent1"/>
-          </a:fillRef>
-          <a:effectRef idx="2">
-            <a:schemeClr val="accent1"/>
-          </a:effectRef>
-          <a:fontRef idx="minor">
-            <a:schemeClr val="lt1"/>
-          </a:fontRef>
-        </p:style>
-        <p:txBody>
-          <a:bodyPr rtlCol="0" anchor="ctr"/>
-          <a:lstStyle/>
-          <a:p>
-            <a:pPr algn="ctr"/>
-          </a:p>
-        </p:txBody>
-      </p:sp>
-      <p:sp>
-        <p:nvSpPr>
-          <p:cNvPr id="33" name="TextBox 32"/>
-          <p:cNvSpPr txBox="1"/>
-          <p:nvPr/>
-        </p:nvSpPr>
-        <p:spPr>
-          <a:xfrm>
-            <a:off x="1097280" y="4645152"/>
-            <a:ext cx="10058400" cy="777240"/>
-          </a:xfrm>
-          <a:prstGeom prst="rect">
-            <a:avLst/>
-          </a:prstGeom>
-          <a:noFill/>
-        </p:spPr>
-        <p:txBody>
-          <a:bodyPr wrap="square" lIns="0" rIns="0" tIns="0" bIns="0">
-            <a:spAutoFit/>
-          </a:bodyPr>
-          <a:lstStyle/>
-          <a:p>
-            <a:pPr algn="l">
-              <a:lnSpc>
-                <a:spcPct val="145000"/>
-              </a:lnSpc>
-              <a:spcAft>
-                <a:spcPts val="0"/>
-              </a:spcAft>
-            </a:pPr>
-            <a:r>
-              <a:rPr sz="1150" b="0">
-                <a:solidFill>
-                  <a:srgbClr val="3B3B3B"/>
-                </a:solidFill>
-                <a:latin typeface="Consolas"/>
-              </a:rPr>
-              <a:t>duracion_real_sem = (anio_titulo - anio_ing_carr_ori) * 2 + (semestre_titulo - sem_ing_carr_ori) + 1</a:t>
-            </a:r>
-          </a:p>
-          <a:p>
-            <a:pPr algn="l">
-              <a:lnSpc>
-                <a:spcPct val="145000"/>
-              </a:lnSpc>
-              <a:spcAft>
-                <a:spcPts val="0"/>
-              </a:spcAft>
-            </a:pPr>
-            <a:r>
-              <a:rPr sz="1150" b="0">
-                <a:solidFill>
-                  <a:srgbClr val="3B3B3B"/>
-                </a:solidFill>
-                <a:latin typeface="Consolas"/>
-              </a:rPr>
-              <a:t>sobreduracion_sem = duracion_real_sem - dur_total_carr</a:t>
+              <a:t>Cuatro comandos, 73 pruebas, 45 commits con historial verificable y cada cifra rastreable a su archivo.</a:t>
             </a:r>
           </a:p>
         </p:txBody>

--- a/informe/Presentacion_Fase4_Sebastian_Antunez.pptx
+++ b/informe/Presentacion_Fase4_Sebastian_Antunez.pptx
@@ -521,7 +521,260 @@
           <a:bodyPr/>
           <a:lstStyle/>
           <a:p>
+            <a:r>
+              <a:t>Buenos </a:t>
+            </a:r>
+            <a:r>
+              <a:rPr dirty="0"/>
+              <a:t>días. Mi </a:t>
+            </a:r>
+            <a:r>
+              <a:rPr dirty="0" err="1"/>
+              <a:t>nombre</a:t>
+            </a:r>
+            <a:r>
+              <a:rPr dirty="0"/>
+              <a:t> es Sebastian Antunez y </a:t>
+            </a:r>
+            <a:r>
+              <a:rPr dirty="0" err="1"/>
+              <a:t>voy</a:t>
+            </a:r>
+            <a:r>
+              <a:rPr dirty="0"/>
+              <a:t> a </a:t>
+            </a:r>
+            <a:r>
+              <a:rPr dirty="0" err="1"/>
+              <a:t>presentar</a:t>
+            </a:r>
+            <a:r>
+              <a:rPr dirty="0"/>
+              <a:t> </a:t>
+            </a:r>
+            <a:r>
+              <a:rPr dirty="0" err="1"/>
+              <a:t>el</a:t>
+            </a:r>
+            <a:r>
+              <a:rPr dirty="0"/>
+              <a:t> </a:t>
+            </a:r>
+            <a:r>
+              <a:rPr dirty="0" err="1"/>
+              <a:t>proyecto</a:t>
+            </a:r>
+            <a:r>
+              <a:rPr dirty="0"/>
+              <a:t> final del</a:t>
+            </a:r>
+          </a:p>
+          <a:p>
+            <a:r>
+              <a:rPr dirty="0" err="1"/>
+              <a:t>curso</a:t>
+            </a:r>
+            <a:r>
+              <a:rPr dirty="0"/>
+              <a:t> </a:t>
+            </a:r>
+            <a:r>
+              <a:rPr dirty="0" err="1"/>
+              <a:t>Programación</a:t>
+            </a:r>
+            <a:r>
+              <a:rPr dirty="0"/>
+              <a:t> para la </a:t>
+            </a:r>
+            <a:r>
+              <a:rPr dirty="0" err="1"/>
+              <a:t>Ciencia</a:t>
+            </a:r>
+            <a:r>
+              <a:rPr dirty="0"/>
+              <a:t> de Datos: un </a:t>
+            </a:r>
+            <a:r>
+              <a:rPr dirty="0" err="1"/>
+              <a:t>análisis</a:t>
+            </a:r>
+            <a:r>
+              <a:rPr dirty="0"/>
+              <a:t> </a:t>
+            </a:r>
+            <a:r>
+              <a:rPr dirty="0" err="1"/>
+              <a:t>sobre</a:t>
+            </a:r>
+            <a:r>
+              <a:rPr dirty="0"/>
+              <a:t> la </a:t>
+            </a:r>
+            <a:r>
+              <a:rPr dirty="0" err="1"/>
+              <a:t>sobreduración</a:t>
+            </a:r>
+            <a:r>
+              <a:rPr dirty="0"/>
+              <a:t> </a:t>
+            </a:r>
+            <a:r>
+              <a:rPr dirty="0" err="1"/>
+              <a:t>en</a:t>
+            </a:r>
+            <a:r>
+              <a:rPr dirty="0"/>
+              <a:t> la</a:t>
+            </a:r>
+          </a:p>
+          <a:p>
+            <a:r>
+              <a:rPr dirty="0" err="1"/>
+              <a:t>titulación</a:t>
+            </a:r>
+            <a:r>
+              <a:rPr dirty="0"/>
+              <a:t> de la </a:t>
+            </a:r>
+            <a:r>
+              <a:rPr dirty="0" err="1"/>
+              <a:t>educación</a:t>
+            </a:r>
+            <a:r>
+              <a:rPr dirty="0"/>
+              <a:t> superior </a:t>
+            </a:r>
+            <a:r>
+              <a:rPr dirty="0" err="1"/>
+              <a:t>chilena</a:t>
+            </a:r>
+            <a:r>
+              <a:rPr dirty="0"/>
+              <a:t>, </a:t>
+            </a:r>
+            <a:r>
+              <a:rPr dirty="0" err="1"/>
+              <a:t>construido</a:t>
+            </a:r>
+            <a:r>
+              <a:rPr dirty="0"/>
+              <a:t> </a:t>
+            </a:r>
+            <a:r>
+              <a:rPr dirty="0" err="1"/>
+              <a:t>sobre</a:t>
+            </a:r>
+            <a:r>
+              <a:rPr dirty="0"/>
+              <a:t> 1.246.760 </a:t>
+            </a:r>
+            <a:r>
+              <a:rPr dirty="0" err="1"/>
+              <a:t>procesos</a:t>
+            </a:r>
+            <a:r>
+              <a:rPr dirty="0"/>
+              <a:t> de</a:t>
+            </a:r>
+          </a:p>
+          <a:p>
+            <a:r>
+              <a:rPr dirty="0" err="1"/>
+              <a:t>titulación</a:t>
+            </a:r>
+            <a:r>
+              <a:rPr dirty="0"/>
+              <a:t> </a:t>
+            </a:r>
+            <a:r>
+              <a:rPr dirty="0" err="1"/>
+              <a:t>reales</a:t>
+            </a:r>
+            <a:r>
+              <a:rPr dirty="0"/>
+              <a:t> entre 2020 y 2025.</a:t>
+            </a:r>
+          </a:p>
+          <a:p>
             <a:endParaRPr dirty="0"/>
+          </a:p>
+          <a:p>
+            <a:r>
+              <a:rPr dirty="0"/>
+              <a:t>RECORDAR: </a:t>
+            </a:r>
+            <a:r>
+              <a:rPr dirty="0" err="1"/>
+              <a:t>hablar</a:t>
+            </a:r>
+            <a:r>
+              <a:rPr dirty="0"/>
+              <a:t> </a:t>
+            </a:r>
+            <a:r>
+              <a:rPr dirty="0" err="1"/>
+              <a:t>más</a:t>
+            </a:r>
+            <a:r>
+              <a:rPr dirty="0"/>
+              <a:t> lento de lo que </a:t>
+            </a:r>
+            <a:r>
+              <a:rPr dirty="0" err="1"/>
+              <a:t>parece</a:t>
+            </a:r>
+            <a:r>
+              <a:rPr dirty="0"/>
+              <a:t> natural; </a:t>
+            </a:r>
+            <a:r>
+              <a:rPr dirty="0" err="1"/>
+              <a:t>en</a:t>
+            </a:r>
+            <a:r>
+              <a:rPr dirty="0"/>
+              <a:t> </a:t>
+            </a:r>
+            <a:r>
+              <a:rPr dirty="0" err="1"/>
+              <a:t>grabación</a:t>
+            </a:r>
+            <a:r>
+              <a:rPr dirty="0"/>
+              <a:t> </a:t>
+            </a:r>
+            <a:r>
+              <a:rPr dirty="0" err="1"/>
+              <a:t>siempre</a:t>
+            </a:r>
+            <a:r>
+              <a:rPr dirty="0"/>
+              <a:t> </a:t>
+            </a:r>
+            <a:r>
+              <a:rPr dirty="0" err="1"/>
+              <a:t>suena</a:t>
+            </a:r>
+            <a:r>
+              <a:rPr dirty="0"/>
+              <a:t> </a:t>
+            </a:r>
+            <a:r>
+              <a:rPr dirty="0" err="1"/>
+              <a:t>más</a:t>
+            </a:r>
+            <a:r>
+              <a:rPr dirty="0"/>
+              <a:t> </a:t>
+            </a:r>
+            <a:r>
+              <a:rPr dirty="0" err="1"/>
+              <a:t>rápido</a:t>
+            </a:r>
+            <a:r>
+              <a:rPr dirty="0"/>
+              <a:t>.</a:t>
+            </a:r>
           </a:p>
         </p:txBody>
       </p:sp>
@@ -589,7 +842,35 @@
           <a:bodyPr/>
           <a:lstStyle/>
           <a:p>
-            <a:endParaRPr dirty="0"/>
+            <a:r>
+              <a:t>[6:55 - 7:10 · 15 s]</a:t>
+            </a:r>
+          </a:p>
+          <a:p>
+            <a:endParaRPr/>
+          </a:p>
+          <a:p>
+            <a:r>
+              <a:t>Lo que queda para seguir: incorporar la base de matrícula para ver la deserción, que hoy</a:t>
+            </a:r>
+          </a:p>
+          <a:p>
+            <a:r>
+              <a:t>es invisible; usar modelos de supervivencia, que son los adecuados para datos</a:t>
+            </a:r>
+          </a:p>
+          <a:p>
+            <a:r>
+              <a:t>censurados; y ampliar las variables hacia la trayectoria individual.</a:t>
+            </a:r>
+          </a:p>
+          <a:p>
+            <a:endParaRPr/>
+          </a:p>
+          <a:p>
+            <a:r>
+              <a:t>El repositorio completo está disponible en GitHub. Muchas gracias.</a:t>
+            </a:r>
           </a:p>
         </p:txBody>
       </p:sp>
@@ -657,7 +938,66 @@
           <a:bodyPr/>
           <a:lstStyle/>
           <a:p>
-            <a:endParaRPr dirty="0"/>
+            <a:r>
+              <a:t>[0:20 - 1:10 · 50 s]</a:t>
+            </a:r>
+          </a:p>
+          <a:p>
+            <a:endParaRPr/>
+          </a:p>
+          <a:p>
+            <a:r>
+              <a:t>Cada carrera en Chile declara una duración teórica. Sobre esa cifra se calculan la</a:t>
+            </a:r>
+          </a:p>
+          <a:p>
+            <a:r>
+              <a:t>duración de las becas y los créditos estatales.</a:t>
+            </a:r>
+          </a:p>
+          <a:p>
+            <a:endParaRPr/>
+          </a:p>
+          <a:p>
+            <a:r>
+              <a:t>Lo que el sistema no publica es cuánto se tarda en realidad. Y aquí está el punto de</a:t>
+            </a:r>
+          </a:p>
+          <a:p>
+            <a:r>
+              <a:t>partida: al revisar el esquema oficial del SIES descubrí que las columnas que parecían</a:t>
+            </a:r>
+          </a:p>
+          <a:p>
+            <a:r>
+              <a:t>tener la respuesta NO registran lo que el estudiante tardó, sino lo que el plan declara.</a:t>
+            </a:r>
+          </a:p>
+          <a:p>
+            <a:r>
+              <a:t>Son un atributo de la carrera, no de la persona.</a:t>
+            </a:r>
+          </a:p>
+          <a:p>
+            <a:endParaRPr/>
+          </a:p>
+          <a:p>
+            <a:r>
+              <a:t>Así que la pregunta fue: se puede reconstruir la duración real desde los registros</a:t>
+            </a:r>
+          </a:p>
+          <a:p>
+            <a:r>
+              <a:t>administrativos, y caracterizar el rezago con esa variable derivada.</a:t>
+            </a:r>
+          </a:p>
+          <a:p>
+            <a:endParaRPr/>
+          </a:p>
+          <a:p>
+            <a:r>
+              <a:t>PAUSA de medio segundo antes de avanzar: es la bisagra del relato.</a:t>
+            </a:r>
           </a:p>
         </p:txBody>
       </p:sp>
@@ -725,7 +1065,711 @@
           <a:bodyPr/>
           <a:lstStyle/>
           <a:p>
+            <a:r>
+              <a:rPr dirty="0"/>
+              <a:t>El </a:t>
+            </a:r>
+            <a:r>
+              <a:rPr dirty="0" err="1"/>
+              <a:t>proyecto</a:t>
+            </a:r>
+            <a:r>
+              <a:rPr dirty="0"/>
+              <a:t> se </a:t>
+            </a:r>
+            <a:r>
+              <a:rPr dirty="0" err="1"/>
+              <a:t>desarrolló</a:t>
+            </a:r>
+            <a:r>
+              <a:rPr dirty="0"/>
+              <a:t> </a:t>
+            </a:r>
+            <a:r>
+              <a:rPr dirty="0" err="1"/>
+              <a:t>en</a:t>
+            </a:r>
+            <a:r>
+              <a:rPr dirty="0"/>
+              <a:t> cuatro </a:t>
+            </a:r>
+            <a:r>
+              <a:rPr dirty="0" err="1"/>
+              <a:t>fases</a:t>
+            </a:r>
+            <a:r>
+              <a:rPr dirty="0"/>
+              <a:t>. La </a:t>
+            </a:r>
+            <a:r>
+              <a:rPr dirty="0" err="1"/>
+              <a:t>primera</a:t>
+            </a:r>
+            <a:r>
+              <a:rPr dirty="0"/>
+              <a:t> </a:t>
+            </a:r>
+            <a:r>
+              <a:rPr dirty="0" err="1"/>
+              <a:t>definió</a:t>
+            </a:r>
+            <a:r>
+              <a:rPr dirty="0"/>
+              <a:t> </a:t>
+            </a:r>
+            <a:r>
+              <a:rPr dirty="0" err="1"/>
+              <a:t>el</a:t>
+            </a:r>
+            <a:r>
+              <a:rPr dirty="0"/>
+              <a:t> </a:t>
+            </a:r>
+            <a:r>
+              <a:rPr dirty="0" err="1"/>
+              <a:t>problema</a:t>
+            </a:r>
+            <a:r>
+              <a:rPr dirty="0"/>
+              <a:t> y </a:t>
+            </a:r>
+            <a:r>
+              <a:rPr dirty="0" err="1"/>
+              <a:t>levantó</a:t>
+            </a:r>
+            <a:r>
+              <a:rPr dirty="0"/>
+              <a:t> </a:t>
+            </a:r>
+            <a:r>
+              <a:rPr dirty="0" err="1"/>
+              <a:t>el</a:t>
+            </a:r>
             <a:endParaRPr dirty="0"/>
+          </a:p>
+          <a:p>
+            <a:r>
+              <a:rPr dirty="0" err="1"/>
+              <a:t>entorno</a:t>
+            </a:r>
+            <a:r>
+              <a:rPr dirty="0"/>
+              <a:t> reproducible. La </a:t>
+            </a:r>
+            <a:r>
+              <a:rPr dirty="0" err="1"/>
+              <a:t>segunda</a:t>
+            </a:r>
+            <a:r>
+              <a:rPr dirty="0"/>
+              <a:t> </a:t>
+            </a:r>
+            <a:r>
+              <a:rPr dirty="0" err="1"/>
+              <a:t>construyó</a:t>
+            </a:r>
+            <a:r>
+              <a:rPr dirty="0"/>
+              <a:t> </a:t>
+            </a:r>
+            <a:r>
+              <a:rPr dirty="0" err="1"/>
+              <a:t>el</a:t>
+            </a:r>
+            <a:r>
+              <a:rPr dirty="0"/>
+              <a:t> pipeline que </a:t>
+            </a:r>
+            <a:r>
+              <a:rPr dirty="0" err="1"/>
+              <a:t>convierte</a:t>
+            </a:r>
+            <a:r>
+              <a:rPr dirty="0"/>
+              <a:t> 955 megabytes de</a:t>
+            </a:r>
+          </a:p>
+          <a:p>
+            <a:r>
+              <a:rPr dirty="0" err="1"/>
+              <a:t>archivos</a:t>
+            </a:r>
+            <a:r>
+              <a:rPr dirty="0"/>
+              <a:t> crudos </a:t>
+            </a:r>
+            <a:r>
+              <a:rPr dirty="0" err="1"/>
+              <a:t>en</a:t>
+            </a:r>
+            <a:r>
+              <a:rPr dirty="0"/>
+              <a:t> un conjunto </a:t>
+            </a:r>
+            <a:r>
+              <a:rPr dirty="0" err="1"/>
+              <a:t>analítico</a:t>
+            </a:r>
+            <a:r>
+              <a:rPr dirty="0"/>
+              <a:t> </a:t>
+            </a:r>
+            <a:r>
+              <a:rPr dirty="0" err="1"/>
+              <a:t>validado</a:t>
+            </a:r>
+            <a:r>
+              <a:rPr dirty="0"/>
+              <a:t>. La </a:t>
+            </a:r>
+            <a:r>
+              <a:rPr dirty="0" err="1"/>
+              <a:t>tercera</a:t>
+            </a:r>
+            <a:r>
+              <a:rPr dirty="0"/>
+              <a:t> </a:t>
+            </a:r>
+            <a:r>
+              <a:rPr dirty="0" err="1"/>
+              <a:t>implementó</a:t>
+            </a:r>
+            <a:r>
+              <a:rPr dirty="0"/>
+              <a:t> </a:t>
+            </a:r>
+            <a:r>
+              <a:rPr dirty="0" err="1"/>
+              <a:t>el</a:t>
+            </a:r>
+            <a:r>
+              <a:rPr dirty="0"/>
+              <a:t> </a:t>
+            </a:r>
+            <a:r>
+              <a:rPr dirty="0" err="1"/>
+              <a:t>núcleo</a:t>
+            </a:r>
+            <a:endParaRPr dirty="0"/>
+          </a:p>
+          <a:p>
+            <a:r>
+              <a:rPr dirty="0" err="1"/>
+              <a:t>algorítmico</a:t>
+            </a:r>
+            <a:r>
+              <a:rPr dirty="0"/>
+              <a:t> </a:t>
+            </a:r>
+            <a:r>
+              <a:rPr dirty="0" err="1"/>
+              <a:t>desde</a:t>
+            </a:r>
+            <a:r>
+              <a:rPr dirty="0"/>
+              <a:t> </a:t>
+            </a:r>
+            <a:r>
+              <a:rPr dirty="0" err="1"/>
+              <a:t>primeros</a:t>
+            </a:r>
+            <a:r>
+              <a:rPr dirty="0"/>
+              <a:t> </a:t>
+            </a:r>
+            <a:r>
+              <a:rPr dirty="0" err="1"/>
+              <a:t>principios</a:t>
+            </a:r>
+            <a:r>
+              <a:rPr dirty="0"/>
+              <a:t>, con </a:t>
+            </a:r>
+            <a:r>
+              <a:rPr dirty="0" err="1"/>
+              <a:t>medición</a:t>
+            </a:r>
+            <a:r>
+              <a:rPr dirty="0"/>
+              <a:t> formal de </a:t>
+            </a:r>
+            <a:r>
+              <a:rPr dirty="0" err="1"/>
+              <a:t>complejidad</a:t>
+            </a:r>
+            <a:r>
+              <a:rPr dirty="0"/>
+              <a:t> y un </a:t>
+            </a:r>
+            <a:r>
+              <a:rPr dirty="0" err="1"/>
+              <a:t>modelo</a:t>
+            </a:r>
+            <a:r>
+              <a:rPr dirty="0"/>
+              <a:t> de</a:t>
+            </a:r>
+          </a:p>
+          <a:p>
+            <a:r>
+              <a:rPr dirty="0" err="1"/>
+              <a:t>dominio</a:t>
+            </a:r>
+            <a:r>
+              <a:rPr dirty="0"/>
+              <a:t> </a:t>
+            </a:r>
+            <a:r>
+              <a:rPr dirty="0" err="1"/>
+              <a:t>orientado</a:t>
+            </a:r>
+            <a:r>
+              <a:rPr dirty="0"/>
+              <a:t> a </a:t>
+            </a:r>
+            <a:r>
+              <a:rPr dirty="0" err="1"/>
+              <a:t>objetos</a:t>
+            </a:r>
+            <a:r>
+              <a:rPr dirty="0"/>
+              <a:t>. Y la </a:t>
+            </a:r>
+            <a:r>
+              <a:rPr dirty="0" err="1"/>
+              <a:t>cuarta</a:t>
+            </a:r>
+            <a:r>
+              <a:rPr dirty="0"/>
+              <a:t>, que es la que </a:t>
+            </a:r>
+            <a:r>
+              <a:rPr dirty="0" err="1"/>
+              <a:t>presento</a:t>
+            </a:r>
+            <a:r>
+              <a:rPr dirty="0"/>
+              <a:t>, </a:t>
+            </a:r>
+            <a:r>
+              <a:rPr dirty="0" err="1"/>
+              <a:t>ejecuta</a:t>
+            </a:r>
+            <a:r>
+              <a:rPr dirty="0"/>
+              <a:t> </a:t>
+            </a:r>
+            <a:r>
+              <a:rPr dirty="0" err="1"/>
+              <a:t>todo</a:t>
+            </a:r>
+            <a:r>
+              <a:rPr dirty="0"/>
+              <a:t> </a:t>
+            </a:r>
+            <a:r>
+              <a:rPr dirty="0" err="1"/>
+              <a:t>eso</a:t>
+            </a:r>
+            <a:r>
+              <a:rPr dirty="0"/>
+              <a:t> de</a:t>
+            </a:r>
+          </a:p>
+          <a:p>
+            <a:r>
+              <a:rPr dirty="0" err="1"/>
+              <a:t>extremo</a:t>
+            </a:r>
+            <a:r>
+              <a:rPr dirty="0"/>
+              <a:t> a </a:t>
+            </a:r>
+            <a:r>
+              <a:rPr dirty="0" err="1"/>
+              <a:t>extremo</a:t>
+            </a:r>
+            <a:r>
+              <a:rPr dirty="0"/>
+              <a:t>.</a:t>
+            </a:r>
+          </a:p>
+          <a:p>
+            <a:endParaRPr dirty="0"/>
+          </a:p>
+          <a:p>
+            <a:r>
+              <a:rPr dirty="0"/>
+              <a:t>La </a:t>
+            </a:r>
+            <a:r>
+              <a:rPr dirty="0" err="1"/>
+              <a:t>transformación</a:t>
+            </a:r>
+            <a:r>
+              <a:rPr dirty="0"/>
+              <a:t> central </a:t>
+            </a:r>
+            <a:r>
+              <a:rPr dirty="0" err="1"/>
+              <a:t>está</a:t>
+            </a:r>
+            <a:r>
+              <a:rPr dirty="0"/>
+              <a:t> </a:t>
+            </a:r>
+            <a:r>
+              <a:rPr dirty="0" err="1"/>
+              <a:t>abajo</a:t>
+            </a:r>
+            <a:r>
+              <a:rPr dirty="0"/>
+              <a:t>: la </a:t>
+            </a:r>
+            <a:r>
+              <a:rPr dirty="0" err="1"/>
+              <a:t>duración</a:t>
+            </a:r>
+            <a:r>
+              <a:rPr dirty="0"/>
+              <a:t> real se </a:t>
+            </a:r>
+            <a:r>
+              <a:rPr dirty="0" err="1"/>
+              <a:t>deriva</a:t>
+            </a:r>
+            <a:r>
+              <a:rPr dirty="0"/>
+              <a:t> del </a:t>
+            </a:r>
+            <a:r>
+              <a:rPr dirty="0" err="1"/>
+              <a:t>año</a:t>
+            </a:r>
+            <a:r>
+              <a:rPr dirty="0"/>
+              <a:t> y </a:t>
+            </a:r>
+            <a:r>
+              <a:rPr dirty="0" err="1"/>
+              <a:t>semestre</a:t>
+            </a:r>
+            <a:r>
+              <a:rPr dirty="0"/>
+              <a:t> de</a:t>
+            </a:r>
+          </a:p>
+          <a:p>
+            <a:r>
+              <a:rPr dirty="0" err="1"/>
+              <a:t>ingreso</a:t>
+            </a:r>
+            <a:r>
+              <a:rPr dirty="0"/>
+              <a:t> y de </a:t>
+            </a:r>
+            <a:r>
+              <a:rPr dirty="0" err="1"/>
+              <a:t>titulación</a:t>
+            </a:r>
+            <a:r>
+              <a:rPr dirty="0"/>
+              <a:t>. El "</a:t>
+            </a:r>
+            <a:r>
+              <a:rPr dirty="0" err="1"/>
+              <a:t>más</a:t>
+            </a:r>
+            <a:r>
+              <a:rPr dirty="0"/>
+              <a:t> uno" no es </a:t>
+            </a:r>
+            <a:r>
+              <a:rPr dirty="0" err="1"/>
+              <a:t>arbitrario</a:t>
+            </a:r>
+            <a:r>
+              <a:rPr dirty="0"/>
+              <a:t>: </a:t>
+            </a:r>
+            <a:r>
+              <a:rPr dirty="0" err="1"/>
+              <a:t>quien</a:t>
+            </a:r>
+            <a:r>
+              <a:rPr dirty="0"/>
+              <a:t> </a:t>
+            </a:r>
+            <a:r>
+              <a:rPr dirty="0" err="1"/>
+              <a:t>ingresa</a:t>
+            </a:r>
+            <a:r>
+              <a:rPr dirty="0"/>
+              <a:t> y se </a:t>
+            </a:r>
+            <a:r>
+              <a:rPr dirty="0" err="1"/>
+              <a:t>titula</a:t>
+            </a:r>
+            <a:r>
+              <a:rPr dirty="0"/>
+              <a:t> </a:t>
+            </a:r>
+            <a:r>
+              <a:rPr dirty="0" err="1"/>
+              <a:t>en</a:t>
+            </a:r>
+            <a:r>
+              <a:rPr dirty="0"/>
+              <a:t> </a:t>
+            </a:r>
+            <a:r>
+              <a:rPr dirty="0" err="1"/>
+              <a:t>el</a:t>
+            </a:r>
+            <a:endParaRPr dirty="0"/>
+          </a:p>
+          <a:p>
+            <a:r>
+              <a:rPr dirty="0" err="1"/>
+              <a:t>mismo</a:t>
+            </a:r>
+            <a:r>
+              <a:rPr dirty="0"/>
+              <a:t> </a:t>
+            </a:r>
+            <a:r>
+              <a:rPr dirty="0" err="1"/>
+              <a:t>semestre</a:t>
+            </a:r>
+            <a:r>
+              <a:rPr dirty="0"/>
+              <a:t> </a:t>
+            </a:r>
+            <a:r>
+              <a:rPr dirty="0" err="1"/>
+              <a:t>cursó</a:t>
+            </a:r>
+            <a:r>
+              <a:rPr dirty="0"/>
+              <a:t> un </a:t>
+            </a:r>
+            <a:r>
+              <a:rPr dirty="0" err="1"/>
+              <a:t>semestre</a:t>
+            </a:r>
+            <a:r>
+              <a:rPr dirty="0"/>
+              <a:t>, no cero. Esa </a:t>
+            </a:r>
+            <a:r>
+              <a:rPr dirty="0" err="1"/>
+              <a:t>coherencia</a:t>
+            </a:r>
+            <a:r>
+              <a:rPr dirty="0"/>
+              <a:t> </a:t>
+            </a:r>
+            <a:r>
+              <a:rPr dirty="0" err="1"/>
+              <a:t>aritmética</a:t>
+            </a:r>
+            <a:r>
+              <a:rPr dirty="0"/>
+              <a:t> se </a:t>
+            </a:r>
+            <a:r>
+              <a:rPr dirty="0" err="1"/>
+              <a:t>verifica</a:t>
+            </a:r>
+            <a:r>
+              <a:rPr dirty="0"/>
+              <a:t> </a:t>
+            </a:r>
+            <a:r>
+              <a:rPr dirty="0" err="1"/>
+              <a:t>como</a:t>
+            </a:r>
+            <a:endParaRPr dirty="0"/>
+          </a:p>
+          <a:p>
+            <a:r>
+              <a:rPr dirty="0" err="1"/>
+              <a:t>regla</a:t>
+            </a:r>
+            <a:r>
+              <a:rPr dirty="0"/>
+              <a:t> de </a:t>
+            </a:r>
+            <a:r>
+              <a:rPr dirty="0" err="1"/>
+              <a:t>validación</a:t>
+            </a:r>
+            <a:r>
+              <a:rPr dirty="0"/>
+              <a:t> </a:t>
+            </a:r>
+            <a:r>
+              <a:rPr dirty="0" err="1"/>
+              <a:t>sobre</a:t>
+            </a:r>
+            <a:r>
+              <a:rPr dirty="0"/>
+              <a:t> </a:t>
+            </a:r>
+            <a:r>
+              <a:rPr dirty="0" err="1"/>
+              <a:t>el</a:t>
+            </a:r>
+            <a:r>
+              <a:rPr dirty="0"/>
+              <a:t> dataset </a:t>
+            </a:r>
+            <a:r>
+              <a:rPr dirty="0" err="1"/>
+              <a:t>completo</a:t>
+            </a:r>
+            <a:r>
+              <a:rPr dirty="0"/>
+              <a:t>.</a:t>
+            </a:r>
+          </a:p>
+          <a:p>
+            <a:endParaRPr dirty="0"/>
+          </a:p>
+          <a:p>
+            <a:r>
+              <a:rPr dirty="0"/>
+              <a:t>SI EL VIDEO VA CORTO, </a:t>
+            </a:r>
+            <a:r>
+              <a:rPr dirty="0" err="1"/>
+              <a:t>agregar</a:t>
+            </a:r>
+            <a:r>
+              <a:rPr dirty="0"/>
+              <a:t> </a:t>
+            </a:r>
+            <a:r>
+              <a:rPr dirty="0" err="1"/>
+              <a:t>aquí</a:t>
+            </a:r>
+            <a:r>
+              <a:rPr dirty="0"/>
+              <a:t>: </a:t>
+            </a:r>
+            <a:r>
+              <a:rPr dirty="0" err="1"/>
+              <a:t>el</a:t>
+            </a:r>
+            <a:r>
+              <a:rPr dirty="0"/>
+              <a:t> pipeline </a:t>
+            </a:r>
+            <a:r>
+              <a:rPr dirty="0" err="1"/>
+              <a:t>retiene</a:t>
+            </a:r>
+            <a:r>
+              <a:rPr dirty="0"/>
+              <a:t> </a:t>
+            </a:r>
+            <a:r>
+              <a:rPr dirty="0" err="1"/>
+              <a:t>el</a:t>
+            </a:r>
+            <a:r>
+              <a:rPr dirty="0"/>
+              <a:t> 72,9 </a:t>
+            </a:r>
+            <a:r>
+              <a:rPr dirty="0" err="1"/>
+              <a:t>por</a:t>
+            </a:r>
+            <a:r>
+              <a:rPr dirty="0"/>
+              <a:t> </a:t>
+            </a:r>
+            <a:r>
+              <a:rPr dirty="0" err="1"/>
+              <a:t>ciento</a:t>
+            </a:r>
+            <a:r>
+              <a:rPr dirty="0"/>
+              <a:t> de las </a:t>
+            </a:r>
+            <a:r>
+              <a:rPr dirty="0" err="1"/>
+              <a:t>filas</a:t>
+            </a:r>
+            <a:endParaRPr dirty="0"/>
+          </a:p>
+          <a:p>
+            <a:r>
+              <a:rPr dirty="0" err="1"/>
+              <a:t>originales</a:t>
+            </a:r>
+            <a:r>
+              <a:rPr dirty="0"/>
+              <a:t> y </a:t>
+            </a:r>
+            <a:r>
+              <a:rPr dirty="0" err="1"/>
+              <a:t>cada</a:t>
+            </a:r>
+            <a:r>
+              <a:rPr dirty="0"/>
+              <a:t> </a:t>
+            </a:r>
+            <a:r>
+              <a:rPr dirty="0" err="1"/>
+              <a:t>exclusión</a:t>
+            </a:r>
+            <a:r>
+              <a:rPr dirty="0"/>
+              <a:t> </a:t>
+            </a:r>
+            <a:r>
+              <a:rPr dirty="0" err="1"/>
+              <a:t>está</a:t>
+            </a:r>
+            <a:r>
+              <a:rPr dirty="0"/>
+              <a:t> </a:t>
+            </a:r>
+            <a:r>
+              <a:rPr dirty="0" err="1"/>
+              <a:t>cuantificada</a:t>
+            </a:r>
+            <a:r>
+              <a:rPr dirty="0"/>
+              <a:t> </a:t>
+            </a:r>
+            <a:r>
+              <a:rPr dirty="0" err="1"/>
+              <a:t>en</a:t>
+            </a:r>
+            <a:r>
+              <a:rPr dirty="0"/>
+              <a:t> </a:t>
+            </a:r>
+            <a:r>
+              <a:rPr dirty="0" err="1"/>
+              <a:t>una</a:t>
+            </a:r>
+            <a:r>
+              <a:rPr dirty="0"/>
+              <a:t> </a:t>
+            </a:r>
+            <a:r>
+              <a:rPr dirty="0" err="1"/>
+              <a:t>bitácora</a:t>
+            </a:r>
+            <a:r>
+              <a:rPr dirty="0"/>
+              <a:t> auditable.</a:t>
+            </a:r>
           </a:p>
         </p:txBody>
       </p:sp>
@@ -793,7 +1837,590 @@
           <a:bodyPr/>
           <a:lstStyle/>
           <a:p>
+            <a:r>
+              <a:rPr dirty="0"/>
+              <a:t>Este es </a:t>
+            </a:r>
+            <a:r>
+              <a:rPr dirty="0" err="1"/>
+              <a:t>el</a:t>
+            </a:r>
+            <a:r>
+              <a:rPr dirty="0"/>
+              <a:t> </a:t>
+            </a:r>
+            <a:r>
+              <a:rPr dirty="0" err="1"/>
+              <a:t>resultado</a:t>
+            </a:r>
+            <a:r>
+              <a:rPr dirty="0"/>
+              <a:t> central. Solo </a:t>
+            </a:r>
+            <a:r>
+              <a:rPr dirty="0" err="1"/>
+              <a:t>el</a:t>
+            </a:r>
+            <a:r>
+              <a:rPr dirty="0"/>
+              <a:t> 19 </a:t>
+            </a:r>
+            <a:r>
+              <a:rPr dirty="0" err="1"/>
+              <a:t>por</a:t>
+            </a:r>
+            <a:r>
+              <a:rPr dirty="0"/>
+              <a:t> </a:t>
+            </a:r>
+            <a:r>
+              <a:rPr dirty="0" err="1"/>
+              <a:t>ciento</a:t>
+            </a:r>
+            <a:r>
+              <a:rPr dirty="0"/>
+              <a:t> de </a:t>
+            </a:r>
+            <a:r>
+              <a:rPr dirty="0" err="1"/>
+              <a:t>los</a:t>
+            </a:r>
+            <a:r>
+              <a:rPr dirty="0"/>
+              <a:t> </a:t>
+            </a:r>
+            <a:r>
+              <a:rPr dirty="0" err="1"/>
+              <a:t>titulados</a:t>
+            </a:r>
+            <a:r>
+              <a:rPr dirty="0"/>
+              <a:t> </a:t>
+            </a:r>
+            <a:r>
+              <a:rPr dirty="0" err="1"/>
+              <a:t>egresa</a:t>
+            </a:r>
+            <a:r>
+              <a:rPr dirty="0"/>
+              <a:t> </a:t>
+            </a:r>
+            <a:r>
+              <a:rPr dirty="0" err="1"/>
+              <a:t>dentro</a:t>
+            </a:r>
+            <a:r>
+              <a:rPr dirty="0"/>
+              <a:t> del</a:t>
+            </a:r>
+          </a:p>
+          <a:p>
+            <a:r>
+              <a:rPr dirty="0" err="1"/>
+              <a:t>plazo</a:t>
+            </a:r>
+            <a:r>
+              <a:rPr dirty="0"/>
+              <a:t> que </a:t>
+            </a:r>
+            <a:r>
+              <a:rPr dirty="0" err="1"/>
+              <a:t>su</a:t>
+            </a:r>
+            <a:r>
+              <a:rPr dirty="0"/>
+              <a:t> </a:t>
+            </a:r>
+            <a:r>
+              <a:rPr dirty="0" err="1"/>
+              <a:t>propio</a:t>
+            </a:r>
+            <a:r>
+              <a:rPr dirty="0"/>
+              <a:t> plan </a:t>
+            </a:r>
+            <a:r>
+              <a:rPr dirty="0" err="1"/>
+              <a:t>declara</a:t>
+            </a:r>
+            <a:r>
+              <a:rPr dirty="0"/>
+              <a:t>. </a:t>
+            </a:r>
+            <a:r>
+              <a:rPr dirty="0" err="1"/>
+              <a:t>Dicho</a:t>
+            </a:r>
+            <a:r>
+              <a:rPr dirty="0"/>
+              <a:t> al </a:t>
+            </a:r>
+            <a:r>
+              <a:rPr dirty="0" err="1"/>
+              <a:t>revés</a:t>
+            </a:r>
+            <a:r>
+              <a:rPr dirty="0"/>
+              <a:t>: cuatro de </a:t>
+            </a:r>
+            <a:r>
+              <a:rPr dirty="0" err="1"/>
+              <a:t>cada</a:t>
+            </a:r>
+            <a:r>
+              <a:rPr dirty="0"/>
+              <a:t> </a:t>
+            </a:r>
+            <a:r>
+              <a:rPr dirty="0" err="1"/>
+              <a:t>cinco</a:t>
+            </a:r>
+            <a:r>
+              <a:rPr dirty="0"/>
+              <a:t> se </a:t>
+            </a:r>
+            <a:r>
+              <a:rPr dirty="0" err="1"/>
+              <a:t>titulan</a:t>
+            </a:r>
+            <a:r>
+              <a:rPr dirty="0"/>
+              <a:t> </a:t>
+            </a:r>
+            <a:r>
+              <a:rPr dirty="0" err="1"/>
+              <a:t>fuera</a:t>
+            </a:r>
             <a:endParaRPr dirty="0"/>
+          </a:p>
+          <a:p>
+            <a:r>
+              <a:rPr dirty="0"/>
+              <a:t>de </a:t>
+            </a:r>
+            <a:r>
+              <a:rPr dirty="0" err="1"/>
+              <a:t>plazo</a:t>
+            </a:r>
+            <a:r>
+              <a:rPr dirty="0"/>
+              <a:t>.</a:t>
+            </a:r>
+          </a:p>
+          <a:p>
+            <a:endParaRPr dirty="0"/>
+          </a:p>
+          <a:p>
+            <a:r>
+              <a:rPr dirty="0"/>
+              <a:t>El </a:t>
+            </a:r>
+            <a:r>
+              <a:rPr dirty="0" err="1"/>
+              <a:t>exceso</a:t>
+            </a:r>
+            <a:r>
+              <a:rPr dirty="0"/>
+              <a:t> </a:t>
+            </a:r>
+            <a:r>
+              <a:rPr dirty="0" err="1"/>
+              <a:t>promedio</a:t>
+            </a:r>
+            <a:r>
+              <a:rPr dirty="0"/>
+              <a:t> es de 2 coma 76 </a:t>
+            </a:r>
+            <a:r>
+              <a:rPr dirty="0" err="1"/>
+              <a:t>semestres</a:t>
+            </a:r>
+            <a:r>
+              <a:rPr dirty="0"/>
+              <a:t>, un 43 </a:t>
+            </a:r>
+            <a:r>
+              <a:rPr dirty="0" err="1"/>
+              <a:t>por</a:t>
+            </a:r>
+            <a:r>
+              <a:rPr dirty="0"/>
+              <a:t> </a:t>
+            </a:r>
+            <a:r>
+              <a:rPr dirty="0" err="1"/>
+              <a:t>ciento</a:t>
+            </a:r>
+            <a:r>
+              <a:rPr dirty="0"/>
+              <a:t> </a:t>
+            </a:r>
+            <a:r>
+              <a:rPr dirty="0" err="1"/>
+              <a:t>más</a:t>
+            </a:r>
+            <a:r>
+              <a:rPr dirty="0"/>
+              <a:t> de </a:t>
+            </a:r>
+            <a:r>
+              <a:rPr dirty="0" err="1"/>
+              <a:t>tiempo</a:t>
+            </a:r>
+            <a:r>
+              <a:rPr dirty="0"/>
+              <a:t> del</a:t>
+            </a:r>
+          </a:p>
+          <a:p>
+            <a:r>
+              <a:rPr dirty="0" err="1"/>
+              <a:t>previsto</a:t>
+            </a:r>
+            <a:r>
+              <a:rPr dirty="0"/>
+              <a:t>. Y </a:t>
+            </a:r>
+            <a:r>
+              <a:rPr dirty="0" err="1"/>
+              <a:t>el</a:t>
+            </a:r>
+            <a:r>
+              <a:rPr dirty="0"/>
+              <a:t> </a:t>
+            </a:r>
+            <a:r>
+              <a:rPr dirty="0" err="1"/>
+              <a:t>rezago</a:t>
+            </a:r>
+            <a:r>
+              <a:rPr dirty="0"/>
+              <a:t> </a:t>
+            </a:r>
+            <a:r>
+              <a:rPr dirty="0" err="1"/>
+              <a:t>severo</a:t>
+            </a:r>
+            <a:r>
+              <a:rPr dirty="0"/>
+              <a:t>, </a:t>
+            </a:r>
+            <a:r>
+              <a:rPr dirty="0" err="1"/>
+              <a:t>más</a:t>
+            </a:r>
+            <a:r>
+              <a:rPr dirty="0"/>
+              <a:t> de cuatro </a:t>
+            </a:r>
+            <a:r>
+              <a:rPr dirty="0" err="1"/>
+              <a:t>semestres</a:t>
+            </a:r>
+            <a:r>
+              <a:rPr dirty="0"/>
+              <a:t> de </a:t>
+            </a:r>
+            <a:r>
+              <a:rPr dirty="0" err="1"/>
+              <a:t>exceso</a:t>
+            </a:r>
+            <a:r>
+              <a:rPr dirty="0"/>
+              <a:t>, </a:t>
+            </a:r>
+            <a:r>
+              <a:rPr dirty="0" err="1"/>
+              <a:t>alcanza</a:t>
+            </a:r>
+            <a:r>
+              <a:rPr dirty="0"/>
+              <a:t> al 20 coma 4</a:t>
+            </a:r>
+          </a:p>
+          <a:p>
+            <a:r>
+              <a:rPr dirty="0" err="1"/>
+              <a:t>por</a:t>
+            </a:r>
+            <a:r>
+              <a:rPr dirty="0"/>
+              <a:t> </a:t>
+            </a:r>
+            <a:r>
+              <a:rPr dirty="0" err="1"/>
+              <a:t>ciento</a:t>
+            </a:r>
+            <a:r>
+              <a:rPr dirty="0"/>
+              <a:t>: </a:t>
+            </a:r>
+            <a:r>
+              <a:rPr dirty="0" err="1"/>
+              <a:t>prácticamente</a:t>
+            </a:r>
+            <a:r>
+              <a:rPr dirty="0"/>
+              <a:t> la </a:t>
+            </a:r>
+            <a:r>
+              <a:rPr dirty="0" err="1"/>
+              <a:t>misma</a:t>
+            </a:r>
+            <a:r>
+              <a:rPr dirty="0"/>
+              <a:t> </a:t>
+            </a:r>
+            <a:r>
+              <a:rPr dirty="0" err="1"/>
+              <a:t>proporción</a:t>
+            </a:r>
+            <a:r>
+              <a:rPr dirty="0"/>
+              <a:t> que </a:t>
+            </a:r>
+            <a:r>
+              <a:rPr dirty="0" err="1"/>
+              <a:t>logra</a:t>
+            </a:r>
+            <a:r>
+              <a:rPr dirty="0"/>
+              <a:t> </a:t>
+            </a:r>
+            <a:r>
+              <a:rPr dirty="0" err="1"/>
+              <a:t>titularse</a:t>
+            </a:r>
+            <a:r>
+              <a:rPr dirty="0"/>
+              <a:t> a </a:t>
+            </a:r>
+            <a:r>
+              <a:rPr dirty="0" err="1"/>
+              <a:t>tiempo</a:t>
+            </a:r>
+            <a:r>
+              <a:rPr dirty="0"/>
+              <a:t>.</a:t>
+            </a:r>
+          </a:p>
+          <a:p>
+            <a:endParaRPr dirty="0"/>
+          </a:p>
+          <a:p>
+            <a:r>
+              <a:rPr dirty="0" err="1"/>
+              <a:t>Agregado</a:t>
+            </a:r>
+            <a:r>
+              <a:rPr dirty="0"/>
+              <a:t>, </a:t>
+            </a:r>
+            <a:r>
+              <a:rPr dirty="0" err="1"/>
+              <a:t>el</a:t>
+            </a:r>
+            <a:r>
+              <a:rPr dirty="0"/>
+              <a:t> </a:t>
+            </a:r>
+            <a:r>
+              <a:rPr dirty="0" err="1"/>
+              <a:t>sistema</a:t>
+            </a:r>
+            <a:r>
+              <a:rPr dirty="0"/>
+              <a:t> </a:t>
+            </a:r>
+            <a:r>
+              <a:rPr dirty="0" err="1"/>
+              <a:t>acumula</a:t>
+            </a:r>
+            <a:r>
+              <a:rPr dirty="0"/>
+              <a:t> 3 coma 55 </a:t>
+            </a:r>
+            <a:r>
+              <a:rPr dirty="0" err="1"/>
+              <a:t>millones</a:t>
+            </a:r>
+            <a:r>
+              <a:rPr dirty="0"/>
+              <a:t> de </a:t>
+            </a:r>
+            <a:r>
+              <a:rPr dirty="0" err="1"/>
+              <a:t>semestres-estudiante</a:t>
+            </a:r>
+            <a:r>
+              <a:rPr dirty="0"/>
+              <a:t> </a:t>
+            </a:r>
+            <a:r>
+              <a:rPr dirty="0" err="1"/>
+              <a:t>por</a:t>
+            </a:r>
+            <a:r>
+              <a:rPr dirty="0"/>
+              <a:t> </a:t>
+            </a:r>
+            <a:r>
+              <a:rPr dirty="0" err="1"/>
+              <a:t>sobre</a:t>
+            </a:r>
+            <a:r>
+              <a:rPr dirty="0"/>
+              <a:t> lo</a:t>
+            </a:r>
+          </a:p>
+          <a:p>
+            <a:r>
+              <a:rPr dirty="0" err="1"/>
+              <a:t>planificado</a:t>
+            </a:r>
+            <a:r>
+              <a:rPr dirty="0"/>
+              <a:t> </a:t>
+            </a:r>
+            <a:r>
+              <a:rPr dirty="0" err="1"/>
+              <a:t>en</a:t>
+            </a:r>
+            <a:r>
+              <a:rPr dirty="0"/>
+              <a:t> </a:t>
+            </a:r>
+            <a:r>
+              <a:rPr dirty="0" err="1"/>
+              <a:t>el</a:t>
+            </a:r>
+            <a:r>
+              <a:rPr dirty="0"/>
+              <a:t> </a:t>
+            </a:r>
+            <a:r>
+              <a:rPr dirty="0" err="1"/>
+              <a:t>período</a:t>
+            </a:r>
+            <a:r>
+              <a:rPr dirty="0"/>
+              <a:t>.</a:t>
+            </a:r>
+          </a:p>
+          <a:p>
+            <a:endParaRPr dirty="0"/>
+          </a:p>
+          <a:p>
+            <a:r>
+              <a:rPr dirty="0"/>
+              <a:t>El </a:t>
+            </a:r>
+            <a:r>
+              <a:rPr dirty="0" err="1"/>
+              <a:t>gráfico</a:t>
+            </a:r>
+            <a:r>
+              <a:rPr dirty="0"/>
+              <a:t> de la </a:t>
+            </a:r>
+            <a:r>
+              <a:rPr dirty="0" err="1"/>
+              <a:t>izquierda</a:t>
+            </a:r>
+            <a:r>
+              <a:rPr dirty="0"/>
+              <a:t> </a:t>
+            </a:r>
+            <a:r>
+              <a:rPr dirty="0" err="1"/>
+              <a:t>muestra</a:t>
+            </a:r>
+            <a:r>
+              <a:rPr dirty="0"/>
+              <a:t> </a:t>
+            </a:r>
+            <a:r>
+              <a:rPr dirty="0" err="1"/>
+              <a:t>por</a:t>
+            </a:r>
+            <a:r>
+              <a:rPr dirty="0"/>
+              <a:t> </a:t>
+            </a:r>
+            <a:r>
+              <a:rPr dirty="0" err="1"/>
+              <a:t>qué</a:t>
+            </a:r>
+            <a:r>
+              <a:rPr dirty="0"/>
+              <a:t> </a:t>
+            </a:r>
+            <a:r>
+              <a:rPr dirty="0" err="1"/>
+              <a:t>reporto</a:t>
+            </a:r>
+            <a:r>
+              <a:rPr dirty="0"/>
+              <a:t> media y </a:t>
+            </a:r>
+            <a:r>
+              <a:rPr dirty="0" err="1"/>
+              <a:t>mediana</a:t>
+            </a:r>
+            <a:r>
+              <a:rPr dirty="0"/>
+              <a:t>: la </a:t>
+            </a:r>
+            <a:r>
+              <a:rPr dirty="0" err="1"/>
+              <a:t>distribución</a:t>
+            </a:r>
+            <a:r>
+              <a:rPr dirty="0"/>
+              <a:t> es</a:t>
+            </a:r>
+          </a:p>
+          <a:p>
+            <a:r>
+              <a:rPr dirty="0" err="1"/>
+              <a:t>asimétrica</a:t>
+            </a:r>
+            <a:r>
+              <a:rPr dirty="0"/>
+              <a:t>, con </a:t>
+            </a:r>
+            <a:r>
+              <a:rPr dirty="0" err="1"/>
+              <a:t>una</a:t>
+            </a:r>
+            <a:r>
+              <a:rPr dirty="0"/>
+              <a:t> cola </a:t>
+            </a:r>
+            <a:r>
+              <a:rPr dirty="0" err="1"/>
+              <a:t>larga</a:t>
+            </a:r>
+            <a:r>
+              <a:rPr dirty="0"/>
+              <a:t> que arrastra </a:t>
+            </a:r>
+            <a:r>
+              <a:rPr dirty="0" err="1"/>
+              <a:t>el</a:t>
+            </a:r>
+            <a:r>
+              <a:rPr dirty="0"/>
+              <a:t> </a:t>
+            </a:r>
+            <a:r>
+              <a:rPr dirty="0" err="1"/>
+              <a:t>promedio</a:t>
+            </a:r>
+            <a:r>
+              <a:rPr dirty="0"/>
+              <a:t>.</a:t>
+            </a:r>
           </a:p>
         </p:txBody>
       </p:sp>
@@ -861,7 +2488,549 @@
           <a:bodyPr/>
           <a:lstStyle/>
           <a:p>
+            <a:r>
+              <a:rPr dirty="0"/>
+              <a:t>El </a:t>
+            </a:r>
+            <a:r>
+              <a:rPr dirty="0" err="1"/>
+              <a:t>rezago</a:t>
+            </a:r>
+            <a:r>
+              <a:rPr dirty="0"/>
+              <a:t> </a:t>
+            </a:r>
+            <a:r>
+              <a:rPr dirty="0" err="1"/>
+              <a:t>tampoco</a:t>
+            </a:r>
+            <a:r>
+              <a:rPr dirty="0"/>
+              <a:t> se </a:t>
+            </a:r>
+            <a:r>
+              <a:rPr dirty="0" err="1"/>
+              <a:t>reparte</a:t>
+            </a:r>
+            <a:r>
+              <a:rPr dirty="0"/>
+              <a:t> de forma pareja.</a:t>
+            </a:r>
+          </a:p>
+          <a:p>
             <a:endParaRPr dirty="0"/>
+          </a:p>
+          <a:p>
+            <a:r>
+              <a:rPr dirty="0"/>
+              <a:t>Por </a:t>
+            </a:r>
+            <a:r>
+              <a:rPr dirty="0" err="1"/>
+              <a:t>área</a:t>
+            </a:r>
+            <a:r>
+              <a:rPr dirty="0"/>
+              <a:t> de </a:t>
+            </a:r>
+            <a:r>
+              <a:rPr dirty="0" err="1"/>
+              <a:t>conocimiento</a:t>
+            </a:r>
+            <a:r>
+              <a:rPr dirty="0"/>
+              <a:t>, Derecho </a:t>
+            </a:r>
+            <a:r>
+              <a:rPr dirty="0" err="1"/>
+              <a:t>triplica</a:t>
+            </a:r>
+            <a:r>
+              <a:rPr dirty="0"/>
+              <a:t> a </a:t>
+            </a:r>
+            <a:r>
+              <a:rPr dirty="0" err="1"/>
+              <a:t>Educación</a:t>
+            </a:r>
+            <a:r>
+              <a:rPr dirty="0"/>
+              <a:t>: 5,77 </a:t>
+            </a:r>
+            <a:r>
+              <a:rPr dirty="0" err="1"/>
+              <a:t>semestres</a:t>
+            </a:r>
+            <a:r>
+              <a:rPr dirty="0"/>
+              <a:t> </a:t>
+            </a:r>
+            <a:r>
+              <a:rPr dirty="0" err="1"/>
+              <a:t>frente</a:t>
+            </a:r>
+            <a:r>
+              <a:rPr dirty="0"/>
+              <a:t> a 1,93.</a:t>
+            </a:r>
+          </a:p>
+          <a:p>
+            <a:r>
+              <a:rPr dirty="0" err="1"/>
+              <a:t>Casi</a:t>
+            </a:r>
+            <a:r>
+              <a:rPr dirty="0"/>
+              <a:t> cuatro </a:t>
+            </a:r>
+            <a:r>
+              <a:rPr dirty="0" err="1"/>
+              <a:t>semestres</a:t>
+            </a:r>
+            <a:r>
+              <a:rPr dirty="0"/>
+              <a:t>, dos </a:t>
+            </a:r>
+            <a:r>
+              <a:rPr dirty="0" err="1"/>
+              <a:t>años</a:t>
+            </a:r>
+            <a:r>
+              <a:rPr dirty="0"/>
+              <a:t>, </a:t>
+            </a:r>
+            <a:r>
+              <a:rPr dirty="0" err="1"/>
+              <a:t>separan</a:t>
+            </a:r>
+            <a:r>
+              <a:rPr dirty="0"/>
+              <a:t> a la </a:t>
+            </a:r>
+            <a:r>
+              <a:rPr dirty="0" err="1"/>
+              <a:t>carrera</a:t>
+            </a:r>
+            <a:r>
+              <a:rPr dirty="0"/>
+              <a:t> </a:t>
+            </a:r>
+            <a:r>
+              <a:rPr dirty="0" err="1"/>
+              <a:t>más</a:t>
+            </a:r>
+            <a:r>
+              <a:rPr dirty="0"/>
+              <a:t> </a:t>
+            </a:r>
+            <a:r>
+              <a:rPr dirty="0" err="1"/>
+              <a:t>rezagada</a:t>
+            </a:r>
+            <a:r>
+              <a:rPr dirty="0"/>
+              <a:t> de la </a:t>
+            </a:r>
+            <a:r>
+              <a:rPr dirty="0" err="1"/>
+              <a:t>menos</a:t>
+            </a:r>
+            <a:r>
+              <a:rPr dirty="0"/>
+              <a:t> </a:t>
+            </a:r>
+            <a:r>
+              <a:rPr dirty="0" err="1"/>
+              <a:t>rezagada</a:t>
+            </a:r>
+            <a:r>
+              <a:rPr dirty="0"/>
+              <a:t>.</a:t>
+            </a:r>
+          </a:p>
+          <a:p>
+            <a:endParaRPr dirty="0"/>
+          </a:p>
+          <a:p>
+            <a:r>
+              <a:rPr dirty="0"/>
+              <a:t>Por </a:t>
+            </a:r>
+            <a:r>
+              <a:rPr dirty="0" err="1"/>
+              <a:t>tipo</a:t>
+            </a:r>
+            <a:r>
+              <a:rPr dirty="0"/>
+              <a:t> de </a:t>
+            </a:r>
+            <a:r>
+              <a:rPr dirty="0" err="1"/>
+              <a:t>institución</a:t>
+            </a:r>
+            <a:r>
+              <a:rPr dirty="0"/>
+              <a:t>, las </a:t>
+            </a:r>
+            <a:r>
+              <a:rPr dirty="0" err="1"/>
+              <a:t>universidades</a:t>
+            </a:r>
+            <a:r>
+              <a:rPr dirty="0"/>
+              <a:t> </a:t>
+            </a:r>
+            <a:r>
+              <a:rPr dirty="0" err="1"/>
+              <a:t>acumulan</a:t>
+            </a:r>
+            <a:r>
+              <a:rPr dirty="0"/>
+              <a:t> </a:t>
+            </a:r>
+            <a:r>
+              <a:rPr dirty="0" err="1"/>
+              <a:t>más</a:t>
+            </a:r>
+            <a:r>
+              <a:rPr dirty="0"/>
+              <a:t> </a:t>
+            </a:r>
+            <a:r>
+              <a:rPr dirty="0" err="1"/>
+              <a:t>rezago</a:t>
+            </a:r>
+            <a:r>
+              <a:rPr dirty="0"/>
+              <a:t> que </a:t>
+            </a:r>
+            <a:r>
+              <a:rPr dirty="0" err="1"/>
+              <a:t>los</a:t>
+            </a:r>
+            <a:r>
+              <a:rPr dirty="0"/>
+              <a:t> </a:t>
+            </a:r>
+            <a:r>
+              <a:rPr dirty="0" err="1"/>
+              <a:t>institutos</a:t>
+            </a:r>
+            <a:endParaRPr dirty="0"/>
+          </a:p>
+          <a:p>
+            <a:r>
+              <a:rPr dirty="0" err="1"/>
+              <a:t>profesionales</a:t>
+            </a:r>
+            <a:r>
+              <a:rPr dirty="0"/>
+              <a:t> y </a:t>
+            </a:r>
+            <a:r>
+              <a:rPr dirty="0" err="1"/>
+              <a:t>su</a:t>
+            </a:r>
+            <a:r>
+              <a:rPr dirty="0"/>
+              <a:t> </a:t>
+            </a:r>
+            <a:r>
+              <a:rPr dirty="0" err="1"/>
+              <a:t>tasa</a:t>
+            </a:r>
+            <a:r>
+              <a:rPr dirty="0"/>
+              <a:t> de </a:t>
+            </a:r>
+            <a:r>
+              <a:rPr dirty="0" err="1"/>
+              <a:t>titulación</a:t>
+            </a:r>
+            <a:r>
+              <a:rPr dirty="0"/>
+              <a:t> </a:t>
+            </a:r>
+            <a:r>
+              <a:rPr dirty="0" err="1"/>
+              <a:t>oportuna</a:t>
+            </a:r>
+            <a:r>
+              <a:rPr dirty="0"/>
+              <a:t> es </a:t>
+            </a:r>
+            <a:r>
+              <a:rPr dirty="0" err="1"/>
+              <a:t>menos</a:t>
+            </a:r>
+            <a:r>
+              <a:rPr dirty="0"/>
+              <a:t> de la </a:t>
+            </a:r>
+            <a:r>
+              <a:rPr dirty="0" err="1"/>
+              <a:t>mitad</a:t>
+            </a:r>
+            <a:r>
+              <a:rPr dirty="0"/>
+              <a:t>. </a:t>
+            </a:r>
+            <a:r>
+              <a:rPr dirty="0" err="1"/>
+              <a:t>Eso</a:t>
+            </a:r>
+            <a:r>
+              <a:rPr dirty="0"/>
+              <a:t> </a:t>
+            </a:r>
+            <a:r>
+              <a:rPr dirty="0" err="1"/>
+              <a:t>sugiere</a:t>
+            </a:r>
+            <a:r>
+              <a:rPr dirty="0"/>
+              <a:t> que la</a:t>
+            </a:r>
+          </a:p>
+          <a:p>
+            <a:r>
+              <a:rPr dirty="0" err="1"/>
+              <a:t>duración</a:t>
+            </a:r>
+            <a:r>
+              <a:rPr dirty="0"/>
+              <a:t> </a:t>
+            </a:r>
+            <a:r>
+              <a:rPr dirty="0" err="1"/>
+              <a:t>declarada</a:t>
+            </a:r>
+            <a:r>
+              <a:rPr dirty="0"/>
+              <a:t> es </a:t>
+            </a:r>
+            <a:r>
+              <a:rPr dirty="0" err="1"/>
+              <a:t>menos</a:t>
+            </a:r>
+            <a:r>
+              <a:rPr dirty="0"/>
+              <a:t> </a:t>
+            </a:r>
+            <a:r>
+              <a:rPr dirty="0" err="1"/>
+              <a:t>realista</a:t>
+            </a:r>
+            <a:r>
+              <a:rPr dirty="0"/>
+              <a:t> </a:t>
+            </a:r>
+            <a:r>
+              <a:rPr dirty="0" err="1"/>
+              <a:t>en</a:t>
+            </a:r>
+            <a:r>
+              <a:rPr dirty="0"/>
+              <a:t> </a:t>
+            </a:r>
+            <a:r>
+              <a:rPr dirty="0" err="1"/>
+              <a:t>carreras</a:t>
+            </a:r>
+            <a:r>
+              <a:rPr dirty="0"/>
+              <a:t> </a:t>
+            </a:r>
+            <a:r>
+              <a:rPr dirty="0" err="1"/>
+              <a:t>universitarias</a:t>
+            </a:r>
+            <a:r>
+              <a:rPr dirty="0"/>
+              <a:t> </a:t>
+            </a:r>
+            <a:r>
+              <a:rPr dirty="0" err="1"/>
+              <a:t>largas</a:t>
+            </a:r>
+            <a:r>
+              <a:rPr dirty="0"/>
+              <a:t>.</a:t>
+            </a:r>
+          </a:p>
+          <a:p>
+            <a:endParaRPr dirty="0"/>
+          </a:p>
+          <a:p>
+            <a:r>
+              <a:rPr dirty="0"/>
+              <a:t>Y </a:t>
+            </a:r>
+            <a:r>
+              <a:rPr dirty="0" err="1"/>
+              <a:t>por</a:t>
+            </a:r>
+            <a:r>
+              <a:rPr dirty="0"/>
+              <a:t> </a:t>
+            </a:r>
+            <a:r>
+              <a:rPr dirty="0" err="1"/>
+              <a:t>género</a:t>
+            </a:r>
+            <a:r>
+              <a:rPr dirty="0"/>
+              <a:t>, las </a:t>
+            </a:r>
+            <a:r>
+              <a:rPr dirty="0" err="1"/>
+              <a:t>mujeres</a:t>
+            </a:r>
+            <a:r>
+              <a:rPr dirty="0"/>
+              <a:t> se </a:t>
+            </a:r>
+            <a:r>
+              <a:rPr dirty="0" err="1"/>
+              <a:t>titulan</a:t>
+            </a:r>
+            <a:r>
+              <a:rPr dirty="0"/>
+              <a:t> 0 coma 93 </a:t>
+            </a:r>
+            <a:r>
+              <a:rPr dirty="0" err="1"/>
+              <a:t>semestres</a:t>
+            </a:r>
+            <a:r>
+              <a:rPr dirty="0"/>
+              <a:t> antes. Lo </a:t>
+            </a:r>
+            <a:r>
+              <a:rPr dirty="0" err="1"/>
+              <a:t>importante</a:t>
+            </a:r>
+            <a:r>
+              <a:rPr dirty="0"/>
+              <a:t> del panel</a:t>
+            </a:r>
+          </a:p>
+          <a:p>
+            <a:r>
+              <a:rPr dirty="0"/>
+              <a:t>derecho es que la </a:t>
+            </a:r>
+            <a:r>
+              <a:rPr dirty="0" err="1"/>
+              <a:t>brecha</a:t>
+            </a:r>
+            <a:r>
+              <a:rPr dirty="0"/>
+              <a:t> se </a:t>
+            </a:r>
+            <a:r>
+              <a:rPr dirty="0" err="1"/>
+              <a:t>sostiene</a:t>
+            </a:r>
+            <a:r>
+              <a:rPr dirty="0"/>
+              <a:t> </a:t>
+            </a:r>
+            <a:r>
+              <a:rPr dirty="0" err="1"/>
+              <a:t>en</a:t>
+            </a:r>
+            <a:r>
+              <a:rPr dirty="0"/>
+              <a:t> las </a:t>
+            </a:r>
+            <a:r>
+              <a:rPr dirty="0" err="1"/>
+              <a:t>diez</a:t>
+            </a:r>
+            <a:r>
+              <a:rPr dirty="0"/>
+              <a:t> </a:t>
+            </a:r>
+            <a:r>
+              <a:rPr dirty="0" err="1"/>
+              <a:t>áreas</a:t>
+            </a:r>
+            <a:r>
+              <a:rPr dirty="0"/>
+              <a:t> sin </a:t>
+            </a:r>
+            <a:r>
+              <a:rPr dirty="0" err="1"/>
+              <a:t>excepción</a:t>
+            </a:r>
+            <a:r>
+              <a:rPr dirty="0"/>
+              <a:t>: no es que </a:t>
+            </a:r>
+            <a:r>
+              <a:rPr dirty="0" err="1"/>
+              <a:t>estudien</a:t>
+            </a:r>
+            <a:endParaRPr dirty="0"/>
+          </a:p>
+          <a:p>
+            <a:r>
+              <a:rPr dirty="0" err="1"/>
+              <a:t>carreras</a:t>
+            </a:r>
+            <a:r>
+              <a:rPr dirty="0"/>
+              <a:t> </a:t>
+            </a:r>
+            <a:r>
+              <a:rPr dirty="0" err="1"/>
+              <a:t>más</a:t>
+            </a:r>
+            <a:r>
+              <a:rPr dirty="0"/>
+              <a:t> </a:t>
+            </a:r>
+            <a:r>
+              <a:rPr dirty="0" err="1"/>
+              <a:t>cortas</a:t>
+            </a:r>
+            <a:r>
+              <a:rPr dirty="0"/>
+              <a:t>, es que </a:t>
+            </a:r>
+            <a:r>
+              <a:rPr dirty="0" err="1"/>
+              <a:t>dentro</a:t>
+            </a:r>
+            <a:r>
+              <a:rPr dirty="0"/>
+              <a:t> de </a:t>
+            </a:r>
+            <a:r>
+              <a:rPr dirty="0" err="1"/>
+              <a:t>cada</a:t>
+            </a:r>
+            <a:r>
+              <a:rPr dirty="0"/>
+              <a:t> </a:t>
+            </a:r>
+            <a:r>
+              <a:rPr dirty="0" err="1"/>
+              <a:t>área</a:t>
+            </a:r>
+            <a:r>
+              <a:rPr dirty="0"/>
+              <a:t> se </a:t>
+            </a:r>
+            <a:r>
+              <a:rPr dirty="0" err="1"/>
+              <a:t>titulan</a:t>
+            </a:r>
+            <a:r>
+              <a:rPr dirty="0"/>
+              <a:t> antes.</a:t>
+            </a:r>
           </a:p>
         </p:txBody>
       </p:sp>
@@ -929,7 +3098,504 @@
           <a:bodyPr/>
           <a:lstStyle/>
           <a:p>
+            <a:r>
+              <a:rPr dirty="0"/>
+              <a:t>Este </a:t>
+            </a:r>
+            <a:r>
+              <a:rPr dirty="0" err="1"/>
+              <a:t>hallazgo</a:t>
+            </a:r>
+            <a:r>
+              <a:rPr dirty="0"/>
+              <a:t> no </a:t>
+            </a:r>
+            <a:r>
+              <a:rPr dirty="0" err="1"/>
+              <a:t>estaba</a:t>
+            </a:r>
+            <a:r>
+              <a:rPr dirty="0"/>
+              <a:t> </a:t>
+            </a:r>
+            <a:r>
+              <a:rPr dirty="0" err="1"/>
+              <a:t>en</a:t>
+            </a:r>
+            <a:r>
+              <a:rPr dirty="0"/>
+              <a:t> </a:t>
+            </a:r>
+            <a:r>
+              <a:rPr dirty="0" err="1"/>
+              <a:t>ninguna</a:t>
+            </a:r>
+            <a:r>
+              <a:rPr dirty="0"/>
+              <a:t> de las </a:t>
+            </a:r>
+            <a:r>
+              <a:rPr dirty="0" err="1"/>
+              <a:t>fases</a:t>
+            </a:r>
+            <a:r>
+              <a:rPr dirty="0"/>
+              <a:t> </a:t>
+            </a:r>
+            <a:r>
+              <a:rPr dirty="0" err="1"/>
+              <a:t>anteriores</a:t>
+            </a:r>
+            <a:r>
+              <a:rPr dirty="0"/>
+              <a:t>; </a:t>
+            </a:r>
+            <a:r>
+              <a:rPr dirty="0" err="1"/>
+              <a:t>apareció</a:t>
+            </a:r>
+            <a:r>
+              <a:rPr dirty="0"/>
+              <a:t> al </a:t>
+            </a:r>
+            <a:r>
+              <a:rPr dirty="0" err="1"/>
+              <a:t>mirar</a:t>
+            </a:r>
+            <a:r>
+              <a:rPr dirty="0"/>
+              <a:t> la </a:t>
+            </a:r>
+            <a:r>
+              <a:rPr dirty="0" err="1"/>
+              <a:t>serie</a:t>
+            </a:r>
             <a:endParaRPr dirty="0"/>
+          </a:p>
+          <a:p>
+            <a:r>
+              <a:rPr dirty="0"/>
+              <a:t>semestral </a:t>
+            </a:r>
+            <a:r>
+              <a:rPr dirty="0" err="1"/>
+              <a:t>en</a:t>
+            </a:r>
+            <a:r>
+              <a:rPr dirty="0"/>
+              <a:t> </a:t>
+            </a:r>
+            <a:r>
+              <a:rPr dirty="0" err="1"/>
+              <a:t>vez</a:t>
+            </a:r>
+            <a:r>
+              <a:rPr dirty="0"/>
+              <a:t> del </a:t>
+            </a:r>
+            <a:r>
+              <a:rPr dirty="0" err="1"/>
+              <a:t>promedio</a:t>
+            </a:r>
+            <a:r>
+              <a:rPr dirty="0"/>
+              <a:t> </a:t>
+            </a:r>
+            <a:r>
+              <a:rPr dirty="0" err="1"/>
+              <a:t>agregado</a:t>
+            </a:r>
+            <a:r>
+              <a:rPr dirty="0"/>
+              <a:t>.</a:t>
+            </a:r>
+          </a:p>
+          <a:p>
+            <a:endParaRPr dirty="0"/>
+          </a:p>
+          <a:p>
+            <a:r>
+              <a:rPr dirty="0"/>
+              <a:t>En 2020 se </a:t>
+            </a:r>
+            <a:r>
+              <a:rPr dirty="0" err="1"/>
+              <a:t>titularon</a:t>
+            </a:r>
+            <a:r>
+              <a:rPr dirty="0"/>
+              <a:t> </a:t>
+            </a:r>
+            <a:r>
+              <a:rPr dirty="0" err="1"/>
+              <a:t>unas</a:t>
+            </a:r>
+            <a:r>
+              <a:rPr dirty="0"/>
+              <a:t> 87 mil personas </a:t>
+            </a:r>
+            <a:r>
+              <a:rPr dirty="0" err="1"/>
+              <a:t>menos</a:t>
+            </a:r>
+            <a:r>
+              <a:rPr dirty="0"/>
+              <a:t> que </a:t>
+            </a:r>
+            <a:r>
+              <a:rPr dirty="0" err="1"/>
+              <a:t>en</a:t>
+            </a:r>
+            <a:r>
+              <a:rPr dirty="0"/>
+              <a:t> un </a:t>
+            </a:r>
+            <a:r>
+              <a:rPr dirty="0" err="1"/>
+              <a:t>año</a:t>
+            </a:r>
+            <a:r>
+              <a:rPr dirty="0"/>
+              <a:t> normal, y la </a:t>
+            </a:r>
+            <a:r>
+              <a:rPr dirty="0" err="1"/>
+              <a:t>sobreduración</a:t>
+            </a:r>
+            <a:endParaRPr dirty="0"/>
+          </a:p>
+          <a:p>
+            <a:r>
+              <a:rPr dirty="0"/>
+              <a:t>media </a:t>
+            </a:r>
+            <a:r>
+              <a:rPr dirty="0" err="1"/>
+              <a:t>tocó</a:t>
+            </a:r>
+            <a:r>
+              <a:rPr dirty="0"/>
+              <a:t> </a:t>
+            </a:r>
+            <a:r>
+              <a:rPr dirty="0" err="1"/>
+              <a:t>su</a:t>
+            </a:r>
+            <a:r>
+              <a:rPr dirty="0"/>
+              <a:t> </a:t>
+            </a:r>
+            <a:r>
+              <a:rPr dirty="0" err="1"/>
+              <a:t>mínimo</a:t>
+            </a:r>
+            <a:r>
+              <a:rPr dirty="0"/>
+              <a:t>. En 2021 </a:t>
+            </a:r>
+            <a:r>
+              <a:rPr dirty="0" err="1"/>
+              <a:t>el</a:t>
+            </a:r>
+            <a:r>
+              <a:rPr dirty="0"/>
+              <a:t> </a:t>
+            </a:r>
+            <a:r>
+              <a:rPr dirty="0" err="1"/>
+              <a:t>volumen</a:t>
+            </a:r>
+            <a:r>
+              <a:rPr dirty="0"/>
+              <a:t> se </a:t>
+            </a:r>
+            <a:r>
+              <a:rPr dirty="0" err="1"/>
+              <a:t>recuperó</a:t>
+            </a:r>
+            <a:r>
+              <a:rPr dirty="0"/>
+              <a:t> y la </a:t>
+            </a:r>
+            <a:r>
+              <a:rPr dirty="0" err="1"/>
+              <a:t>sobreduración</a:t>
+            </a:r>
+            <a:r>
+              <a:rPr dirty="0"/>
+              <a:t> </a:t>
+            </a:r>
+            <a:r>
+              <a:rPr dirty="0" err="1"/>
+              <a:t>alcanzó</a:t>
+            </a:r>
+            <a:r>
+              <a:rPr dirty="0"/>
+              <a:t> </a:t>
+            </a:r>
+            <a:r>
+              <a:rPr dirty="0" err="1"/>
+              <a:t>su</a:t>
+            </a:r>
+            <a:endParaRPr dirty="0"/>
+          </a:p>
+          <a:p>
+            <a:r>
+              <a:rPr dirty="0" err="1"/>
+              <a:t>máximo</a:t>
+            </a:r>
+            <a:r>
+              <a:rPr dirty="0"/>
+              <a:t>.</a:t>
+            </a:r>
+          </a:p>
+          <a:p>
+            <a:endParaRPr dirty="0"/>
+          </a:p>
+          <a:p>
+            <a:r>
+              <a:rPr dirty="0"/>
+              <a:t>La </a:t>
+            </a:r>
+            <a:r>
+              <a:rPr dirty="0" err="1"/>
+              <a:t>tentación</a:t>
+            </a:r>
+            <a:r>
+              <a:rPr dirty="0"/>
+              <a:t> es </a:t>
+            </a:r>
+            <a:r>
+              <a:rPr dirty="0" err="1"/>
+              <a:t>decir</a:t>
+            </a:r>
+            <a:r>
+              <a:rPr dirty="0"/>
+              <a:t> que 2020 </a:t>
+            </a:r>
+            <a:r>
+              <a:rPr dirty="0" err="1"/>
+              <a:t>fue</a:t>
+            </a:r>
+            <a:r>
+              <a:rPr dirty="0"/>
+              <a:t> un </a:t>
+            </a:r>
+            <a:r>
+              <a:rPr dirty="0" err="1"/>
+              <a:t>buen</a:t>
+            </a:r>
+            <a:r>
+              <a:rPr dirty="0"/>
+              <a:t> </a:t>
+            </a:r>
+            <a:r>
+              <a:rPr dirty="0" err="1"/>
+              <a:t>año</a:t>
+            </a:r>
+            <a:r>
+              <a:rPr dirty="0"/>
+              <a:t>. Pero no: las </a:t>
+            </a:r>
+            <a:r>
+              <a:rPr dirty="0" err="1"/>
+              <a:t>titulaciones</a:t>
+            </a:r>
+            <a:r>
+              <a:rPr dirty="0"/>
+              <a:t> se</a:t>
+            </a:r>
+          </a:p>
+          <a:p>
+            <a:r>
+              <a:rPr dirty="0"/>
+              <a:t>POSTERGARON. </a:t>
+            </a:r>
+            <a:r>
+              <a:rPr dirty="0" err="1"/>
+              <a:t>Quienes</a:t>
+            </a:r>
+            <a:r>
+              <a:rPr dirty="0"/>
+              <a:t> </a:t>
+            </a:r>
+            <a:r>
+              <a:rPr dirty="0" err="1"/>
+              <a:t>debían</a:t>
+            </a:r>
+            <a:r>
+              <a:rPr dirty="0"/>
+              <a:t> </a:t>
+            </a:r>
+            <a:r>
+              <a:rPr dirty="0" err="1"/>
+              <a:t>egresar</a:t>
+            </a:r>
+            <a:r>
+              <a:rPr dirty="0"/>
+              <a:t> </a:t>
+            </a:r>
+            <a:r>
+              <a:rPr dirty="0" err="1"/>
+              <a:t>en</a:t>
+            </a:r>
+            <a:r>
+              <a:rPr dirty="0"/>
+              <a:t> 2020 lo </a:t>
+            </a:r>
+            <a:r>
+              <a:rPr dirty="0" err="1"/>
+              <a:t>hicieron</a:t>
+            </a:r>
+            <a:r>
+              <a:rPr dirty="0"/>
+              <a:t> </a:t>
+            </a:r>
+            <a:r>
+              <a:rPr dirty="0" err="1"/>
+              <a:t>en</a:t>
+            </a:r>
+            <a:r>
+              <a:rPr dirty="0"/>
+              <a:t> 2021, con uno o dos </a:t>
+            </a:r>
+            <a:r>
+              <a:rPr dirty="0" err="1"/>
+              <a:t>semestres</a:t>
+            </a:r>
+            <a:endParaRPr dirty="0"/>
+          </a:p>
+          <a:p>
+            <a:r>
+              <a:rPr dirty="0" err="1"/>
+              <a:t>adicionales</a:t>
+            </a:r>
+            <a:r>
+              <a:rPr dirty="0"/>
+              <a:t> </a:t>
+            </a:r>
+            <a:r>
+              <a:rPr dirty="0" err="1"/>
+              <a:t>encima</a:t>
+            </a:r>
+            <a:r>
+              <a:rPr dirty="0"/>
+              <a:t>. El </a:t>
+            </a:r>
+            <a:r>
+              <a:rPr dirty="0" err="1"/>
+              <a:t>mínimo</a:t>
+            </a:r>
+            <a:r>
+              <a:rPr dirty="0"/>
+              <a:t> y </a:t>
+            </a:r>
+            <a:r>
+              <a:rPr dirty="0" err="1"/>
+              <a:t>el</a:t>
+            </a:r>
+            <a:r>
+              <a:rPr dirty="0"/>
+              <a:t> </a:t>
+            </a:r>
+            <a:r>
+              <a:rPr dirty="0" err="1"/>
+              <a:t>máximo</a:t>
+            </a:r>
+            <a:r>
+              <a:rPr dirty="0"/>
+              <a:t> son </a:t>
+            </a:r>
+            <a:r>
+              <a:rPr dirty="0" err="1"/>
+              <a:t>el</a:t>
+            </a:r>
+            <a:r>
+              <a:rPr dirty="0"/>
+              <a:t> </a:t>
+            </a:r>
+            <a:r>
+              <a:rPr dirty="0" err="1"/>
+              <a:t>mismo</a:t>
+            </a:r>
+            <a:r>
+              <a:rPr dirty="0"/>
+              <a:t> </a:t>
+            </a:r>
+            <a:r>
+              <a:rPr dirty="0" err="1"/>
+              <a:t>fenómeno</a:t>
+            </a:r>
+            <a:r>
+              <a:rPr dirty="0"/>
+              <a:t> visto </a:t>
+            </a:r>
+            <a:r>
+              <a:rPr dirty="0" err="1"/>
+              <a:t>en</a:t>
+            </a:r>
+            <a:r>
+              <a:rPr dirty="0"/>
+              <a:t> dos </a:t>
+            </a:r>
+            <a:r>
+              <a:rPr dirty="0" err="1"/>
+              <a:t>momentos</a:t>
+            </a:r>
+            <a:r>
+              <a:rPr dirty="0"/>
+              <a:t>, y</a:t>
+            </a:r>
+          </a:p>
+          <a:p>
+            <a:r>
+              <a:rPr dirty="0" err="1"/>
+              <a:t>el</a:t>
+            </a:r>
+            <a:r>
+              <a:rPr dirty="0"/>
+              <a:t> </a:t>
+            </a:r>
+            <a:r>
+              <a:rPr dirty="0" err="1"/>
+              <a:t>mecanismo</a:t>
+            </a:r>
+            <a:r>
+              <a:rPr dirty="0"/>
+              <a:t> es de </a:t>
+            </a:r>
+            <a:r>
+              <a:rPr dirty="0" err="1"/>
+              <a:t>desplazamiento</a:t>
+            </a:r>
+            <a:r>
+              <a:rPr dirty="0"/>
+              <a:t> </a:t>
+            </a:r>
+            <a:r>
+              <a:rPr dirty="0" err="1"/>
+              <a:t>administrativo</a:t>
+            </a:r>
+            <a:r>
+              <a:rPr dirty="0"/>
+              <a:t>, no de </a:t>
+            </a:r>
+            <a:r>
+              <a:rPr dirty="0" err="1"/>
+              <a:t>deterioro</a:t>
+            </a:r>
+            <a:r>
+              <a:rPr dirty="0"/>
+              <a:t> </a:t>
+            </a:r>
+            <a:r>
+              <a:rPr dirty="0" err="1"/>
+              <a:t>académico</a:t>
+            </a:r>
+            <a:r>
+              <a:rPr dirty="0"/>
+              <a:t>.</a:t>
+            </a:r>
           </a:p>
         </p:txBody>
       </p:sp>
@@ -997,7 +3663,531 @@
           <a:bodyPr/>
           <a:lstStyle/>
           <a:p>
+            <a:r>
+              <a:rPr dirty="0"/>
+              <a:t>Y </a:t>
+            </a:r>
+            <a:r>
+              <a:rPr dirty="0" err="1"/>
+              <a:t>aquí</a:t>
+            </a:r>
+            <a:r>
+              <a:rPr dirty="0"/>
+              <a:t> </a:t>
+            </a:r>
+            <a:r>
+              <a:rPr dirty="0" err="1"/>
+              <a:t>una</a:t>
+            </a:r>
+            <a:r>
+              <a:rPr dirty="0"/>
+              <a:t> </a:t>
+            </a:r>
+            <a:r>
+              <a:rPr dirty="0" err="1"/>
+              <a:t>limitación</a:t>
+            </a:r>
+            <a:r>
+              <a:rPr dirty="0"/>
+              <a:t> que </a:t>
+            </a:r>
+            <a:r>
+              <a:rPr dirty="0" err="1"/>
+              <a:t>condiciona</a:t>
+            </a:r>
+            <a:r>
+              <a:rPr dirty="0"/>
+              <a:t> </a:t>
+            </a:r>
+            <a:r>
+              <a:rPr dirty="0" err="1"/>
+              <a:t>todo</a:t>
+            </a:r>
+            <a:r>
+              <a:rPr dirty="0"/>
+              <a:t> lo anterior, y que </a:t>
+            </a:r>
+            <a:r>
+              <a:rPr dirty="0" err="1"/>
+              <a:t>creo</a:t>
+            </a:r>
+            <a:r>
+              <a:rPr dirty="0"/>
+              <a:t> que es uno de </a:t>
+            </a:r>
+            <a:r>
+              <a:rPr dirty="0" err="1"/>
+              <a:t>los</a:t>
+            </a:r>
             <a:endParaRPr dirty="0"/>
+          </a:p>
+          <a:p>
+            <a:r>
+              <a:rPr dirty="0" err="1"/>
+              <a:t>resultados</a:t>
+            </a:r>
+            <a:r>
+              <a:rPr dirty="0"/>
+              <a:t> </a:t>
+            </a:r>
+            <a:r>
+              <a:rPr dirty="0" err="1"/>
+              <a:t>más</a:t>
+            </a:r>
+            <a:r>
+              <a:rPr dirty="0"/>
+              <a:t> </a:t>
+            </a:r>
+            <a:r>
+              <a:rPr dirty="0" err="1"/>
+              <a:t>valiosos</a:t>
+            </a:r>
+            <a:r>
+              <a:rPr dirty="0"/>
+              <a:t> del </a:t>
+            </a:r>
+            <a:r>
+              <a:rPr dirty="0" err="1"/>
+              <a:t>proyecto</a:t>
+            </a:r>
+            <a:r>
+              <a:rPr dirty="0"/>
+              <a:t>.</a:t>
+            </a:r>
+          </a:p>
+          <a:p>
+            <a:endParaRPr dirty="0"/>
+          </a:p>
+          <a:p>
+            <a:r>
+              <a:rPr dirty="0"/>
+              <a:t>Una base de </a:t>
+            </a:r>
+            <a:r>
+              <a:rPr dirty="0" err="1"/>
+              <a:t>titulados</a:t>
+            </a:r>
+            <a:r>
+              <a:rPr dirty="0"/>
+              <a:t> solo </a:t>
+            </a:r>
+            <a:r>
+              <a:rPr dirty="0" err="1"/>
+              <a:t>contiene</a:t>
+            </a:r>
+            <a:r>
+              <a:rPr dirty="0"/>
+              <a:t> a </a:t>
+            </a:r>
+            <a:r>
+              <a:rPr dirty="0" err="1"/>
+              <a:t>quien</a:t>
+            </a:r>
+            <a:r>
+              <a:rPr dirty="0"/>
+              <a:t> </a:t>
+            </a:r>
+            <a:r>
+              <a:rPr dirty="0" err="1"/>
+              <a:t>terminó</a:t>
+            </a:r>
+            <a:r>
+              <a:rPr dirty="0"/>
+              <a:t>. De las </a:t>
+            </a:r>
+            <a:r>
+              <a:rPr dirty="0" err="1"/>
+              <a:t>cohortes</a:t>
+            </a:r>
+            <a:r>
+              <a:rPr dirty="0"/>
+              <a:t> </a:t>
+            </a:r>
+            <a:r>
+              <a:rPr dirty="0" err="1"/>
+              <a:t>recientes</a:t>
+            </a:r>
+            <a:r>
+              <a:rPr dirty="0"/>
+              <a:t> solo se</a:t>
+            </a:r>
+          </a:p>
+          <a:p>
+            <a:r>
+              <a:rPr dirty="0" err="1"/>
+              <a:t>han</a:t>
+            </a:r>
+            <a:r>
+              <a:rPr dirty="0"/>
+              <a:t> </a:t>
+            </a:r>
+            <a:r>
+              <a:rPr dirty="0" err="1"/>
+              <a:t>titulado</a:t>
+            </a:r>
+            <a:r>
+              <a:rPr dirty="0"/>
+              <a:t> </a:t>
+            </a:r>
+            <a:r>
+              <a:rPr dirty="0" err="1"/>
+              <a:t>los</a:t>
+            </a:r>
+            <a:r>
+              <a:rPr dirty="0"/>
+              <a:t> </a:t>
+            </a:r>
+            <a:r>
+              <a:rPr dirty="0" err="1"/>
+              <a:t>excepcionalmente</a:t>
+            </a:r>
+            <a:r>
+              <a:rPr dirty="0"/>
+              <a:t> </a:t>
+            </a:r>
+            <a:r>
+              <a:rPr dirty="0" err="1"/>
+              <a:t>rápidos</a:t>
+            </a:r>
+            <a:r>
+              <a:rPr dirty="0"/>
+              <a:t>, </a:t>
+            </a:r>
+            <a:r>
+              <a:rPr dirty="0" err="1"/>
+              <a:t>porque</a:t>
+            </a:r>
+            <a:r>
+              <a:rPr dirty="0"/>
+              <a:t> son </a:t>
+            </a:r>
+            <a:r>
+              <a:rPr dirty="0" err="1"/>
+              <a:t>los</a:t>
+            </a:r>
+            <a:r>
+              <a:rPr dirty="0"/>
+              <a:t> </a:t>
+            </a:r>
+            <a:r>
+              <a:rPr dirty="0" err="1"/>
+              <a:t>únicos</a:t>
+            </a:r>
+            <a:r>
+              <a:rPr dirty="0"/>
+              <a:t> que </a:t>
+            </a:r>
+            <a:r>
+              <a:rPr dirty="0" err="1"/>
+              <a:t>alcanzaron</a:t>
+            </a:r>
+            <a:r>
+              <a:rPr dirty="0"/>
+              <a:t> a</a:t>
+            </a:r>
+          </a:p>
+          <a:p>
+            <a:r>
+              <a:rPr dirty="0" err="1"/>
+              <a:t>hacerlo</a:t>
+            </a:r>
+            <a:r>
+              <a:rPr dirty="0"/>
+              <a:t>. De las </a:t>
+            </a:r>
+            <a:r>
+              <a:rPr dirty="0" err="1"/>
+              <a:t>cohortes</a:t>
+            </a:r>
+            <a:r>
+              <a:rPr dirty="0"/>
+              <a:t> </a:t>
+            </a:r>
+            <a:r>
+              <a:rPr dirty="0" err="1"/>
+              <a:t>antiguas</a:t>
+            </a:r>
+            <a:r>
+              <a:rPr dirty="0"/>
+              <a:t>, </a:t>
+            </a:r>
+            <a:r>
+              <a:rPr dirty="0" err="1"/>
+              <a:t>en</a:t>
+            </a:r>
+            <a:r>
+              <a:rPr dirty="0"/>
+              <a:t> </a:t>
+            </a:r>
+            <a:r>
+              <a:rPr dirty="0" err="1"/>
+              <a:t>cambio</a:t>
+            </a:r>
+            <a:r>
+              <a:rPr dirty="0"/>
+              <a:t>, </a:t>
+            </a:r>
+            <a:r>
+              <a:rPr dirty="0" err="1"/>
+              <a:t>los</a:t>
+            </a:r>
+            <a:r>
+              <a:rPr dirty="0"/>
+              <a:t> que </a:t>
+            </a:r>
+            <a:r>
+              <a:rPr dirty="0" err="1"/>
+              <a:t>aparecen</a:t>
+            </a:r>
+            <a:r>
+              <a:rPr dirty="0"/>
+              <a:t> son </a:t>
+            </a:r>
+            <a:r>
+              <a:rPr dirty="0" err="1"/>
+              <a:t>los</a:t>
+            </a:r>
+            <a:r>
+              <a:rPr dirty="0"/>
+              <a:t> </a:t>
+            </a:r>
+            <a:r>
+              <a:rPr dirty="0" err="1"/>
+              <a:t>extremadamente</a:t>
+            </a:r>
+            <a:endParaRPr dirty="0"/>
+          </a:p>
+          <a:p>
+            <a:r>
+              <a:rPr dirty="0" err="1"/>
+              <a:t>rezagados</a:t>
+            </a:r>
+            <a:r>
+              <a:rPr dirty="0"/>
+              <a:t>.</a:t>
+            </a:r>
+          </a:p>
+          <a:p>
+            <a:endParaRPr dirty="0"/>
+          </a:p>
+          <a:p>
+            <a:r>
+              <a:rPr dirty="0" err="1"/>
+              <a:t>Ninguna</a:t>
+            </a:r>
+            <a:r>
+              <a:rPr dirty="0"/>
+              <a:t> </a:t>
+            </a:r>
+            <a:r>
+              <a:rPr dirty="0" err="1"/>
+              <a:t>cohorte</a:t>
+            </a:r>
+            <a:r>
+              <a:rPr dirty="0"/>
+              <a:t> </a:t>
+            </a:r>
+            <a:r>
+              <a:rPr dirty="0" err="1"/>
+              <a:t>está</a:t>
+            </a:r>
+            <a:r>
+              <a:rPr dirty="0"/>
+              <a:t> </a:t>
+            </a:r>
+            <a:r>
+              <a:rPr dirty="0" err="1"/>
+              <a:t>completa</a:t>
+            </a:r>
+            <a:r>
+              <a:rPr dirty="0"/>
+              <a:t>, y lo </a:t>
+            </a:r>
+            <a:r>
+              <a:rPr dirty="0" err="1"/>
+              <a:t>están</a:t>
+            </a:r>
+            <a:r>
+              <a:rPr dirty="0"/>
+              <a:t> </a:t>
+            </a:r>
+            <a:r>
+              <a:rPr dirty="0" err="1"/>
+              <a:t>en</a:t>
+            </a:r>
+            <a:r>
+              <a:rPr dirty="0"/>
+              <a:t> </a:t>
+            </a:r>
+            <a:r>
+              <a:rPr dirty="0" err="1"/>
+              <a:t>direcciones</a:t>
+            </a:r>
+            <a:r>
+              <a:rPr dirty="0"/>
+              <a:t> </a:t>
+            </a:r>
+            <a:r>
+              <a:rPr dirty="0" err="1"/>
+              <a:t>opuestas</a:t>
+            </a:r>
+            <a:r>
+              <a:rPr dirty="0"/>
+              <a:t>. Por </a:t>
+            </a:r>
+            <a:r>
+              <a:rPr dirty="0" err="1"/>
+              <a:t>eso</a:t>
+            </a:r>
+            <a:r>
+              <a:rPr dirty="0"/>
+              <a:t> </a:t>
+            </a:r>
+            <a:r>
+              <a:rPr dirty="0" err="1"/>
+              <a:t>el</a:t>
+            </a:r>
+            <a:r>
+              <a:rPr dirty="0"/>
+              <a:t> </a:t>
+            </a:r>
+            <a:r>
+              <a:rPr dirty="0" err="1"/>
+              <a:t>descenso</a:t>
+            </a:r>
+            <a:endParaRPr dirty="0"/>
+          </a:p>
+          <a:p>
+            <a:r>
+              <a:rPr dirty="0"/>
+              <a:t>de la </a:t>
+            </a:r>
+            <a:r>
+              <a:rPr dirty="0" err="1"/>
+              <a:t>serie</a:t>
+            </a:r>
+            <a:r>
+              <a:rPr dirty="0"/>
+              <a:t> </a:t>
+            </a:r>
+            <a:r>
+              <a:rPr dirty="0" err="1"/>
+              <a:t>desde</a:t>
+            </a:r>
+            <a:r>
+              <a:rPr dirty="0"/>
+              <a:t> 2024 no </a:t>
+            </a:r>
+            <a:r>
+              <a:rPr dirty="0" err="1"/>
+              <a:t>puede</a:t>
+            </a:r>
+            <a:r>
+              <a:rPr dirty="0"/>
+              <a:t> </a:t>
+            </a:r>
+            <a:r>
+              <a:rPr dirty="0" err="1"/>
+              <a:t>leerse</a:t>
+            </a:r>
+            <a:r>
+              <a:rPr dirty="0"/>
+              <a:t> </a:t>
+            </a:r>
+            <a:r>
+              <a:rPr dirty="0" err="1"/>
+              <a:t>como</a:t>
+            </a:r>
+            <a:r>
+              <a:rPr dirty="0"/>
+              <a:t> </a:t>
+            </a:r>
+            <a:r>
+              <a:rPr dirty="0" err="1"/>
+              <a:t>una</a:t>
+            </a:r>
+            <a:r>
+              <a:rPr dirty="0"/>
+              <a:t> </a:t>
+            </a:r>
+            <a:r>
+              <a:rPr dirty="0" err="1"/>
+              <a:t>mejora</a:t>
+            </a:r>
+            <a:r>
+              <a:rPr dirty="0"/>
+              <a:t> del </a:t>
+            </a:r>
+            <a:r>
+              <a:rPr dirty="0" err="1"/>
+              <a:t>sistema</a:t>
+            </a:r>
+            <a:r>
+              <a:rPr dirty="0"/>
+              <a:t>. Es </a:t>
+            </a:r>
+            <a:r>
+              <a:rPr dirty="0" err="1"/>
+              <a:t>una</a:t>
+            </a:r>
+            <a:r>
+              <a:rPr dirty="0"/>
+              <a:t> </a:t>
+            </a:r>
+            <a:r>
+              <a:rPr dirty="0" err="1"/>
+              <a:t>limitación</a:t>
+            </a:r>
+            <a:r>
+              <a:rPr dirty="0"/>
+              <a:t> de</a:t>
+            </a:r>
+          </a:p>
+          <a:p>
+            <a:r>
+              <a:rPr dirty="0"/>
+              <a:t>la </a:t>
+            </a:r>
+            <a:r>
+              <a:rPr dirty="0" err="1"/>
+              <a:t>fuente</a:t>
+            </a:r>
+            <a:r>
+              <a:rPr dirty="0"/>
+              <a:t>, no del </a:t>
+            </a:r>
+            <a:r>
+              <a:rPr dirty="0" err="1"/>
+              <a:t>procesamiento</a:t>
+            </a:r>
+            <a:r>
+              <a:rPr dirty="0"/>
+              <a:t>, y </a:t>
+            </a:r>
+            <a:r>
+              <a:rPr dirty="0" err="1"/>
+              <a:t>declararla</a:t>
+            </a:r>
+            <a:r>
+              <a:rPr dirty="0"/>
+              <a:t> es </a:t>
+            </a:r>
+            <a:r>
+              <a:rPr dirty="0" err="1"/>
+              <a:t>parte</a:t>
+            </a:r>
+            <a:r>
+              <a:rPr dirty="0"/>
+              <a:t> del </a:t>
+            </a:r>
+            <a:r>
+              <a:rPr dirty="0" err="1"/>
+              <a:t>resultado</a:t>
+            </a:r>
+            <a:r>
+              <a:rPr dirty="0"/>
+              <a:t>.</a:t>
+            </a:r>
           </a:p>
         </p:txBody>
       </p:sp>
@@ -1065,7 +4255,655 @@
           <a:bodyPr/>
           <a:lstStyle/>
           <a:p>
+            <a:r>
+              <a:rPr dirty="0" err="1"/>
+              <a:t>Sobre</a:t>
+            </a:r>
+            <a:r>
+              <a:rPr dirty="0"/>
+              <a:t> </a:t>
+            </a:r>
+            <a:r>
+              <a:rPr dirty="0" err="1"/>
+              <a:t>el</a:t>
+            </a:r>
+            <a:r>
+              <a:rPr dirty="0"/>
+              <a:t> </a:t>
+            </a:r>
+            <a:r>
+              <a:rPr dirty="0" err="1"/>
+              <a:t>trabajo</a:t>
+            </a:r>
+            <a:r>
+              <a:rPr dirty="0"/>
+              <a:t> </a:t>
+            </a:r>
+            <a:r>
+              <a:rPr dirty="0" err="1"/>
+              <a:t>técnico</a:t>
+            </a:r>
+            <a:r>
+              <a:rPr dirty="0"/>
+              <a:t>: </a:t>
+            </a:r>
+            <a:r>
+              <a:rPr dirty="0" err="1"/>
+              <a:t>el</a:t>
+            </a:r>
+            <a:r>
+              <a:rPr dirty="0"/>
+              <a:t> </a:t>
+            </a:r>
+            <a:r>
+              <a:rPr dirty="0" err="1"/>
+              <a:t>proyecto</a:t>
+            </a:r>
+            <a:r>
+              <a:rPr dirty="0"/>
+              <a:t> </a:t>
+            </a:r>
+            <a:r>
+              <a:rPr dirty="0" err="1"/>
+              <a:t>tiene</a:t>
+            </a:r>
+            <a:r>
+              <a:rPr dirty="0"/>
+              <a:t> 73 </a:t>
+            </a:r>
+            <a:r>
+              <a:rPr dirty="0" err="1"/>
+              <a:t>pruebas</a:t>
+            </a:r>
+            <a:r>
+              <a:rPr dirty="0"/>
+              <a:t> </a:t>
+            </a:r>
+            <a:r>
+              <a:rPr dirty="0" err="1"/>
+              <a:t>automatizadas</a:t>
+            </a:r>
+            <a:r>
+              <a:rPr dirty="0"/>
+              <a:t> que </a:t>
+            </a:r>
+            <a:r>
+              <a:rPr dirty="0" err="1"/>
+              <a:t>cubren</a:t>
+            </a:r>
+            <a:r>
+              <a:rPr dirty="0"/>
+              <a:t> </a:t>
+            </a:r>
+            <a:r>
+              <a:rPr dirty="0" err="1"/>
+              <a:t>casos</a:t>
+            </a:r>
             <a:endParaRPr dirty="0"/>
+          </a:p>
+          <a:p>
+            <a:r>
+              <a:rPr dirty="0" err="1"/>
+              <a:t>normales</a:t>
+            </a:r>
+            <a:r>
+              <a:rPr dirty="0"/>
+              <a:t>, </a:t>
+            </a:r>
+            <a:r>
+              <a:rPr dirty="0" err="1"/>
+              <a:t>límite</a:t>
+            </a:r>
+            <a:r>
+              <a:rPr dirty="0"/>
+              <a:t> y </a:t>
+            </a:r>
+            <a:r>
+              <a:rPr dirty="0" err="1"/>
+              <a:t>excepciones</a:t>
+            </a:r>
+            <a:r>
+              <a:rPr dirty="0"/>
+              <a:t>, y 9 </a:t>
+            </a:r>
+            <a:r>
+              <a:rPr dirty="0" err="1"/>
+              <a:t>reglas</a:t>
+            </a:r>
+            <a:r>
+              <a:rPr dirty="0"/>
+              <a:t> de </a:t>
+            </a:r>
+            <a:r>
+              <a:rPr dirty="0" err="1"/>
+              <a:t>coherencia</a:t>
+            </a:r>
+            <a:r>
+              <a:rPr dirty="0"/>
+              <a:t> del </a:t>
+            </a:r>
+            <a:r>
+              <a:rPr dirty="0" err="1"/>
+              <a:t>dominio</a:t>
+            </a:r>
+            <a:r>
+              <a:rPr dirty="0"/>
+              <a:t>, </a:t>
+            </a:r>
+            <a:r>
+              <a:rPr dirty="0" err="1"/>
+              <a:t>todas</a:t>
+            </a:r>
+            <a:r>
+              <a:rPr dirty="0"/>
+              <a:t> </a:t>
+            </a:r>
+            <a:r>
+              <a:rPr dirty="0" err="1"/>
+              <a:t>aprobadas</a:t>
+            </a:r>
+            <a:r>
+              <a:rPr dirty="0"/>
+              <a:t>.</a:t>
+            </a:r>
+          </a:p>
+          <a:p>
+            <a:endParaRPr dirty="0"/>
+          </a:p>
+          <a:p>
+            <a:r>
+              <a:rPr dirty="0"/>
+              <a:t>Los </a:t>
+            </a:r>
+            <a:r>
+              <a:rPr dirty="0" err="1"/>
+              <a:t>algoritmos</a:t>
+            </a:r>
+            <a:r>
+              <a:rPr dirty="0"/>
+              <a:t> se </a:t>
+            </a:r>
+            <a:r>
+              <a:rPr dirty="0" err="1"/>
+              <a:t>implementaron</a:t>
+            </a:r>
+            <a:r>
+              <a:rPr dirty="0"/>
+              <a:t> </a:t>
+            </a:r>
+            <a:r>
+              <a:rPr dirty="0" err="1"/>
+              <a:t>desde</a:t>
+            </a:r>
+            <a:r>
+              <a:rPr dirty="0"/>
+              <a:t> cero y se </a:t>
+            </a:r>
+            <a:r>
+              <a:rPr dirty="0" err="1"/>
+              <a:t>verificaron</a:t>
+            </a:r>
+            <a:r>
+              <a:rPr dirty="0"/>
+              <a:t> contra pandas, sorted y</a:t>
+            </a:r>
+          </a:p>
+          <a:p>
+            <a:r>
+              <a:rPr dirty="0"/>
+              <a:t>NumPy ANTES de </a:t>
+            </a:r>
+            <a:r>
+              <a:rPr dirty="0" err="1"/>
+              <a:t>medir</a:t>
+            </a:r>
+            <a:r>
+              <a:rPr dirty="0"/>
+              <a:t> </a:t>
+            </a:r>
+            <a:r>
+              <a:rPr dirty="0" err="1"/>
+              <a:t>su</a:t>
+            </a:r>
+            <a:r>
+              <a:rPr dirty="0"/>
+              <a:t> </a:t>
+            </a:r>
+            <a:r>
+              <a:rPr dirty="0" err="1"/>
+              <a:t>tiempo</a:t>
+            </a:r>
+            <a:r>
+              <a:rPr dirty="0"/>
+              <a:t>: </a:t>
+            </a:r>
+            <a:r>
+              <a:rPr dirty="0" err="1"/>
+              <a:t>medir</a:t>
+            </a:r>
+            <a:r>
+              <a:rPr dirty="0"/>
+              <a:t> un </a:t>
+            </a:r>
+            <a:r>
+              <a:rPr dirty="0" err="1"/>
+              <a:t>algoritmo</a:t>
+            </a:r>
+            <a:r>
+              <a:rPr dirty="0"/>
+              <a:t> </a:t>
+            </a:r>
+            <a:r>
+              <a:rPr dirty="0" err="1"/>
+              <a:t>incorrecto</a:t>
+            </a:r>
+            <a:r>
+              <a:rPr dirty="0"/>
+              <a:t> no </a:t>
+            </a:r>
+            <a:r>
+              <a:rPr dirty="0" err="1"/>
+              <a:t>tiene</a:t>
+            </a:r>
+            <a:r>
+              <a:rPr dirty="0"/>
+              <a:t> </a:t>
+            </a:r>
+            <a:r>
+              <a:rPr dirty="0" err="1"/>
+              <a:t>sentido</a:t>
+            </a:r>
+            <a:r>
+              <a:rPr dirty="0"/>
+              <a:t>.</a:t>
+            </a:r>
+          </a:p>
+          <a:p>
+            <a:endParaRPr dirty="0"/>
+          </a:p>
+          <a:p>
+            <a:r>
+              <a:rPr dirty="0"/>
+              <a:t>Las curvas log-log </a:t>
+            </a:r>
+            <a:r>
+              <a:rPr dirty="0" err="1"/>
+              <a:t>confirmaron</a:t>
+            </a:r>
+            <a:r>
+              <a:rPr dirty="0"/>
+              <a:t> las </a:t>
+            </a:r>
+            <a:r>
+              <a:rPr dirty="0" err="1"/>
+              <a:t>cotas</a:t>
+            </a:r>
+            <a:r>
+              <a:rPr dirty="0"/>
+              <a:t> </a:t>
+            </a:r>
+            <a:r>
+              <a:rPr dirty="0" err="1"/>
+              <a:t>teóricas</a:t>
+            </a:r>
+            <a:r>
+              <a:rPr dirty="0"/>
+              <a:t>, </a:t>
+            </a:r>
+            <a:r>
+              <a:rPr dirty="0" err="1"/>
+              <a:t>pero</a:t>
+            </a:r>
+            <a:r>
+              <a:rPr dirty="0"/>
+              <a:t> </a:t>
+            </a:r>
+            <a:r>
+              <a:rPr dirty="0" err="1"/>
+              <a:t>también</a:t>
+            </a:r>
+            <a:r>
+              <a:rPr dirty="0"/>
+              <a:t> </a:t>
+            </a:r>
+            <a:r>
+              <a:rPr dirty="0" err="1"/>
+              <a:t>mostraron</a:t>
+            </a:r>
+            <a:r>
+              <a:rPr dirty="0"/>
+              <a:t> </a:t>
+            </a:r>
+            <a:r>
+              <a:rPr dirty="0" err="1"/>
+              <a:t>dónde</a:t>
+            </a:r>
+            <a:r>
+              <a:rPr dirty="0"/>
+              <a:t> la</a:t>
+            </a:r>
+          </a:p>
+          <a:p>
+            <a:r>
+              <a:rPr dirty="0" err="1"/>
+              <a:t>teoría</a:t>
+            </a:r>
+            <a:r>
+              <a:rPr dirty="0"/>
+              <a:t> no basta: </a:t>
+            </a:r>
+            <a:r>
+              <a:rPr dirty="0" err="1"/>
+              <a:t>quickselect</a:t>
+            </a:r>
+            <a:r>
+              <a:rPr dirty="0"/>
+              <a:t> es </a:t>
+            </a:r>
+            <a:r>
+              <a:rPr dirty="0" err="1"/>
+              <a:t>orden</a:t>
+            </a:r>
+            <a:r>
+              <a:rPr dirty="0"/>
+              <a:t> n </a:t>
+            </a:r>
+            <a:r>
+              <a:rPr dirty="0" err="1"/>
+              <a:t>en</a:t>
+            </a:r>
+            <a:r>
+              <a:rPr dirty="0"/>
+              <a:t> </a:t>
+            </a:r>
+            <a:r>
+              <a:rPr dirty="0" err="1"/>
+              <a:t>comparaciones</a:t>
+            </a:r>
+            <a:r>
+              <a:rPr dirty="0"/>
+              <a:t> y sin embargo </a:t>
+            </a:r>
+            <a:r>
+              <a:rPr dirty="0" err="1"/>
+              <a:t>escala</a:t>
+            </a:r>
+            <a:r>
+              <a:rPr dirty="0"/>
+              <a:t> </a:t>
+            </a:r>
+            <a:r>
+              <a:rPr dirty="0" err="1"/>
+              <a:t>como</a:t>
+            </a:r>
+            <a:r>
+              <a:rPr dirty="0"/>
+              <a:t> n</a:t>
+            </a:r>
+          </a:p>
+          <a:p>
+            <a:r>
+              <a:rPr dirty="0" err="1"/>
+              <a:t>elevado</a:t>
+            </a:r>
+            <a:r>
+              <a:rPr dirty="0"/>
+              <a:t> a 1,22, </a:t>
+            </a:r>
+            <a:r>
+              <a:rPr dirty="0" err="1"/>
+              <a:t>porque</a:t>
+            </a:r>
+            <a:r>
+              <a:rPr dirty="0"/>
+              <a:t> </a:t>
+            </a:r>
+            <a:r>
+              <a:rPr dirty="0" err="1"/>
+              <a:t>cada</a:t>
+            </a:r>
+            <a:r>
+              <a:rPr dirty="0"/>
+              <a:t> </a:t>
+            </a:r>
+            <a:r>
+              <a:rPr dirty="0" err="1"/>
+              <a:t>nivel</a:t>
+            </a:r>
+            <a:r>
+              <a:rPr dirty="0"/>
+              <a:t> de </a:t>
+            </a:r>
+            <a:r>
+              <a:rPr dirty="0" err="1"/>
+              <a:t>recursión</a:t>
+            </a:r>
+            <a:r>
+              <a:rPr dirty="0"/>
+              <a:t> </a:t>
+            </a:r>
+            <a:r>
+              <a:rPr dirty="0" err="1"/>
+              <a:t>asigna</a:t>
+            </a:r>
+            <a:r>
+              <a:rPr dirty="0"/>
+              <a:t> </a:t>
+            </a:r>
+            <a:r>
+              <a:rPr dirty="0" err="1"/>
+              <a:t>tres</a:t>
+            </a:r>
+            <a:r>
+              <a:rPr dirty="0"/>
+              <a:t> </a:t>
+            </a:r>
+            <a:r>
+              <a:rPr dirty="0" err="1"/>
+              <a:t>listas</a:t>
+            </a:r>
+            <a:r>
+              <a:rPr dirty="0"/>
+              <a:t> </a:t>
+            </a:r>
+            <a:r>
+              <a:rPr dirty="0" err="1"/>
+              <a:t>nuevas</a:t>
+            </a:r>
+            <a:r>
+              <a:rPr dirty="0"/>
+              <a:t>. La </a:t>
+            </a:r>
+            <a:r>
+              <a:rPr dirty="0" err="1"/>
+              <a:t>cota</a:t>
+            </a:r>
+            <a:endParaRPr dirty="0"/>
+          </a:p>
+          <a:p>
+            <a:r>
+              <a:rPr dirty="0"/>
+              <a:t>describe </a:t>
+            </a:r>
+            <a:r>
+              <a:rPr dirty="0" err="1"/>
+              <a:t>el</a:t>
+            </a:r>
+            <a:r>
+              <a:rPr dirty="0"/>
+              <a:t> </a:t>
+            </a:r>
+            <a:r>
+              <a:rPr dirty="0" err="1"/>
+              <a:t>crecimiento</a:t>
+            </a:r>
+            <a:r>
+              <a:rPr dirty="0"/>
+              <a:t>, no la </a:t>
+            </a:r>
+            <a:r>
+              <a:rPr dirty="0" err="1"/>
+              <a:t>constante</a:t>
+            </a:r>
+            <a:r>
+              <a:rPr dirty="0"/>
+              <a:t>. Ese </a:t>
+            </a:r>
+            <a:r>
+              <a:rPr dirty="0" err="1"/>
+              <a:t>contraste</a:t>
+            </a:r>
+            <a:r>
+              <a:rPr dirty="0"/>
+              <a:t> </a:t>
+            </a:r>
+            <a:r>
+              <a:rPr dirty="0" err="1"/>
+              <a:t>fue</a:t>
+            </a:r>
+            <a:r>
+              <a:rPr dirty="0"/>
+              <a:t> uno de </a:t>
+            </a:r>
+            <a:r>
+              <a:rPr dirty="0" err="1"/>
+              <a:t>los</a:t>
+            </a:r>
+            <a:r>
+              <a:rPr dirty="0"/>
+              <a:t> </a:t>
+            </a:r>
+            <a:r>
+              <a:rPr dirty="0" err="1"/>
+              <a:t>aprendizajes</a:t>
+            </a:r>
+            <a:endParaRPr dirty="0"/>
+          </a:p>
+          <a:p>
+            <a:r>
+              <a:rPr dirty="0" err="1"/>
+              <a:t>centrales</a:t>
+            </a:r>
+            <a:r>
+              <a:rPr dirty="0"/>
+              <a:t> del </a:t>
+            </a:r>
+            <a:r>
+              <a:rPr dirty="0" err="1"/>
+              <a:t>curso</a:t>
+            </a:r>
+            <a:r>
+              <a:rPr dirty="0"/>
+              <a:t>.</a:t>
+            </a:r>
+          </a:p>
+          <a:p>
+            <a:endParaRPr dirty="0"/>
+          </a:p>
+          <a:p>
+            <a:r>
+              <a:rPr dirty="0"/>
+              <a:t>SI EL VIDEO VA LARGO, </a:t>
+            </a:r>
+            <a:r>
+              <a:rPr dirty="0" err="1"/>
+              <a:t>recortar</a:t>
+            </a:r>
+            <a:r>
+              <a:rPr dirty="0"/>
+              <a:t> </a:t>
+            </a:r>
+            <a:r>
+              <a:rPr dirty="0" err="1"/>
+              <a:t>esta</a:t>
+            </a:r>
+            <a:r>
+              <a:rPr dirty="0"/>
+              <a:t> </a:t>
+            </a:r>
+            <a:r>
+              <a:rPr dirty="0" err="1"/>
+              <a:t>lámina</a:t>
+            </a:r>
+            <a:r>
+              <a:rPr dirty="0"/>
+              <a:t> a las dos </a:t>
+            </a:r>
+            <a:r>
+              <a:rPr dirty="0" err="1"/>
+              <a:t>primeras</a:t>
+            </a:r>
+            <a:r>
+              <a:rPr dirty="0"/>
+              <a:t> </a:t>
+            </a:r>
+            <a:r>
+              <a:rPr dirty="0" err="1"/>
+              <a:t>cifras</a:t>
+            </a:r>
+            <a:r>
+              <a:rPr dirty="0"/>
+              <a:t> y </a:t>
+            </a:r>
+            <a:r>
+              <a:rPr dirty="0" err="1"/>
+              <a:t>omitir</a:t>
+            </a:r>
+            <a:r>
+              <a:rPr dirty="0"/>
+              <a:t> </a:t>
+            </a:r>
+            <a:r>
+              <a:rPr dirty="0" err="1"/>
+              <a:t>el</a:t>
+            </a:r>
+            <a:r>
+              <a:rPr dirty="0"/>
+              <a:t> </a:t>
+            </a:r>
+            <a:r>
+              <a:rPr dirty="0" err="1"/>
+              <a:t>detalle</a:t>
+            </a:r>
+            <a:endParaRPr dirty="0"/>
+          </a:p>
+          <a:p>
+            <a:r>
+              <a:rPr dirty="0"/>
+              <a:t>de </a:t>
+            </a:r>
+            <a:r>
+              <a:rPr dirty="0" err="1"/>
+              <a:t>quickselect</a:t>
+            </a:r>
+            <a:r>
+              <a:rPr dirty="0"/>
+              <a:t>: </a:t>
+            </a:r>
+            <a:r>
+              <a:rPr dirty="0" err="1"/>
+              <a:t>ahorra</a:t>
+            </a:r>
+            <a:r>
+              <a:rPr dirty="0"/>
+              <a:t> </a:t>
+            </a:r>
+            <a:r>
+              <a:rPr dirty="0" err="1"/>
+              <a:t>unos</a:t>
+            </a:r>
+            <a:r>
+              <a:rPr dirty="0"/>
+              <a:t> 20 </a:t>
+            </a:r>
+            <a:r>
+              <a:rPr dirty="0" err="1"/>
+              <a:t>segundos</a:t>
+            </a:r>
+            <a:r>
+              <a:rPr dirty="0"/>
+              <a:t>.</a:t>
+            </a:r>
           </a:p>
         </p:txBody>
       </p:sp>
@@ -1133,7 +4971,454 @@
           <a:bodyPr/>
           <a:lstStyle/>
           <a:p>
+            <a:r>
+              <a:rPr dirty="0"/>
+              <a:t>En </a:t>
+            </a:r>
+            <a:r>
+              <a:rPr dirty="0" err="1"/>
+              <a:t>síntesis</a:t>
+            </a:r>
+            <a:r>
+              <a:rPr dirty="0"/>
+              <a:t>, cuatro </a:t>
+            </a:r>
+            <a:r>
+              <a:rPr dirty="0" err="1"/>
+              <a:t>conclusiones</a:t>
+            </a:r>
+            <a:r>
+              <a:rPr dirty="0"/>
+              <a:t>.</a:t>
+            </a:r>
+          </a:p>
+          <a:p>
             <a:endParaRPr dirty="0"/>
+          </a:p>
+          <a:p>
+            <a:r>
+              <a:rPr dirty="0"/>
+              <a:t>El </a:t>
+            </a:r>
+            <a:r>
+              <a:rPr dirty="0" err="1"/>
+              <a:t>rezago</a:t>
+            </a:r>
+            <a:r>
+              <a:rPr dirty="0"/>
+              <a:t> es </a:t>
+            </a:r>
+            <a:r>
+              <a:rPr dirty="0" err="1"/>
+              <a:t>masivo</a:t>
+            </a:r>
+            <a:r>
+              <a:rPr dirty="0"/>
+              <a:t> y </a:t>
+            </a:r>
+            <a:r>
+              <a:rPr dirty="0" err="1"/>
+              <a:t>estructural</a:t>
+            </a:r>
+            <a:r>
+              <a:rPr dirty="0"/>
+              <a:t>, no </a:t>
+            </a:r>
+            <a:r>
+              <a:rPr dirty="0" err="1"/>
+              <a:t>aleatorio</a:t>
+            </a:r>
+            <a:r>
+              <a:rPr dirty="0"/>
+              <a:t>.</a:t>
+            </a:r>
+          </a:p>
+          <a:p>
+            <a:endParaRPr dirty="0"/>
+          </a:p>
+          <a:p>
+            <a:r>
+              <a:rPr dirty="0"/>
+              <a:t>La pandemia </a:t>
+            </a:r>
+            <a:r>
+              <a:rPr dirty="0" err="1"/>
+              <a:t>desplazó</a:t>
+            </a:r>
+            <a:r>
+              <a:rPr dirty="0"/>
+              <a:t> </a:t>
+            </a:r>
+            <a:r>
+              <a:rPr dirty="0" err="1"/>
+              <a:t>titulaciones</a:t>
+            </a:r>
+            <a:r>
+              <a:rPr dirty="0"/>
+              <a:t> </a:t>
+            </a:r>
+            <a:r>
+              <a:rPr dirty="0" err="1"/>
+              <a:t>en</a:t>
+            </a:r>
+            <a:r>
+              <a:rPr dirty="0"/>
+              <a:t> </a:t>
+            </a:r>
+            <a:r>
+              <a:rPr dirty="0" err="1"/>
+              <a:t>lugar</a:t>
+            </a:r>
+            <a:r>
+              <a:rPr dirty="0"/>
+              <a:t> de </a:t>
+            </a:r>
+            <a:r>
+              <a:rPr dirty="0" err="1"/>
+              <a:t>empeorarlas</a:t>
+            </a:r>
+            <a:r>
+              <a:rPr dirty="0"/>
+              <a:t>.</a:t>
+            </a:r>
+          </a:p>
+          <a:p>
+            <a:endParaRPr dirty="0"/>
+          </a:p>
+          <a:p>
+            <a:r>
+              <a:rPr dirty="0"/>
+              <a:t>Los </a:t>
+            </a:r>
+            <a:r>
+              <a:rPr dirty="0" err="1"/>
+              <a:t>registros</a:t>
+            </a:r>
+            <a:r>
+              <a:rPr dirty="0"/>
+              <a:t> </a:t>
+            </a:r>
+            <a:r>
+              <a:rPr dirty="0" err="1"/>
+              <a:t>administrativos</a:t>
+            </a:r>
+            <a:r>
+              <a:rPr dirty="0"/>
+              <a:t> no </a:t>
+            </a:r>
+            <a:r>
+              <a:rPr dirty="0" err="1"/>
+              <a:t>explican</a:t>
+            </a:r>
+            <a:r>
+              <a:rPr dirty="0"/>
+              <a:t> </a:t>
+            </a:r>
+            <a:r>
+              <a:rPr dirty="0" err="1"/>
+              <a:t>el</a:t>
+            </a:r>
+            <a:r>
+              <a:rPr dirty="0"/>
+              <a:t> </a:t>
+            </a:r>
+            <a:r>
+              <a:rPr dirty="0" err="1"/>
+              <a:t>caso</a:t>
+            </a:r>
+            <a:r>
+              <a:rPr dirty="0"/>
+              <a:t> individual: </a:t>
+            </a:r>
+            <a:r>
+              <a:rPr dirty="0" err="1"/>
+              <a:t>el</a:t>
+            </a:r>
+            <a:r>
+              <a:rPr dirty="0"/>
+              <a:t> R </a:t>
+            </a:r>
+            <a:r>
+              <a:rPr dirty="0" err="1"/>
+              <a:t>cuadrado</a:t>
+            </a:r>
+            <a:r>
+              <a:rPr dirty="0"/>
+              <a:t> es de 0 coma</a:t>
+            </a:r>
+          </a:p>
+          <a:p>
+            <a:r>
+              <a:rPr dirty="0"/>
+              <a:t>085 y la </a:t>
+            </a:r>
+            <a:r>
+              <a:rPr dirty="0" err="1"/>
+              <a:t>clasificación</a:t>
+            </a:r>
+            <a:r>
+              <a:rPr dirty="0"/>
+              <a:t> no </a:t>
+            </a:r>
+            <a:r>
+              <a:rPr dirty="0" err="1"/>
+              <a:t>supera</a:t>
+            </a:r>
+            <a:r>
+              <a:rPr dirty="0"/>
+              <a:t> a </a:t>
+            </a:r>
+            <a:r>
+              <a:rPr dirty="0" err="1"/>
+              <a:t>predecir</a:t>
+            </a:r>
+            <a:r>
+              <a:rPr dirty="0"/>
+              <a:t> </a:t>
+            </a:r>
+            <a:r>
+              <a:rPr dirty="0" err="1"/>
+              <a:t>siempre</a:t>
+            </a:r>
+            <a:r>
+              <a:rPr dirty="0"/>
+              <a:t> la </a:t>
+            </a:r>
+            <a:r>
+              <a:rPr dirty="0" err="1"/>
+              <a:t>clase</a:t>
+            </a:r>
+            <a:r>
+              <a:rPr dirty="0"/>
+              <a:t> </a:t>
+            </a:r>
+            <a:r>
+              <a:rPr dirty="0" err="1"/>
+              <a:t>mayoritaria</a:t>
+            </a:r>
+            <a:r>
+              <a:rPr dirty="0"/>
+              <a:t>. </a:t>
+            </a:r>
+            <a:r>
+              <a:rPr dirty="0" err="1"/>
+              <a:t>Eso</a:t>
+            </a:r>
+            <a:r>
+              <a:rPr dirty="0"/>
+              <a:t> no es un</a:t>
+            </a:r>
+          </a:p>
+          <a:p>
+            <a:r>
+              <a:rPr dirty="0" err="1"/>
+              <a:t>fracaso</a:t>
+            </a:r>
+            <a:r>
+              <a:rPr dirty="0"/>
+              <a:t> del </a:t>
+            </a:r>
+            <a:r>
+              <a:rPr dirty="0" err="1"/>
+              <a:t>modelo</a:t>
+            </a:r>
+            <a:r>
+              <a:rPr dirty="0"/>
+              <a:t>, es un </a:t>
+            </a:r>
+            <a:r>
+              <a:rPr dirty="0" err="1"/>
+              <a:t>resultado</a:t>
+            </a:r>
+            <a:r>
+              <a:rPr dirty="0"/>
+              <a:t>: </a:t>
+            </a:r>
+            <a:r>
+              <a:rPr dirty="0" err="1"/>
+              <a:t>el</a:t>
+            </a:r>
+            <a:r>
+              <a:rPr dirty="0"/>
+              <a:t> </a:t>
+            </a:r>
+            <a:r>
+              <a:rPr dirty="0" err="1"/>
+              <a:t>rezago</a:t>
+            </a:r>
+            <a:r>
+              <a:rPr dirty="0"/>
+              <a:t> </a:t>
+            </a:r>
+            <a:r>
+              <a:rPr dirty="0" err="1"/>
+              <a:t>depende</a:t>
+            </a:r>
+            <a:r>
+              <a:rPr dirty="0"/>
+              <a:t> de </a:t>
+            </a:r>
+            <a:r>
+              <a:rPr dirty="0" err="1"/>
+              <a:t>trayectorias</a:t>
+            </a:r>
+            <a:r>
+              <a:rPr dirty="0"/>
+              <a:t> </a:t>
+            </a:r>
+            <a:r>
+              <a:rPr dirty="0" err="1"/>
+              <a:t>personales</a:t>
+            </a:r>
+            <a:r>
+              <a:rPr dirty="0"/>
+              <a:t> que</a:t>
+            </a:r>
+          </a:p>
+          <a:p>
+            <a:r>
+              <a:rPr dirty="0" err="1"/>
+              <a:t>esta</a:t>
+            </a:r>
+            <a:r>
+              <a:rPr dirty="0"/>
+              <a:t> </a:t>
+            </a:r>
+            <a:r>
+              <a:rPr dirty="0" err="1"/>
+              <a:t>fuente</a:t>
+            </a:r>
+            <a:r>
+              <a:rPr dirty="0"/>
+              <a:t> no </a:t>
+            </a:r>
+            <a:r>
+              <a:rPr dirty="0" err="1"/>
+              <a:t>registra</a:t>
+            </a:r>
+            <a:r>
+              <a:rPr dirty="0"/>
+              <a:t>.</a:t>
+            </a:r>
+          </a:p>
+          <a:p>
+            <a:endParaRPr dirty="0"/>
+          </a:p>
+          <a:p>
+            <a:r>
+              <a:rPr dirty="0"/>
+              <a:t>Y </a:t>
+            </a:r>
+            <a:r>
+              <a:rPr dirty="0" err="1"/>
+              <a:t>todo</a:t>
+            </a:r>
+            <a:r>
+              <a:rPr dirty="0"/>
+              <a:t> </a:t>
+            </a:r>
+            <a:r>
+              <a:rPr dirty="0" err="1"/>
+              <a:t>el</a:t>
+            </a:r>
+            <a:r>
+              <a:rPr dirty="0"/>
+              <a:t> </a:t>
+            </a:r>
+            <a:r>
+              <a:rPr dirty="0" err="1"/>
+              <a:t>proyecto</a:t>
+            </a:r>
+            <a:r>
+              <a:rPr dirty="0"/>
+              <a:t> es reproducible: cuatro </a:t>
+            </a:r>
+            <a:r>
+              <a:rPr dirty="0" err="1"/>
+              <a:t>comandos</a:t>
+            </a:r>
+            <a:r>
+              <a:rPr dirty="0"/>
+              <a:t> lo </a:t>
+            </a:r>
+            <a:r>
+              <a:rPr dirty="0" err="1"/>
+              <a:t>instalan</a:t>
+            </a:r>
+            <a:r>
+              <a:rPr dirty="0"/>
+              <a:t> y </a:t>
+            </a:r>
+            <a:r>
+              <a:rPr dirty="0" err="1"/>
+              <a:t>ejecutan</a:t>
+            </a:r>
+            <a:r>
+              <a:rPr dirty="0"/>
+              <a:t>, con 45</a:t>
+            </a:r>
+          </a:p>
+          <a:p>
+            <a:r>
+              <a:rPr dirty="0"/>
+              <a:t>commits </a:t>
+            </a:r>
+            <a:r>
+              <a:rPr dirty="0" err="1"/>
+              <a:t>verificables</a:t>
+            </a:r>
+            <a:r>
+              <a:rPr dirty="0"/>
+              <a:t> y </a:t>
+            </a:r>
+            <a:r>
+              <a:rPr dirty="0" err="1"/>
+              <a:t>cada</a:t>
+            </a:r>
+            <a:r>
+              <a:rPr dirty="0"/>
+              <a:t> </a:t>
+            </a:r>
+            <a:r>
+              <a:rPr dirty="0" err="1"/>
+              <a:t>cifra</a:t>
+            </a:r>
+            <a:r>
+              <a:rPr dirty="0"/>
+              <a:t> </a:t>
+            </a:r>
+            <a:r>
+              <a:rPr dirty="0" err="1"/>
+              <a:t>rastreable</a:t>
+            </a:r>
+            <a:r>
+              <a:rPr dirty="0"/>
+              <a:t> hasta </a:t>
+            </a:r>
+            <a:r>
+              <a:rPr dirty="0" err="1"/>
+              <a:t>el</a:t>
+            </a:r>
+            <a:r>
+              <a:rPr dirty="0"/>
+              <a:t> </a:t>
+            </a:r>
+            <a:r>
+              <a:rPr dirty="0" err="1"/>
+              <a:t>archivo</a:t>
+            </a:r>
+            <a:r>
+              <a:rPr dirty="0"/>
+              <a:t> que la </a:t>
+            </a:r>
+            <a:r>
+              <a:rPr dirty="0" err="1"/>
+              <a:t>generó</a:t>
+            </a:r>
+            <a:r>
+              <a:rPr dirty="0"/>
+              <a:t>.</a:t>
+            </a:r>
           </a:p>
         </p:txBody>
       </p:sp>

--- a/informe/Presentacion_Fase4_Sebastian_Antunez.pptx
+++ b/informe/Presentacion_Fase4_Sebastian_Antunez.pptx
@@ -521,260 +521,7 @@
           <a:bodyPr/>
           <a:lstStyle/>
           <a:p>
-            <a:r>
-              <a:t>Buenos </a:t>
-            </a:r>
-            <a:r>
-              <a:rPr dirty="0"/>
-              <a:t>días. Mi </a:t>
-            </a:r>
-            <a:r>
-              <a:rPr dirty="0" err="1"/>
-              <a:t>nombre</a:t>
-            </a:r>
-            <a:r>
-              <a:rPr dirty="0"/>
-              <a:t> es Sebastian Antunez y </a:t>
-            </a:r>
-            <a:r>
-              <a:rPr dirty="0" err="1"/>
-              <a:t>voy</a:t>
-            </a:r>
-            <a:r>
-              <a:rPr dirty="0"/>
-              <a:t> a </a:t>
-            </a:r>
-            <a:r>
-              <a:rPr dirty="0" err="1"/>
-              <a:t>presentar</a:t>
-            </a:r>
-            <a:r>
-              <a:rPr dirty="0"/>
-              <a:t> </a:t>
-            </a:r>
-            <a:r>
-              <a:rPr dirty="0" err="1"/>
-              <a:t>el</a:t>
-            </a:r>
-            <a:r>
-              <a:rPr dirty="0"/>
-              <a:t> </a:t>
-            </a:r>
-            <a:r>
-              <a:rPr dirty="0" err="1"/>
-              <a:t>proyecto</a:t>
-            </a:r>
-            <a:r>
-              <a:rPr dirty="0"/>
-              <a:t> final del</a:t>
-            </a:r>
-          </a:p>
-          <a:p>
-            <a:r>
-              <a:rPr dirty="0" err="1"/>
-              <a:t>curso</a:t>
-            </a:r>
-            <a:r>
-              <a:rPr dirty="0"/>
-              <a:t> </a:t>
-            </a:r>
-            <a:r>
-              <a:rPr dirty="0" err="1"/>
-              <a:t>Programación</a:t>
-            </a:r>
-            <a:r>
-              <a:rPr dirty="0"/>
-              <a:t> para la </a:t>
-            </a:r>
-            <a:r>
-              <a:rPr dirty="0" err="1"/>
-              <a:t>Ciencia</a:t>
-            </a:r>
-            <a:r>
-              <a:rPr dirty="0"/>
-              <a:t> de Datos: un </a:t>
-            </a:r>
-            <a:r>
-              <a:rPr dirty="0" err="1"/>
-              <a:t>análisis</a:t>
-            </a:r>
-            <a:r>
-              <a:rPr dirty="0"/>
-              <a:t> </a:t>
-            </a:r>
-            <a:r>
-              <a:rPr dirty="0" err="1"/>
-              <a:t>sobre</a:t>
-            </a:r>
-            <a:r>
-              <a:rPr dirty="0"/>
-              <a:t> la </a:t>
-            </a:r>
-            <a:r>
-              <a:rPr dirty="0" err="1"/>
-              <a:t>sobreduración</a:t>
-            </a:r>
-            <a:r>
-              <a:rPr dirty="0"/>
-              <a:t> </a:t>
-            </a:r>
-            <a:r>
-              <a:rPr dirty="0" err="1"/>
-              <a:t>en</a:t>
-            </a:r>
-            <a:r>
-              <a:rPr dirty="0"/>
-              <a:t> la</a:t>
-            </a:r>
-          </a:p>
-          <a:p>
-            <a:r>
-              <a:rPr dirty="0" err="1"/>
-              <a:t>titulación</a:t>
-            </a:r>
-            <a:r>
-              <a:rPr dirty="0"/>
-              <a:t> de la </a:t>
-            </a:r>
-            <a:r>
-              <a:rPr dirty="0" err="1"/>
-              <a:t>educación</a:t>
-            </a:r>
-            <a:r>
-              <a:rPr dirty="0"/>
-              <a:t> superior </a:t>
-            </a:r>
-            <a:r>
-              <a:rPr dirty="0" err="1"/>
-              <a:t>chilena</a:t>
-            </a:r>
-            <a:r>
-              <a:rPr dirty="0"/>
-              <a:t>, </a:t>
-            </a:r>
-            <a:r>
-              <a:rPr dirty="0" err="1"/>
-              <a:t>construido</a:t>
-            </a:r>
-            <a:r>
-              <a:rPr dirty="0"/>
-              <a:t> </a:t>
-            </a:r>
-            <a:r>
-              <a:rPr dirty="0" err="1"/>
-              <a:t>sobre</a:t>
-            </a:r>
-            <a:r>
-              <a:rPr dirty="0"/>
-              <a:t> 1.246.760 </a:t>
-            </a:r>
-            <a:r>
-              <a:rPr dirty="0" err="1"/>
-              <a:t>procesos</a:t>
-            </a:r>
-            <a:r>
-              <a:rPr dirty="0"/>
-              <a:t> de</a:t>
-            </a:r>
-          </a:p>
-          <a:p>
-            <a:r>
-              <a:rPr dirty="0" err="1"/>
-              <a:t>titulación</a:t>
-            </a:r>
-            <a:r>
-              <a:rPr dirty="0"/>
-              <a:t> </a:t>
-            </a:r>
-            <a:r>
-              <a:rPr dirty="0" err="1"/>
-              <a:t>reales</a:t>
-            </a:r>
-            <a:r>
-              <a:rPr dirty="0"/>
-              <a:t> entre 2020 y 2025.</a:t>
-            </a:r>
-          </a:p>
-          <a:p>
             <a:endParaRPr dirty="0"/>
-          </a:p>
-          <a:p>
-            <a:r>
-              <a:rPr dirty="0"/>
-              <a:t>RECORDAR: </a:t>
-            </a:r>
-            <a:r>
-              <a:rPr dirty="0" err="1"/>
-              <a:t>hablar</a:t>
-            </a:r>
-            <a:r>
-              <a:rPr dirty="0"/>
-              <a:t> </a:t>
-            </a:r>
-            <a:r>
-              <a:rPr dirty="0" err="1"/>
-              <a:t>más</a:t>
-            </a:r>
-            <a:r>
-              <a:rPr dirty="0"/>
-              <a:t> lento de lo que </a:t>
-            </a:r>
-            <a:r>
-              <a:rPr dirty="0" err="1"/>
-              <a:t>parece</a:t>
-            </a:r>
-            <a:r>
-              <a:rPr dirty="0"/>
-              <a:t> natural; </a:t>
-            </a:r>
-            <a:r>
-              <a:rPr dirty="0" err="1"/>
-              <a:t>en</a:t>
-            </a:r>
-            <a:r>
-              <a:rPr dirty="0"/>
-              <a:t> </a:t>
-            </a:r>
-            <a:r>
-              <a:rPr dirty="0" err="1"/>
-              <a:t>grabación</a:t>
-            </a:r>
-            <a:r>
-              <a:rPr dirty="0"/>
-              <a:t> </a:t>
-            </a:r>
-            <a:r>
-              <a:rPr dirty="0" err="1"/>
-              <a:t>siempre</a:t>
-            </a:r>
-            <a:r>
-              <a:rPr dirty="0"/>
-              <a:t> </a:t>
-            </a:r>
-            <a:r>
-              <a:rPr dirty="0" err="1"/>
-              <a:t>suena</a:t>
-            </a:r>
-            <a:r>
-              <a:rPr dirty="0"/>
-              <a:t> </a:t>
-            </a:r>
-            <a:r>
-              <a:rPr dirty="0" err="1"/>
-              <a:t>más</a:t>
-            </a:r>
-            <a:r>
-              <a:rPr dirty="0"/>
-              <a:t> </a:t>
-            </a:r>
-            <a:r>
-              <a:rPr dirty="0" err="1"/>
-              <a:t>rápido</a:t>
-            </a:r>
-            <a:r>
-              <a:rPr dirty="0"/>
-              <a:t>.</a:t>
-            </a:r>
           </a:p>
         </p:txBody>
       </p:sp>
@@ -843,33 +590,182 @@
           <a:lstStyle/>
           <a:p>
             <a:r>
-              <a:t>[6:55 - 7:10 · 15 s]</a:t>
-            </a:r>
-          </a:p>
-          <a:p>
-            <a:endParaRPr/>
-          </a:p>
-          <a:p>
-            <a:r>
-              <a:t>Lo que queda para seguir: incorporar la base de matrícula para ver la deserción, que hoy</a:t>
-            </a:r>
-          </a:p>
-          <a:p>
-            <a:r>
-              <a:t>es invisible; usar modelos de supervivencia, que son los adecuados para datos</a:t>
-            </a:r>
-          </a:p>
-          <a:p>
-            <a:r>
-              <a:t>censurados; y ampliar las variables hacia la trayectoria individual.</a:t>
-            </a:r>
-          </a:p>
-          <a:p>
-            <a:endParaRPr/>
-          </a:p>
-          <a:p>
-            <a:r>
-              <a:t>El repositorio completo está disponible en GitHub. Muchas gracias.</a:t>
+              <a:rPr dirty="0"/>
+              <a:t>Lo que </a:t>
+            </a:r>
+            <a:r>
+              <a:rPr dirty="0" err="1"/>
+              <a:t>queda</a:t>
+            </a:r>
+            <a:r>
+              <a:rPr dirty="0"/>
+              <a:t> para </a:t>
+            </a:r>
+            <a:r>
+              <a:rPr dirty="0" err="1"/>
+              <a:t>seguir</a:t>
+            </a:r>
+            <a:r>
+              <a:rPr dirty="0"/>
+              <a:t>: </a:t>
+            </a:r>
+            <a:r>
+              <a:rPr dirty="0" err="1"/>
+              <a:t>incorporar</a:t>
+            </a:r>
+            <a:r>
+              <a:rPr dirty="0"/>
+              <a:t> la base de </a:t>
+            </a:r>
+            <a:r>
+              <a:rPr dirty="0" err="1"/>
+              <a:t>matrícula</a:t>
+            </a:r>
+            <a:r>
+              <a:rPr dirty="0"/>
+              <a:t> para </a:t>
+            </a:r>
+            <a:r>
+              <a:rPr dirty="0" err="1"/>
+              <a:t>ver</a:t>
+            </a:r>
+            <a:r>
+              <a:rPr dirty="0"/>
+              <a:t> la </a:t>
+            </a:r>
+            <a:r>
+              <a:rPr dirty="0" err="1"/>
+              <a:t>deserción</a:t>
+            </a:r>
+            <a:r>
+              <a:rPr dirty="0"/>
+              <a:t>, que hoy</a:t>
+            </a:r>
+          </a:p>
+          <a:p>
+            <a:r>
+              <a:rPr dirty="0"/>
+              <a:t>es invisible; usar </a:t>
+            </a:r>
+            <a:r>
+              <a:rPr dirty="0" err="1"/>
+              <a:t>modelos</a:t>
+            </a:r>
+            <a:r>
+              <a:rPr dirty="0"/>
+              <a:t> de </a:t>
+            </a:r>
+            <a:r>
+              <a:rPr dirty="0" err="1"/>
+              <a:t>supervivencia</a:t>
+            </a:r>
+            <a:r>
+              <a:rPr dirty="0"/>
+              <a:t>, que son </a:t>
+            </a:r>
+            <a:r>
+              <a:rPr dirty="0" err="1"/>
+              <a:t>los</a:t>
+            </a:r>
+            <a:r>
+              <a:rPr dirty="0"/>
+              <a:t> </a:t>
+            </a:r>
+            <a:r>
+              <a:rPr dirty="0" err="1"/>
+              <a:t>adecuados</a:t>
+            </a:r>
+            <a:r>
+              <a:rPr dirty="0"/>
+              <a:t> para </a:t>
+            </a:r>
+            <a:r>
+              <a:rPr dirty="0" err="1"/>
+              <a:t>datos</a:t>
+            </a:r>
+            <a:endParaRPr dirty="0"/>
+          </a:p>
+          <a:p>
+            <a:r>
+              <a:rPr dirty="0" err="1"/>
+              <a:t>censurados</a:t>
+            </a:r>
+            <a:r>
+              <a:rPr dirty="0"/>
+              <a:t>; y </a:t>
+            </a:r>
+            <a:r>
+              <a:rPr dirty="0" err="1"/>
+              <a:t>ampliar</a:t>
+            </a:r>
+            <a:r>
+              <a:rPr dirty="0"/>
+              <a:t> las variables </a:t>
+            </a:r>
+            <a:r>
+              <a:rPr dirty="0" err="1"/>
+              <a:t>hacia</a:t>
+            </a:r>
+            <a:r>
+              <a:rPr dirty="0"/>
+              <a:t> la </a:t>
+            </a:r>
+            <a:r>
+              <a:rPr dirty="0" err="1"/>
+              <a:t>trayectoria</a:t>
+            </a:r>
+            <a:r>
+              <a:rPr dirty="0"/>
+              <a:t> individual.</a:t>
+            </a:r>
+          </a:p>
+          <a:p>
+            <a:endParaRPr dirty="0"/>
+          </a:p>
+          <a:p>
+            <a:r>
+              <a:rPr dirty="0"/>
+              <a:t>El </a:t>
+            </a:r>
+            <a:r>
+              <a:rPr dirty="0" err="1"/>
+              <a:t>repositorio</a:t>
+            </a:r>
+            <a:r>
+              <a:rPr dirty="0"/>
+              <a:t> </a:t>
+            </a:r>
+            <a:r>
+              <a:rPr dirty="0" err="1"/>
+              <a:t>completo</a:t>
+            </a:r>
+            <a:r>
+              <a:rPr dirty="0"/>
+              <a:t> </a:t>
+            </a:r>
+            <a:r>
+              <a:rPr dirty="0" err="1"/>
+              <a:t>está</a:t>
+            </a:r>
+            <a:r>
+              <a:rPr dirty="0"/>
+              <a:t> disponible </a:t>
+            </a:r>
+            <a:r>
+              <a:rPr dirty="0" err="1"/>
+              <a:t>en</a:t>
+            </a:r>
+            <a:r>
+              <a:rPr dirty="0"/>
+              <a:t> GitHub. </a:t>
+            </a:r>
+            <a:r>
+              <a:rPr dirty="0" err="1"/>
+              <a:t>Muchas</a:t>
+            </a:r>
+            <a:r>
+              <a:rPr dirty="0"/>
+              <a:t> gracias.</a:t>
             </a:r>
           </a:p>
         </p:txBody>
@@ -939,64 +835,498 @@
           <a:lstStyle/>
           <a:p>
             <a:r>
-              <a:t>[0:20 - 1:10 · 50 s]</a:t>
-            </a:r>
-          </a:p>
-          <a:p>
-            <a:endParaRPr/>
-          </a:p>
-          <a:p>
-            <a:r>
-              <a:t>Cada carrera en Chile declara una duración teórica. Sobre esa cifra se calculan la</a:t>
-            </a:r>
-          </a:p>
-          <a:p>
-            <a:r>
-              <a:t>duración de las becas y los créditos estatales.</a:t>
-            </a:r>
-          </a:p>
-          <a:p>
-            <a:endParaRPr/>
-          </a:p>
-          <a:p>
-            <a:r>
-              <a:t>Lo que el sistema no publica es cuánto se tarda en realidad. Y aquí está el punto de</a:t>
-            </a:r>
-          </a:p>
-          <a:p>
-            <a:r>
-              <a:t>partida: al revisar el esquema oficial del SIES descubrí que las columnas que parecían</a:t>
-            </a:r>
-          </a:p>
-          <a:p>
-            <a:r>
-              <a:t>tener la respuesta NO registran lo que el estudiante tardó, sino lo que el plan declara.</a:t>
-            </a:r>
-          </a:p>
-          <a:p>
-            <a:r>
-              <a:t>Son un atributo de la carrera, no de la persona.</a:t>
-            </a:r>
-          </a:p>
-          <a:p>
-            <a:endParaRPr/>
-          </a:p>
-          <a:p>
-            <a:r>
-              <a:t>Así que la pregunta fue: se puede reconstruir la duración real desde los registros</a:t>
-            </a:r>
-          </a:p>
-          <a:p>
-            <a:r>
-              <a:t>administrativos, y caracterizar el rezago con esa variable derivada.</a:t>
-            </a:r>
-          </a:p>
-          <a:p>
-            <a:endParaRPr/>
-          </a:p>
-          <a:p>
-            <a:r>
-              <a:t>PAUSA de medio segundo antes de avanzar: es la bisagra del relato.</a:t>
+              <a:rPr dirty="0" err="1"/>
+              <a:t>Cada</a:t>
+            </a:r>
+            <a:r>
+              <a:rPr dirty="0"/>
+              <a:t> </a:t>
+            </a:r>
+            <a:r>
+              <a:rPr dirty="0" err="1"/>
+              <a:t>carrera</a:t>
+            </a:r>
+            <a:r>
+              <a:rPr dirty="0"/>
+              <a:t> </a:t>
+            </a:r>
+            <a:r>
+              <a:rPr dirty="0" err="1"/>
+              <a:t>en</a:t>
+            </a:r>
+            <a:r>
+              <a:rPr dirty="0"/>
+              <a:t> Chile </a:t>
+            </a:r>
+            <a:r>
+              <a:rPr dirty="0" err="1"/>
+              <a:t>declara</a:t>
+            </a:r>
+            <a:r>
+              <a:rPr dirty="0"/>
+              <a:t> </a:t>
+            </a:r>
+            <a:r>
+              <a:rPr dirty="0" err="1"/>
+              <a:t>una</a:t>
+            </a:r>
+            <a:r>
+              <a:rPr dirty="0"/>
+              <a:t> </a:t>
+            </a:r>
+            <a:r>
+              <a:rPr dirty="0" err="1"/>
+              <a:t>duración</a:t>
+            </a:r>
+            <a:r>
+              <a:rPr dirty="0"/>
+              <a:t> </a:t>
+            </a:r>
+            <a:r>
+              <a:rPr dirty="0" err="1"/>
+              <a:t>teórica</a:t>
+            </a:r>
+            <a:r>
+              <a:rPr dirty="0"/>
+              <a:t>. </a:t>
+            </a:r>
+            <a:r>
+              <a:rPr dirty="0" err="1"/>
+              <a:t>Sobre</a:t>
+            </a:r>
+            <a:r>
+              <a:rPr dirty="0"/>
+              <a:t> </a:t>
+            </a:r>
+            <a:r>
+              <a:rPr dirty="0" err="1"/>
+              <a:t>esa</a:t>
+            </a:r>
+            <a:r>
+              <a:rPr dirty="0"/>
+              <a:t> </a:t>
+            </a:r>
+            <a:r>
+              <a:rPr dirty="0" err="1"/>
+              <a:t>cifra</a:t>
+            </a:r>
+            <a:r>
+              <a:rPr dirty="0"/>
+              <a:t> se </a:t>
+            </a:r>
+            <a:r>
+              <a:rPr dirty="0" err="1"/>
+              <a:t>calculan</a:t>
+            </a:r>
+            <a:r>
+              <a:rPr dirty="0"/>
+              <a:t> la</a:t>
+            </a:r>
+          </a:p>
+          <a:p>
+            <a:r>
+              <a:rPr dirty="0" err="1"/>
+              <a:t>duración</a:t>
+            </a:r>
+            <a:r>
+              <a:rPr dirty="0"/>
+              <a:t> de las </a:t>
+            </a:r>
+            <a:r>
+              <a:rPr dirty="0" err="1"/>
+              <a:t>becas</a:t>
+            </a:r>
+            <a:r>
+              <a:rPr dirty="0"/>
+              <a:t> y </a:t>
+            </a:r>
+            <a:r>
+              <a:rPr dirty="0" err="1"/>
+              <a:t>los</a:t>
+            </a:r>
+            <a:r>
+              <a:rPr dirty="0"/>
+              <a:t> </a:t>
+            </a:r>
+            <a:r>
+              <a:rPr dirty="0" err="1"/>
+              <a:t>créditos</a:t>
+            </a:r>
+            <a:r>
+              <a:rPr dirty="0"/>
+              <a:t> </a:t>
+            </a:r>
+            <a:r>
+              <a:rPr dirty="0" err="1"/>
+              <a:t>estatales</a:t>
+            </a:r>
+            <a:r>
+              <a:rPr dirty="0"/>
+              <a:t>.</a:t>
+            </a:r>
+          </a:p>
+          <a:p>
+            <a:endParaRPr dirty="0"/>
+          </a:p>
+          <a:p>
+            <a:r>
+              <a:rPr dirty="0"/>
+              <a:t>Lo que </a:t>
+            </a:r>
+            <a:r>
+              <a:rPr dirty="0" err="1"/>
+              <a:t>el</a:t>
+            </a:r>
+            <a:r>
+              <a:rPr dirty="0"/>
+              <a:t> </a:t>
+            </a:r>
+            <a:r>
+              <a:rPr dirty="0" err="1"/>
+              <a:t>sistema</a:t>
+            </a:r>
+            <a:r>
+              <a:rPr dirty="0"/>
+              <a:t> no publica es </a:t>
+            </a:r>
+            <a:r>
+              <a:rPr dirty="0" err="1"/>
+              <a:t>cuánto</a:t>
+            </a:r>
+            <a:r>
+              <a:rPr dirty="0"/>
+              <a:t> se </a:t>
+            </a:r>
+            <a:r>
+              <a:rPr dirty="0" err="1"/>
+              <a:t>tarda</a:t>
+            </a:r>
+            <a:r>
+              <a:rPr dirty="0"/>
+              <a:t> </a:t>
+            </a:r>
+            <a:r>
+              <a:rPr dirty="0" err="1"/>
+              <a:t>en</a:t>
+            </a:r>
+            <a:r>
+              <a:rPr dirty="0"/>
+              <a:t> </a:t>
+            </a:r>
+            <a:r>
+              <a:rPr dirty="0" err="1"/>
+              <a:t>realidad</a:t>
+            </a:r>
+            <a:r>
+              <a:rPr dirty="0"/>
+              <a:t>. Y </a:t>
+            </a:r>
+            <a:r>
+              <a:rPr dirty="0" err="1"/>
+              <a:t>aquí</a:t>
+            </a:r>
+            <a:r>
+              <a:rPr dirty="0"/>
+              <a:t> </a:t>
+            </a:r>
+            <a:r>
+              <a:rPr dirty="0" err="1"/>
+              <a:t>está</a:t>
+            </a:r>
+            <a:r>
+              <a:rPr dirty="0"/>
+              <a:t> </a:t>
+            </a:r>
+            <a:r>
+              <a:rPr dirty="0" err="1"/>
+              <a:t>el</a:t>
+            </a:r>
+            <a:r>
+              <a:rPr dirty="0"/>
+              <a:t> punto de</a:t>
+            </a:r>
+          </a:p>
+          <a:p>
+            <a:r>
+              <a:rPr dirty="0" err="1"/>
+              <a:t>partida</a:t>
+            </a:r>
+            <a:r>
+              <a:rPr dirty="0"/>
+              <a:t>: al </a:t>
+            </a:r>
+            <a:r>
+              <a:rPr dirty="0" err="1"/>
+              <a:t>revisar</a:t>
+            </a:r>
+            <a:r>
+              <a:rPr dirty="0"/>
+              <a:t> </a:t>
+            </a:r>
+            <a:r>
+              <a:rPr dirty="0" err="1"/>
+              <a:t>el</a:t>
+            </a:r>
+            <a:r>
+              <a:rPr dirty="0"/>
+              <a:t> </a:t>
+            </a:r>
+            <a:r>
+              <a:rPr dirty="0" err="1"/>
+              <a:t>esquema</a:t>
+            </a:r>
+            <a:r>
+              <a:rPr dirty="0"/>
+              <a:t> </a:t>
+            </a:r>
+            <a:r>
+              <a:rPr dirty="0" err="1"/>
+              <a:t>oficial</a:t>
+            </a:r>
+            <a:r>
+              <a:rPr dirty="0"/>
+              <a:t> del SIES </a:t>
+            </a:r>
+            <a:r>
+              <a:rPr dirty="0" err="1"/>
+              <a:t>descubrí</a:t>
+            </a:r>
+            <a:r>
+              <a:rPr dirty="0"/>
+              <a:t> que las </a:t>
+            </a:r>
+            <a:r>
+              <a:rPr dirty="0" err="1"/>
+              <a:t>columnas</a:t>
+            </a:r>
+            <a:r>
+              <a:rPr dirty="0"/>
+              <a:t> que </a:t>
+            </a:r>
+            <a:r>
+              <a:rPr dirty="0" err="1"/>
+              <a:t>parecían</a:t>
+            </a:r>
+            <a:endParaRPr dirty="0"/>
+          </a:p>
+          <a:p>
+            <a:r>
+              <a:rPr dirty="0" err="1"/>
+              <a:t>tener</a:t>
+            </a:r>
+            <a:r>
+              <a:rPr dirty="0"/>
+              <a:t> la </a:t>
+            </a:r>
+            <a:r>
+              <a:rPr dirty="0" err="1"/>
+              <a:t>respuesta</a:t>
+            </a:r>
+            <a:r>
+              <a:rPr dirty="0"/>
+              <a:t> NO </a:t>
+            </a:r>
+            <a:r>
+              <a:rPr dirty="0" err="1"/>
+              <a:t>registran</a:t>
+            </a:r>
+            <a:r>
+              <a:rPr dirty="0"/>
+              <a:t> lo que </a:t>
+            </a:r>
+            <a:r>
+              <a:rPr dirty="0" err="1"/>
+              <a:t>el</a:t>
+            </a:r>
+            <a:r>
+              <a:rPr dirty="0"/>
+              <a:t> </a:t>
+            </a:r>
+            <a:r>
+              <a:rPr dirty="0" err="1"/>
+              <a:t>estudiante</a:t>
+            </a:r>
+            <a:r>
+              <a:rPr dirty="0"/>
+              <a:t> </a:t>
+            </a:r>
+            <a:r>
+              <a:rPr dirty="0" err="1"/>
+              <a:t>tardó</a:t>
+            </a:r>
+            <a:r>
+              <a:rPr dirty="0"/>
+              <a:t>, </a:t>
+            </a:r>
+            <a:r>
+              <a:rPr dirty="0" err="1"/>
+              <a:t>sino</a:t>
+            </a:r>
+            <a:r>
+              <a:rPr dirty="0"/>
+              <a:t> lo que </a:t>
+            </a:r>
+            <a:r>
+              <a:rPr dirty="0" err="1"/>
+              <a:t>el</a:t>
+            </a:r>
+            <a:r>
+              <a:rPr dirty="0"/>
+              <a:t> plan </a:t>
+            </a:r>
+            <a:r>
+              <a:rPr dirty="0" err="1"/>
+              <a:t>declara</a:t>
+            </a:r>
+            <a:r>
+              <a:rPr dirty="0"/>
+              <a:t>.</a:t>
+            </a:r>
+          </a:p>
+          <a:p>
+            <a:r>
+              <a:rPr dirty="0"/>
+              <a:t>Son un </a:t>
+            </a:r>
+            <a:r>
+              <a:rPr dirty="0" err="1"/>
+              <a:t>atributo</a:t>
+            </a:r>
+            <a:r>
+              <a:rPr dirty="0"/>
+              <a:t> de la </a:t>
+            </a:r>
+            <a:r>
+              <a:rPr dirty="0" err="1"/>
+              <a:t>carrera</a:t>
+            </a:r>
+            <a:r>
+              <a:rPr dirty="0"/>
+              <a:t>, no de la persona.</a:t>
+            </a:r>
+          </a:p>
+          <a:p>
+            <a:endParaRPr dirty="0"/>
+          </a:p>
+          <a:p>
+            <a:r>
+              <a:rPr dirty="0" err="1"/>
+              <a:t>Así</a:t>
+            </a:r>
+            <a:r>
+              <a:rPr dirty="0"/>
+              <a:t> que la </a:t>
+            </a:r>
+            <a:r>
+              <a:rPr dirty="0" err="1"/>
+              <a:t>pregunta</a:t>
+            </a:r>
+            <a:r>
+              <a:rPr dirty="0"/>
+              <a:t> </a:t>
+            </a:r>
+            <a:r>
+              <a:rPr dirty="0" err="1"/>
+              <a:t>fue</a:t>
+            </a:r>
+            <a:r>
+              <a:rPr dirty="0"/>
+              <a:t>: se </a:t>
+            </a:r>
+            <a:r>
+              <a:rPr dirty="0" err="1"/>
+              <a:t>puede</a:t>
+            </a:r>
+            <a:r>
+              <a:rPr dirty="0"/>
+              <a:t> </a:t>
+            </a:r>
+            <a:r>
+              <a:rPr dirty="0" err="1"/>
+              <a:t>reconstruir</a:t>
+            </a:r>
+            <a:r>
+              <a:rPr dirty="0"/>
+              <a:t> la </a:t>
+            </a:r>
+            <a:r>
+              <a:rPr dirty="0" err="1"/>
+              <a:t>duración</a:t>
+            </a:r>
+            <a:r>
+              <a:rPr dirty="0"/>
+              <a:t> real </a:t>
+            </a:r>
+            <a:r>
+              <a:rPr dirty="0" err="1"/>
+              <a:t>desde</a:t>
+            </a:r>
+            <a:r>
+              <a:rPr dirty="0"/>
+              <a:t> </a:t>
+            </a:r>
+            <a:r>
+              <a:rPr dirty="0" err="1"/>
+              <a:t>los</a:t>
+            </a:r>
+            <a:r>
+              <a:rPr dirty="0"/>
+              <a:t> </a:t>
+            </a:r>
+            <a:r>
+              <a:rPr dirty="0" err="1"/>
+              <a:t>registros</a:t>
+            </a:r>
+            <a:endParaRPr dirty="0"/>
+          </a:p>
+          <a:p>
+            <a:r>
+              <a:rPr dirty="0" err="1"/>
+              <a:t>administrativos</a:t>
+            </a:r>
+            <a:r>
+              <a:rPr dirty="0"/>
+              <a:t>, y </a:t>
+            </a:r>
+            <a:r>
+              <a:rPr dirty="0" err="1"/>
+              <a:t>caracterizar</a:t>
+            </a:r>
+            <a:r>
+              <a:rPr dirty="0"/>
+              <a:t> </a:t>
+            </a:r>
+            <a:r>
+              <a:rPr dirty="0" err="1"/>
+              <a:t>el</a:t>
+            </a:r>
+            <a:r>
+              <a:rPr dirty="0"/>
+              <a:t> </a:t>
+            </a:r>
+            <a:r>
+              <a:rPr dirty="0" err="1"/>
+              <a:t>rezago</a:t>
+            </a:r>
+            <a:r>
+              <a:rPr dirty="0"/>
+              <a:t> con </a:t>
+            </a:r>
+            <a:r>
+              <a:rPr dirty="0" err="1"/>
+              <a:t>esa</a:t>
+            </a:r>
+            <a:r>
+              <a:rPr dirty="0"/>
+              <a:t> variable </a:t>
+            </a:r>
+            <a:r>
+              <a:rPr dirty="0" err="1"/>
+              <a:t>derivada</a:t>
+            </a:r>
+            <a:r>
+              <a:rPr dirty="0"/>
+              <a:t>.</a:t>
             </a:r>
           </a:p>
         </p:txBody>
@@ -1638,139 +1968,6 @@
           <a:p>
             <a:endParaRPr dirty="0"/>
           </a:p>
-          <a:p>
-            <a:r>
-              <a:rPr dirty="0"/>
-              <a:t>SI EL VIDEO VA CORTO, </a:t>
-            </a:r>
-            <a:r>
-              <a:rPr dirty="0" err="1"/>
-              <a:t>agregar</a:t>
-            </a:r>
-            <a:r>
-              <a:rPr dirty="0"/>
-              <a:t> </a:t>
-            </a:r>
-            <a:r>
-              <a:rPr dirty="0" err="1"/>
-              <a:t>aquí</a:t>
-            </a:r>
-            <a:r>
-              <a:rPr dirty="0"/>
-              <a:t>: </a:t>
-            </a:r>
-            <a:r>
-              <a:rPr dirty="0" err="1"/>
-              <a:t>el</a:t>
-            </a:r>
-            <a:r>
-              <a:rPr dirty="0"/>
-              <a:t> pipeline </a:t>
-            </a:r>
-            <a:r>
-              <a:rPr dirty="0" err="1"/>
-              <a:t>retiene</a:t>
-            </a:r>
-            <a:r>
-              <a:rPr dirty="0"/>
-              <a:t> </a:t>
-            </a:r>
-            <a:r>
-              <a:rPr dirty="0" err="1"/>
-              <a:t>el</a:t>
-            </a:r>
-            <a:r>
-              <a:rPr dirty="0"/>
-              <a:t> 72,9 </a:t>
-            </a:r>
-            <a:r>
-              <a:rPr dirty="0" err="1"/>
-              <a:t>por</a:t>
-            </a:r>
-            <a:r>
-              <a:rPr dirty="0"/>
-              <a:t> </a:t>
-            </a:r>
-            <a:r>
-              <a:rPr dirty="0" err="1"/>
-              <a:t>ciento</a:t>
-            </a:r>
-            <a:r>
-              <a:rPr dirty="0"/>
-              <a:t> de las </a:t>
-            </a:r>
-            <a:r>
-              <a:rPr dirty="0" err="1"/>
-              <a:t>filas</a:t>
-            </a:r>
-            <a:endParaRPr dirty="0"/>
-          </a:p>
-          <a:p>
-            <a:r>
-              <a:rPr dirty="0" err="1"/>
-              <a:t>originales</a:t>
-            </a:r>
-            <a:r>
-              <a:rPr dirty="0"/>
-              <a:t> y </a:t>
-            </a:r>
-            <a:r>
-              <a:rPr dirty="0" err="1"/>
-              <a:t>cada</a:t>
-            </a:r>
-            <a:r>
-              <a:rPr dirty="0"/>
-              <a:t> </a:t>
-            </a:r>
-            <a:r>
-              <a:rPr dirty="0" err="1"/>
-              <a:t>exclusión</a:t>
-            </a:r>
-            <a:r>
-              <a:rPr dirty="0"/>
-              <a:t> </a:t>
-            </a:r>
-            <a:r>
-              <a:rPr dirty="0" err="1"/>
-              <a:t>está</a:t>
-            </a:r>
-            <a:r>
-              <a:rPr dirty="0"/>
-              <a:t> </a:t>
-            </a:r>
-            <a:r>
-              <a:rPr dirty="0" err="1"/>
-              <a:t>cuantificada</a:t>
-            </a:r>
-            <a:r>
-              <a:rPr dirty="0"/>
-              <a:t> </a:t>
-            </a:r>
-            <a:r>
-              <a:rPr dirty="0" err="1"/>
-              <a:t>en</a:t>
-            </a:r>
-            <a:r>
-              <a:rPr dirty="0"/>
-              <a:t> </a:t>
-            </a:r>
-            <a:r>
-              <a:rPr dirty="0" err="1"/>
-              <a:t>una</a:t>
-            </a:r>
-            <a:r>
-              <a:rPr dirty="0"/>
-              <a:t> </a:t>
-            </a:r>
-            <a:r>
-              <a:rPr dirty="0" err="1"/>
-              <a:t>bitácora</a:t>
-            </a:r>
-            <a:r>
-              <a:rPr dirty="0"/>
-              <a:t> auditable.</a:t>
-            </a:r>
-          </a:p>
         </p:txBody>
       </p:sp>
       <p:sp>
@@ -4799,111 +4996,6 @@
           </a:p>
           <a:p>
             <a:endParaRPr dirty="0"/>
-          </a:p>
-          <a:p>
-            <a:r>
-              <a:rPr dirty="0"/>
-              <a:t>SI EL VIDEO VA LARGO, </a:t>
-            </a:r>
-            <a:r>
-              <a:rPr dirty="0" err="1"/>
-              <a:t>recortar</a:t>
-            </a:r>
-            <a:r>
-              <a:rPr dirty="0"/>
-              <a:t> </a:t>
-            </a:r>
-            <a:r>
-              <a:rPr dirty="0" err="1"/>
-              <a:t>esta</a:t>
-            </a:r>
-            <a:r>
-              <a:rPr dirty="0"/>
-              <a:t> </a:t>
-            </a:r>
-            <a:r>
-              <a:rPr dirty="0" err="1"/>
-              <a:t>lámina</a:t>
-            </a:r>
-            <a:r>
-              <a:rPr dirty="0"/>
-              <a:t> a las dos </a:t>
-            </a:r>
-            <a:r>
-              <a:rPr dirty="0" err="1"/>
-              <a:t>primeras</a:t>
-            </a:r>
-            <a:r>
-              <a:rPr dirty="0"/>
-              <a:t> </a:t>
-            </a:r>
-            <a:r>
-              <a:rPr dirty="0" err="1"/>
-              <a:t>cifras</a:t>
-            </a:r>
-            <a:r>
-              <a:rPr dirty="0"/>
-              <a:t> y </a:t>
-            </a:r>
-            <a:r>
-              <a:rPr dirty="0" err="1"/>
-              <a:t>omitir</a:t>
-            </a:r>
-            <a:r>
-              <a:rPr dirty="0"/>
-              <a:t> </a:t>
-            </a:r>
-            <a:r>
-              <a:rPr dirty="0" err="1"/>
-              <a:t>el</a:t>
-            </a:r>
-            <a:r>
-              <a:rPr dirty="0"/>
-              <a:t> </a:t>
-            </a:r>
-            <a:r>
-              <a:rPr dirty="0" err="1"/>
-              <a:t>detalle</a:t>
-            </a:r>
-            <a:endParaRPr dirty="0"/>
-          </a:p>
-          <a:p>
-            <a:r>
-              <a:rPr dirty="0"/>
-              <a:t>de </a:t>
-            </a:r>
-            <a:r>
-              <a:rPr dirty="0" err="1"/>
-              <a:t>quickselect</a:t>
-            </a:r>
-            <a:r>
-              <a:rPr dirty="0"/>
-              <a:t>: </a:t>
-            </a:r>
-            <a:r>
-              <a:rPr dirty="0" err="1"/>
-              <a:t>ahorra</a:t>
-            </a:r>
-            <a:r>
-              <a:rPr dirty="0"/>
-              <a:t> </a:t>
-            </a:r>
-            <a:r>
-              <a:rPr dirty="0" err="1"/>
-              <a:t>unos</a:t>
-            </a:r>
-            <a:r>
-              <a:rPr dirty="0"/>
-              <a:t> 20 </a:t>
-            </a:r>
-            <a:r>
-              <a:rPr dirty="0" err="1"/>
-              <a:t>segundos</a:t>
-            </a:r>
-            <a:r>
-              <a:rPr dirty="0"/>
-              <a:t>.</a:t>
-            </a:r>
           </a:p>
         </p:txBody>
       </p:sp>

--- a/informe/Presentacion_Fase4_Sebastian_Antunez.pptx
+++ b/informe/Presentacion_Fase4_Sebastian_Antunez.pptx
@@ -922,8 +922,10 @@
               <a:rPr dirty="0"/>
               <a:t> la</a:t>
             </a:r>
-          </a:p>
-          <a:p>
+            <a:r>
+              <a:rPr lang="en-US" dirty="0"/>
+              <a:t> </a:t>
+            </a:r>
             <a:r>
               <a:rPr dirty="0" err="1"/>
               <a:t>duración</a:t>
@@ -1045,8 +1047,10 @@
               <a:rPr dirty="0"/>
               <a:t> punto de</a:t>
             </a:r>
-          </a:p>
-          <a:p>
+            <a:r>
+              <a:rPr lang="en-US" dirty="0"/>
+              <a:t> </a:t>
+            </a:r>
             <a:r>
               <a:rPr dirty="0" err="1"/>
               <a:t>partida</a:t>
@@ -1182,8 +1186,10 @@
               <a:rPr dirty="0"/>
               <a:t>.</a:t>
             </a:r>
-          </a:p>
-          <a:p>
+            <a:r>
+              <a:rPr lang="en-US" dirty="0"/>
+              <a:t> </a:t>
+            </a:r>
             <a:r>
               <a:rPr dirty="0"/>
               <a:t>Son un </a:t>
@@ -1277,11 +1283,11 @@
               <a:rPr dirty="0" err="1"/>
               <a:t>registros</a:t>
             </a:r>
-            <a:endParaRPr dirty="0"/>
-          </a:p>
-          <a:p>
-            <a:r>
-              <a:rPr dirty="0" err="1"/>
+            <a:r>
+              <a:rPr lang="en-US"/>
+              <a:t> </a:t>
+            </a:r>
+            <a:r>
               <a:t>administrativos</a:t>
             </a:r>
             <a:r>
